--- a/lectures/lecture3.pptx
+++ b/lectures/lecture3.pptx
@@ -20,7 +20,7 @@
     <p:sldId id="265" r:id="rId11"/>
     <p:sldId id="266" r:id="rId12"/>
     <p:sldId id="267" r:id="rId13"/>
-    <p:sldId id="289" r:id="rId14"/>
+    <p:sldId id="290" r:id="rId14"/>
     <p:sldId id="269" r:id="rId15"/>
     <p:sldId id="270" r:id="rId16"/>
     <p:sldId id="271" r:id="rId17"/>
@@ -30,7 +30,7 @@
     <p:sldId id="275" r:id="rId21"/>
     <p:sldId id="276" r:id="rId22"/>
     <p:sldId id="277" r:id="rId23"/>
-    <p:sldId id="278" r:id="rId24"/>
+    <p:sldId id="291" r:id="rId24"/>
     <p:sldId id="279" r:id="rId25"/>
     <p:sldId id="280" r:id="rId26"/>
     <p:sldId id="281" r:id="rId27"/>
@@ -967,6 +967,70 @@
 </p:notesMaster>
 </file>
 
+<file path=ppt/notesSlides/notesSlide1.xml><?xml version="1.0" encoding="utf-8"?>
+<p:notes xmlns:a="http://schemas.openxmlformats.org/drawingml/2006/main" xmlns:r="http://schemas.openxmlformats.org/officeDocument/2006/relationships" xmlns:p="http://schemas.openxmlformats.org/presentationml/2006/main">
+  <p:cSld>
+    <p:spTree>
+      <p:nvGrpSpPr>
+        <p:cNvPr id="1" name=""/>
+        <p:cNvGrpSpPr/>
+        <p:nvPr/>
+      </p:nvGrpSpPr>
+      <p:grpSpPr>
+        <a:xfrm>
+          <a:off x="0" y="0"/>
+          <a:ext cx="0" cy="0"/>
+          <a:chOff x="0" y="0"/>
+          <a:chExt cx="0" cy="0"/>
+        </a:xfrm>
+      </p:grpSpPr>
+      <p:sp>
+        <p:nvSpPr>
+          <p:cNvPr id="2" name="Slide Image Placeholder 1"/>
+          <p:cNvSpPr>
+            <a:spLocks noGrp="1" noRot="1" noChangeAspect="1"/>
+          </p:cNvSpPr>
+          <p:nvPr>
+            <p:ph type="sldImg"/>
+          </p:nvPr>
+        </p:nvSpPr>
+        <p:spPr/>
+      </p:sp>
+      <p:sp>
+        <p:nvSpPr>
+          <p:cNvPr id="3" name="Notes Placeholder 2"/>
+          <p:cNvSpPr>
+            <a:spLocks noGrp="1"/>
+          </p:cNvSpPr>
+          <p:nvPr>
+            <p:ph type="body" idx="1"/>
+          </p:nvPr>
+        </p:nvSpPr>
+        <p:spPr/>
+        <p:txBody>
+          <a:bodyPr/>
+          <a:lstStyle/>
+          <a:p>
+            <a:r>
+              <a:rPr lang="en-GB" dirty="0"/>
+              <a:t>The simplified FSM has 3 states (A/C, B/D, E) and detects if we’ve seen two trailing zeros</a:t>
+            </a:r>
+          </a:p>
+        </p:txBody>
+      </p:sp>
+    </p:spTree>
+    <p:extLst>
+      <p:ext uri="{BB962C8B-B14F-4D97-AF65-F5344CB8AC3E}">
+        <p14:creationId xmlns:p14="http://schemas.microsoft.com/office/powerpoint/2010/main" val="2598668010"/>
+      </p:ext>
+    </p:extLst>
+  </p:cSld>
+  <p:clrMapOvr>
+    <a:masterClrMapping/>
+  </p:clrMapOvr>
+</p:notes>
+</file>
+
 <file path=ppt/slideLayouts/slideLayout1.xml><?xml version="1.0" encoding="utf-8"?>
 <p:sldLayout xmlns:a="http://schemas.openxmlformats.org/drawingml/2006/main" xmlns:r="http://schemas.openxmlformats.org/officeDocument/2006/relationships" xmlns:p="http://schemas.openxmlformats.org/presentationml/2006/main" showMasterSp="0" type="title">
   <p:cSld name="Title &amp; Subtitle">
@@ -1126,7 +1190,7 @@
           </a:ln>
           <a:extLst>
             <a:ext uri="{C572A759-6A51-4108-AA02-DFA0A04FC94B}">
-              <ma14:wrappingTextBoxFlag xmlns="" xmlns:m="http://schemas.openxmlformats.org/officeDocument/2006/math" xmlns:a14="http://schemas.microsoft.com/office/drawing/2010/main" xmlns:ma14="http://schemas.microsoft.com/office/mac/drawingml/2011/main" val="1"/>
+              <ma14:wrappingTextBoxFlag xmlns:ma14="http://schemas.microsoft.com/office/mac/drawingml/2011/main" xmlns:a14="http://schemas.microsoft.com/office/drawing/2010/main" xmlns:m="http://schemas.openxmlformats.org/officeDocument/2006/math" xmlns="" val="1"/>
             </a:ext>
           </a:extLst>
         </p:spPr>
@@ -1873,7 +1937,7 @@
           </a:ln>
           <a:extLst>
             <a:ext uri="{C572A759-6A51-4108-AA02-DFA0A04FC94B}">
-              <ma14:wrappingTextBoxFlag xmlns="" xmlns:m="http://schemas.openxmlformats.org/officeDocument/2006/math" xmlns:a14="http://schemas.microsoft.com/office/drawing/2010/main" xmlns:ma14="http://schemas.microsoft.com/office/mac/drawingml/2011/main" val="1"/>
+              <ma14:wrappingTextBoxFlag xmlns:ma14="http://schemas.microsoft.com/office/mac/drawingml/2011/main" xmlns:a14="http://schemas.microsoft.com/office/drawing/2010/main" xmlns:m="http://schemas.openxmlformats.org/officeDocument/2006/math" xmlns="" val="1"/>
             </a:ext>
           </a:extLst>
         </p:spPr>
@@ -1956,7 +2020,7 @@
           </a:ln>
           <a:extLst>
             <a:ext uri="{C572A759-6A51-4108-AA02-DFA0A04FC94B}">
-              <ma14:wrappingTextBoxFlag xmlns="" xmlns:m="http://schemas.openxmlformats.org/officeDocument/2006/math" xmlns:a14="http://schemas.microsoft.com/office/drawing/2010/main" xmlns:ma14="http://schemas.microsoft.com/office/mac/drawingml/2011/main" val="1"/>
+              <ma14:wrappingTextBoxFlag xmlns:ma14="http://schemas.microsoft.com/office/mac/drawingml/2011/main" xmlns:a14="http://schemas.microsoft.com/office/drawing/2010/main" xmlns:m="http://schemas.openxmlformats.org/officeDocument/2006/math" xmlns="" val="1"/>
             </a:ext>
           </a:extLst>
         </p:spPr>
@@ -2000,7 +2064,7 @@
           </a:ln>
           <a:extLst>
             <a:ext uri="{C572A759-6A51-4108-AA02-DFA0A04FC94B}">
-              <ma14:wrappingTextBoxFlag xmlns="" xmlns:m="http://schemas.openxmlformats.org/officeDocument/2006/math" xmlns:a14="http://schemas.microsoft.com/office/drawing/2010/main" xmlns:ma14="http://schemas.microsoft.com/office/mac/drawingml/2011/main" val="1"/>
+              <ma14:wrappingTextBoxFlag xmlns:ma14="http://schemas.microsoft.com/office/mac/drawingml/2011/main" xmlns:a14="http://schemas.microsoft.com/office/drawing/2010/main" xmlns:m="http://schemas.openxmlformats.org/officeDocument/2006/math" xmlns="" val="1"/>
             </a:ext>
           </a:extLst>
         </p:spPr>
@@ -2093,7 +2157,7 @@
           </a:ln>
           <a:extLst>
             <a:ext uri="{C572A759-6A51-4108-AA02-DFA0A04FC94B}">
-              <ma14:wrappingTextBoxFlag xmlns="" xmlns:m="http://schemas.openxmlformats.org/officeDocument/2006/math" xmlns:a14="http://schemas.microsoft.com/office/drawing/2010/main" xmlns:ma14="http://schemas.microsoft.com/office/mac/drawingml/2011/main" val="1"/>
+              <ma14:wrappingTextBoxFlag xmlns:ma14="http://schemas.microsoft.com/office/mac/drawingml/2011/main" xmlns:a14="http://schemas.microsoft.com/office/drawing/2010/main" xmlns:m="http://schemas.openxmlformats.org/officeDocument/2006/math" xmlns="" val="1"/>
             </a:ext>
           </a:extLst>
         </p:spPr>
@@ -2132,7 +2196,7 @@
           </a:ln>
           <a:extLst>
             <a:ext uri="{C572A759-6A51-4108-AA02-DFA0A04FC94B}">
-              <ma14:wrappingTextBoxFlag xmlns="" xmlns:m="http://schemas.openxmlformats.org/officeDocument/2006/math" xmlns:a14="http://schemas.microsoft.com/office/drawing/2010/main" xmlns:ma14="http://schemas.microsoft.com/office/mac/drawingml/2011/main" val="1"/>
+              <ma14:wrappingTextBoxFlag xmlns:ma14="http://schemas.microsoft.com/office/mac/drawingml/2011/main" xmlns:a14="http://schemas.microsoft.com/office/drawing/2010/main" xmlns:m="http://schemas.openxmlformats.org/officeDocument/2006/math" xmlns="" val="1"/>
             </a:ext>
           </a:extLst>
         </p:spPr>
@@ -2223,7 +2287,7 @@
           </a:ln>
           <a:extLst>
             <a:ext uri="{C572A759-6A51-4108-AA02-DFA0A04FC94B}">
-              <ma14:wrappingTextBoxFlag xmlns="" xmlns:m="http://schemas.openxmlformats.org/officeDocument/2006/math" xmlns:a14="http://schemas.microsoft.com/office/drawing/2010/main" xmlns:ma14="http://schemas.microsoft.com/office/mac/drawingml/2011/main" val="1"/>
+              <ma14:wrappingTextBoxFlag xmlns:ma14="http://schemas.microsoft.com/office/mac/drawingml/2011/main" xmlns:a14="http://schemas.microsoft.com/office/drawing/2010/main" xmlns:m="http://schemas.openxmlformats.org/officeDocument/2006/math" xmlns="" val="1"/>
             </a:ext>
           </a:extLst>
         </p:spPr>
@@ -2266,7 +2330,7 @@
           </a:ln>
           <a:extLst>
             <a:ext uri="{C572A759-6A51-4108-AA02-DFA0A04FC94B}">
-              <ma14:wrappingTextBoxFlag xmlns="" xmlns:m="http://schemas.openxmlformats.org/officeDocument/2006/math" xmlns:a14="http://schemas.microsoft.com/office/drawing/2010/main" xmlns:ma14="http://schemas.microsoft.com/office/mac/drawingml/2011/main" val="1"/>
+              <ma14:wrappingTextBoxFlag xmlns:ma14="http://schemas.microsoft.com/office/mac/drawingml/2011/main" xmlns:a14="http://schemas.microsoft.com/office/drawing/2010/main" xmlns:m="http://schemas.openxmlformats.org/officeDocument/2006/math" xmlns="" val="1"/>
             </a:ext>
           </a:extLst>
         </p:spPr>
@@ -3150,7 +3214,7 @@
           </a:ln>
           <a:extLst>
             <a:ext uri="{C572A759-6A51-4108-AA02-DFA0A04FC94B}">
-              <ma14:wrappingTextBoxFlag xmlns="" xmlns:m="http://schemas.openxmlformats.org/officeDocument/2006/math" xmlns:a14="http://schemas.microsoft.com/office/drawing/2010/main" xmlns:ma14="http://schemas.microsoft.com/office/mac/drawingml/2011/main" val="1"/>
+              <ma14:wrappingTextBoxFlag xmlns:ma14="http://schemas.microsoft.com/office/mac/drawingml/2011/main" xmlns:a14="http://schemas.microsoft.com/office/drawing/2010/main" xmlns:m="http://schemas.openxmlformats.org/officeDocument/2006/math" xmlns="" val="1"/>
             </a:ext>
           </a:extLst>
         </p:spPr>
@@ -3208,7 +3272,7 @@
           </a:ln>
           <a:extLst>
             <a:ext uri="{C572A759-6A51-4108-AA02-DFA0A04FC94B}">
-              <ma14:wrappingTextBoxFlag xmlns:ma14="http://schemas.microsoft.com/office/mac/drawingml/2011/main" xmlns:a14="http://schemas.microsoft.com/office/drawing/2010/main" xmlns:m="http://schemas.openxmlformats.org/officeDocument/2006/math" xmlns="" val="1"/>
+              <ma14:wrappingTextBoxFlag xmlns="" xmlns:m="http://schemas.openxmlformats.org/officeDocument/2006/math" xmlns:a14="http://schemas.microsoft.com/office/drawing/2010/main" xmlns:ma14="http://schemas.microsoft.com/office/mac/drawingml/2011/main" val="1"/>
             </a:ext>
           </a:extLst>
         </p:spPr>
@@ -3333,7 +3397,7 @@
           </a:prstGeom>
           <a:extLst>
             <a:ext uri="{C572A759-6A51-4108-AA02-DFA0A04FC94B}">
-              <ma14:wrappingTextBoxFlag xmlns="" xmlns:m="http://schemas.openxmlformats.org/officeDocument/2006/math" xmlns:a14="http://schemas.microsoft.com/office/drawing/2010/main" xmlns:ma14="http://schemas.microsoft.com/office/mac/drawingml/2011/main" val="1"/>
+              <ma14:wrappingTextBoxFlag xmlns:ma14="http://schemas.microsoft.com/office/mac/drawingml/2011/main" xmlns:a14="http://schemas.microsoft.com/office/drawing/2010/main" xmlns:m="http://schemas.openxmlformats.org/officeDocument/2006/math" xmlns="" val="1"/>
             </a:ext>
           </a:extLst>
         </p:spPr>
@@ -3423,6 +3487,7 @@
           <a:lstStyle/>
           <a:p>
             <a:r>
+              <a:rPr dirty="0"/>
               <a:t>Task: </a:t>
             </a:r>
           </a:p>
@@ -3448,7 +3513,7 @@
           </a:prstGeom>
           <a:extLst>
             <a:ext uri="{C572A759-6A51-4108-AA02-DFA0A04FC94B}">
-              <ma14:wrappingTextBoxFlag xmlns="" xmlns:m="http://schemas.openxmlformats.org/officeDocument/2006/math" xmlns:a14="http://schemas.microsoft.com/office/drawing/2010/main" xmlns:ma14="http://schemas.microsoft.com/office/mac/drawingml/2011/main" val="1"/>
+              <ma14:wrappingTextBoxFlag xmlns:ma14="http://schemas.microsoft.com/office/mac/drawingml/2011/main" xmlns:a14="http://schemas.microsoft.com/office/drawing/2010/main" xmlns:m="http://schemas.openxmlformats.org/officeDocument/2006/math" xmlns="" val="1"/>
             </a:ext>
           </a:extLst>
         </p:spPr>
@@ -3480,7 +3545,7 @@
         </p:blipFill>
         <p:spPr>
           <a:xfrm>
-            <a:off x="2626783" y="2633133"/>
+            <a:off x="2591625" y="2246022"/>
             <a:ext cx="7179692" cy="1023235"/>
           </a:xfrm>
           <a:prstGeom prst="rect">
@@ -4001,6 +4066,908 @@
           </a:prstGeom>
         </p:spPr>
       </p:pic>
+      <p:cxnSp>
+        <p:nvCxnSpPr>
+          <p:cNvPr id="4" name="Straight Connector 3">
+            <a:extLst>
+              <a:ext uri="{FF2B5EF4-FFF2-40B4-BE49-F238E27FC236}">
+                <a16:creationId xmlns:a16="http://schemas.microsoft.com/office/drawing/2014/main" id="{4FC174E4-CEC6-8148-9447-1B9F457A51FE}"/>
+              </a:ext>
+            </a:extLst>
+          </p:cNvPr>
+          <p:cNvCxnSpPr/>
+          <p:nvPr/>
+        </p:nvCxnSpPr>
+        <p:spPr>
+          <a:xfrm>
+            <a:off x="4965538" y="2246022"/>
+            <a:ext cx="0" cy="1261229"/>
+          </a:xfrm>
+          <a:prstGeom prst="line">
+            <a:avLst/>
+          </a:prstGeom>
+          <a:noFill/>
+          <a:ln w="25400" cap="flat">
+            <a:solidFill>
+              <a:srgbClr val="FF0000"/>
+            </a:solidFill>
+            <a:prstDash val="solid"/>
+            <a:miter lim="400000"/>
+          </a:ln>
+          <a:effectLst/>
+          <a:sp3d/>
+        </p:spPr>
+        <p:style>
+          <a:lnRef idx="0">
+            <a:scrgbClr r="0" g="0" b="0"/>
+          </a:lnRef>
+          <a:fillRef idx="0">
+            <a:scrgbClr r="0" g="0" b="0"/>
+          </a:fillRef>
+          <a:effectRef idx="0">
+            <a:scrgbClr r="0" g="0" b="0"/>
+          </a:effectRef>
+          <a:fontRef idx="none"/>
+        </p:style>
+      </p:cxnSp>
+      <p:cxnSp>
+        <p:nvCxnSpPr>
+          <p:cNvPr id="5" name="Straight Connector 4">
+            <a:extLst>
+              <a:ext uri="{FF2B5EF4-FFF2-40B4-BE49-F238E27FC236}">
+                <a16:creationId xmlns:a16="http://schemas.microsoft.com/office/drawing/2014/main" id="{EF9D638F-8296-A899-8D97-EA903B9CDFFF}"/>
+              </a:ext>
+            </a:extLst>
+          </p:cNvPr>
+          <p:cNvCxnSpPr/>
+          <p:nvPr/>
+        </p:nvCxnSpPr>
+        <p:spPr>
+          <a:xfrm>
+            <a:off x="5418880" y="2246022"/>
+            <a:ext cx="0" cy="1261229"/>
+          </a:xfrm>
+          <a:prstGeom prst="line">
+            <a:avLst/>
+          </a:prstGeom>
+          <a:noFill/>
+          <a:ln w="25400" cap="flat">
+            <a:solidFill>
+              <a:srgbClr val="FF0000"/>
+            </a:solidFill>
+            <a:prstDash val="solid"/>
+            <a:miter lim="400000"/>
+          </a:ln>
+          <a:effectLst/>
+          <a:sp3d/>
+        </p:spPr>
+        <p:style>
+          <a:lnRef idx="0">
+            <a:scrgbClr r="0" g="0" b="0"/>
+          </a:lnRef>
+          <a:fillRef idx="0">
+            <a:scrgbClr r="0" g="0" b="0"/>
+          </a:fillRef>
+          <a:effectRef idx="0">
+            <a:scrgbClr r="0" g="0" b="0"/>
+          </a:effectRef>
+          <a:fontRef idx="none"/>
+        </p:style>
+      </p:cxnSp>
+      <p:cxnSp>
+        <p:nvCxnSpPr>
+          <p:cNvPr id="6" name="Straight Connector 5">
+            <a:extLst>
+              <a:ext uri="{FF2B5EF4-FFF2-40B4-BE49-F238E27FC236}">
+                <a16:creationId xmlns:a16="http://schemas.microsoft.com/office/drawing/2014/main" id="{17C93FD2-DA19-FD2C-5F2E-5EA40C6EAC2B}"/>
+              </a:ext>
+            </a:extLst>
+          </p:cNvPr>
+          <p:cNvCxnSpPr/>
+          <p:nvPr/>
+        </p:nvCxnSpPr>
+        <p:spPr>
+          <a:xfrm>
+            <a:off x="5837498" y="2246021"/>
+            <a:ext cx="0" cy="1261229"/>
+          </a:xfrm>
+          <a:prstGeom prst="line">
+            <a:avLst/>
+          </a:prstGeom>
+          <a:noFill/>
+          <a:ln w="25400" cap="flat">
+            <a:solidFill>
+              <a:srgbClr val="FF0000"/>
+            </a:solidFill>
+            <a:prstDash val="solid"/>
+            <a:miter lim="400000"/>
+          </a:ln>
+          <a:effectLst/>
+          <a:sp3d/>
+        </p:spPr>
+        <p:style>
+          <a:lnRef idx="0">
+            <a:scrgbClr r="0" g="0" b="0"/>
+          </a:lnRef>
+          <a:fillRef idx="0">
+            <a:scrgbClr r="0" g="0" b="0"/>
+          </a:fillRef>
+          <a:effectRef idx="0">
+            <a:scrgbClr r="0" g="0" b="0"/>
+          </a:effectRef>
+          <a:fontRef idx="none"/>
+        </p:style>
+      </p:cxnSp>
+      <p:cxnSp>
+        <p:nvCxnSpPr>
+          <p:cNvPr id="7" name="Straight Connector 6">
+            <a:extLst>
+              <a:ext uri="{FF2B5EF4-FFF2-40B4-BE49-F238E27FC236}">
+                <a16:creationId xmlns:a16="http://schemas.microsoft.com/office/drawing/2014/main" id="{C24ABCAF-ADD9-1E57-22F0-002FA029D5D4}"/>
+              </a:ext>
+            </a:extLst>
+          </p:cNvPr>
+          <p:cNvCxnSpPr/>
+          <p:nvPr/>
+        </p:nvCxnSpPr>
+        <p:spPr>
+          <a:xfrm>
+            <a:off x="6205959" y="2265640"/>
+            <a:ext cx="0" cy="1261229"/>
+          </a:xfrm>
+          <a:prstGeom prst="line">
+            <a:avLst/>
+          </a:prstGeom>
+          <a:noFill/>
+          <a:ln w="25400" cap="flat">
+            <a:solidFill>
+              <a:srgbClr val="FF0000"/>
+            </a:solidFill>
+            <a:prstDash val="solid"/>
+            <a:miter lim="400000"/>
+          </a:ln>
+          <a:effectLst/>
+          <a:sp3d/>
+        </p:spPr>
+        <p:style>
+          <a:lnRef idx="0">
+            <a:scrgbClr r="0" g="0" b="0"/>
+          </a:lnRef>
+          <a:fillRef idx="0">
+            <a:scrgbClr r="0" g="0" b="0"/>
+          </a:fillRef>
+          <a:effectRef idx="0">
+            <a:scrgbClr r="0" g="0" b="0"/>
+          </a:effectRef>
+          <a:fontRef idx="none"/>
+        </p:style>
+      </p:cxnSp>
+      <p:cxnSp>
+        <p:nvCxnSpPr>
+          <p:cNvPr id="9" name="Straight Connector 8">
+            <a:extLst>
+              <a:ext uri="{FF2B5EF4-FFF2-40B4-BE49-F238E27FC236}">
+                <a16:creationId xmlns:a16="http://schemas.microsoft.com/office/drawing/2014/main" id="{FAD04A96-9DAB-13E5-7FBB-5284DD2F5A43}"/>
+              </a:ext>
+            </a:extLst>
+          </p:cNvPr>
+          <p:cNvCxnSpPr/>
+          <p:nvPr/>
+        </p:nvCxnSpPr>
+        <p:spPr>
+          <a:xfrm>
+            <a:off x="6659301" y="2265640"/>
+            <a:ext cx="0" cy="1261229"/>
+          </a:xfrm>
+          <a:prstGeom prst="line">
+            <a:avLst/>
+          </a:prstGeom>
+          <a:noFill/>
+          <a:ln w="25400" cap="flat">
+            <a:solidFill>
+              <a:srgbClr val="FF0000"/>
+            </a:solidFill>
+            <a:prstDash val="solid"/>
+            <a:miter lim="400000"/>
+          </a:ln>
+          <a:effectLst/>
+          <a:sp3d/>
+        </p:spPr>
+        <p:style>
+          <a:lnRef idx="0">
+            <a:scrgbClr r="0" g="0" b="0"/>
+          </a:lnRef>
+          <a:fillRef idx="0">
+            <a:scrgbClr r="0" g="0" b="0"/>
+          </a:fillRef>
+          <a:effectRef idx="0">
+            <a:scrgbClr r="0" g="0" b="0"/>
+          </a:effectRef>
+          <a:fontRef idx="none"/>
+        </p:style>
+      </p:cxnSp>
+      <p:cxnSp>
+        <p:nvCxnSpPr>
+          <p:cNvPr id="10" name="Straight Connector 9">
+            <a:extLst>
+              <a:ext uri="{FF2B5EF4-FFF2-40B4-BE49-F238E27FC236}">
+                <a16:creationId xmlns:a16="http://schemas.microsoft.com/office/drawing/2014/main" id="{E9C2803F-529C-9B83-0A1F-D69A88AA495A}"/>
+              </a:ext>
+            </a:extLst>
+          </p:cNvPr>
+          <p:cNvCxnSpPr/>
+          <p:nvPr/>
+        </p:nvCxnSpPr>
+        <p:spPr>
+          <a:xfrm>
+            <a:off x="7135792" y="2265640"/>
+            <a:ext cx="0" cy="1261229"/>
+          </a:xfrm>
+          <a:prstGeom prst="line">
+            <a:avLst/>
+          </a:prstGeom>
+          <a:noFill/>
+          <a:ln w="25400" cap="flat">
+            <a:solidFill>
+              <a:srgbClr val="FF0000"/>
+            </a:solidFill>
+            <a:prstDash val="solid"/>
+            <a:miter lim="400000"/>
+          </a:ln>
+          <a:effectLst/>
+          <a:sp3d/>
+        </p:spPr>
+        <p:style>
+          <a:lnRef idx="0">
+            <a:scrgbClr r="0" g="0" b="0"/>
+          </a:lnRef>
+          <a:fillRef idx="0">
+            <a:scrgbClr r="0" g="0" b="0"/>
+          </a:fillRef>
+          <a:effectRef idx="0">
+            <a:scrgbClr r="0" g="0" b="0"/>
+          </a:effectRef>
+          <a:fontRef idx="none"/>
+        </p:style>
+      </p:cxnSp>
+      <p:sp>
+        <p:nvSpPr>
+          <p:cNvPr id="11" name="TextBox 10">
+            <a:extLst>
+              <a:ext uri="{FF2B5EF4-FFF2-40B4-BE49-F238E27FC236}">
+                <a16:creationId xmlns:a16="http://schemas.microsoft.com/office/drawing/2014/main" id="{DBB0C8F3-42B4-0577-95AA-FB74F1DC126B}"/>
+              </a:ext>
+            </a:extLst>
+          </p:cNvPr>
+          <p:cNvSpPr txBox="1"/>
+          <p:nvPr/>
+        </p:nvSpPr>
+        <p:spPr>
+          <a:xfrm>
+            <a:off x="4699320" y="3556978"/>
+            <a:ext cx="532435" cy="471924"/>
+          </a:xfrm>
+          <a:prstGeom prst="rect">
+            <a:avLst/>
+          </a:prstGeom>
+          <a:noFill/>
+          <a:ln w="12700" cap="flat">
+            <a:noFill/>
+            <a:miter lim="400000"/>
+          </a:ln>
+          <a:effectLst/>
+          <a:sp3d/>
+        </p:spPr>
+        <p:style>
+          <a:lnRef idx="0">
+            <a:scrgbClr r="0" g="0" b="0"/>
+          </a:lnRef>
+          <a:fillRef idx="0">
+            <a:scrgbClr r="0" g="0" b="0"/>
+          </a:fillRef>
+          <a:effectRef idx="0">
+            <a:scrgbClr r="0" g="0" b="0"/>
+          </a:effectRef>
+          <a:fontRef idx="none"/>
+        </p:style>
+        <p:txBody>
+          <a:bodyPr rot="0" spcFirstLastPara="1" vertOverflow="overflow" horzOverflow="overflow" vert="horz" wrap="square" lIns="50800" tIns="50800" rIns="50800" bIns="50800" numCol="1" spcCol="38100" rtlCol="0" anchor="ctr">
+            <a:spAutoFit/>
+          </a:bodyPr>
+          <a:lstStyle/>
+          <a:p>
+            <a:pPr marL="0" marR="0" indent="0" algn="ctr" defTabSz="584200" rtl="0" fontAlgn="auto" latinLnBrk="0" hangingPunct="0">
+              <a:lnSpc>
+                <a:spcPct val="100000"/>
+              </a:lnSpc>
+              <a:spcBef>
+                <a:spcPts val="0"/>
+              </a:spcBef>
+              <a:spcAft>
+                <a:spcPts val="0"/>
+              </a:spcAft>
+              <a:buClrTx/>
+              <a:buSzTx/>
+              <a:buFontTx/>
+              <a:buNone/>
+              <a:tabLst/>
+            </a:pPr>
+            <a:r>
+              <a:rPr kumimoji="0" lang="en-GB" sz="2400" b="0" i="0" u="none" strike="noStrike" cap="none" spc="0" normalizeH="0" baseline="0" dirty="0">
+                <a:ln>
+                  <a:noFill/>
+                </a:ln>
+                <a:solidFill>
+                  <a:srgbClr val="FF0000"/>
+                </a:solidFill>
+                <a:effectLst/>
+                <a:uFillTx/>
+                <a:latin typeface="+mn-lt"/>
+                <a:ea typeface="+mn-ea"/>
+                <a:cs typeface="+mn-cs"/>
+                <a:sym typeface="Helvetica"/>
+              </a:rPr>
+              <a:t>0</a:t>
+            </a:r>
+          </a:p>
+        </p:txBody>
+      </p:sp>
+      <p:sp>
+        <p:nvSpPr>
+          <p:cNvPr id="12" name="TextBox 11">
+            <a:extLst>
+              <a:ext uri="{FF2B5EF4-FFF2-40B4-BE49-F238E27FC236}">
+                <a16:creationId xmlns:a16="http://schemas.microsoft.com/office/drawing/2014/main" id="{A918083C-31FA-0638-F17E-DFCD25DE86D4}"/>
+              </a:ext>
+            </a:extLst>
+          </p:cNvPr>
+          <p:cNvSpPr txBox="1"/>
+          <p:nvPr/>
+        </p:nvSpPr>
+        <p:spPr>
+          <a:xfrm>
+            <a:off x="5152662" y="3570839"/>
+            <a:ext cx="532435" cy="471924"/>
+          </a:xfrm>
+          <a:prstGeom prst="rect">
+            <a:avLst/>
+          </a:prstGeom>
+          <a:noFill/>
+          <a:ln w="12700" cap="flat">
+            <a:noFill/>
+            <a:miter lim="400000"/>
+          </a:ln>
+          <a:effectLst/>
+          <a:sp3d/>
+        </p:spPr>
+        <p:style>
+          <a:lnRef idx="0">
+            <a:scrgbClr r="0" g="0" b="0"/>
+          </a:lnRef>
+          <a:fillRef idx="0">
+            <a:scrgbClr r="0" g="0" b="0"/>
+          </a:fillRef>
+          <a:effectRef idx="0">
+            <a:scrgbClr r="0" g="0" b="0"/>
+          </a:effectRef>
+          <a:fontRef idx="none"/>
+        </p:style>
+        <p:txBody>
+          <a:bodyPr rot="0" spcFirstLastPara="1" vertOverflow="overflow" horzOverflow="overflow" vert="horz" wrap="square" lIns="50800" tIns="50800" rIns="50800" bIns="50800" numCol="1" spcCol="38100" rtlCol="0" anchor="ctr">
+            <a:spAutoFit/>
+          </a:bodyPr>
+          <a:lstStyle/>
+          <a:p>
+            <a:pPr marL="0" marR="0" indent="0" algn="ctr" defTabSz="584200" rtl="0" fontAlgn="auto" latinLnBrk="0" hangingPunct="0">
+              <a:lnSpc>
+                <a:spcPct val="100000"/>
+              </a:lnSpc>
+              <a:spcBef>
+                <a:spcPts val="0"/>
+              </a:spcBef>
+              <a:spcAft>
+                <a:spcPts val="0"/>
+              </a:spcAft>
+              <a:buClrTx/>
+              <a:buSzTx/>
+              <a:buFontTx/>
+              <a:buNone/>
+              <a:tabLst/>
+            </a:pPr>
+            <a:r>
+              <a:rPr lang="en-GB" sz="2400" dirty="0">
+                <a:solidFill>
+                  <a:srgbClr val="FF0000"/>
+                </a:solidFill>
+              </a:rPr>
+              <a:t>1</a:t>
+            </a:r>
+            <a:endParaRPr kumimoji="0" lang="en-GB" sz="2400" b="0" i="0" u="none" strike="noStrike" cap="none" spc="0" normalizeH="0" baseline="0" dirty="0">
+              <a:ln>
+                <a:noFill/>
+              </a:ln>
+              <a:solidFill>
+                <a:srgbClr val="FF0000"/>
+              </a:solidFill>
+              <a:effectLst/>
+              <a:uFillTx/>
+              <a:latin typeface="+mn-lt"/>
+              <a:ea typeface="+mn-ea"/>
+              <a:cs typeface="+mn-cs"/>
+              <a:sym typeface="Helvetica"/>
+            </a:endParaRPr>
+          </a:p>
+        </p:txBody>
+      </p:sp>
+      <p:sp>
+        <p:nvSpPr>
+          <p:cNvPr id="13" name="TextBox 12">
+            <a:extLst>
+              <a:ext uri="{FF2B5EF4-FFF2-40B4-BE49-F238E27FC236}">
+                <a16:creationId xmlns:a16="http://schemas.microsoft.com/office/drawing/2014/main" id="{567A4FEE-6AE2-B856-43DC-6A6E21ABF0AF}"/>
+              </a:ext>
+            </a:extLst>
+          </p:cNvPr>
+          <p:cNvSpPr txBox="1"/>
+          <p:nvPr/>
+        </p:nvSpPr>
+        <p:spPr>
+          <a:xfrm>
+            <a:off x="5557505" y="3556978"/>
+            <a:ext cx="532435" cy="471924"/>
+          </a:xfrm>
+          <a:prstGeom prst="rect">
+            <a:avLst/>
+          </a:prstGeom>
+          <a:noFill/>
+          <a:ln w="12700" cap="flat">
+            <a:noFill/>
+            <a:miter lim="400000"/>
+          </a:ln>
+          <a:effectLst/>
+          <a:sp3d/>
+        </p:spPr>
+        <p:style>
+          <a:lnRef idx="0">
+            <a:scrgbClr r="0" g="0" b="0"/>
+          </a:lnRef>
+          <a:fillRef idx="0">
+            <a:scrgbClr r="0" g="0" b="0"/>
+          </a:fillRef>
+          <a:effectRef idx="0">
+            <a:scrgbClr r="0" g="0" b="0"/>
+          </a:effectRef>
+          <a:fontRef idx="none"/>
+        </p:style>
+        <p:txBody>
+          <a:bodyPr rot="0" spcFirstLastPara="1" vertOverflow="overflow" horzOverflow="overflow" vert="horz" wrap="square" lIns="50800" tIns="50800" rIns="50800" bIns="50800" numCol="1" spcCol="38100" rtlCol="0" anchor="ctr">
+            <a:spAutoFit/>
+          </a:bodyPr>
+          <a:lstStyle/>
+          <a:p>
+            <a:pPr marL="0" marR="0" indent="0" algn="ctr" defTabSz="584200" rtl="0" fontAlgn="auto" latinLnBrk="0" hangingPunct="0">
+              <a:lnSpc>
+                <a:spcPct val="100000"/>
+              </a:lnSpc>
+              <a:spcBef>
+                <a:spcPts val="0"/>
+              </a:spcBef>
+              <a:spcAft>
+                <a:spcPts val="0"/>
+              </a:spcAft>
+              <a:buClrTx/>
+              <a:buSzTx/>
+              <a:buFontTx/>
+              <a:buNone/>
+              <a:tabLst/>
+            </a:pPr>
+            <a:r>
+              <a:rPr kumimoji="0" lang="en-GB" sz="2400" b="0" i="0" u="none" strike="noStrike" cap="none" spc="0" normalizeH="0" baseline="0" dirty="0">
+                <a:ln>
+                  <a:noFill/>
+                </a:ln>
+                <a:solidFill>
+                  <a:srgbClr val="FF0000"/>
+                </a:solidFill>
+                <a:effectLst/>
+                <a:uFillTx/>
+                <a:latin typeface="+mn-lt"/>
+                <a:ea typeface="+mn-ea"/>
+                <a:cs typeface="+mn-cs"/>
+                <a:sym typeface="Helvetica"/>
+              </a:rPr>
+              <a:t>0</a:t>
+            </a:r>
+          </a:p>
+        </p:txBody>
+      </p:sp>
+      <p:sp>
+        <p:nvSpPr>
+          <p:cNvPr id="14" name="TextBox 13">
+            <a:extLst>
+              <a:ext uri="{FF2B5EF4-FFF2-40B4-BE49-F238E27FC236}">
+                <a16:creationId xmlns:a16="http://schemas.microsoft.com/office/drawing/2014/main" id="{699A9F67-86F5-4B54-EBAF-D44C4FCE5DBF}"/>
+              </a:ext>
+            </a:extLst>
+          </p:cNvPr>
+          <p:cNvSpPr txBox="1"/>
+          <p:nvPr/>
+        </p:nvSpPr>
+        <p:spPr>
+          <a:xfrm>
+            <a:off x="6010847" y="3570839"/>
+            <a:ext cx="532435" cy="471924"/>
+          </a:xfrm>
+          <a:prstGeom prst="rect">
+            <a:avLst/>
+          </a:prstGeom>
+          <a:noFill/>
+          <a:ln w="12700" cap="flat">
+            <a:noFill/>
+            <a:miter lim="400000"/>
+          </a:ln>
+          <a:effectLst/>
+          <a:sp3d/>
+        </p:spPr>
+        <p:style>
+          <a:lnRef idx="0">
+            <a:scrgbClr r="0" g="0" b="0"/>
+          </a:lnRef>
+          <a:fillRef idx="0">
+            <a:scrgbClr r="0" g="0" b="0"/>
+          </a:fillRef>
+          <a:effectRef idx="0">
+            <a:scrgbClr r="0" g="0" b="0"/>
+          </a:effectRef>
+          <a:fontRef idx="none"/>
+        </p:style>
+        <p:txBody>
+          <a:bodyPr rot="0" spcFirstLastPara="1" vertOverflow="overflow" horzOverflow="overflow" vert="horz" wrap="square" lIns="50800" tIns="50800" rIns="50800" bIns="50800" numCol="1" spcCol="38100" rtlCol="0" anchor="ctr">
+            <a:spAutoFit/>
+          </a:bodyPr>
+          <a:lstStyle/>
+          <a:p>
+            <a:pPr marL="0" marR="0" indent="0" algn="ctr" defTabSz="584200" rtl="0" fontAlgn="auto" latinLnBrk="0" hangingPunct="0">
+              <a:lnSpc>
+                <a:spcPct val="100000"/>
+              </a:lnSpc>
+              <a:spcBef>
+                <a:spcPts val="0"/>
+              </a:spcBef>
+              <a:spcAft>
+                <a:spcPts val="0"/>
+              </a:spcAft>
+              <a:buClrTx/>
+              <a:buSzTx/>
+              <a:buFontTx/>
+              <a:buNone/>
+              <a:tabLst/>
+            </a:pPr>
+            <a:r>
+              <a:rPr lang="en-GB" sz="2400" dirty="0">
+                <a:solidFill>
+                  <a:srgbClr val="FF0000"/>
+                </a:solidFill>
+              </a:rPr>
+              <a:t>1</a:t>
+            </a:r>
+            <a:endParaRPr kumimoji="0" lang="en-GB" sz="2400" b="0" i="0" u="none" strike="noStrike" cap="none" spc="0" normalizeH="0" baseline="0" dirty="0">
+              <a:ln>
+                <a:noFill/>
+              </a:ln>
+              <a:solidFill>
+                <a:srgbClr val="FF0000"/>
+              </a:solidFill>
+              <a:effectLst/>
+              <a:uFillTx/>
+              <a:latin typeface="+mn-lt"/>
+              <a:ea typeface="+mn-ea"/>
+              <a:cs typeface="+mn-cs"/>
+              <a:sym typeface="Helvetica"/>
+            </a:endParaRPr>
+          </a:p>
+        </p:txBody>
+      </p:sp>
+      <p:sp>
+        <p:nvSpPr>
+          <p:cNvPr id="15" name="TextBox 14">
+            <a:extLst>
+              <a:ext uri="{FF2B5EF4-FFF2-40B4-BE49-F238E27FC236}">
+                <a16:creationId xmlns:a16="http://schemas.microsoft.com/office/drawing/2014/main" id="{46A4E99A-4B5C-7E88-508E-7ECC73EE8D68}"/>
+              </a:ext>
+            </a:extLst>
+          </p:cNvPr>
+          <p:cNvSpPr txBox="1"/>
+          <p:nvPr/>
+        </p:nvSpPr>
+        <p:spPr>
+          <a:xfrm>
+            <a:off x="6415690" y="3589378"/>
+            <a:ext cx="532435" cy="471924"/>
+          </a:xfrm>
+          <a:prstGeom prst="rect">
+            <a:avLst/>
+          </a:prstGeom>
+          <a:noFill/>
+          <a:ln w="12700" cap="flat">
+            <a:noFill/>
+            <a:miter lim="400000"/>
+          </a:ln>
+          <a:effectLst/>
+          <a:sp3d/>
+        </p:spPr>
+        <p:style>
+          <a:lnRef idx="0">
+            <a:scrgbClr r="0" g="0" b="0"/>
+          </a:lnRef>
+          <a:fillRef idx="0">
+            <a:scrgbClr r="0" g="0" b="0"/>
+          </a:fillRef>
+          <a:effectRef idx="0">
+            <a:scrgbClr r="0" g="0" b="0"/>
+          </a:effectRef>
+          <a:fontRef idx="none"/>
+        </p:style>
+        <p:txBody>
+          <a:bodyPr rot="0" spcFirstLastPara="1" vertOverflow="overflow" horzOverflow="overflow" vert="horz" wrap="square" lIns="50800" tIns="50800" rIns="50800" bIns="50800" numCol="1" spcCol="38100" rtlCol="0" anchor="ctr">
+            <a:spAutoFit/>
+          </a:bodyPr>
+          <a:lstStyle/>
+          <a:p>
+            <a:pPr marL="0" marR="0" indent="0" algn="ctr" defTabSz="584200" rtl="0" fontAlgn="auto" latinLnBrk="0" hangingPunct="0">
+              <a:lnSpc>
+                <a:spcPct val="100000"/>
+              </a:lnSpc>
+              <a:spcBef>
+                <a:spcPts val="0"/>
+              </a:spcBef>
+              <a:spcAft>
+                <a:spcPts val="0"/>
+              </a:spcAft>
+              <a:buClrTx/>
+              <a:buSzTx/>
+              <a:buFontTx/>
+              <a:buNone/>
+              <a:tabLst/>
+            </a:pPr>
+            <a:r>
+              <a:rPr kumimoji="0" lang="en-GB" sz="2400" b="0" i="0" u="none" strike="noStrike" cap="none" spc="0" normalizeH="0" baseline="0" dirty="0">
+                <a:ln>
+                  <a:noFill/>
+                </a:ln>
+                <a:solidFill>
+                  <a:srgbClr val="FF0000"/>
+                </a:solidFill>
+                <a:effectLst/>
+                <a:uFillTx/>
+                <a:latin typeface="+mn-lt"/>
+                <a:ea typeface="+mn-ea"/>
+                <a:cs typeface="+mn-cs"/>
+                <a:sym typeface="Helvetica"/>
+              </a:rPr>
+              <a:t>0</a:t>
+            </a:r>
+          </a:p>
+        </p:txBody>
+      </p:sp>
+      <p:sp>
+        <p:nvSpPr>
+          <p:cNvPr id="16" name="TextBox 15">
+            <a:extLst>
+              <a:ext uri="{FF2B5EF4-FFF2-40B4-BE49-F238E27FC236}">
+                <a16:creationId xmlns:a16="http://schemas.microsoft.com/office/drawing/2014/main" id="{5C56F8A4-BA9E-52C0-F3D9-9699C58A2C39}"/>
+              </a:ext>
+            </a:extLst>
+          </p:cNvPr>
+          <p:cNvSpPr txBox="1"/>
+          <p:nvPr/>
+        </p:nvSpPr>
+        <p:spPr>
+          <a:xfrm>
+            <a:off x="6869032" y="3603239"/>
+            <a:ext cx="532435" cy="471924"/>
+          </a:xfrm>
+          <a:prstGeom prst="rect">
+            <a:avLst/>
+          </a:prstGeom>
+          <a:noFill/>
+          <a:ln w="12700" cap="flat">
+            <a:noFill/>
+            <a:miter lim="400000"/>
+          </a:ln>
+          <a:effectLst/>
+          <a:sp3d/>
+        </p:spPr>
+        <p:style>
+          <a:lnRef idx="0">
+            <a:scrgbClr r="0" g="0" b="0"/>
+          </a:lnRef>
+          <a:fillRef idx="0">
+            <a:scrgbClr r="0" g="0" b="0"/>
+          </a:fillRef>
+          <a:effectRef idx="0">
+            <a:scrgbClr r="0" g="0" b="0"/>
+          </a:effectRef>
+          <a:fontRef idx="none"/>
+        </p:style>
+        <p:txBody>
+          <a:bodyPr rot="0" spcFirstLastPara="1" vertOverflow="overflow" horzOverflow="overflow" vert="horz" wrap="square" lIns="50800" tIns="50800" rIns="50800" bIns="50800" numCol="1" spcCol="38100" rtlCol="0" anchor="ctr">
+            <a:spAutoFit/>
+          </a:bodyPr>
+          <a:lstStyle/>
+          <a:p>
+            <a:pPr marL="0" marR="0" indent="0" algn="ctr" defTabSz="584200" rtl="0" fontAlgn="auto" latinLnBrk="0" hangingPunct="0">
+              <a:lnSpc>
+                <a:spcPct val="100000"/>
+              </a:lnSpc>
+              <a:spcBef>
+                <a:spcPts val="0"/>
+              </a:spcBef>
+              <a:spcAft>
+                <a:spcPts val="0"/>
+              </a:spcAft>
+              <a:buClrTx/>
+              <a:buSzTx/>
+              <a:buFontTx/>
+              <a:buNone/>
+              <a:tabLst/>
+            </a:pPr>
+            <a:r>
+              <a:rPr lang="en-GB" sz="2400" dirty="0">
+                <a:solidFill>
+                  <a:srgbClr val="FF0000"/>
+                </a:solidFill>
+              </a:rPr>
+              <a:t>1</a:t>
+            </a:r>
+            <a:endParaRPr kumimoji="0" lang="en-GB" sz="2400" b="0" i="0" u="none" strike="noStrike" cap="none" spc="0" normalizeH="0" baseline="0" dirty="0">
+              <a:ln>
+                <a:noFill/>
+              </a:ln>
+              <a:solidFill>
+                <a:srgbClr val="FF0000"/>
+              </a:solidFill>
+              <a:effectLst/>
+              <a:uFillTx/>
+              <a:latin typeface="+mn-lt"/>
+              <a:ea typeface="+mn-ea"/>
+              <a:cs typeface="+mn-cs"/>
+              <a:sym typeface="Helvetica"/>
+            </a:endParaRPr>
+          </a:p>
+        </p:txBody>
+      </p:sp>
+      <p:cxnSp>
+        <p:nvCxnSpPr>
+          <p:cNvPr id="17" name="Straight Connector 16">
+            <a:extLst>
+              <a:ext uri="{FF2B5EF4-FFF2-40B4-BE49-F238E27FC236}">
+                <a16:creationId xmlns:a16="http://schemas.microsoft.com/office/drawing/2014/main" id="{AE14A9D8-1AB8-987A-92D3-F4F2911AD8EF}"/>
+              </a:ext>
+            </a:extLst>
+          </p:cNvPr>
+          <p:cNvCxnSpPr/>
+          <p:nvPr/>
+        </p:nvCxnSpPr>
+        <p:spPr>
+          <a:xfrm>
+            <a:off x="7517625" y="2265640"/>
+            <a:ext cx="0" cy="1261229"/>
+          </a:xfrm>
+          <a:prstGeom prst="line">
+            <a:avLst/>
+          </a:prstGeom>
+          <a:noFill/>
+          <a:ln w="25400" cap="flat">
+            <a:solidFill>
+              <a:srgbClr val="FF0000"/>
+            </a:solidFill>
+            <a:prstDash val="solid"/>
+            <a:miter lim="400000"/>
+          </a:ln>
+          <a:effectLst/>
+          <a:sp3d/>
+        </p:spPr>
+        <p:style>
+          <a:lnRef idx="0">
+            <a:scrgbClr r="0" g="0" b="0"/>
+          </a:lnRef>
+          <a:fillRef idx="0">
+            <a:scrgbClr r="0" g="0" b="0"/>
+          </a:fillRef>
+          <a:effectRef idx="0">
+            <a:scrgbClr r="0" g="0" b="0"/>
+          </a:effectRef>
+          <a:fontRef idx="none"/>
+        </p:style>
+      </p:cxnSp>
+      <p:sp>
+        <p:nvSpPr>
+          <p:cNvPr id="18" name="TextBox 17">
+            <a:extLst>
+              <a:ext uri="{FF2B5EF4-FFF2-40B4-BE49-F238E27FC236}">
+                <a16:creationId xmlns:a16="http://schemas.microsoft.com/office/drawing/2014/main" id="{9220EE45-14FC-1C77-E72A-2FA5BA8D87FA}"/>
+              </a:ext>
+            </a:extLst>
+          </p:cNvPr>
+          <p:cNvSpPr txBox="1"/>
+          <p:nvPr/>
+        </p:nvSpPr>
+        <p:spPr>
+          <a:xfrm>
+            <a:off x="7250865" y="3603239"/>
+            <a:ext cx="532435" cy="471924"/>
+          </a:xfrm>
+          <a:prstGeom prst="rect">
+            <a:avLst/>
+          </a:prstGeom>
+          <a:noFill/>
+          <a:ln w="12700" cap="flat">
+            <a:noFill/>
+            <a:miter lim="400000"/>
+          </a:ln>
+          <a:effectLst/>
+          <a:sp3d/>
+        </p:spPr>
+        <p:style>
+          <a:lnRef idx="0">
+            <a:scrgbClr r="0" g="0" b="0"/>
+          </a:lnRef>
+          <a:fillRef idx="0">
+            <a:scrgbClr r="0" g="0" b="0"/>
+          </a:fillRef>
+          <a:effectRef idx="0">
+            <a:scrgbClr r="0" g="0" b="0"/>
+          </a:effectRef>
+          <a:fontRef idx="none"/>
+        </p:style>
+        <p:txBody>
+          <a:bodyPr rot="0" spcFirstLastPara="1" vertOverflow="overflow" horzOverflow="overflow" vert="horz" wrap="square" lIns="50800" tIns="50800" rIns="50800" bIns="50800" numCol="1" spcCol="38100" rtlCol="0" anchor="ctr">
+            <a:spAutoFit/>
+          </a:bodyPr>
+          <a:lstStyle/>
+          <a:p>
+            <a:pPr marL="0" marR="0" indent="0" algn="ctr" defTabSz="584200" rtl="0" fontAlgn="auto" latinLnBrk="0" hangingPunct="0">
+              <a:lnSpc>
+                <a:spcPct val="100000"/>
+              </a:lnSpc>
+              <a:spcBef>
+                <a:spcPts val="0"/>
+              </a:spcBef>
+              <a:spcAft>
+                <a:spcPts val="0"/>
+              </a:spcAft>
+              <a:buClrTx/>
+              <a:buSzTx/>
+              <a:buFontTx/>
+              <a:buNone/>
+              <a:tabLst/>
+            </a:pPr>
+            <a:r>
+              <a:rPr lang="en-GB" sz="2400" dirty="0">
+                <a:solidFill>
+                  <a:srgbClr val="FF0000"/>
+                </a:solidFill>
+              </a:rPr>
+              <a:t>1</a:t>
+            </a:r>
+            <a:endParaRPr kumimoji="0" lang="en-GB" sz="2400" b="0" i="0" u="none" strike="noStrike" cap="none" spc="0" normalizeH="0" baseline="0" dirty="0">
+              <a:ln>
+                <a:noFill/>
+              </a:ln>
+              <a:solidFill>
+                <a:srgbClr val="FF0000"/>
+              </a:solidFill>
+              <a:effectLst/>
+              <a:uFillTx/>
+              <a:latin typeface="+mn-lt"/>
+              <a:ea typeface="+mn-ea"/>
+              <a:cs typeface="+mn-cs"/>
+              <a:sym typeface="Helvetica"/>
+            </a:endParaRPr>
+          </a:p>
+        </p:txBody>
+      </p:sp>
     </p:spTree>
   </p:cSld>
   <p:clrMapOvr>
@@ -4028,7 +4995,7 @@
                             </p:stCondLst>
                             <p:childTnLst>
                               <p:par>
-                                <p:cTn id="5" presetID="1" presetClass="entr" presetSubtype="0" fill="hold" grpId="1" nodeType="clickEffect">
+                                <p:cTn id="5" presetID="1" presetClass="entr" presetSubtype="0" fill="hold" grpId="21" nodeType="clickEffect">
                                   <p:stCondLst>
                                     <p:cond delay="0"/>
                                   </p:stCondLst>
@@ -4040,42 +5007,7 @@
                                       <p:cBhvr>
                                         <p:cTn id="6" fill="hold"/>
                                         <p:tgtEl>
-                                          <p:spTgt spid="382"/>
-                                        </p:tgtEl>
-                                        <p:attrNameLst>
-                                          <p:attrName>style.visibility</p:attrName>
-                                        </p:attrNameLst>
-                                      </p:cBhvr>
-                                      <p:to>
-                                        <p:strVal val="visible"/>
-                                      </p:to>
-                                    </p:set>
-                                  </p:childTnLst>
-                                </p:cTn>
-                              </p:par>
-                            </p:childTnLst>
-                          </p:cTn>
-                        </p:par>
-                        <p:par>
-                          <p:cTn id="7" fill="hold">
-                            <p:stCondLst>
-                              <p:cond delay="0"/>
-                            </p:stCondLst>
-                            <p:childTnLst>
-                              <p:par>
-                                <p:cTn id="8" presetID="1" presetClass="entr" presetSubtype="0" fill="hold" grpId="2" nodeType="afterEffect">
-                                  <p:stCondLst>
-                                    <p:cond delay="0"/>
-                                  </p:stCondLst>
-                                  <p:iterate>
-                                    <p:tmAbs val="0"/>
-                                  </p:iterate>
-                                  <p:childTnLst>
-                                    <p:set>
-                                      <p:cBhvr>
-                                        <p:cTn id="9" fill="hold"/>
-                                        <p:tgtEl>
-                                          <p:spTgt spid="380"/>
+                                          <p:spTgt spid="405"/>
                                         </p:tgtEl>
                                         <p:attrNameLst>
                                           <p:attrName>style.visibility</p:attrName>
@@ -4095,31 +5027,428 @@
                     </p:cTn>
                   </p:par>
                   <p:par>
-                    <p:cTn id="10" fill="hold">
+                    <p:cTn id="7" fill="hold">
                       <p:stCondLst>
                         <p:cond delay="indefinite"/>
                       </p:stCondLst>
                       <p:childTnLst>
                         <p:par>
-                          <p:cTn id="11" fill="hold">
+                          <p:cTn id="8" fill="hold">
                             <p:stCondLst>
                               <p:cond delay="0"/>
                             </p:stCondLst>
                             <p:childTnLst>
                               <p:par>
-                                <p:cTn id="12" presetID="1" presetClass="entr" presetSubtype="0" fill="hold" grpId="21" nodeType="clickEffect">
+                                <p:cTn id="9" presetID="1" presetClass="entr" presetSubtype="0" fill="hold" nodeType="clickEffect">
                                   <p:stCondLst>
                                     <p:cond delay="0"/>
                                   </p:stCondLst>
-                                  <p:iterate>
-                                    <p:tmAbs val="0"/>
-                                  </p:iterate>
                                   <p:childTnLst>
                                     <p:set>
                                       <p:cBhvr>
-                                        <p:cTn id="13" fill="hold"/>
+                                        <p:cTn id="10" dur="1" fill="hold">
+                                          <p:stCondLst>
+                                            <p:cond delay="0"/>
+                                          </p:stCondLst>
+                                        </p:cTn>
                                         <p:tgtEl>
-                                          <p:spTgt spid="405"/>
+                                          <p:spTgt spid="8"/>
+                                        </p:tgtEl>
+                                        <p:attrNameLst>
+                                          <p:attrName>style.visibility</p:attrName>
+                                        </p:attrNameLst>
+                                      </p:cBhvr>
+                                      <p:to>
+                                        <p:strVal val="visible"/>
+                                      </p:to>
+                                    </p:set>
+                                  </p:childTnLst>
+                                </p:cTn>
+                              </p:par>
+                            </p:childTnLst>
+                          </p:cTn>
+                        </p:par>
+                      </p:childTnLst>
+                    </p:cTn>
+                  </p:par>
+                  <p:par>
+                    <p:cTn id="11" fill="hold">
+                      <p:stCondLst>
+                        <p:cond delay="indefinite"/>
+                      </p:stCondLst>
+                      <p:childTnLst>
+                        <p:par>
+                          <p:cTn id="12" fill="hold">
+                            <p:stCondLst>
+                              <p:cond delay="0"/>
+                            </p:stCondLst>
+                            <p:childTnLst>
+                              <p:par>
+                                <p:cTn id="13" presetID="1" presetClass="entr" presetSubtype="0" fill="hold" nodeType="clickEffect">
+                                  <p:stCondLst>
+                                    <p:cond delay="0"/>
+                                  </p:stCondLst>
+                                  <p:childTnLst>
+                                    <p:set>
+                                      <p:cBhvr>
+                                        <p:cTn id="14" dur="1" fill="hold">
+                                          <p:stCondLst>
+                                            <p:cond delay="0"/>
+                                          </p:stCondLst>
+                                        </p:cTn>
+                                        <p:tgtEl>
+                                          <p:spTgt spid="4"/>
+                                        </p:tgtEl>
+                                        <p:attrNameLst>
+                                          <p:attrName>style.visibility</p:attrName>
+                                        </p:attrNameLst>
+                                      </p:cBhvr>
+                                      <p:to>
+                                        <p:strVal val="visible"/>
+                                      </p:to>
+                                    </p:set>
+                                  </p:childTnLst>
+                                </p:cTn>
+                              </p:par>
+                              <p:par>
+                                <p:cTn id="15" presetID="1" presetClass="entr" presetSubtype="0" fill="hold" nodeType="withEffect">
+                                  <p:stCondLst>
+                                    <p:cond delay="0"/>
+                                  </p:stCondLst>
+                                  <p:childTnLst>
+                                    <p:set>
+                                      <p:cBhvr>
+                                        <p:cTn id="16" dur="1" fill="hold">
+                                          <p:stCondLst>
+                                            <p:cond delay="0"/>
+                                          </p:stCondLst>
+                                        </p:cTn>
+                                        <p:tgtEl>
+                                          <p:spTgt spid="5"/>
+                                        </p:tgtEl>
+                                        <p:attrNameLst>
+                                          <p:attrName>style.visibility</p:attrName>
+                                        </p:attrNameLst>
+                                      </p:cBhvr>
+                                      <p:to>
+                                        <p:strVal val="visible"/>
+                                      </p:to>
+                                    </p:set>
+                                  </p:childTnLst>
+                                </p:cTn>
+                              </p:par>
+                              <p:par>
+                                <p:cTn id="17" presetID="1" presetClass="entr" presetSubtype="0" fill="hold" nodeType="withEffect">
+                                  <p:stCondLst>
+                                    <p:cond delay="0"/>
+                                  </p:stCondLst>
+                                  <p:childTnLst>
+                                    <p:set>
+                                      <p:cBhvr>
+                                        <p:cTn id="18" dur="1" fill="hold">
+                                          <p:stCondLst>
+                                            <p:cond delay="0"/>
+                                          </p:stCondLst>
+                                        </p:cTn>
+                                        <p:tgtEl>
+                                          <p:spTgt spid="6"/>
+                                        </p:tgtEl>
+                                        <p:attrNameLst>
+                                          <p:attrName>style.visibility</p:attrName>
+                                        </p:attrNameLst>
+                                      </p:cBhvr>
+                                      <p:to>
+                                        <p:strVal val="visible"/>
+                                      </p:to>
+                                    </p:set>
+                                  </p:childTnLst>
+                                </p:cTn>
+                              </p:par>
+                              <p:par>
+                                <p:cTn id="19" presetID="1" presetClass="entr" presetSubtype="0" fill="hold" nodeType="withEffect">
+                                  <p:stCondLst>
+                                    <p:cond delay="0"/>
+                                  </p:stCondLst>
+                                  <p:childTnLst>
+                                    <p:set>
+                                      <p:cBhvr>
+                                        <p:cTn id="20" dur="1" fill="hold">
+                                          <p:stCondLst>
+                                            <p:cond delay="0"/>
+                                          </p:stCondLst>
+                                        </p:cTn>
+                                        <p:tgtEl>
+                                          <p:spTgt spid="7"/>
+                                        </p:tgtEl>
+                                        <p:attrNameLst>
+                                          <p:attrName>style.visibility</p:attrName>
+                                        </p:attrNameLst>
+                                      </p:cBhvr>
+                                      <p:to>
+                                        <p:strVal val="visible"/>
+                                      </p:to>
+                                    </p:set>
+                                  </p:childTnLst>
+                                </p:cTn>
+                              </p:par>
+                              <p:par>
+                                <p:cTn id="21" presetID="1" presetClass="entr" presetSubtype="0" fill="hold" nodeType="withEffect">
+                                  <p:stCondLst>
+                                    <p:cond delay="0"/>
+                                  </p:stCondLst>
+                                  <p:childTnLst>
+                                    <p:set>
+                                      <p:cBhvr>
+                                        <p:cTn id="22" dur="1" fill="hold">
+                                          <p:stCondLst>
+                                            <p:cond delay="0"/>
+                                          </p:stCondLst>
+                                        </p:cTn>
+                                        <p:tgtEl>
+                                          <p:spTgt spid="9"/>
+                                        </p:tgtEl>
+                                        <p:attrNameLst>
+                                          <p:attrName>style.visibility</p:attrName>
+                                        </p:attrNameLst>
+                                      </p:cBhvr>
+                                      <p:to>
+                                        <p:strVal val="visible"/>
+                                      </p:to>
+                                    </p:set>
+                                  </p:childTnLst>
+                                </p:cTn>
+                              </p:par>
+                              <p:par>
+                                <p:cTn id="23" presetID="1" presetClass="entr" presetSubtype="0" fill="hold" nodeType="withEffect">
+                                  <p:stCondLst>
+                                    <p:cond delay="0"/>
+                                  </p:stCondLst>
+                                  <p:childTnLst>
+                                    <p:set>
+                                      <p:cBhvr>
+                                        <p:cTn id="24" dur="1" fill="hold">
+                                          <p:stCondLst>
+                                            <p:cond delay="0"/>
+                                          </p:stCondLst>
+                                        </p:cTn>
+                                        <p:tgtEl>
+                                          <p:spTgt spid="10"/>
+                                        </p:tgtEl>
+                                        <p:attrNameLst>
+                                          <p:attrName>style.visibility</p:attrName>
+                                        </p:attrNameLst>
+                                      </p:cBhvr>
+                                      <p:to>
+                                        <p:strVal val="visible"/>
+                                      </p:to>
+                                    </p:set>
+                                  </p:childTnLst>
+                                </p:cTn>
+                              </p:par>
+                              <p:par>
+                                <p:cTn id="25" presetID="1" presetClass="entr" presetSubtype="0" fill="hold" grpId="0" nodeType="withEffect">
+                                  <p:stCondLst>
+                                    <p:cond delay="0"/>
+                                  </p:stCondLst>
+                                  <p:childTnLst>
+                                    <p:set>
+                                      <p:cBhvr>
+                                        <p:cTn id="26" dur="1" fill="hold">
+                                          <p:stCondLst>
+                                            <p:cond delay="0"/>
+                                          </p:stCondLst>
+                                        </p:cTn>
+                                        <p:tgtEl>
+                                          <p:spTgt spid="11"/>
+                                        </p:tgtEl>
+                                        <p:attrNameLst>
+                                          <p:attrName>style.visibility</p:attrName>
+                                        </p:attrNameLst>
+                                      </p:cBhvr>
+                                      <p:to>
+                                        <p:strVal val="visible"/>
+                                      </p:to>
+                                    </p:set>
+                                  </p:childTnLst>
+                                </p:cTn>
+                              </p:par>
+                              <p:par>
+                                <p:cTn id="27" presetID="1" presetClass="entr" presetSubtype="0" fill="hold" grpId="0" nodeType="withEffect">
+                                  <p:stCondLst>
+                                    <p:cond delay="0"/>
+                                  </p:stCondLst>
+                                  <p:childTnLst>
+                                    <p:set>
+                                      <p:cBhvr>
+                                        <p:cTn id="28" dur="1" fill="hold">
+                                          <p:stCondLst>
+                                            <p:cond delay="0"/>
+                                          </p:stCondLst>
+                                        </p:cTn>
+                                        <p:tgtEl>
+                                          <p:spTgt spid="12"/>
+                                        </p:tgtEl>
+                                        <p:attrNameLst>
+                                          <p:attrName>style.visibility</p:attrName>
+                                        </p:attrNameLst>
+                                      </p:cBhvr>
+                                      <p:to>
+                                        <p:strVal val="visible"/>
+                                      </p:to>
+                                    </p:set>
+                                  </p:childTnLst>
+                                </p:cTn>
+                              </p:par>
+                              <p:par>
+                                <p:cTn id="29" presetID="1" presetClass="entr" presetSubtype="0" fill="hold" grpId="0" nodeType="withEffect">
+                                  <p:stCondLst>
+                                    <p:cond delay="0"/>
+                                  </p:stCondLst>
+                                  <p:childTnLst>
+                                    <p:set>
+                                      <p:cBhvr>
+                                        <p:cTn id="30" dur="1" fill="hold">
+                                          <p:stCondLst>
+                                            <p:cond delay="0"/>
+                                          </p:stCondLst>
+                                        </p:cTn>
+                                        <p:tgtEl>
+                                          <p:spTgt spid="13"/>
+                                        </p:tgtEl>
+                                        <p:attrNameLst>
+                                          <p:attrName>style.visibility</p:attrName>
+                                        </p:attrNameLst>
+                                      </p:cBhvr>
+                                      <p:to>
+                                        <p:strVal val="visible"/>
+                                      </p:to>
+                                    </p:set>
+                                  </p:childTnLst>
+                                </p:cTn>
+                              </p:par>
+                              <p:par>
+                                <p:cTn id="31" presetID="1" presetClass="entr" presetSubtype="0" fill="hold" grpId="0" nodeType="withEffect">
+                                  <p:stCondLst>
+                                    <p:cond delay="0"/>
+                                  </p:stCondLst>
+                                  <p:childTnLst>
+                                    <p:set>
+                                      <p:cBhvr>
+                                        <p:cTn id="32" dur="1" fill="hold">
+                                          <p:stCondLst>
+                                            <p:cond delay="0"/>
+                                          </p:stCondLst>
+                                        </p:cTn>
+                                        <p:tgtEl>
+                                          <p:spTgt spid="14"/>
+                                        </p:tgtEl>
+                                        <p:attrNameLst>
+                                          <p:attrName>style.visibility</p:attrName>
+                                        </p:attrNameLst>
+                                      </p:cBhvr>
+                                      <p:to>
+                                        <p:strVal val="visible"/>
+                                      </p:to>
+                                    </p:set>
+                                  </p:childTnLst>
+                                </p:cTn>
+                              </p:par>
+                              <p:par>
+                                <p:cTn id="33" presetID="1" presetClass="entr" presetSubtype="0" fill="hold" grpId="0" nodeType="withEffect">
+                                  <p:stCondLst>
+                                    <p:cond delay="0"/>
+                                  </p:stCondLst>
+                                  <p:childTnLst>
+                                    <p:set>
+                                      <p:cBhvr>
+                                        <p:cTn id="34" dur="1" fill="hold">
+                                          <p:stCondLst>
+                                            <p:cond delay="0"/>
+                                          </p:stCondLst>
+                                        </p:cTn>
+                                        <p:tgtEl>
+                                          <p:spTgt spid="15"/>
+                                        </p:tgtEl>
+                                        <p:attrNameLst>
+                                          <p:attrName>style.visibility</p:attrName>
+                                        </p:attrNameLst>
+                                      </p:cBhvr>
+                                      <p:to>
+                                        <p:strVal val="visible"/>
+                                      </p:to>
+                                    </p:set>
+                                  </p:childTnLst>
+                                </p:cTn>
+                              </p:par>
+                              <p:par>
+                                <p:cTn id="35" presetID="1" presetClass="entr" presetSubtype="0" fill="hold" grpId="0" nodeType="withEffect">
+                                  <p:stCondLst>
+                                    <p:cond delay="0"/>
+                                  </p:stCondLst>
+                                  <p:childTnLst>
+                                    <p:set>
+                                      <p:cBhvr>
+                                        <p:cTn id="36" dur="1" fill="hold">
+                                          <p:stCondLst>
+                                            <p:cond delay="0"/>
+                                          </p:stCondLst>
+                                        </p:cTn>
+                                        <p:tgtEl>
+                                          <p:spTgt spid="16"/>
+                                        </p:tgtEl>
+                                        <p:attrNameLst>
+                                          <p:attrName>style.visibility</p:attrName>
+                                        </p:attrNameLst>
+                                      </p:cBhvr>
+                                      <p:to>
+                                        <p:strVal val="visible"/>
+                                      </p:to>
+                                    </p:set>
+                                  </p:childTnLst>
+                                </p:cTn>
+                              </p:par>
+                              <p:par>
+                                <p:cTn id="37" presetID="1" presetClass="entr" presetSubtype="0" fill="hold" nodeType="withEffect">
+                                  <p:stCondLst>
+                                    <p:cond delay="0"/>
+                                  </p:stCondLst>
+                                  <p:childTnLst>
+                                    <p:set>
+                                      <p:cBhvr>
+                                        <p:cTn id="38" dur="1" fill="hold">
+                                          <p:stCondLst>
+                                            <p:cond delay="0"/>
+                                          </p:stCondLst>
+                                        </p:cTn>
+                                        <p:tgtEl>
+                                          <p:spTgt spid="17"/>
+                                        </p:tgtEl>
+                                        <p:attrNameLst>
+                                          <p:attrName>style.visibility</p:attrName>
+                                        </p:attrNameLst>
+                                      </p:cBhvr>
+                                      <p:to>
+                                        <p:strVal val="visible"/>
+                                      </p:to>
+                                    </p:set>
+                                  </p:childTnLst>
+                                </p:cTn>
+                              </p:par>
+                              <p:par>
+                                <p:cTn id="39" presetID="1" presetClass="entr" presetSubtype="0" fill="hold" grpId="0" nodeType="withEffect">
+                                  <p:stCondLst>
+                                    <p:cond delay="0"/>
+                                  </p:stCondLst>
+                                  <p:childTnLst>
+                                    <p:set>
+                                      <p:cBhvr>
+                                        <p:cTn id="40" dur="1" fill="hold">
+                                          <p:stCondLst>
+                                            <p:cond delay="0"/>
+                                          </p:stCondLst>
+                                        </p:cTn>
+                                        <p:tgtEl>
+                                          <p:spTgt spid="18"/>
                                         </p:tgtEl>
                                         <p:attrNameLst>
                                           <p:attrName>style.visibility</p:attrName>
@@ -4160,9 +5489,14 @@
       </p:par>
     </p:tnLst>
     <p:bldLst>
-      <p:bldP spid="380" grpId="2" animBg="1" advAuto="0"/>
-      <p:bldP spid="382" grpId="1" animBg="1" advAuto="0"/>
       <p:bldP spid="405" grpId="21" animBg="1" advAuto="0"/>
+      <p:bldP spid="11" grpId="0"/>
+      <p:bldP spid="12" grpId="0"/>
+      <p:bldP spid="13" grpId="0"/>
+      <p:bldP spid="14" grpId="0"/>
+      <p:bldP spid="15" grpId="0"/>
+      <p:bldP spid="16" grpId="0"/>
+      <p:bldP spid="18" grpId="0"/>
     </p:bldLst>
   </p:timing>
 </p:sld>
@@ -4204,7 +5538,7 @@
           </a:ln>
           <a:extLst>
             <a:ext uri="{C572A759-6A51-4108-AA02-DFA0A04FC94B}">
-              <ma14:wrappingTextBoxFlag xmlns="" xmlns:m="http://schemas.openxmlformats.org/officeDocument/2006/math" xmlns:a14="http://schemas.microsoft.com/office/drawing/2010/main" xmlns:ma14="http://schemas.microsoft.com/office/mac/drawingml/2011/main" val="1"/>
+              <ma14:wrappingTextBoxFlag xmlns:ma14="http://schemas.microsoft.com/office/mac/drawingml/2011/main" xmlns:a14="http://schemas.microsoft.com/office/drawing/2010/main" xmlns:m="http://schemas.openxmlformats.org/officeDocument/2006/math" xmlns="" val="1"/>
             </a:ext>
           </a:extLst>
         </p:spPr>
@@ -4239,7 +5573,7 @@
           </a:ln>
           <a:extLst>
             <a:ext uri="{C572A759-6A51-4108-AA02-DFA0A04FC94B}">
-              <ma14:wrappingTextBoxFlag xmlns="" xmlns:m="http://schemas.openxmlformats.org/officeDocument/2006/math" xmlns:a14="http://schemas.microsoft.com/office/drawing/2010/main" xmlns:ma14="http://schemas.microsoft.com/office/mac/drawingml/2011/main" val="1"/>
+              <ma14:wrappingTextBoxFlag xmlns:ma14="http://schemas.microsoft.com/office/mac/drawingml/2011/main" xmlns:a14="http://schemas.microsoft.com/office/drawing/2010/main" xmlns:m="http://schemas.openxmlformats.org/officeDocument/2006/math" xmlns="" val="1"/>
             </a:ext>
           </a:extLst>
         </p:spPr>
@@ -4296,7 +5630,7 @@
           </a:prstGeom>
           <a:extLst>
             <a:ext uri="{C572A759-6A51-4108-AA02-DFA0A04FC94B}">
-              <ma14:wrappingTextBoxFlag xmlns="" xmlns:m="http://schemas.openxmlformats.org/officeDocument/2006/math" xmlns:a14="http://schemas.microsoft.com/office/drawing/2010/main" xmlns:ma14="http://schemas.microsoft.com/office/mac/drawingml/2011/main" val="1"/>
+              <ma14:wrappingTextBoxFlag xmlns:ma14="http://schemas.microsoft.com/office/mac/drawingml/2011/main" xmlns:a14="http://schemas.microsoft.com/office/drawing/2010/main" xmlns:m="http://schemas.openxmlformats.org/officeDocument/2006/math" xmlns="" val="1"/>
             </a:ext>
           </a:extLst>
         </p:spPr>
@@ -4331,7 +5665,7 @@
           </a:ln>
           <a:extLst>
             <a:ext uri="{C572A759-6A51-4108-AA02-DFA0A04FC94B}">
-              <ma14:wrappingTextBoxFlag xmlns="" xmlns:m="http://schemas.openxmlformats.org/officeDocument/2006/math" xmlns:a14="http://schemas.microsoft.com/office/drawing/2010/main" xmlns:ma14="http://schemas.microsoft.com/office/mac/drawingml/2011/main" val="1"/>
+              <ma14:wrappingTextBoxFlag xmlns:ma14="http://schemas.microsoft.com/office/mac/drawingml/2011/main" xmlns:a14="http://schemas.microsoft.com/office/drawing/2010/main" xmlns:m="http://schemas.openxmlformats.org/officeDocument/2006/math" xmlns="" val="1"/>
             </a:ext>
           </a:extLst>
         </p:spPr>
@@ -4367,7 +5701,7 @@
           </a:ln>
           <a:extLst>
             <a:ext uri="{C572A759-6A51-4108-AA02-DFA0A04FC94B}">
-              <ma14:wrappingTextBoxFlag xmlns="" xmlns:m="http://schemas.openxmlformats.org/officeDocument/2006/math" xmlns:a14="http://schemas.microsoft.com/office/drawing/2010/main" xmlns:ma14="http://schemas.microsoft.com/office/mac/drawingml/2011/main" val="1"/>
+              <ma14:wrappingTextBoxFlag xmlns:ma14="http://schemas.microsoft.com/office/mac/drawingml/2011/main" xmlns:a14="http://schemas.microsoft.com/office/drawing/2010/main" xmlns:m="http://schemas.openxmlformats.org/officeDocument/2006/math" xmlns="" val="1"/>
             </a:ext>
           </a:extLst>
         </p:spPr>
@@ -4541,7 +5875,7 @@
             <a:effectLst/>
             <a:extLst>
               <a:ext uri="{C572A759-6A51-4108-AA02-DFA0A04FC94B}">
-                <ma14:wrappingTextBoxFlag xmlns="" xmlns:m="http://schemas.openxmlformats.org/officeDocument/2006/math" xmlns:a14="http://schemas.microsoft.com/office/drawing/2010/main" xmlns:ma14="http://schemas.microsoft.com/office/mac/drawingml/2011/main" val="1"/>
+                <ma14:wrappingTextBoxFlag xmlns:ma14="http://schemas.microsoft.com/office/mac/drawingml/2011/main" xmlns:a14="http://schemas.microsoft.com/office/drawing/2010/main" xmlns:m="http://schemas.openxmlformats.org/officeDocument/2006/math" xmlns="" val="1"/>
               </a:ext>
             </a:extLst>
           </p:spPr>
@@ -4638,7 +5972,7 @@
             <a:effectLst/>
             <a:extLst>
               <a:ext uri="{C572A759-6A51-4108-AA02-DFA0A04FC94B}">
-                <ma14:wrappingTextBoxFlag xmlns="" xmlns:m="http://schemas.openxmlformats.org/officeDocument/2006/math" xmlns:a14="http://schemas.microsoft.com/office/drawing/2010/main" xmlns:ma14="http://schemas.microsoft.com/office/mac/drawingml/2011/main" val="1"/>
+                <ma14:wrappingTextBoxFlag xmlns:ma14="http://schemas.microsoft.com/office/mac/drawingml/2011/main" xmlns:a14="http://schemas.microsoft.com/office/drawing/2010/main" xmlns:m="http://schemas.openxmlformats.org/officeDocument/2006/math" xmlns="" val="1"/>
               </a:ext>
             </a:extLst>
           </p:spPr>
@@ -4832,7 +6166,7 @@
             <a:effectLst/>
             <a:extLst>
               <a:ext uri="{C572A759-6A51-4108-AA02-DFA0A04FC94B}">
-                <ma14:wrappingTextBoxFlag xmlns="" xmlns:m="http://schemas.openxmlformats.org/officeDocument/2006/math" xmlns:a14="http://schemas.microsoft.com/office/drawing/2010/main" xmlns:ma14="http://schemas.microsoft.com/office/mac/drawingml/2011/main" val="1"/>
+                <ma14:wrappingTextBoxFlag xmlns:ma14="http://schemas.microsoft.com/office/mac/drawingml/2011/main" xmlns:a14="http://schemas.microsoft.com/office/drawing/2010/main" xmlns:m="http://schemas.openxmlformats.org/officeDocument/2006/math" xmlns="" val="1"/>
               </a:ext>
             </a:extLst>
           </p:spPr>
@@ -4895,65 +6229,6 @@
                 <a:lnTo>
                   <a:pt x="0" y="21600"/>
                 </a:lnTo>
-              </a:path>
-            </a:pathLst>
-          </a:custGeom>
-          <a:ln w="25400">
-            <a:solidFill>
-              <a:srgbClr val="000000"/>
-            </a:solidFill>
-            <a:miter lim="400000"/>
-            <a:tailEnd type="triangle"/>
-          </a:ln>
-        </p:spPr>
-        <p:txBody>
-          <a:bodyPr/>
-          <a:lstStyle/>
-          <a:p>
-            <a:endParaRPr/>
-          </a:p>
-        </p:txBody>
-      </p:sp>
-      <p:sp>
-        <p:nvSpPr>
-          <p:cNvPr id="431" name="Connection Line"/>
-          <p:cNvSpPr/>
-          <p:nvPr/>
-        </p:nvSpPr>
-        <p:spPr>
-          <a:xfrm>
-            <a:off x="5231875" y="5723333"/>
-            <a:ext cx="3447583" cy="1327153"/>
-          </a:xfrm>
-          <a:custGeom>
-            <a:avLst/>
-            <a:gdLst/>
-            <a:ahLst/>
-            <a:cxnLst>
-              <a:cxn ang="0">
-                <a:pos x="wd2" y="hd2"/>
-              </a:cxn>
-              <a:cxn ang="5400000">
-                <a:pos x="wd2" y="hd2"/>
-              </a:cxn>
-              <a:cxn ang="10800000">
-                <a:pos x="wd2" y="hd2"/>
-              </a:cxn>
-              <a:cxn ang="16200000">
-                <a:pos x="wd2" y="hd2"/>
-              </a:cxn>
-            </a:cxnLst>
-            <a:rect l="0" t="0" r="r" b="b"/>
-            <a:pathLst>
-              <a:path w="20825" h="21600" extrusionOk="0">
-                <a:moveTo>
-                  <a:pt x="20825" y="21600"/>
-                </a:moveTo>
-                <a:cubicBezTo>
-                  <a:pt x="6144" y="20623"/>
-                  <a:pt x="-775" y="13423"/>
-                  <a:pt x="69" y="0"/>
-                </a:cubicBezTo>
               </a:path>
             </a:pathLst>
           </a:custGeom>
@@ -5093,24 +6368,24 @@
       </p:sp>
       <p:cxnSp>
         <p:nvCxnSpPr>
-          <p:cNvPr id="3" name="Curved Connector 2">
+          <p:cNvPr id="4" name="Straight Arrow Connector 3">
             <a:extLst>
               <a:ext uri="{FF2B5EF4-FFF2-40B4-BE49-F238E27FC236}">
-                <a16:creationId xmlns:a16="http://schemas.microsoft.com/office/drawing/2014/main" id="{C43557BF-B2EA-764F-E678-2C0310CAD6DC}"/>
+                <a16:creationId xmlns:a16="http://schemas.microsoft.com/office/drawing/2014/main" id="{87771199-9A42-71C8-1FAD-1868D0F84BD4}"/>
               </a:ext>
             </a:extLst>
           </p:cNvPr>
           <p:cNvCxnSpPr>
-            <a:stCxn id="413" idx="3"/>
+            <a:stCxn id="418" idx="1"/>
           </p:cNvCxnSpPr>
           <p:nvPr/>
         </p:nvCxnSpPr>
         <p:spPr>
-          <a:xfrm>
-            <a:off x="2382119" y="3954768"/>
-            <a:ext cx="1588141" cy="843475"/>
+          <a:xfrm flipH="1" flipV="1">
+            <a:off x="6308203" y="5723849"/>
+            <a:ext cx="2371254" cy="1327051"/>
           </a:xfrm>
-          <a:prstGeom prst="curvedConnector3">
+          <a:prstGeom prst="straightConnector1">
             <a:avLst/>
           </a:prstGeom>
           <a:noFill/>
@@ -5140,10 +6415,57 @@
       </p:cxnSp>
       <p:cxnSp>
         <p:nvCxnSpPr>
-          <p:cNvPr id="5" name="Curved Connector 4">
+          <p:cNvPr id="7" name="Straight Arrow Connector 6">
             <a:extLst>
               <a:ext uri="{FF2B5EF4-FFF2-40B4-BE49-F238E27FC236}">
-                <a16:creationId xmlns:a16="http://schemas.microsoft.com/office/drawing/2014/main" id="{65F7CEEB-6529-E1B9-C039-F43A688EC5F7}"/>
+                <a16:creationId xmlns:a16="http://schemas.microsoft.com/office/drawing/2014/main" id="{AF910876-59FE-15E6-4BA6-57F35040E74F}"/>
+              </a:ext>
+            </a:extLst>
+          </p:cNvPr>
+          <p:cNvCxnSpPr>
+            <a:stCxn id="413" idx="3"/>
+          </p:cNvCxnSpPr>
+          <p:nvPr/>
+        </p:nvCxnSpPr>
+        <p:spPr>
+          <a:xfrm>
+            <a:off x="2382119" y="3954768"/>
+            <a:ext cx="1588141" cy="779278"/>
+          </a:xfrm>
+          <a:prstGeom prst="straightConnector1">
+            <a:avLst/>
+          </a:prstGeom>
+          <a:noFill/>
+          <a:ln w="25400" cap="flat">
+            <a:solidFill>
+              <a:srgbClr val="000000"/>
+            </a:solidFill>
+            <a:prstDash val="solid"/>
+            <a:miter lim="400000"/>
+            <a:tailEnd type="triangle"/>
+          </a:ln>
+          <a:effectLst/>
+          <a:sp3d/>
+        </p:spPr>
+        <p:style>
+          <a:lnRef idx="0">
+            <a:scrgbClr r="0" g="0" b="0"/>
+          </a:lnRef>
+          <a:fillRef idx="0">
+            <a:scrgbClr r="0" g="0" b="0"/>
+          </a:fillRef>
+          <a:effectRef idx="0">
+            <a:scrgbClr r="0" g="0" b="0"/>
+          </a:effectRef>
+          <a:fontRef idx="none"/>
+        </p:style>
+      </p:cxnSp>
+      <p:cxnSp>
+        <p:nvCxnSpPr>
+          <p:cNvPr id="9" name="Straight Arrow Connector 8">
+            <a:extLst>
+              <a:ext uri="{FF2B5EF4-FFF2-40B4-BE49-F238E27FC236}">
+                <a16:creationId xmlns:a16="http://schemas.microsoft.com/office/drawing/2014/main" id="{A353C221-E95F-6A41-18E4-5162016560F5}"/>
               </a:ext>
             </a:extLst>
           </p:cNvPr>
@@ -5153,11 +6475,11 @@
           <p:nvPr/>
         </p:nvCxnSpPr>
         <p:spPr>
-          <a:xfrm rot="16200000" flipH="1">
-            <a:off x="1576453" y="4554752"/>
-            <a:ext cx="1408744" cy="792975"/>
+          <a:xfrm>
+            <a:off x="1884338" y="4246868"/>
+            <a:ext cx="731540" cy="1441834"/>
           </a:xfrm>
-          <a:prstGeom prst="curvedConnector3">
+          <a:prstGeom prst="straightConnector1">
             <a:avLst/>
           </a:prstGeom>
           <a:noFill/>
@@ -5342,6 +6664,33 @@
                                   </p:childTnLst>
                                 </p:cTn>
                               </p:par>
+                              <p:par>
+                                <p:cTn id="16" presetID="1" presetClass="entr" presetSubtype="0" fill="hold" nodeType="withEffect">
+                                  <p:stCondLst>
+                                    <p:cond delay="0"/>
+                                  </p:stCondLst>
+                                  <p:childTnLst>
+                                    <p:set>
+                                      <p:cBhvr>
+                                        <p:cTn id="17" dur="1" fill="hold">
+                                          <p:stCondLst>
+                                            <p:cond delay="0"/>
+                                          </p:stCondLst>
+                                        </p:cTn>
+                                        <p:tgtEl>
+                                          <p:spTgt spid="7"/>
+                                        </p:tgtEl>
+                                        <p:attrNameLst>
+                                          <p:attrName>style.visibility</p:attrName>
+                                        </p:attrNameLst>
+                                      </p:cBhvr>
+                                      <p:to>
+                                        <p:strVal val="visible"/>
+                                      </p:to>
+                                    </p:set>
+                                  </p:childTnLst>
+                                </p:cTn>
+                              </p:par>
                             </p:childTnLst>
                           </p:cTn>
                         </p:par>
@@ -5349,19 +6698,19 @@
                     </p:cTn>
                   </p:par>
                   <p:par>
-                    <p:cTn id="16" fill="hold">
+                    <p:cTn id="18" fill="hold">
                       <p:stCondLst>
                         <p:cond delay="indefinite"/>
                       </p:stCondLst>
                       <p:childTnLst>
                         <p:par>
-                          <p:cTn id="17" fill="hold">
+                          <p:cTn id="19" fill="hold">
                             <p:stCondLst>
                               <p:cond delay="0"/>
                             </p:stCondLst>
                             <p:childTnLst>
                               <p:par>
-                                <p:cTn id="18" presetID="1" presetClass="entr" presetSubtype="0" fill="hold" grpId="6" nodeType="clickEffect">
+                                <p:cTn id="20" presetID="1" presetClass="entr" presetSubtype="0" fill="hold" grpId="7" nodeType="clickEffect">
                                   <p:stCondLst>
                                     <p:cond delay="0"/>
                                   </p:stCondLst>
@@ -5371,9 +6720,36 @@
                                   <p:childTnLst>
                                     <p:set>
                                       <p:cBhvr>
-                                        <p:cTn id="19" fill="hold"/>
+                                        <p:cTn id="21" fill="hold"/>
                                         <p:tgtEl>
-                                          <p:spTgt spid="431"/>
+                                          <p:spTgt spid="420"/>
+                                        </p:tgtEl>
+                                        <p:attrNameLst>
+                                          <p:attrName>style.visibility</p:attrName>
+                                        </p:attrNameLst>
+                                      </p:cBhvr>
+                                      <p:to>
+                                        <p:strVal val="visible"/>
+                                      </p:to>
+                                    </p:set>
+                                  </p:childTnLst>
+                                </p:cTn>
+                              </p:par>
+                              <p:par>
+                                <p:cTn id="22" presetID="1" presetClass="entr" presetSubtype="0" fill="hold" nodeType="withEffect">
+                                  <p:stCondLst>
+                                    <p:cond delay="0"/>
+                                  </p:stCondLst>
+                                  <p:childTnLst>
+                                    <p:set>
+                                      <p:cBhvr>
+                                        <p:cTn id="23" dur="1" fill="hold">
+                                          <p:stCondLst>
+                                            <p:cond delay="0"/>
+                                          </p:stCondLst>
+                                        </p:cTn>
+                                        <p:tgtEl>
+                                          <p:spTgt spid="4"/>
                                         </p:tgtEl>
                                         <p:attrNameLst>
                                           <p:attrName>style.visibility</p:attrName>
@@ -5390,13 +6766,13 @@
                           </p:cTn>
                         </p:par>
                         <p:par>
-                          <p:cTn id="20" fill="hold">
+                          <p:cTn id="24" fill="hold">
                             <p:stCondLst>
                               <p:cond delay="0"/>
                             </p:stCondLst>
                             <p:childTnLst>
                               <p:par>
-                                <p:cTn id="21" presetID="1" presetClass="entr" presetSubtype="0" fill="hold" grpId="7" nodeType="afterEffect">
+                                <p:cTn id="25" presetID="1" presetClass="entr" presetSubtype="0" fill="hold" grpId="8" nodeType="afterEffect">
                                   <p:stCondLst>
                                     <p:cond delay="0"/>
                                   </p:stCondLst>
@@ -5406,42 +6782,7 @@
                                   <p:childTnLst>
                                     <p:set>
                                       <p:cBhvr>
-                                        <p:cTn id="22" fill="hold"/>
-                                        <p:tgtEl>
-                                          <p:spTgt spid="420"/>
-                                        </p:tgtEl>
-                                        <p:attrNameLst>
-                                          <p:attrName>style.visibility</p:attrName>
-                                        </p:attrNameLst>
-                                      </p:cBhvr>
-                                      <p:to>
-                                        <p:strVal val="visible"/>
-                                      </p:to>
-                                    </p:set>
-                                  </p:childTnLst>
-                                </p:cTn>
-                              </p:par>
-                            </p:childTnLst>
-                          </p:cTn>
-                        </p:par>
-                        <p:par>
-                          <p:cTn id="23" fill="hold">
-                            <p:stCondLst>
-                              <p:cond delay="0"/>
-                            </p:stCondLst>
-                            <p:childTnLst>
-                              <p:par>
-                                <p:cTn id="24" presetID="1" presetClass="entr" presetSubtype="0" fill="hold" grpId="8" nodeType="afterEffect">
-                                  <p:stCondLst>
-                                    <p:cond delay="0"/>
-                                  </p:stCondLst>
-                                  <p:iterate>
-                                    <p:tmAbs val="0"/>
-                                  </p:iterate>
-                                  <p:childTnLst>
-                                    <p:set>
-                                      <p:cBhvr>
-                                        <p:cTn id="25" fill="hold"/>
+                                        <p:cTn id="26" fill="hold"/>
                                         <p:tgtEl>
                                           <p:spTgt spid="410"/>
                                         </p:tgtEl>
@@ -5463,19 +6804,19 @@
                     </p:cTn>
                   </p:par>
                   <p:par>
-                    <p:cTn id="26" fill="hold">
+                    <p:cTn id="27" fill="hold">
                       <p:stCondLst>
                         <p:cond delay="indefinite"/>
                       </p:stCondLst>
                       <p:childTnLst>
                         <p:par>
-                          <p:cTn id="27" fill="hold">
+                          <p:cTn id="28" fill="hold">
                             <p:stCondLst>
                               <p:cond delay="0"/>
                             </p:stCondLst>
                             <p:childTnLst>
                               <p:par>
-                                <p:cTn id="28" presetID="1" presetClass="entr" presetSubtype="0" fill="hold" grpId="9" nodeType="clickEffect">
+                                <p:cTn id="29" presetID="1" presetClass="entr" presetSubtype="0" fill="hold" grpId="9" nodeType="clickEffect">
                                   <p:stCondLst>
                                     <p:cond delay="0"/>
                                   </p:stCondLst>
@@ -5485,7 +6826,7 @@
                                   <p:childTnLst>
                                     <p:set>
                                       <p:cBhvr>
-                                        <p:cTn id="29" fill="hold"/>
+                                        <p:cTn id="30" fill="hold"/>
                                         <p:tgtEl>
                                           <p:spTgt spid="430"/>
                                         </p:tgtEl>
@@ -5504,13 +6845,13 @@
                           </p:cTn>
                         </p:par>
                         <p:par>
-                          <p:cTn id="30" fill="hold">
+                          <p:cTn id="31" fill="hold">
                             <p:stCondLst>
                               <p:cond delay="0"/>
                             </p:stCondLst>
                             <p:childTnLst>
                               <p:par>
-                                <p:cTn id="31" presetID="1" presetClass="entr" presetSubtype="0" fill="hold" grpId="11" nodeType="afterEffect">
+                                <p:cTn id="32" presetID="1" presetClass="entr" presetSubtype="0" fill="hold" grpId="11" nodeType="afterEffect">
                                   <p:stCondLst>
                                     <p:cond delay="0"/>
                                   </p:stCondLst>
@@ -5520,7 +6861,7 @@
                                   <p:childTnLst>
                                     <p:set>
                                       <p:cBhvr>
-                                        <p:cTn id="32" fill="hold"/>
+                                        <p:cTn id="33" fill="hold"/>
                                         <p:tgtEl>
                                           <p:spTgt spid="417"/>
                                         </p:tgtEl>
@@ -5539,13 +6880,13 @@
                           </p:cTn>
                         </p:par>
                         <p:par>
-                          <p:cTn id="33" fill="hold">
+                          <p:cTn id="34" fill="hold">
                             <p:stCondLst>
                               <p:cond delay="0"/>
                             </p:stCondLst>
                             <p:childTnLst>
                               <p:par>
-                                <p:cTn id="34" presetID="1" presetClass="entr" presetSubtype="0" fill="hold" grpId="12" nodeType="afterEffect">
+                                <p:cTn id="35" presetID="1" presetClass="entr" presetSubtype="0" fill="hold" grpId="12" nodeType="afterEffect">
                                   <p:stCondLst>
                                     <p:cond delay="0"/>
                                   </p:stCondLst>
@@ -5555,7 +6896,7 @@
                                   <p:childTnLst>
                                     <p:set>
                                       <p:cBhvr>
-                                        <p:cTn id="35" fill="hold"/>
+                                        <p:cTn id="36" fill="hold"/>
                                         <p:tgtEl>
                                           <p:spTgt spid="432"/>
                                         </p:tgtEl>
@@ -5574,13 +6915,13 @@
                           </p:cTn>
                         </p:par>
                         <p:par>
-                          <p:cTn id="36" fill="hold">
+                          <p:cTn id="37" fill="hold">
                             <p:stCondLst>
                               <p:cond delay="0"/>
                             </p:stCondLst>
                             <p:childTnLst>
                               <p:par>
-                                <p:cTn id="37" presetID="1" presetClass="entr" presetSubtype="0" fill="hold" grpId="13" nodeType="afterEffect">
+                                <p:cTn id="38" presetID="1" presetClass="entr" presetSubtype="0" fill="hold" grpId="13" nodeType="afterEffect">
                                   <p:stCondLst>
                                     <p:cond delay="0"/>
                                   </p:stCondLst>
@@ -5590,7 +6931,7 @@
                                   <p:childTnLst>
                                     <p:set>
                                       <p:cBhvr>
-                                        <p:cTn id="38" fill="hold"/>
+                                        <p:cTn id="39" fill="hold"/>
                                         <p:tgtEl>
                                           <p:spTgt spid="409"/>
                                         </p:tgtEl>
@@ -5605,38 +6946,21 @@
                                   </p:childTnLst>
                                 </p:cTn>
                               </p:par>
-                            </p:childTnLst>
-                          </p:cTn>
-                        </p:par>
-                      </p:childTnLst>
-                    </p:cTn>
-                  </p:par>
-                  <p:par>
-                    <p:cTn id="39" fill="hold">
-                      <p:stCondLst>
-                        <p:cond delay="indefinite"/>
-                      </p:stCondLst>
-                      <p:childTnLst>
-                        <p:par>
-                          <p:cTn id="40" fill="hold">
-                            <p:stCondLst>
-                              <p:cond delay="0"/>
-                            </p:stCondLst>
-                            <p:childTnLst>
                               <p:par>
-                                <p:cTn id="41" presetID="1" presetClass="entr" presetSubtype="0" fill="hold" grpId="14" nodeType="clickEffect">
+                                <p:cTn id="40" presetID="1" presetClass="entr" presetSubtype="0" fill="hold" nodeType="withEffect">
                                   <p:stCondLst>
                                     <p:cond delay="0"/>
                                   </p:stCondLst>
-                                  <p:iterate>
-                                    <p:tmAbs val="0"/>
-                                  </p:iterate>
                                   <p:childTnLst>
                                     <p:set>
                                       <p:cBhvr>
-                                        <p:cTn id="42" fill="hold"/>
+                                        <p:cTn id="41" dur="1" fill="hold">
+                                          <p:stCondLst>
+                                            <p:cond delay="0"/>
+                                          </p:stCondLst>
+                                        </p:cTn>
                                         <p:tgtEl>
-                                          <p:spTgt spid="411"/>
+                                          <p:spTgt spid="9"/>
                                         </p:tgtEl>
                                         <p:attrNameLst>
                                           <p:attrName>style.visibility</p:attrName>
@@ -5679,14 +7003,12 @@
     <p:bldLst>
       <p:bldP spid="409" grpId="13" animBg="1" advAuto="0"/>
       <p:bldP spid="410" grpId="8" animBg="1" advAuto="0"/>
-      <p:bldP spid="411" grpId="14" animBg="1" advAuto="0"/>
       <p:bldP spid="413" grpId="4" animBg="1" advAuto="0"/>
       <p:bldP spid="414" grpId="3" animBg="1" advAuto="0"/>
       <p:bldP spid="417" grpId="11" animBg="1" advAuto="0"/>
       <p:bldP spid="420" grpId="7" animBg="1" advAuto="0"/>
       <p:bldP spid="423" grpId="1" animBg="1" advAuto="0"/>
       <p:bldP spid="430" grpId="9" animBg="1" advAuto="0"/>
-      <p:bldP spid="431" grpId="6" animBg="1" advAuto="0"/>
       <p:bldP spid="432" grpId="12" animBg="1" advAuto="0"/>
       <p:bldP spid="435" grpId="2" animBg="1" advAuto="0"/>
     </p:bldLst>
@@ -5702,7 +7024,7 @@
         <p:cNvPr id="1" name="">
           <a:extLst>
             <a:ext uri="{FF2B5EF4-FFF2-40B4-BE49-F238E27FC236}">
-              <a16:creationId xmlns:a16="http://schemas.microsoft.com/office/drawing/2014/main" id="{3519F07C-FE86-F639-FC91-089D48C4F9BE}"/>
+              <a16:creationId xmlns:a16="http://schemas.microsoft.com/office/drawing/2014/main" id="{8937382F-1F56-B2F5-E6F2-977EFBBC5CFE}"/>
             </a:ext>
           </a:extLst>
         </p:cNvPr>
@@ -5722,7 +7044,7 @@
           <p:cNvPr id="409" name="next state">
             <a:extLst>
               <a:ext uri="{FF2B5EF4-FFF2-40B4-BE49-F238E27FC236}">
-                <a16:creationId xmlns:a16="http://schemas.microsoft.com/office/drawing/2014/main" id="{29C15325-6F36-2DB3-EFA5-4A91DAA77281}"/>
+                <a16:creationId xmlns:a16="http://schemas.microsoft.com/office/drawing/2014/main" id="{B04ABA60-5E76-B7EC-A037-EC3600A4C673}"/>
               </a:ext>
             </a:extLst>
           </p:cNvPr>
@@ -5742,7 +7064,7 @@
           </a:ln>
           <a:extLst>
             <a:ext uri="{C572A759-6A51-4108-AA02-DFA0A04FC94B}">
-              <ma14:wrappingTextBoxFlag xmlns:ma14="http://schemas.microsoft.com/office/mac/drawingml/2011/main" xmlns:a14="http://schemas.microsoft.com/office/drawing/2010/main" xmlns:m="http://schemas.openxmlformats.org/officeDocument/2006/math" xmlns="" val="1"/>
+              <ma14:wrappingTextBoxFlag xmlns="" xmlns:m="http://schemas.openxmlformats.org/officeDocument/2006/math" xmlns:a14="http://schemas.microsoft.com/office/drawing/2010/main" xmlns:ma14="http://schemas.microsoft.com/office/mac/drawingml/2011/main" val="1"/>
             </a:ext>
           </a:extLst>
         </p:spPr>
@@ -5763,7 +7085,7 @@
           <p:cNvPr id="410" name="current state">
             <a:extLst>
               <a:ext uri="{FF2B5EF4-FFF2-40B4-BE49-F238E27FC236}">
-                <a16:creationId xmlns:a16="http://schemas.microsoft.com/office/drawing/2014/main" id="{6E5D8512-D66B-F623-FB80-CEEE4EF5B166}"/>
+                <a16:creationId xmlns:a16="http://schemas.microsoft.com/office/drawing/2014/main" id="{8FB1F1DA-45F0-9F2A-36E0-ED0AFAA7A6A1}"/>
               </a:ext>
             </a:extLst>
           </p:cNvPr>
@@ -5772,7 +7094,7 @@
         </p:nvSpPr>
         <p:spPr>
           <a:xfrm>
-            <a:off x="6340309" y="6983350"/>
+            <a:off x="6179603" y="6925658"/>
             <a:ext cx="2373115" cy="584201"/>
           </a:xfrm>
           <a:prstGeom prst="rect">
@@ -5783,7 +7105,7 @@
           </a:ln>
           <a:extLst>
             <a:ext uri="{C572A759-6A51-4108-AA02-DFA0A04FC94B}">
-              <ma14:wrappingTextBoxFlag xmlns:ma14="http://schemas.microsoft.com/office/mac/drawingml/2011/main" xmlns:a14="http://schemas.microsoft.com/office/drawing/2010/main" xmlns:m="http://schemas.openxmlformats.org/officeDocument/2006/math" xmlns="" val="1"/>
+              <ma14:wrappingTextBoxFlag xmlns="" xmlns:m="http://schemas.openxmlformats.org/officeDocument/2006/math" xmlns:a14="http://schemas.microsoft.com/office/drawing/2010/main" xmlns:ma14="http://schemas.microsoft.com/office/mac/drawingml/2011/main" val="1"/>
             </a:ext>
           </a:extLst>
         </p:spPr>
@@ -5794,8 +7116,47 @@
           <a:lstStyle/>
           <a:p>
             <a:r>
+              <a:t>current state</a:t>
+            </a:r>
+          </a:p>
+        </p:txBody>
+      </p:sp>
+      <p:sp>
+        <p:nvSpPr>
+          <p:cNvPr id="411" name="Mealy machines">
+            <a:extLst>
+              <a:ext uri="{FF2B5EF4-FFF2-40B4-BE49-F238E27FC236}">
+                <a16:creationId xmlns:a16="http://schemas.microsoft.com/office/drawing/2014/main" id="{940313D5-DACF-7D36-BEDF-318E526BFF92}"/>
+              </a:ext>
+            </a:extLst>
+          </p:cNvPr>
+          <p:cNvSpPr txBox="1">
+            <a:spLocks noGrp="1"/>
+          </p:cNvSpPr>
+          <p:nvPr>
+            <p:ph type="title"/>
+          </p:nvPr>
+        </p:nvSpPr>
+        <p:spPr>
+          <a:prstGeom prst="rect">
+            <a:avLst/>
+          </a:prstGeom>
+        </p:spPr>
+        <p:txBody>
+          <a:bodyPr/>
+          <a:lstStyle/>
+          <a:p>
+            <a:r>
               <a:rPr dirty="0"/>
-              <a:t>current state</a:t>
+              <a:t>M</a:t>
+            </a:r>
+            <a:r>
+              <a:rPr lang="en-GB" dirty="0" err="1"/>
+              <a:t>oore</a:t>
+            </a:r>
+            <a:r>
+              <a:rPr dirty="0"/>
+              <a:t> machines</a:t>
             </a:r>
           </a:p>
         </p:txBody>
@@ -5805,7 +7166,7 @@
           <p:cNvPr id="412" name="Slide Number">
             <a:extLst>
               <a:ext uri="{FF2B5EF4-FFF2-40B4-BE49-F238E27FC236}">
-                <a16:creationId xmlns:a16="http://schemas.microsoft.com/office/drawing/2014/main" id="{3CE26FC9-202E-BBBF-FBC9-0DB10B6C3509}"/>
+                <a16:creationId xmlns:a16="http://schemas.microsoft.com/office/drawing/2014/main" id="{1794E6C5-5129-6935-9088-257AC2113B3D}"/>
               </a:ext>
             </a:extLst>
           </p:cNvPr>
@@ -5822,7 +7183,7 @@
           </a:prstGeom>
           <a:extLst>
             <a:ext uri="{C572A759-6A51-4108-AA02-DFA0A04FC94B}">
-              <ma14:wrappingTextBoxFlag xmlns:ma14="http://schemas.microsoft.com/office/mac/drawingml/2011/main" xmlns:a14="http://schemas.microsoft.com/office/drawing/2010/main" xmlns:m="http://schemas.openxmlformats.org/officeDocument/2006/math" xmlns="" val="1"/>
+              <ma14:wrappingTextBoxFlag xmlns="" xmlns:m="http://schemas.openxmlformats.org/officeDocument/2006/math" xmlns:a14="http://schemas.microsoft.com/office/drawing/2010/main" xmlns:ma14="http://schemas.microsoft.com/office/mac/drawingml/2011/main" val="1"/>
             </a:ext>
           </a:extLst>
         </p:spPr>
@@ -5843,7 +7204,7 @@
           <p:cNvPr id="413" name="input">
             <a:extLst>
               <a:ext uri="{FF2B5EF4-FFF2-40B4-BE49-F238E27FC236}">
-                <a16:creationId xmlns:a16="http://schemas.microsoft.com/office/drawing/2014/main" id="{87A18A34-D571-49E0-D9B5-BF658653BF3E}"/>
+                <a16:creationId xmlns:a16="http://schemas.microsoft.com/office/drawing/2014/main" id="{A32E929E-A533-271B-8AF0-36CF8F8E5A34}"/>
               </a:ext>
             </a:extLst>
           </p:cNvPr>
@@ -5863,7 +7224,7 @@
           </a:ln>
           <a:extLst>
             <a:ext uri="{C572A759-6A51-4108-AA02-DFA0A04FC94B}">
-              <ma14:wrappingTextBoxFlag xmlns:ma14="http://schemas.microsoft.com/office/mac/drawingml/2011/main" xmlns:a14="http://schemas.microsoft.com/office/drawing/2010/main" xmlns:m="http://schemas.openxmlformats.org/officeDocument/2006/math" xmlns="" val="1"/>
+              <ma14:wrappingTextBoxFlag xmlns="" xmlns:m="http://schemas.openxmlformats.org/officeDocument/2006/math" xmlns:a14="http://schemas.microsoft.com/office/drawing/2010/main" xmlns:ma14="http://schemas.microsoft.com/office/mac/drawingml/2011/main" val="1"/>
             </a:ext>
           </a:extLst>
         </p:spPr>
@@ -5885,7 +7246,7 @@
           <p:cNvPr id="414" name="output">
             <a:extLst>
               <a:ext uri="{FF2B5EF4-FFF2-40B4-BE49-F238E27FC236}">
-                <a16:creationId xmlns:a16="http://schemas.microsoft.com/office/drawing/2014/main" id="{69017BE5-DDC8-03EF-8A90-6A273D76E096}"/>
+                <a16:creationId xmlns:a16="http://schemas.microsoft.com/office/drawing/2014/main" id="{7AAC61E3-AAEE-D514-C8C8-AD4F1C79A8BA}"/>
               </a:ext>
             </a:extLst>
           </p:cNvPr>
@@ -5905,7 +7266,7 @@
           </a:ln>
           <a:extLst>
             <a:ext uri="{C572A759-6A51-4108-AA02-DFA0A04FC94B}">
-              <ma14:wrappingTextBoxFlag xmlns:ma14="http://schemas.microsoft.com/office/mac/drawingml/2011/main" xmlns:a14="http://schemas.microsoft.com/office/drawing/2010/main" xmlns:m="http://schemas.openxmlformats.org/officeDocument/2006/math" xmlns="" val="1"/>
+              <ma14:wrappingTextBoxFlag xmlns="" xmlns:m="http://schemas.openxmlformats.org/officeDocument/2006/math" xmlns:a14="http://schemas.microsoft.com/office/drawing/2010/main" xmlns:ma14="http://schemas.microsoft.com/office/mac/drawingml/2011/main" val="1"/>
             </a:ext>
           </a:extLst>
         </p:spPr>
@@ -5926,7 +7287,7 @@
           <p:cNvPr id="417" name="Group">
             <a:extLst>
               <a:ext uri="{FF2B5EF4-FFF2-40B4-BE49-F238E27FC236}">
-                <a16:creationId xmlns:a16="http://schemas.microsoft.com/office/drawing/2014/main" id="{FDDD49BC-0772-48A2-78E7-37ECE62C534E}"/>
+                <a16:creationId xmlns:a16="http://schemas.microsoft.com/office/drawing/2014/main" id="{59BDA520-400E-C908-9E82-A4DA9899660E}"/>
               </a:ext>
             </a:extLst>
           </p:cNvPr>
@@ -5946,7 +7307,7 @@
             <p:cNvPr id="415" name="Cloud">
               <a:extLst>
                 <a:ext uri="{FF2B5EF4-FFF2-40B4-BE49-F238E27FC236}">
-                  <a16:creationId xmlns:a16="http://schemas.microsoft.com/office/drawing/2014/main" id="{33F80D6D-CF32-6E85-DEA8-BFD8561CC559}"/>
+                  <a16:creationId xmlns:a16="http://schemas.microsoft.com/office/drawing/2014/main" id="{7A6D43AA-5A20-5B04-0531-C53C6CCD2426}"/>
                 </a:ext>
               </a:extLst>
             </p:cNvPr>
@@ -6074,7 +7435,7 @@
             <p:cNvPr id="416" name="combinational logic">
               <a:extLst>
                 <a:ext uri="{FF2B5EF4-FFF2-40B4-BE49-F238E27FC236}">
-                  <a16:creationId xmlns:a16="http://schemas.microsoft.com/office/drawing/2014/main" id="{A6D4D325-418C-05EE-C130-0A2B0947E498}"/>
+                  <a16:creationId xmlns:a16="http://schemas.microsoft.com/office/drawing/2014/main" id="{B67EE9F9-FA6E-D0A8-5A6C-4E4B2F583CC1}"/>
                 </a:ext>
               </a:extLst>
             </p:cNvPr>
@@ -6097,7 +7458,7 @@
             <a:effectLst/>
             <a:extLst>
               <a:ext uri="{C572A759-6A51-4108-AA02-DFA0A04FC94B}">
-                <ma14:wrappingTextBoxFlag xmlns:ma14="http://schemas.microsoft.com/office/mac/drawingml/2011/main" xmlns:a14="http://schemas.microsoft.com/office/drawing/2010/main" xmlns:m="http://schemas.openxmlformats.org/officeDocument/2006/math" xmlns="" val="1"/>
+                <ma14:wrappingTextBoxFlag xmlns="" xmlns:m="http://schemas.openxmlformats.org/officeDocument/2006/math" xmlns:a14="http://schemas.microsoft.com/office/drawing/2010/main" xmlns:ma14="http://schemas.microsoft.com/office/mac/drawingml/2011/main" val="1"/>
               </a:ext>
             </a:extLst>
           </p:spPr>
@@ -6127,7 +7488,7 @@
           <p:cNvPr id="420" name="Group">
             <a:extLst>
               <a:ext uri="{FF2B5EF4-FFF2-40B4-BE49-F238E27FC236}">
-                <a16:creationId xmlns:a16="http://schemas.microsoft.com/office/drawing/2014/main" id="{7F4F4B8A-2727-989D-15B5-F9297C48E8E2}"/>
+                <a16:creationId xmlns:a16="http://schemas.microsoft.com/office/drawing/2014/main" id="{44178F16-E6EC-5F28-5246-DDA4C62394DA}"/>
               </a:ext>
             </a:extLst>
           </p:cNvPr>
@@ -6147,7 +7508,7 @@
             <p:cNvPr id="418" name="Rectangle">
               <a:extLst>
                 <a:ext uri="{FF2B5EF4-FFF2-40B4-BE49-F238E27FC236}">
-                  <a16:creationId xmlns:a16="http://schemas.microsoft.com/office/drawing/2014/main" id="{F6B70D8F-A3F1-4441-1ACC-F7F44E13924A}"/>
+                  <a16:creationId xmlns:a16="http://schemas.microsoft.com/office/drawing/2014/main" id="{D189E88C-9ECC-53C1-2467-C098CCD7A22F}"/>
                 </a:ext>
               </a:extLst>
             </p:cNvPr>
@@ -6189,7 +7550,7 @@
             <p:cNvPr id="419" name="state…">
               <a:extLst>
                 <a:ext uri="{FF2B5EF4-FFF2-40B4-BE49-F238E27FC236}">
-                  <a16:creationId xmlns:a16="http://schemas.microsoft.com/office/drawing/2014/main" id="{E2394BED-F11D-5714-C7C2-D1608A6F1B49}"/>
+                  <a16:creationId xmlns:a16="http://schemas.microsoft.com/office/drawing/2014/main" id="{C3EE4B2B-3E78-C3DF-8056-30249CFBC6CD}"/>
                 </a:ext>
               </a:extLst>
             </p:cNvPr>
@@ -6212,7 +7573,7 @@
             <a:effectLst/>
             <a:extLst>
               <a:ext uri="{C572A759-6A51-4108-AA02-DFA0A04FC94B}">
-                <ma14:wrappingTextBoxFlag xmlns:ma14="http://schemas.microsoft.com/office/mac/drawingml/2011/main" xmlns:a14="http://schemas.microsoft.com/office/drawing/2010/main" xmlns:m="http://schemas.openxmlformats.org/officeDocument/2006/math" xmlns="" val="1"/>
+                <ma14:wrappingTextBoxFlag xmlns="" xmlns:m="http://schemas.openxmlformats.org/officeDocument/2006/math" xmlns:a14="http://schemas.microsoft.com/office/drawing/2010/main" xmlns:ma14="http://schemas.microsoft.com/office/mac/drawingml/2011/main" val="1"/>
               </a:ext>
             </a:extLst>
           </p:spPr>
@@ -6253,7 +7614,7 @@
           <p:cNvPr id="423" name="Group">
             <a:extLst>
               <a:ext uri="{FF2B5EF4-FFF2-40B4-BE49-F238E27FC236}">
-                <a16:creationId xmlns:a16="http://schemas.microsoft.com/office/drawing/2014/main" id="{C68D07DF-B999-E0ED-C712-E18991D291BE}"/>
+                <a16:creationId xmlns:a16="http://schemas.microsoft.com/office/drawing/2014/main" id="{29D62EBC-E038-0DBA-77C9-FD3EEEC26E73}"/>
               </a:ext>
             </a:extLst>
           </p:cNvPr>
@@ -6273,7 +7634,7 @@
             <p:cNvPr id="421" name="Cloud">
               <a:extLst>
                 <a:ext uri="{FF2B5EF4-FFF2-40B4-BE49-F238E27FC236}">
-                  <a16:creationId xmlns:a16="http://schemas.microsoft.com/office/drawing/2014/main" id="{9CD031CA-89CC-4503-8898-4D62636C5BBA}"/>
+                  <a16:creationId xmlns:a16="http://schemas.microsoft.com/office/drawing/2014/main" id="{14E8E966-E134-F683-1D30-F35F8B5BEAF9}"/>
                 </a:ext>
               </a:extLst>
             </p:cNvPr>
@@ -6401,7 +7762,7 @@
             <p:cNvPr id="422" name="combinational logic">
               <a:extLst>
                 <a:ext uri="{FF2B5EF4-FFF2-40B4-BE49-F238E27FC236}">
-                  <a16:creationId xmlns:a16="http://schemas.microsoft.com/office/drawing/2014/main" id="{824DC7E5-DA5A-885C-C557-2B3EF6621AEB}"/>
+                  <a16:creationId xmlns:a16="http://schemas.microsoft.com/office/drawing/2014/main" id="{5D2751BF-CE08-2666-B86E-577C83CC1F6C}"/>
                 </a:ext>
               </a:extLst>
             </p:cNvPr>
@@ -6424,7 +7785,7 @@
             <a:effectLst/>
             <a:extLst>
               <a:ext uri="{C572A759-6A51-4108-AA02-DFA0A04FC94B}">
-                <ma14:wrappingTextBoxFlag xmlns:ma14="http://schemas.microsoft.com/office/mac/drawingml/2011/main" xmlns:a14="http://schemas.microsoft.com/office/drawing/2010/main" xmlns:m="http://schemas.openxmlformats.org/officeDocument/2006/math" xmlns="" val="1"/>
+                <ma14:wrappingTextBoxFlag xmlns="" xmlns:m="http://schemas.openxmlformats.org/officeDocument/2006/math" xmlns:a14="http://schemas.microsoft.com/office/drawing/2010/main" xmlns:ma14="http://schemas.microsoft.com/office/mac/drawingml/2011/main" val="1"/>
               </a:ext>
             </a:extLst>
           </p:spPr>
@@ -6454,7 +7815,7 @@
           <p:cNvPr id="430" name="Connection Line">
             <a:extLst>
               <a:ext uri="{FF2B5EF4-FFF2-40B4-BE49-F238E27FC236}">
-                <a16:creationId xmlns:a16="http://schemas.microsoft.com/office/drawing/2014/main" id="{F0ED7369-3BD5-4A32-ED70-B39221C27C9B}"/>
+                <a16:creationId xmlns:a16="http://schemas.microsoft.com/office/drawing/2014/main" id="{52263CBB-AD17-2845-387B-9E9B05580C7E}"/>
               </a:ext>
             </a:extLst>
           </p:cNvPr>
@@ -6514,75 +7875,10 @@
       </p:sp>
       <p:sp>
         <p:nvSpPr>
-          <p:cNvPr id="431" name="Connection Line">
-            <a:extLst>
-              <a:ext uri="{FF2B5EF4-FFF2-40B4-BE49-F238E27FC236}">
-                <a16:creationId xmlns:a16="http://schemas.microsoft.com/office/drawing/2014/main" id="{C8F24B6B-133D-36E9-8ECF-238EA8456C4E}"/>
-              </a:ext>
-            </a:extLst>
-          </p:cNvPr>
-          <p:cNvSpPr/>
-          <p:nvPr/>
-        </p:nvSpPr>
-        <p:spPr>
-          <a:xfrm>
-            <a:off x="5231875" y="5723333"/>
-            <a:ext cx="3447583" cy="1327153"/>
-          </a:xfrm>
-          <a:custGeom>
-            <a:avLst/>
-            <a:gdLst/>
-            <a:ahLst/>
-            <a:cxnLst>
-              <a:cxn ang="0">
-                <a:pos x="wd2" y="hd2"/>
-              </a:cxn>
-              <a:cxn ang="5400000">
-                <a:pos x="wd2" y="hd2"/>
-              </a:cxn>
-              <a:cxn ang="10800000">
-                <a:pos x="wd2" y="hd2"/>
-              </a:cxn>
-              <a:cxn ang="16200000">
-                <a:pos x="wd2" y="hd2"/>
-              </a:cxn>
-            </a:cxnLst>
-            <a:rect l="0" t="0" r="r" b="b"/>
-            <a:pathLst>
-              <a:path w="20825" h="21600" extrusionOk="0">
-                <a:moveTo>
-                  <a:pt x="20825" y="21600"/>
-                </a:moveTo>
-                <a:cubicBezTo>
-                  <a:pt x="6144" y="20623"/>
-                  <a:pt x="-775" y="13423"/>
-                  <a:pt x="69" y="0"/>
-                </a:cubicBezTo>
-              </a:path>
-            </a:pathLst>
-          </a:custGeom>
-          <a:ln w="25400">
-            <a:solidFill>
-              <a:srgbClr val="000000"/>
-            </a:solidFill>
-            <a:miter lim="400000"/>
-            <a:tailEnd type="triangle"/>
-          </a:ln>
-        </p:spPr>
-        <p:txBody>
-          <a:bodyPr/>
-          <a:lstStyle/>
-          <a:p>
-            <a:endParaRPr/>
-          </a:p>
-        </p:txBody>
-      </p:sp>
-      <p:sp>
-        <p:nvSpPr>
           <p:cNvPr id="432" name="Connection Line">
             <a:extLst>
               <a:ext uri="{FF2B5EF4-FFF2-40B4-BE49-F238E27FC236}">
-                <a16:creationId xmlns:a16="http://schemas.microsoft.com/office/drawing/2014/main" id="{C5048C4A-EB99-5B12-FF34-2A19DC360082}"/>
+                <a16:creationId xmlns:a16="http://schemas.microsoft.com/office/drawing/2014/main" id="{59CBA652-EA62-472B-B95B-C21114B1D122}"/>
               </a:ext>
             </a:extLst>
           </p:cNvPr>
@@ -6647,7 +7943,7 @@
           <p:cNvPr id="435" name="Connection Line">
             <a:extLst>
               <a:ext uri="{FF2B5EF4-FFF2-40B4-BE49-F238E27FC236}">
-                <a16:creationId xmlns:a16="http://schemas.microsoft.com/office/drawing/2014/main" id="{173CC56D-5DC2-A61D-5938-10A4D818FA93}"/>
+                <a16:creationId xmlns:a16="http://schemas.microsoft.com/office/drawing/2014/main" id="{C4FE8355-BCD2-B906-468E-7DAF07F4CF07}"/>
               </a:ext>
             </a:extLst>
           </p:cNvPr>
@@ -6709,24 +8005,24 @@
       </p:sp>
       <p:cxnSp>
         <p:nvCxnSpPr>
-          <p:cNvPr id="5" name="Curved Connector 4">
+          <p:cNvPr id="4" name="Straight Arrow Connector 3">
             <a:extLst>
               <a:ext uri="{FF2B5EF4-FFF2-40B4-BE49-F238E27FC236}">
-                <a16:creationId xmlns:a16="http://schemas.microsoft.com/office/drawing/2014/main" id="{AF3C8BFD-91F5-FDB7-90EF-94D3D37A01DE}"/>
+                <a16:creationId xmlns:a16="http://schemas.microsoft.com/office/drawing/2014/main" id="{F22E1EEA-8296-6E95-4ADA-AAE3DC521355}"/>
               </a:ext>
             </a:extLst>
           </p:cNvPr>
           <p:cNvCxnSpPr>
-            <a:stCxn id="413" idx="2"/>
+            <a:stCxn id="418" idx="1"/>
           </p:cNvCxnSpPr>
           <p:nvPr/>
         </p:nvCxnSpPr>
         <p:spPr>
-          <a:xfrm rot="16200000" flipH="1">
-            <a:off x="1576453" y="4554752"/>
-            <a:ext cx="1408744" cy="792975"/>
+          <a:xfrm flipH="1" flipV="1">
+            <a:off x="6308203" y="5723849"/>
+            <a:ext cx="2371254" cy="1327051"/>
           </a:xfrm>
-          <a:prstGeom prst="curvedConnector3">
+          <a:prstGeom prst="straightConnector1">
             <a:avLst/>
           </a:prstGeom>
           <a:noFill/>
@@ -6754,46 +8050,57 @@
           <a:fontRef idx="none"/>
         </p:style>
       </p:cxnSp>
-      <p:sp>
-        <p:nvSpPr>
-          <p:cNvPr id="6" name="Moore machines">
+      <p:cxnSp>
+        <p:nvCxnSpPr>
+          <p:cNvPr id="9" name="Straight Arrow Connector 8">
             <a:extLst>
               <a:ext uri="{FF2B5EF4-FFF2-40B4-BE49-F238E27FC236}">
-                <a16:creationId xmlns:a16="http://schemas.microsoft.com/office/drawing/2014/main" id="{A6AA4984-9B9E-E829-2022-D18D9E574639}"/>
+                <a16:creationId xmlns:a16="http://schemas.microsoft.com/office/drawing/2014/main" id="{A6933189-D0BD-1A54-4F73-7634186B380D}"/>
               </a:ext>
             </a:extLst>
           </p:cNvPr>
-          <p:cNvSpPr txBox="1">
-            <a:spLocks noGrp="1"/>
-          </p:cNvSpPr>
-          <p:nvPr>
-            <p:ph type="title"/>
-          </p:nvPr>
-        </p:nvSpPr>
+          <p:cNvCxnSpPr>
+            <a:stCxn id="413" idx="2"/>
+          </p:cNvCxnSpPr>
+          <p:nvPr/>
+        </p:nvCxnSpPr>
         <p:spPr>
           <a:xfrm>
-            <a:off x="952500" y="546100"/>
-            <a:ext cx="11099800" cy="2159000"/>
+            <a:off x="1884338" y="4246868"/>
+            <a:ext cx="731540" cy="1441834"/>
           </a:xfrm>
-          <a:prstGeom prst="rect">
+          <a:prstGeom prst="straightConnector1">
             <a:avLst/>
           </a:prstGeom>
+          <a:noFill/>
+          <a:ln w="25400" cap="flat">
+            <a:solidFill>
+              <a:srgbClr val="000000"/>
+            </a:solidFill>
+            <a:prstDash val="solid"/>
+            <a:miter lim="400000"/>
+            <a:tailEnd type="triangle"/>
+          </a:ln>
+          <a:effectLst/>
+          <a:sp3d/>
         </p:spPr>
-        <p:txBody>
-          <a:bodyPr/>
-          <a:lstStyle/>
-          <a:p>
-            <a:r>
-              <a:rPr dirty="0"/>
-              <a:t>Moore machines</a:t>
-            </a:r>
-          </a:p>
-        </p:txBody>
-      </p:sp>
+        <p:style>
+          <a:lnRef idx="0">
+            <a:scrgbClr r="0" g="0" b="0"/>
+          </a:lnRef>
+          <a:fillRef idx="0">
+            <a:scrgbClr r="0" g="0" b="0"/>
+          </a:fillRef>
+          <a:effectRef idx="0">
+            <a:scrgbClr r="0" g="0" b="0"/>
+          </a:effectRef>
+          <a:fontRef idx="none"/>
+        </p:style>
+      </p:cxnSp>
     </p:spTree>
     <p:extLst>
       <p:ext uri="{BB962C8B-B14F-4D97-AF65-F5344CB8AC3E}">
-        <p14:creationId xmlns:p14="http://schemas.microsoft.com/office/powerpoint/2010/main" val="3550929172"/>
+        <p14:creationId xmlns:p14="http://schemas.microsoft.com/office/powerpoint/2010/main" val="2700197202"/>
       </p:ext>
     </p:extLst>
   </p:cSld>
@@ -6801,461 +8108,6 @@
     <a:masterClrMapping/>
   </p:clrMapOvr>
   <p:transition spd="med"/>
-  <p:timing>
-    <p:tnLst>
-      <p:par>
-        <p:cTn id="1" dur="indefinite" restart="never" fill="hold" nodeType="tmRoot">
-          <p:childTnLst>
-            <p:seq concurrent="1" prevAc="none" nextAc="seek">
-              <p:cTn id="2" dur="indefinite" fill="hold" nodeType="mainSeq">
-                <p:childTnLst>
-                  <p:par>
-                    <p:cTn id="3" fill="hold">
-                      <p:stCondLst>
-                        <p:cond delay="indefinite"/>
-                      </p:stCondLst>
-                      <p:childTnLst>
-                        <p:par>
-                          <p:cTn id="4" fill="hold">
-                            <p:stCondLst>
-                              <p:cond delay="0"/>
-                            </p:stCondLst>
-                            <p:childTnLst>
-                              <p:par>
-                                <p:cTn id="5" presetID="1" presetClass="entr" presetSubtype="0" fill="hold" grpId="0" nodeType="clickEffect">
-                                  <p:stCondLst>
-                                    <p:cond delay="0"/>
-                                  </p:stCondLst>
-                                  <p:iterate>
-                                    <p:tmAbs val="0"/>
-                                  </p:iterate>
-                                  <p:childTnLst>
-                                    <p:set>
-                                      <p:cBhvr>
-                                        <p:cTn id="6" fill="hold"/>
-                                        <p:tgtEl>
-                                          <p:spTgt spid="423"/>
-                                        </p:tgtEl>
-                                        <p:attrNameLst>
-                                          <p:attrName>style.visibility</p:attrName>
-                                        </p:attrNameLst>
-                                      </p:cBhvr>
-                                      <p:to>
-                                        <p:strVal val="visible"/>
-                                      </p:to>
-                                    </p:set>
-                                  </p:childTnLst>
-                                </p:cTn>
-                              </p:par>
-                            </p:childTnLst>
-                          </p:cTn>
-                        </p:par>
-                        <p:par>
-                          <p:cTn id="7" fill="hold">
-                            <p:stCondLst>
-                              <p:cond delay="0"/>
-                            </p:stCondLst>
-                            <p:childTnLst>
-                              <p:par>
-                                <p:cTn id="8" presetID="1" presetClass="entr" presetSubtype="0" fill="hold" grpId="0" nodeType="afterEffect">
-                                  <p:stCondLst>
-                                    <p:cond delay="0"/>
-                                  </p:stCondLst>
-                                  <p:iterate>
-                                    <p:tmAbs val="0"/>
-                                  </p:iterate>
-                                  <p:childTnLst>
-                                    <p:set>
-                                      <p:cBhvr>
-                                        <p:cTn id="9" fill="hold"/>
-                                        <p:tgtEl>
-                                          <p:spTgt spid="435"/>
-                                        </p:tgtEl>
-                                        <p:attrNameLst>
-                                          <p:attrName>style.visibility</p:attrName>
-                                        </p:attrNameLst>
-                                      </p:cBhvr>
-                                      <p:to>
-                                        <p:strVal val="visible"/>
-                                      </p:to>
-                                    </p:set>
-                                  </p:childTnLst>
-                                </p:cTn>
-                              </p:par>
-                            </p:childTnLst>
-                          </p:cTn>
-                        </p:par>
-                        <p:par>
-                          <p:cTn id="10" fill="hold">
-                            <p:stCondLst>
-                              <p:cond delay="0"/>
-                            </p:stCondLst>
-                            <p:childTnLst>
-                              <p:par>
-                                <p:cTn id="11" presetID="1" presetClass="entr" presetSubtype="0" fill="hold" grpId="0" nodeType="afterEffect">
-                                  <p:stCondLst>
-                                    <p:cond delay="0"/>
-                                  </p:stCondLst>
-                                  <p:iterate>
-                                    <p:tmAbs val="0"/>
-                                  </p:iterate>
-                                  <p:childTnLst>
-                                    <p:set>
-                                      <p:cBhvr>
-                                        <p:cTn id="12" fill="hold"/>
-                                        <p:tgtEl>
-                                          <p:spTgt spid="414"/>
-                                        </p:tgtEl>
-                                        <p:attrNameLst>
-                                          <p:attrName>style.visibility</p:attrName>
-                                        </p:attrNameLst>
-                                      </p:cBhvr>
-                                      <p:to>
-                                        <p:strVal val="visible"/>
-                                      </p:to>
-                                    </p:set>
-                                  </p:childTnLst>
-                                </p:cTn>
-                              </p:par>
-                            </p:childTnLst>
-                          </p:cTn>
-                        </p:par>
-                        <p:par>
-                          <p:cTn id="13" fill="hold">
-                            <p:stCondLst>
-                              <p:cond delay="0"/>
-                            </p:stCondLst>
-                            <p:childTnLst>
-                              <p:par>
-                                <p:cTn id="14" presetID="1" presetClass="entr" presetSubtype="0" fill="hold" grpId="0" nodeType="afterEffect">
-                                  <p:stCondLst>
-                                    <p:cond delay="0"/>
-                                  </p:stCondLst>
-                                  <p:iterate>
-                                    <p:tmAbs val="0"/>
-                                  </p:iterate>
-                                  <p:childTnLst>
-                                    <p:set>
-                                      <p:cBhvr>
-                                        <p:cTn id="15" fill="hold"/>
-                                        <p:tgtEl>
-                                          <p:spTgt spid="413"/>
-                                        </p:tgtEl>
-                                        <p:attrNameLst>
-                                          <p:attrName>style.visibility</p:attrName>
-                                        </p:attrNameLst>
-                                      </p:cBhvr>
-                                      <p:to>
-                                        <p:strVal val="visible"/>
-                                      </p:to>
-                                    </p:set>
-                                  </p:childTnLst>
-                                </p:cTn>
-                              </p:par>
-                            </p:childTnLst>
-                          </p:cTn>
-                        </p:par>
-                      </p:childTnLst>
-                    </p:cTn>
-                  </p:par>
-                  <p:par>
-                    <p:cTn id="16" fill="hold">
-                      <p:stCondLst>
-                        <p:cond delay="indefinite"/>
-                      </p:stCondLst>
-                      <p:childTnLst>
-                        <p:par>
-                          <p:cTn id="17" fill="hold">
-                            <p:stCondLst>
-                              <p:cond delay="0"/>
-                            </p:stCondLst>
-                            <p:childTnLst>
-                              <p:par>
-                                <p:cTn id="18" presetID="1" presetClass="entr" presetSubtype="0" fill="hold" grpId="0" nodeType="clickEffect">
-                                  <p:stCondLst>
-                                    <p:cond delay="0"/>
-                                  </p:stCondLst>
-                                  <p:iterate>
-                                    <p:tmAbs val="0"/>
-                                  </p:iterate>
-                                  <p:childTnLst>
-                                    <p:set>
-                                      <p:cBhvr>
-                                        <p:cTn id="19" fill="hold"/>
-                                        <p:tgtEl>
-                                          <p:spTgt spid="431"/>
-                                        </p:tgtEl>
-                                        <p:attrNameLst>
-                                          <p:attrName>style.visibility</p:attrName>
-                                        </p:attrNameLst>
-                                      </p:cBhvr>
-                                      <p:to>
-                                        <p:strVal val="visible"/>
-                                      </p:to>
-                                    </p:set>
-                                  </p:childTnLst>
-                                </p:cTn>
-                              </p:par>
-                            </p:childTnLst>
-                          </p:cTn>
-                        </p:par>
-                        <p:par>
-                          <p:cTn id="20" fill="hold">
-                            <p:stCondLst>
-                              <p:cond delay="0"/>
-                            </p:stCondLst>
-                            <p:childTnLst>
-                              <p:par>
-                                <p:cTn id="21" presetID="1" presetClass="entr" presetSubtype="0" fill="hold" grpId="0" nodeType="afterEffect">
-                                  <p:stCondLst>
-                                    <p:cond delay="0"/>
-                                  </p:stCondLst>
-                                  <p:iterate>
-                                    <p:tmAbs val="0"/>
-                                  </p:iterate>
-                                  <p:childTnLst>
-                                    <p:set>
-                                      <p:cBhvr>
-                                        <p:cTn id="22" fill="hold"/>
-                                        <p:tgtEl>
-                                          <p:spTgt spid="420"/>
-                                        </p:tgtEl>
-                                        <p:attrNameLst>
-                                          <p:attrName>style.visibility</p:attrName>
-                                        </p:attrNameLst>
-                                      </p:cBhvr>
-                                      <p:to>
-                                        <p:strVal val="visible"/>
-                                      </p:to>
-                                    </p:set>
-                                  </p:childTnLst>
-                                </p:cTn>
-                              </p:par>
-                            </p:childTnLst>
-                          </p:cTn>
-                        </p:par>
-                        <p:par>
-                          <p:cTn id="23" fill="hold">
-                            <p:stCondLst>
-                              <p:cond delay="0"/>
-                            </p:stCondLst>
-                            <p:childTnLst>
-                              <p:par>
-                                <p:cTn id="24" presetID="1" presetClass="entr" presetSubtype="0" fill="hold" grpId="0" nodeType="afterEffect">
-                                  <p:stCondLst>
-                                    <p:cond delay="0"/>
-                                  </p:stCondLst>
-                                  <p:iterate>
-                                    <p:tmAbs val="0"/>
-                                  </p:iterate>
-                                  <p:childTnLst>
-                                    <p:set>
-                                      <p:cBhvr>
-                                        <p:cTn id="25" fill="hold"/>
-                                        <p:tgtEl>
-                                          <p:spTgt spid="410"/>
-                                        </p:tgtEl>
-                                        <p:attrNameLst>
-                                          <p:attrName>style.visibility</p:attrName>
-                                        </p:attrNameLst>
-                                      </p:cBhvr>
-                                      <p:to>
-                                        <p:strVal val="visible"/>
-                                      </p:to>
-                                    </p:set>
-                                  </p:childTnLst>
-                                </p:cTn>
-                              </p:par>
-                            </p:childTnLst>
-                          </p:cTn>
-                        </p:par>
-                      </p:childTnLst>
-                    </p:cTn>
-                  </p:par>
-                  <p:par>
-                    <p:cTn id="26" fill="hold">
-                      <p:stCondLst>
-                        <p:cond delay="indefinite"/>
-                      </p:stCondLst>
-                      <p:childTnLst>
-                        <p:par>
-                          <p:cTn id="27" fill="hold">
-                            <p:stCondLst>
-                              <p:cond delay="0"/>
-                            </p:stCondLst>
-                            <p:childTnLst>
-                              <p:par>
-                                <p:cTn id="28" presetID="1" presetClass="entr" presetSubtype="0" fill="hold" grpId="0" nodeType="clickEffect">
-                                  <p:stCondLst>
-                                    <p:cond delay="0"/>
-                                  </p:stCondLst>
-                                  <p:iterate>
-                                    <p:tmAbs val="0"/>
-                                  </p:iterate>
-                                  <p:childTnLst>
-                                    <p:set>
-                                      <p:cBhvr>
-                                        <p:cTn id="29" fill="hold"/>
-                                        <p:tgtEl>
-                                          <p:spTgt spid="430"/>
-                                        </p:tgtEl>
-                                        <p:attrNameLst>
-                                          <p:attrName>style.visibility</p:attrName>
-                                        </p:attrNameLst>
-                                      </p:cBhvr>
-                                      <p:to>
-                                        <p:strVal val="visible"/>
-                                      </p:to>
-                                    </p:set>
-                                  </p:childTnLst>
-                                </p:cTn>
-                              </p:par>
-                            </p:childTnLst>
-                          </p:cTn>
-                        </p:par>
-                        <p:par>
-                          <p:cTn id="30" fill="hold">
-                            <p:stCondLst>
-                              <p:cond delay="0"/>
-                            </p:stCondLst>
-                            <p:childTnLst>
-                              <p:par>
-                                <p:cTn id="31" presetID="1" presetClass="entr" presetSubtype="0" fill="hold" grpId="0" nodeType="afterEffect">
-                                  <p:stCondLst>
-                                    <p:cond delay="0"/>
-                                  </p:stCondLst>
-                                  <p:iterate>
-                                    <p:tmAbs val="0"/>
-                                  </p:iterate>
-                                  <p:childTnLst>
-                                    <p:set>
-                                      <p:cBhvr>
-                                        <p:cTn id="32" fill="hold"/>
-                                        <p:tgtEl>
-                                          <p:spTgt spid="417"/>
-                                        </p:tgtEl>
-                                        <p:attrNameLst>
-                                          <p:attrName>style.visibility</p:attrName>
-                                        </p:attrNameLst>
-                                      </p:cBhvr>
-                                      <p:to>
-                                        <p:strVal val="visible"/>
-                                      </p:to>
-                                    </p:set>
-                                  </p:childTnLst>
-                                </p:cTn>
-                              </p:par>
-                            </p:childTnLst>
-                          </p:cTn>
-                        </p:par>
-                        <p:par>
-                          <p:cTn id="33" fill="hold">
-                            <p:stCondLst>
-                              <p:cond delay="0"/>
-                            </p:stCondLst>
-                            <p:childTnLst>
-                              <p:par>
-                                <p:cTn id="34" presetID="1" presetClass="entr" presetSubtype="0" fill="hold" grpId="0" nodeType="afterEffect">
-                                  <p:stCondLst>
-                                    <p:cond delay="0"/>
-                                  </p:stCondLst>
-                                  <p:iterate>
-                                    <p:tmAbs val="0"/>
-                                  </p:iterate>
-                                  <p:childTnLst>
-                                    <p:set>
-                                      <p:cBhvr>
-                                        <p:cTn id="35" fill="hold"/>
-                                        <p:tgtEl>
-                                          <p:spTgt spid="432"/>
-                                        </p:tgtEl>
-                                        <p:attrNameLst>
-                                          <p:attrName>style.visibility</p:attrName>
-                                        </p:attrNameLst>
-                                      </p:cBhvr>
-                                      <p:to>
-                                        <p:strVal val="visible"/>
-                                      </p:to>
-                                    </p:set>
-                                  </p:childTnLst>
-                                </p:cTn>
-                              </p:par>
-                            </p:childTnLst>
-                          </p:cTn>
-                        </p:par>
-                        <p:par>
-                          <p:cTn id="36" fill="hold">
-                            <p:stCondLst>
-                              <p:cond delay="0"/>
-                            </p:stCondLst>
-                            <p:childTnLst>
-                              <p:par>
-                                <p:cTn id="37" presetID="1" presetClass="entr" presetSubtype="0" fill="hold" grpId="0" nodeType="afterEffect">
-                                  <p:stCondLst>
-                                    <p:cond delay="0"/>
-                                  </p:stCondLst>
-                                  <p:iterate>
-                                    <p:tmAbs val="0"/>
-                                  </p:iterate>
-                                  <p:childTnLst>
-                                    <p:set>
-                                      <p:cBhvr>
-                                        <p:cTn id="38" fill="hold"/>
-                                        <p:tgtEl>
-                                          <p:spTgt spid="409"/>
-                                        </p:tgtEl>
-                                        <p:attrNameLst>
-                                          <p:attrName>style.visibility</p:attrName>
-                                        </p:attrNameLst>
-                                      </p:cBhvr>
-                                      <p:to>
-                                        <p:strVal val="visible"/>
-                                      </p:to>
-                                    </p:set>
-                                  </p:childTnLst>
-                                </p:cTn>
-                              </p:par>
-                            </p:childTnLst>
-                          </p:cTn>
-                        </p:par>
-                      </p:childTnLst>
-                    </p:cTn>
-                  </p:par>
-                </p:childTnLst>
-              </p:cTn>
-              <p:prevCondLst>
-                <p:cond evt="onPrev" delay="0">
-                  <p:tgtEl>
-                    <p:sldTgt/>
-                  </p:tgtEl>
-                </p:cond>
-              </p:prevCondLst>
-              <p:nextCondLst>
-                <p:cond evt="onNext" delay="0">
-                  <p:tgtEl>
-                    <p:sldTgt/>
-                  </p:tgtEl>
-                </p:cond>
-              </p:nextCondLst>
-            </p:seq>
-          </p:childTnLst>
-        </p:cTn>
-      </p:par>
-    </p:tnLst>
-    <p:bldLst>
-      <p:bldP spid="409" grpId="0" animBg="1" advAuto="0"/>
-      <p:bldP spid="410" grpId="0" animBg="1" advAuto="0"/>
-      <p:bldP spid="413" grpId="0" animBg="1" advAuto="0"/>
-      <p:bldP spid="414" grpId="0" animBg="1" advAuto="0"/>
-      <p:bldP spid="417" grpId="0" animBg="1" advAuto="0"/>
-      <p:bldP spid="420" grpId="0" animBg="1" advAuto="0"/>
-      <p:bldP spid="423" grpId="0" animBg="1" advAuto="0"/>
-      <p:bldP spid="430" grpId="0" animBg="1" advAuto="0"/>
-      <p:bldP spid="431" grpId="0" animBg="1" advAuto="0"/>
-      <p:bldP spid="432" grpId="0" animBg="1" advAuto="0"/>
-      <p:bldP spid="435" grpId="0" animBg="1" advAuto="0"/>
-    </p:bldLst>
-  </p:timing>
 </p:sld>
 </file>
 
@@ -7321,22 +8173,20 @@
           <a:lstStyle/>
           <a:p>
             <a:r>
+              <a:rPr dirty="0"/>
               <a:t>Mealy machines are a bit more complicated to design.</a:t>
             </a:r>
           </a:p>
           <a:p>
             <a:r>
+              <a:rPr dirty="0"/>
               <a:t>Moore machines tend to require more states.</a:t>
             </a:r>
           </a:p>
           <a:p>
             <a:r>
+              <a:rPr dirty="0"/>
               <a:t>Outputs of Moore machines are delayed.</a:t>
-            </a:r>
-          </a:p>
-          <a:p>
-            <a:r>
-              <a:t>Named after George Mealy (1927–2010) and Edward Moore (1925–2003).</a:t>
             </a:r>
           </a:p>
         </p:txBody>
@@ -7357,7 +8207,7 @@
           </a:prstGeom>
           <a:extLst>
             <a:ext uri="{C572A759-6A51-4108-AA02-DFA0A04FC94B}">
-              <ma14:wrappingTextBoxFlag xmlns="" xmlns:m="http://schemas.openxmlformats.org/officeDocument/2006/math" xmlns:a14="http://schemas.microsoft.com/office/drawing/2010/main" xmlns:ma14="http://schemas.microsoft.com/office/mac/drawingml/2011/main" val="1"/>
+              <ma14:wrappingTextBoxFlag xmlns:ma14="http://schemas.microsoft.com/office/mac/drawingml/2011/main" xmlns:a14="http://schemas.microsoft.com/office/drawing/2010/main" xmlns:m="http://schemas.openxmlformats.org/officeDocument/2006/math" xmlns="" val="1"/>
             </a:ext>
           </a:extLst>
         </p:spPr>
@@ -7389,7 +8239,7 @@
         </p:blipFill>
         <p:spPr>
           <a:xfrm>
-            <a:off x="7989574" y="6330098"/>
+            <a:off x="6218336" y="5595882"/>
             <a:ext cx="2298701" cy="2743201"/>
           </a:xfrm>
           <a:prstGeom prst="rect">
@@ -7416,7 +8266,7 @@
         </p:blipFill>
         <p:spPr>
           <a:xfrm>
-            <a:off x="5278620" y="6450748"/>
+            <a:off x="3140274" y="5797550"/>
             <a:ext cx="1841501" cy="2501901"/>
           </a:xfrm>
           <a:prstGeom prst="rect">
@@ -7427,346 +8277,94 @@
           </a:ln>
         </p:spPr>
       </p:pic>
+      <p:sp>
+        <p:nvSpPr>
+          <p:cNvPr id="2" name="TextBox 1">
+            <a:extLst>
+              <a:ext uri="{FF2B5EF4-FFF2-40B4-BE49-F238E27FC236}">
+                <a16:creationId xmlns:a16="http://schemas.microsoft.com/office/drawing/2014/main" id="{4A7714D0-838D-0DDB-4C83-6CFC57AEEB89}"/>
+              </a:ext>
+            </a:extLst>
+          </p:cNvPr>
+          <p:cNvSpPr txBox="1"/>
+          <p:nvPr/>
+        </p:nvSpPr>
+        <p:spPr>
+          <a:xfrm>
+            <a:off x="138896" y="8869604"/>
+            <a:ext cx="12727008" cy="595035"/>
+          </a:xfrm>
+          <a:prstGeom prst="rect">
+            <a:avLst/>
+          </a:prstGeom>
+          <a:noFill/>
+          <a:ln w="12700" cap="flat">
+            <a:noFill/>
+            <a:miter lim="400000"/>
+          </a:ln>
+          <a:effectLst/>
+          <a:sp3d/>
+        </p:spPr>
+        <p:style>
+          <a:lnRef idx="0">
+            <a:scrgbClr r="0" g="0" b="0"/>
+          </a:lnRef>
+          <a:fillRef idx="0">
+            <a:scrgbClr r="0" g="0" b="0"/>
+          </a:fillRef>
+          <a:effectRef idx="0">
+            <a:scrgbClr r="0" g="0" b="0"/>
+          </a:effectRef>
+          <a:fontRef idx="none"/>
+        </p:style>
+        <p:txBody>
+          <a:bodyPr rot="0" spcFirstLastPara="1" vertOverflow="overflow" horzOverflow="overflow" vert="horz" wrap="square" lIns="50800" tIns="50800" rIns="50800" bIns="50800" numCol="1" spcCol="38100" rtlCol="0" anchor="ctr">
+            <a:spAutoFit/>
+          </a:bodyPr>
+          <a:lstStyle/>
+          <a:p>
+            <a:pPr marL="0" marR="0" indent="0" algn="ctr" defTabSz="584200" rtl="0" fontAlgn="auto" latinLnBrk="0" hangingPunct="0">
+              <a:lnSpc>
+                <a:spcPct val="100000"/>
+              </a:lnSpc>
+              <a:spcBef>
+                <a:spcPts val="0"/>
+              </a:spcBef>
+              <a:spcAft>
+                <a:spcPts val="0"/>
+              </a:spcAft>
+              <a:buClrTx/>
+              <a:buSzTx/>
+              <a:buFontTx/>
+              <a:buNone/>
+              <a:tabLst/>
+            </a:pPr>
+            <a:r>
+              <a:rPr kumimoji="0" lang="en-GB" sz="3200" b="0" i="0" u="none" strike="noStrike" cap="none" spc="0" normalizeH="0" baseline="0" dirty="0">
+                <a:ln>
+                  <a:noFill/>
+                </a:ln>
+                <a:solidFill>
+                  <a:srgbClr val="000000"/>
+                </a:solidFill>
+                <a:effectLst/>
+                <a:uFillTx/>
+                <a:latin typeface="+mn-lt"/>
+                <a:ea typeface="+mn-ea"/>
+                <a:cs typeface="+mn-cs"/>
+                <a:sym typeface="Helvetica"/>
+              </a:rPr>
+              <a:t>Question: What kind of machine did we just describe for the denoiser?</a:t>
+            </a:r>
+          </a:p>
+        </p:txBody>
+      </p:sp>
     </p:spTree>
   </p:cSld>
   <p:clrMapOvr>
     <a:masterClrMapping/>
   </p:clrMapOvr>
   <p:transition spd="med"/>
-  <p:timing>
-    <p:tnLst>
-      <p:par>
-        <p:cTn id="1" dur="indefinite" restart="never" fill="hold" nodeType="tmRoot">
-          <p:childTnLst>
-            <p:seq concurrent="1" prevAc="none" nextAc="seek">
-              <p:cTn id="2" dur="indefinite" fill="hold" nodeType="mainSeq">
-                <p:childTnLst>
-                  <p:par>
-                    <p:cTn id="3" fill="hold">
-                      <p:stCondLst>
-                        <p:cond delay="indefinite"/>
-                      </p:stCondLst>
-                      <p:childTnLst>
-                        <p:par>
-                          <p:cTn id="4" fill="hold">
-                            <p:stCondLst>
-                              <p:cond delay="0"/>
-                            </p:stCondLst>
-                            <p:childTnLst>
-                              <p:par>
-                                <p:cTn id="5" presetID="1" presetClass="entr" presetSubtype="0" fill="hold" grpId="1" nodeType="clickEffect">
-                                  <p:stCondLst>
-                                    <p:cond delay="0"/>
-                                  </p:stCondLst>
-                                  <p:iterate>
-                                    <p:tmAbs val="0"/>
-                                  </p:iterate>
-                                  <p:childTnLst>
-                                    <p:set>
-                                      <p:cBhvr>
-                                        <p:cTn id="6" fill="hold"/>
-                                        <p:tgtEl>
-                                          <p:spTgt spid="464">
-                                            <p:bg/>
-                                          </p:spTgt>
-                                        </p:tgtEl>
-                                        <p:attrNameLst>
-                                          <p:attrName>style.visibility</p:attrName>
-                                        </p:attrNameLst>
-                                      </p:cBhvr>
-                                      <p:to>
-                                        <p:strVal val="visible"/>
-                                      </p:to>
-                                    </p:set>
-                                  </p:childTnLst>
-                                </p:cTn>
-                              </p:par>
-                              <p:par>
-                                <p:cTn id="7" presetID="1" presetClass="entr" presetSubtype="0" fill="hold" grpId="1" nodeType="withEffect">
-                                  <p:stCondLst>
-                                    <p:cond delay="0"/>
-                                  </p:stCondLst>
-                                  <p:iterate>
-                                    <p:tmAbs val="0"/>
-                                  </p:iterate>
-                                  <p:childTnLst>
-                                    <p:set>
-                                      <p:cBhvr>
-                                        <p:cTn id="8" fill="hold"/>
-                                        <p:tgtEl>
-                                          <p:spTgt spid="464">
-                                            <p:txEl>
-                                              <p:pRg st="0" end="0"/>
-                                            </p:txEl>
-                                          </p:spTgt>
-                                        </p:tgtEl>
-                                        <p:attrNameLst>
-                                          <p:attrName>style.visibility</p:attrName>
-                                        </p:attrNameLst>
-                                      </p:cBhvr>
-                                      <p:to>
-                                        <p:strVal val="visible"/>
-                                      </p:to>
-                                    </p:set>
-                                  </p:childTnLst>
-                                </p:cTn>
-                              </p:par>
-                            </p:childTnLst>
-                          </p:cTn>
-                        </p:par>
-                      </p:childTnLst>
-                    </p:cTn>
-                  </p:par>
-                  <p:par>
-                    <p:cTn id="9" fill="hold">
-                      <p:stCondLst>
-                        <p:cond delay="indefinite"/>
-                      </p:stCondLst>
-                      <p:childTnLst>
-                        <p:par>
-                          <p:cTn id="10" fill="hold">
-                            <p:stCondLst>
-                              <p:cond delay="0"/>
-                            </p:stCondLst>
-                            <p:childTnLst>
-                              <p:par>
-                                <p:cTn id="11" presetID="1" presetClass="entr" presetSubtype="0" fill="hold" grpId="1" nodeType="clickEffect">
-                                  <p:stCondLst>
-                                    <p:cond delay="0"/>
-                                  </p:stCondLst>
-                                  <p:iterate>
-                                    <p:tmAbs val="0"/>
-                                  </p:iterate>
-                                  <p:childTnLst>
-                                    <p:set>
-                                      <p:cBhvr>
-                                        <p:cTn id="12" fill="hold"/>
-                                        <p:tgtEl>
-                                          <p:spTgt spid="464">
-                                            <p:txEl>
-                                              <p:pRg st="1" end="1"/>
-                                            </p:txEl>
-                                          </p:spTgt>
-                                        </p:tgtEl>
-                                        <p:attrNameLst>
-                                          <p:attrName>style.visibility</p:attrName>
-                                        </p:attrNameLst>
-                                      </p:cBhvr>
-                                      <p:to>
-                                        <p:strVal val="visible"/>
-                                      </p:to>
-                                    </p:set>
-                                  </p:childTnLst>
-                                </p:cTn>
-                              </p:par>
-                            </p:childTnLst>
-                          </p:cTn>
-                        </p:par>
-                      </p:childTnLst>
-                    </p:cTn>
-                  </p:par>
-                  <p:par>
-                    <p:cTn id="13" fill="hold">
-                      <p:stCondLst>
-                        <p:cond delay="indefinite"/>
-                      </p:stCondLst>
-                      <p:childTnLst>
-                        <p:par>
-                          <p:cTn id="14" fill="hold">
-                            <p:stCondLst>
-                              <p:cond delay="0"/>
-                            </p:stCondLst>
-                            <p:childTnLst>
-                              <p:par>
-                                <p:cTn id="15" presetID="1" presetClass="entr" presetSubtype="0" fill="hold" grpId="1" nodeType="clickEffect">
-                                  <p:stCondLst>
-                                    <p:cond delay="0"/>
-                                  </p:stCondLst>
-                                  <p:iterate>
-                                    <p:tmAbs val="0"/>
-                                  </p:iterate>
-                                  <p:childTnLst>
-                                    <p:set>
-                                      <p:cBhvr>
-                                        <p:cTn id="16" fill="hold"/>
-                                        <p:tgtEl>
-                                          <p:spTgt spid="464">
-                                            <p:txEl>
-                                              <p:pRg st="2" end="2"/>
-                                            </p:txEl>
-                                          </p:spTgt>
-                                        </p:tgtEl>
-                                        <p:attrNameLst>
-                                          <p:attrName>style.visibility</p:attrName>
-                                        </p:attrNameLst>
-                                      </p:cBhvr>
-                                      <p:to>
-                                        <p:strVal val="visible"/>
-                                      </p:to>
-                                    </p:set>
-                                  </p:childTnLst>
-                                </p:cTn>
-                              </p:par>
-                            </p:childTnLst>
-                          </p:cTn>
-                        </p:par>
-                      </p:childTnLst>
-                    </p:cTn>
-                  </p:par>
-                  <p:par>
-                    <p:cTn id="17" fill="hold">
-                      <p:stCondLst>
-                        <p:cond delay="indefinite"/>
-                      </p:stCondLst>
-                      <p:childTnLst>
-                        <p:par>
-                          <p:cTn id="18" fill="hold">
-                            <p:stCondLst>
-                              <p:cond delay="0"/>
-                            </p:stCondLst>
-                            <p:childTnLst>
-                              <p:par>
-                                <p:cTn id="19" presetID="1" presetClass="entr" presetSubtype="0" fill="hold" grpId="1" nodeType="clickEffect">
-                                  <p:stCondLst>
-                                    <p:cond delay="0"/>
-                                  </p:stCondLst>
-                                  <p:iterate>
-                                    <p:tmAbs val="0"/>
-                                  </p:iterate>
-                                  <p:childTnLst>
-                                    <p:set>
-                                      <p:cBhvr>
-                                        <p:cTn id="20" fill="hold"/>
-                                        <p:tgtEl>
-                                          <p:spTgt spid="464">
-                                            <p:txEl>
-                                              <p:pRg st="3" end="3"/>
-                                            </p:txEl>
-                                          </p:spTgt>
-                                        </p:tgtEl>
-                                        <p:attrNameLst>
-                                          <p:attrName>style.visibility</p:attrName>
-                                        </p:attrNameLst>
-                                      </p:cBhvr>
-                                      <p:to>
-                                        <p:strVal val="visible"/>
-                                      </p:to>
-                                    </p:set>
-                                  </p:childTnLst>
-                                </p:cTn>
-                              </p:par>
-                            </p:childTnLst>
-                          </p:cTn>
-                        </p:par>
-                      </p:childTnLst>
-                    </p:cTn>
-                  </p:par>
-                  <p:par>
-                    <p:cTn id="21" fill="hold">
-                      <p:stCondLst>
-                        <p:cond delay="indefinite"/>
-                      </p:stCondLst>
-                      <p:childTnLst>
-                        <p:par>
-                          <p:cTn id="22" fill="hold">
-                            <p:stCondLst>
-                              <p:cond delay="0"/>
-                            </p:stCondLst>
-                            <p:childTnLst>
-                              <p:par>
-                                <p:cTn id="23" presetID="1" presetClass="entr" presetSubtype="0" fill="hold" grpId="2" nodeType="clickEffect">
-                                  <p:stCondLst>
-                                    <p:cond delay="0"/>
-                                  </p:stCondLst>
-                                  <p:iterate>
-                                    <p:tmAbs val="0"/>
-                                  </p:iterate>
-                                  <p:childTnLst>
-                                    <p:set>
-                                      <p:cBhvr>
-                                        <p:cTn id="24" fill="hold"/>
-                                        <p:tgtEl>
-                                          <p:spTgt spid="466"/>
-                                        </p:tgtEl>
-                                        <p:attrNameLst>
-                                          <p:attrName>style.visibility</p:attrName>
-                                        </p:attrNameLst>
-                                      </p:cBhvr>
-                                      <p:to>
-                                        <p:strVal val="visible"/>
-                                      </p:to>
-                                    </p:set>
-                                  </p:childTnLst>
-                                </p:cTn>
-                              </p:par>
-                            </p:childTnLst>
-                          </p:cTn>
-                        </p:par>
-                        <p:par>
-                          <p:cTn id="25" fill="hold">
-                            <p:stCondLst>
-                              <p:cond delay="0"/>
-                            </p:stCondLst>
-                            <p:childTnLst>
-                              <p:par>
-                                <p:cTn id="26" presetID="1" presetClass="entr" presetSubtype="0" fill="hold" grpId="3" nodeType="afterEffect">
-                                  <p:stCondLst>
-                                    <p:cond delay="0"/>
-                                  </p:stCondLst>
-                                  <p:iterate>
-                                    <p:tmAbs val="0"/>
-                                  </p:iterate>
-                                  <p:childTnLst>
-                                    <p:set>
-                                      <p:cBhvr>
-                                        <p:cTn id="27" fill="hold"/>
-                                        <p:tgtEl>
-                                          <p:spTgt spid="467"/>
-                                        </p:tgtEl>
-                                        <p:attrNameLst>
-                                          <p:attrName>style.visibility</p:attrName>
-                                        </p:attrNameLst>
-                                      </p:cBhvr>
-                                      <p:to>
-                                        <p:strVal val="visible"/>
-                                      </p:to>
-                                    </p:set>
-                                  </p:childTnLst>
-                                </p:cTn>
-                              </p:par>
-                            </p:childTnLst>
-                          </p:cTn>
-                        </p:par>
-                      </p:childTnLst>
-                    </p:cTn>
-                  </p:par>
-                </p:childTnLst>
-              </p:cTn>
-              <p:prevCondLst>
-                <p:cond evt="onPrev" delay="0">
-                  <p:tgtEl>
-                    <p:sldTgt/>
-                  </p:tgtEl>
-                </p:cond>
-              </p:prevCondLst>
-              <p:nextCondLst>
-                <p:cond evt="onNext" delay="0">
-                  <p:tgtEl>
-                    <p:sldTgt/>
-                  </p:tgtEl>
-                </p:cond>
-              </p:nextCondLst>
-            </p:seq>
-          </p:childTnLst>
-        </p:cTn>
-      </p:par>
-    </p:tnLst>
-    <p:bldLst>
-      <p:bldP spid="464" grpId="1" build="p" bldLvl="5" animBg="1" advAuto="0"/>
-      <p:bldP spid="466" grpId="2" animBg="1" advAuto="0"/>
-      <p:bldP spid="467" grpId="3" animBg="1" advAuto="0"/>
-    </p:bldLst>
-  </p:timing>
 </p:sld>
 </file>
 
@@ -7828,7 +8426,7 @@
           </a:prstGeom>
           <a:extLst>
             <a:ext uri="{C572A759-6A51-4108-AA02-DFA0A04FC94B}">
-              <ma14:wrappingTextBoxFlag xmlns="" xmlns:m="http://schemas.openxmlformats.org/officeDocument/2006/math" xmlns:a14="http://schemas.microsoft.com/office/drawing/2010/main" xmlns:ma14="http://schemas.microsoft.com/office/mac/drawingml/2011/main" val="1"/>
+              <ma14:wrappingTextBoxFlag xmlns:ma14="http://schemas.microsoft.com/office/mac/drawingml/2011/main" xmlns:a14="http://schemas.microsoft.com/office/drawing/2010/main" xmlns:m="http://schemas.openxmlformats.org/officeDocument/2006/math" xmlns="" val="1"/>
             </a:ext>
           </a:extLst>
         </p:spPr>
@@ -8421,7 +9019,7 @@
           </a:prstGeom>
           <a:extLst>
             <a:ext uri="{C572A759-6A51-4108-AA02-DFA0A04FC94B}">
-              <ma14:wrappingTextBoxFlag xmlns="" xmlns:m="http://schemas.openxmlformats.org/officeDocument/2006/math" xmlns:a14="http://schemas.microsoft.com/office/drawing/2010/main" xmlns:ma14="http://schemas.microsoft.com/office/mac/drawingml/2011/main" val="1"/>
+              <ma14:wrappingTextBoxFlag xmlns:ma14="http://schemas.microsoft.com/office/mac/drawingml/2011/main" xmlns:a14="http://schemas.microsoft.com/office/drawing/2010/main" xmlns:m="http://schemas.openxmlformats.org/officeDocument/2006/math" xmlns="" val="1"/>
             </a:ext>
           </a:extLst>
         </p:spPr>
@@ -9276,7 +9874,7 @@
           </a:prstGeom>
           <a:extLst>
             <a:ext uri="{C572A759-6A51-4108-AA02-DFA0A04FC94B}">
-              <ma14:wrappingTextBoxFlag xmlns="" xmlns:m="http://schemas.openxmlformats.org/officeDocument/2006/math" xmlns:a14="http://schemas.microsoft.com/office/drawing/2010/main" xmlns:ma14="http://schemas.microsoft.com/office/mac/drawingml/2011/main" val="1"/>
+              <ma14:wrappingTextBoxFlag xmlns:ma14="http://schemas.microsoft.com/office/mac/drawingml/2011/main" xmlns:a14="http://schemas.microsoft.com/office/drawing/2010/main" xmlns:m="http://schemas.openxmlformats.org/officeDocument/2006/math" xmlns="" val="1"/>
             </a:ext>
           </a:extLst>
         </p:spPr>
@@ -10632,7 +11230,7 @@
           </a:prstGeom>
           <a:extLst>
             <a:ext uri="{C572A759-6A51-4108-AA02-DFA0A04FC94B}">
-              <ma14:wrappingTextBoxFlag xmlns="" xmlns:m="http://schemas.openxmlformats.org/officeDocument/2006/math" xmlns:a14="http://schemas.microsoft.com/office/drawing/2010/main" xmlns:ma14="http://schemas.microsoft.com/office/mac/drawingml/2011/main" val="1"/>
+              <ma14:wrappingTextBoxFlag xmlns:ma14="http://schemas.microsoft.com/office/mac/drawingml/2011/main" xmlns:a14="http://schemas.microsoft.com/office/drawing/2010/main" xmlns:m="http://schemas.openxmlformats.org/officeDocument/2006/math" xmlns="" val="1"/>
             </a:ext>
           </a:extLst>
         </p:spPr>
@@ -11833,7 +12431,7 @@
           </a:ln>
           <a:extLst>
             <a:ext uri="{C572A759-6A51-4108-AA02-DFA0A04FC94B}">
-              <ma14:wrappingTextBoxFlag xmlns="" xmlns:m="http://schemas.openxmlformats.org/officeDocument/2006/math" xmlns:a14="http://schemas.microsoft.com/office/drawing/2010/main" xmlns:ma14="http://schemas.microsoft.com/office/mac/drawingml/2011/main" val="1"/>
+              <ma14:wrappingTextBoxFlag xmlns:ma14="http://schemas.microsoft.com/office/mac/drawingml/2011/main" xmlns:a14="http://schemas.microsoft.com/office/drawing/2010/main" xmlns:m="http://schemas.openxmlformats.org/officeDocument/2006/math" xmlns="" val="1"/>
             </a:ext>
           </a:extLst>
         </p:spPr>
@@ -12566,7 +13164,7 @@
           </a:ln>
           <a:extLst>
             <a:ext uri="{C572A759-6A51-4108-AA02-DFA0A04FC94B}">
-              <ma14:wrappingTextBoxFlag xmlns="" xmlns:m="http://schemas.openxmlformats.org/officeDocument/2006/math" xmlns:a14="http://schemas.microsoft.com/office/drawing/2010/main" xmlns:ma14="http://schemas.microsoft.com/office/mac/drawingml/2011/main" val="1"/>
+              <ma14:wrappingTextBoxFlag xmlns:ma14="http://schemas.microsoft.com/office/mac/drawingml/2011/main" xmlns:a14="http://schemas.microsoft.com/office/drawing/2010/main" xmlns:m="http://schemas.openxmlformats.org/officeDocument/2006/math" xmlns="" val="1"/>
             </a:ext>
           </a:extLst>
         </p:spPr>
@@ -12934,7 +13532,7 @@
           </a:prstGeom>
           <a:extLst>
             <a:ext uri="{C572A759-6A51-4108-AA02-DFA0A04FC94B}">
-              <ma14:wrappingTextBoxFlag xmlns="" xmlns:m="http://schemas.openxmlformats.org/officeDocument/2006/math" xmlns:a14="http://schemas.microsoft.com/office/drawing/2010/main" xmlns:ma14="http://schemas.microsoft.com/office/mac/drawingml/2011/main" val="1"/>
+              <ma14:wrappingTextBoxFlag xmlns:ma14="http://schemas.microsoft.com/office/mac/drawingml/2011/main" xmlns:a14="http://schemas.microsoft.com/office/drawing/2010/main" xmlns:m="http://schemas.openxmlformats.org/officeDocument/2006/math" xmlns="" val="1"/>
             </a:ext>
           </a:extLst>
         </p:spPr>
@@ -14135,7 +14733,7 @@
           </a:ln>
           <a:extLst>
             <a:ext uri="{C572A759-6A51-4108-AA02-DFA0A04FC94B}">
-              <ma14:wrappingTextBoxFlag xmlns="" xmlns:m="http://schemas.openxmlformats.org/officeDocument/2006/math" xmlns:a14="http://schemas.microsoft.com/office/drawing/2010/main" xmlns:ma14="http://schemas.microsoft.com/office/mac/drawingml/2011/main" val="1"/>
+              <ma14:wrappingTextBoxFlag xmlns:ma14="http://schemas.microsoft.com/office/mac/drawingml/2011/main" xmlns:a14="http://schemas.microsoft.com/office/drawing/2010/main" xmlns:m="http://schemas.openxmlformats.org/officeDocument/2006/math" xmlns="" val="1"/>
             </a:ext>
           </a:extLst>
         </p:spPr>
@@ -14733,7 +15331,7 @@
           </a:ln>
           <a:extLst>
             <a:ext uri="{C572A759-6A51-4108-AA02-DFA0A04FC94B}">
-              <ma14:wrappingTextBoxFlag xmlns="" xmlns:m="http://schemas.openxmlformats.org/officeDocument/2006/math" xmlns:a14="http://schemas.microsoft.com/office/drawing/2010/main" xmlns:ma14="http://schemas.microsoft.com/office/mac/drawingml/2011/main" val="1"/>
+              <ma14:wrappingTextBoxFlag xmlns:ma14="http://schemas.microsoft.com/office/mac/drawingml/2011/main" xmlns:a14="http://schemas.microsoft.com/office/drawing/2010/main" xmlns:m="http://schemas.openxmlformats.org/officeDocument/2006/math" xmlns="" val="1"/>
             </a:ext>
           </a:extLst>
         </p:spPr>
@@ -14796,7 +15394,7 @@
           </a:ln>
           <a:extLst>
             <a:ext uri="{C572A759-6A51-4108-AA02-DFA0A04FC94B}">
-              <ma14:wrappingTextBoxFlag xmlns="" xmlns:m="http://schemas.openxmlformats.org/officeDocument/2006/math" xmlns:a14="http://schemas.microsoft.com/office/drawing/2010/main" xmlns:ma14="http://schemas.microsoft.com/office/mac/drawingml/2011/main" val="1"/>
+              <ma14:wrappingTextBoxFlag xmlns:ma14="http://schemas.microsoft.com/office/mac/drawingml/2011/main" xmlns:a14="http://schemas.microsoft.com/office/drawing/2010/main" xmlns:m="http://schemas.openxmlformats.org/officeDocument/2006/math" xmlns="" val="1"/>
             </a:ext>
           </a:extLst>
         </p:spPr>
@@ -15113,7 +15711,7 @@
           </a:prstGeom>
           <a:extLst>
             <a:ext uri="{C572A759-6A51-4108-AA02-DFA0A04FC94B}">
-              <ma14:wrappingTextBoxFlag xmlns="" xmlns:m="http://schemas.openxmlformats.org/officeDocument/2006/math" xmlns:a14="http://schemas.microsoft.com/office/drawing/2010/main" xmlns:ma14="http://schemas.microsoft.com/office/mac/drawingml/2011/main" val="1"/>
+              <ma14:wrappingTextBoxFlag xmlns:ma14="http://schemas.microsoft.com/office/mac/drawingml/2011/main" xmlns:a14="http://schemas.microsoft.com/office/drawing/2010/main" xmlns:m="http://schemas.openxmlformats.org/officeDocument/2006/math" xmlns="" val="1"/>
             </a:ext>
           </a:extLst>
         </p:spPr>
@@ -15122,6 +15720,7 @@
           <a:lstStyle/>
           <a:p>
             <a:fld id="{86CB4B4D-7CA3-9044-876B-883B54F8677D}" type="slidenum">
+              <a:rPr/>
               <a:t>2</a:t>
             </a:fld>
             <a:endParaRPr/>
@@ -15170,7 +15769,7 @@
           </a:prstGeom>
           <a:extLst>
             <a:ext uri="{C572A759-6A51-4108-AA02-DFA0A04FC94B}">
-              <ma14:wrappingTextBoxFlag xmlns="" xmlns:m="http://schemas.openxmlformats.org/officeDocument/2006/math" xmlns:a14="http://schemas.microsoft.com/office/drawing/2010/main" xmlns:ma14="http://schemas.microsoft.com/office/mac/drawingml/2011/main" val="1"/>
+              <ma14:wrappingTextBoxFlag xmlns:ma14="http://schemas.microsoft.com/office/mac/drawingml/2011/main" xmlns:a14="http://schemas.microsoft.com/office/drawing/2010/main" xmlns:m="http://schemas.openxmlformats.org/officeDocument/2006/math" xmlns="" val="1"/>
             </a:ext>
           </a:extLst>
         </p:spPr>
@@ -15315,10 +15914,11 @@
                         <a:defRPr sz="2600" b="1"/>
                       </a:pPr>
                       <a:r>
+                        <a:rPr dirty="0"/>
                         <a:t>output </a:t>
                       </a:r>
                       <a:r>
-                        <a:rPr sz="2300" b="0">
+                        <a:rPr sz="2300" b="0" dirty="0">
                           <a:solidFill>
                             <a:schemeClr val="accent6">
                               <a:satOff val="-15808"/>
@@ -15462,7 +16062,7 @@
                         <a:defRPr sz="1800"/>
                       </a:pPr>
                       <a:r>
-                        <a:rPr sz="2600"/>
+                        <a:rPr sz="2600" dirty="0"/>
                         <a:t>"definitely low"</a:t>
                       </a:r>
                     </a:p>
@@ -15485,7 +16085,7 @@
                         <a:defRPr sz="1800"/>
                       </a:pPr>
                       <a:r>
-                        <a:rPr sz="2600"/>
+                        <a:rPr sz="2600" dirty="0"/>
                         <a:t>0</a:t>
                       </a:r>
                     </a:p>
@@ -16325,7 +16925,7 @@
                         <a:defRPr sz="1800"/>
                       </a:pPr>
                       <a:r>
-                        <a:rPr sz="2600"/>
+                        <a:rPr sz="2600" dirty="0"/>
                         <a:t>11</a:t>
                       </a:r>
                     </a:p>
@@ -16371,7 +16971,7 @@
           </a:ln>
           <a:extLst>
             <a:ext uri="{C572A759-6A51-4108-AA02-DFA0A04FC94B}">
-              <ma14:wrappingTextBoxFlag xmlns="" xmlns:m="http://schemas.openxmlformats.org/officeDocument/2006/math" xmlns:a14="http://schemas.microsoft.com/office/drawing/2010/main" xmlns:ma14="http://schemas.microsoft.com/office/mac/drawingml/2011/main" val="1"/>
+              <ma14:wrappingTextBoxFlag xmlns:ma14="http://schemas.microsoft.com/office/mac/drawingml/2011/main" xmlns:a14="http://schemas.microsoft.com/office/drawing/2010/main" xmlns:m="http://schemas.openxmlformats.org/officeDocument/2006/math" xmlns="" val="1"/>
             </a:ext>
           </a:extLst>
         </p:spPr>
@@ -16969,7 +17569,7 @@
           </a:ln>
           <a:extLst>
             <a:ext uri="{C572A759-6A51-4108-AA02-DFA0A04FC94B}">
-              <ma14:wrappingTextBoxFlag xmlns="" xmlns:m="http://schemas.openxmlformats.org/officeDocument/2006/math" xmlns:a14="http://schemas.microsoft.com/office/drawing/2010/main" xmlns:ma14="http://schemas.microsoft.com/office/mac/drawingml/2011/main" val="1"/>
+              <ma14:wrappingTextBoxFlag xmlns:ma14="http://schemas.microsoft.com/office/mac/drawingml/2011/main" xmlns:a14="http://schemas.microsoft.com/office/drawing/2010/main" xmlns:m="http://schemas.openxmlformats.org/officeDocument/2006/math" xmlns="" val="1"/>
             </a:ext>
           </a:extLst>
         </p:spPr>
@@ -17032,7 +17632,7 @@
           </a:ln>
           <a:extLst>
             <a:ext uri="{C572A759-6A51-4108-AA02-DFA0A04FC94B}">
-              <ma14:wrappingTextBoxFlag xmlns="" xmlns:m="http://schemas.openxmlformats.org/officeDocument/2006/math" xmlns:a14="http://schemas.microsoft.com/office/drawing/2010/main" xmlns:ma14="http://schemas.microsoft.com/office/mac/drawingml/2011/main" val="1"/>
+              <ma14:wrappingTextBoxFlag xmlns:ma14="http://schemas.microsoft.com/office/mac/drawingml/2011/main" xmlns:a14="http://schemas.microsoft.com/office/drawing/2010/main" xmlns:m="http://schemas.openxmlformats.org/officeDocument/2006/math" xmlns="" val="1"/>
             </a:ext>
           </a:extLst>
         </p:spPr>
@@ -17360,7 +17960,7 @@
           </a:prstGeom>
           <a:extLst>
             <a:ext uri="{C572A759-6A51-4108-AA02-DFA0A04FC94B}">
-              <ma14:wrappingTextBoxFlag xmlns="" xmlns:m="http://schemas.openxmlformats.org/officeDocument/2006/math" xmlns:a14="http://schemas.microsoft.com/office/drawing/2010/main" xmlns:ma14="http://schemas.microsoft.com/office/mac/drawingml/2011/main" val="1"/>
+              <ma14:wrappingTextBoxFlag xmlns:ma14="http://schemas.microsoft.com/office/mac/drawingml/2011/main" xmlns:a14="http://schemas.microsoft.com/office/drawing/2010/main" xmlns:m="http://schemas.openxmlformats.org/officeDocument/2006/math" xmlns="" val="1"/>
             </a:ext>
           </a:extLst>
         </p:spPr>
@@ -17803,7 +18403,7 @@
                         <a:defRPr sz="1800"/>
                       </a:pPr>
                       <a:r>
-                        <a:rPr sz="3200"/>
+                        <a:rPr sz="3200" dirty="0"/>
                         <a:t>10</a:t>
                       </a:r>
                     </a:p>
@@ -17829,7 +18429,7 @@
                         <a:defRPr sz="1800"/>
                       </a:pPr>
                       <a:r>
-                        <a:rPr sz="3200"/>
+                        <a:rPr sz="3200" dirty="0"/>
                         <a:t>1000</a:t>
                       </a:r>
                     </a:p>
@@ -18221,7 +18821,7 @@
           </a:prstGeom>
           <a:extLst>
             <a:ext uri="{C572A759-6A51-4108-AA02-DFA0A04FC94B}">
-              <ma14:wrappingTextBoxFlag xmlns="" xmlns:m="http://schemas.openxmlformats.org/officeDocument/2006/math" xmlns:a14="http://schemas.microsoft.com/office/drawing/2010/main" xmlns:ma14="http://schemas.microsoft.com/office/mac/drawingml/2011/main" val="1"/>
+              <ma14:wrappingTextBoxFlag xmlns:ma14="http://schemas.microsoft.com/office/mac/drawingml/2011/main" xmlns:a14="http://schemas.microsoft.com/office/drawing/2010/main" xmlns:m="http://schemas.openxmlformats.org/officeDocument/2006/math" xmlns="" val="1"/>
             </a:ext>
           </a:extLst>
         </p:spPr>
@@ -18259,7 +18859,7 @@
           </a:ln>
           <a:extLst>
             <a:ext uri="{C572A759-6A51-4108-AA02-DFA0A04FC94B}">
-              <ma14:wrappingTextBoxFlag xmlns="" xmlns:m="http://schemas.openxmlformats.org/officeDocument/2006/math" xmlns:a14="http://schemas.microsoft.com/office/drawing/2010/main" xmlns:ma14="http://schemas.microsoft.com/office/mac/drawingml/2011/main" val="1"/>
+              <ma14:wrappingTextBoxFlag xmlns:ma14="http://schemas.microsoft.com/office/mac/drawingml/2011/main" xmlns:a14="http://schemas.microsoft.com/office/drawing/2010/main" xmlns:m="http://schemas.openxmlformats.org/officeDocument/2006/math" xmlns="" val="1"/>
             </a:ext>
           </a:extLst>
         </p:spPr>
@@ -19939,7 +20539,7 @@
           </a:ln>
           <a:extLst>
             <a:ext uri="{C572A759-6A51-4108-AA02-DFA0A04FC94B}">
-              <ma14:wrappingTextBoxFlag xmlns="" xmlns:m="http://schemas.openxmlformats.org/officeDocument/2006/math" xmlns:a14="http://schemas.microsoft.com/office/drawing/2010/main" xmlns:ma14="http://schemas.microsoft.com/office/mac/drawingml/2011/main" val="1"/>
+              <ma14:wrappingTextBoxFlag xmlns:ma14="http://schemas.microsoft.com/office/mac/drawingml/2011/main" xmlns:a14="http://schemas.microsoft.com/office/drawing/2010/main" xmlns:m="http://schemas.openxmlformats.org/officeDocument/2006/math" xmlns="" val="1"/>
             </a:ext>
           </a:extLst>
         </p:spPr>
@@ -20260,7 +20860,7 @@
           <a:effectLst/>
           <a:extLst>
             <a:ext uri="{C572A759-6A51-4108-AA02-DFA0A04FC94B}">
-              <ma14:wrappingTextBoxFlag xmlns="" xmlns:m="http://schemas.openxmlformats.org/officeDocument/2006/math" xmlns:a14="http://schemas.microsoft.com/office/drawing/2010/main" xmlns:ma14="http://schemas.microsoft.com/office/mac/drawingml/2011/main" val="1"/>
+              <ma14:wrappingTextBoxFlag xmlns:ma14="http://schemas.microsoft.com/office/mac/drawingml/2011/main" xmlns:a14="http://schemas.microsoft.com/office/drawing/2010/main" xmlns:m="http://schemas.openxmlformats.org/officeDocument/2006/math" xmlns="" val="1"/>
             </a:ext>
           </a:extLst>
         </p:spPr>
@@ -20305,7 +20905,7 @@
           <a:effectLst/>
           <a:extLst>
             <a:ext uri="{C572A759-6A51-4108-AA02-DFA0A04FC94B}">
-              <ma14:wrappingTextBoxFlag xmlns="" xmlns:m="http://schemas.openxmlformats.org/officeDocument/2006/math" xmlns:a14="http://schemas.microsoft.com/office/drawing/2010/main" xmlns:ma14="http://schemas.microsoft.com/office/mac/drawingml/2011/main" val="1"/>
+              <ma14:wrappingTextBoxFlag xmlns:ma14="http://schemas.microsoft.com/office/mac/drawingml/2011/main" xmlns:a14="http://schemas.microsoft.com/office/drawing/2010/main" xmlns:m="http://schemas.openxmlformats.org/officeDocument/2006/math" xmlns="" val="1"/>
             </a:ext>
           </a:extLst>
         </p:spPr>
@@ -20388,7 +20988,7 @@
           <a:effectLst/>
           <a:extLst>
             <a:ext uri="{C572A759-6A51-4108-AA02-DFA0A04FC94B}">
-              <ma14:wrappingTextBoxFlag xmlns="" xmlns:m="http://schemas.openxmlformats.org/officeDocument/2006/math" xmlns:a14="http://schemas.microsoft.com/office/drawing/2010/main" xmlns:ma14="http://schemas.microsoft.com/office/mac/drawingml/2011/main" val="1"/>
+              <ma14:wrappingTextBoxFlag xmlns:ma14="http://schemas.microsoft.com/office/mac/drawingml/2011/main" xmlns:a14="http://schemas.microsoft.com/office/drawing/2010/main" xmlns:m="http://schemas.openxmlformats.org/officeDocument/2006/math" xmlns="" val="1"/>
             </a:ext>
           </a:extLst>
         </p:spPr>
@@ -20621,171 +21221,2604 @@
       </p:grpSpPr>
       <p:sp>
         <p:nvSpPr>
-          <p:cNvPr id="622" name="The result"/>
-          <p:cNvSpPr txBox="1">
+          <p:cNvPr id="2" name="Title 1">
+            <a:extLst>
+              <a:ext uri="{FF2B5EF4-FFF2-40B4-BE49-F238E27FC236}">
+                <a16:creationId xmlns:a16="http://schemas.microsoft.com/office/drawing/2014/main" id="{0EB718D9-5198-1C39-03BD-A2C9D4E0DE78}"/>
+              </a:ext>
+            </a:extLst>
+          </p:cNvPr>
+          <p:cNvSpPr>
             <a:spLocks noGrp="1"/>
           </p:cNvSpPr>
           <p:nvPr>
             <p:ph type="title"/>
           </p:nvPr>
         </p:nvSpPr>
-        <p:spPr>
-          <a:prstGeom prst="rect">
-            <a:avLst/>
-          </a:prstGeom>
-        </p:spPr>
+        <p:spPr/>
         <p:txBody>
           <a:bodyPr/>
           <a:lstStyle/>
           <a:p>
             <a:r>
-              <a:t>The result</a:t>
+              <a:rPr lang="en-GB" dirty="0"/>
+              <a:t>Question</a:t>
             </a:r>
           </a:p>
         </p:txBody>
       </p:sp>
+      <p:graphicFrame>
+        <p:nvGraphicFramePr>
+          <p:cNvPr id="4" name="Table 3">
+            <a:extLst>
+              <a:ext uri="{FF2B5EF4-FFF2-40B4-BE49-F238E27FC236}">
+                <a16:creationId xmlns:a16="http://schemas.microsoft.com/office/drawing/2014/main" id="{9EE4094A-BBEE-0EA4-364D-5048F450BC40}"/>
+              </a:ext>
+            </a:extLst>
+          </p:cNvPr>
+          <p:cNvGraphicFramePr>
+            <a:graphicFrameLocks noGrp="1"/>
+          </p:cNvGraphicFramePr>
+          <p:nvPr>
+            <p:extLst>
+              <p:ext uri="{D42A27DB-BD31-4B8C-83A1-F6EECF244321}">
+                <p14:modId xmlns:p14="http://schemas.microsoft.com/office/powerpoint/2010/main" val="1424771601"/>
+              </p:ext>
+            </p:extLst>
+          </p:nvPr>
+        </p:nvGraphicFramePr>
+        <p:xfrm>
+          <a:off x="802029" y="2302494"/>
+          <a:ext cx="11099800" cy="5364480"/>
+        </p:xfrm>
+        <a:graphic>
+          <a:graphicData uri="http://schemas.openxmlformats.org/drawingml/2006/table">
+            <a:tbl>
+              <a:tblPr>
+                <a:tableStyleId>{5940675A-B579-460E-94D1-54222C63F5DA}</a:tableStyleId>
+              </a:tblPr>
+              <a:tblGrid>
+                <a:gridCol w="1096218">
+                  <a:extLst>
+                    <a:ext uri="{9D8B030D-6E8A-4147-A177-3AD203B41FA5}">
+                      <a16:colId xmlns:a16="http://schemas.microsoft.com/office/drawing/2014/main" val="577237048"/>
+                    </a:ext>
+                  </a:extLst>
+                </a:gridCol>
+                <a:gridCol w="1423686">
+                  <a:extLst>
+                    <a:ext uri="{9D8B030D-6E8A-4147-A177-3AD203B41FA5}">
+                      <a16:colId xmlns:a16="http://schemas.microsoft.com/office/drawing/2014/main" val="698112831"/>
+                    </a:ext>
+                  </a:extLst>
+                </a:gridCol>
+                <a:gridCol w="3761773">
+                  <a:extLst>
+                    <a:ext uri="{9D8B030D-6E8A-4147-A177-3AD203B41FA5}">
+                      <a16:colId xmlns:a16="http://schemas.microsoft.com/office/drawing/2014/main" val="3817986081"/>
+                    </a:ext>
+                  </a:extLst>
+                </a:gridCol>
+                <a:gridCol w="4818123">
+                  <a:extLst>
+                    <a:ext uri="{9D8B030D-6E8A-4147-A177-3AD203B41FA5}">
+                      <a16:colId xmlns:a16="http://schemas.microsoft.com/office/drawing/2014/main" val="1778665189"/>
+                    </a:ext>
+                  </a:extLst>
+                </a:gridCol>
+              </a:tblGrid>
+              <a:tr h="0">
+                <a:tc>
+                  <a:txBody>
+                    <a:bodyPr/>
+                    <a:lstStyle/>
+                    <a:p>
+                      <a:pPr>
+                        <a:buNone/>
+                      </a:pPr>
+                      <a:r>
+                        <a:rPr lang="en-GB" sz="2600" dirty="0"/>
+                        <a:t>State</a:t>
+                      </a:r>
+                    </a:p>
+                  </a:txBody>
+                  <a:tcPr anchor="ctr">
+                    <a:lnL w="12700" cmpd="sng">
+                      <a:noFill/>
+                    </a:lnL>
+                    <a:lnR w="12700" cap="flat" cmpd="sng" algn="ctr">
+                      <a:solidFill>
+                        <a:schemeClr val="tx1"/>
+                      </a:solidFill>
+                      <a:prstDash val="solid"/>
+                      <a:round/>
+                      <a:headEnd type="none" w="med" len="med"/>
+                      <a:tailEnd type="none" w="med" len="med"/>
+                    </a:lnR>
+                    <a:lnT w="12700" cmpd="sng">
+                      <a:noFill/>
+                    </a:lnT>
+                    <a:lnB w="12700" cap="flat" cmpd="sng" algn="ctr">
+                      <a:solidFill>
+                        <a:schemeClr val="tx1"/>
+                      </a:solidFill>
+                      <a:prstDash val="solid"/>
+                      <a:round/>
+                      <a:headEnd type="none" w="med" len="med"/>
+                      <a:tailEnd type="none" w="med" len="med"/>
+                    </a:lnB>
+                    <a:lnTlToBr w="12700" cmpd="sng">
+                      <a:noFill/>
+                      <a:prstDash val="solid"/>
+                    </a:lnTlToBr>
+                    <a:lnBlToTr w="12700" cmpd="sng">
+                      <a:noFill/>
+                      <a:prstDash val="solid"/>
+                    </a:lnBlToTr>
+                  </a:tcPr>
+                </a:tc>
+                <a:tc>
+                  <a:txBody>
+                    <a:bodyPr/>
+                    <a:lstStyle/>
+                    <a:p>
+                      <a:pPr algn="r">
+                        <a:buNone/>
+                      </a:pPr>
+                      <a:r>
+                        <a:rPr lang="en-GB" sz="2600" dirty="0">
+                          <a:effectLst/>
+                        </a:rPr>
+                        <a:t>Output</a:t>
+                      </a:r>
+                    </a:p>
+                  </a:txBody>
+                  <a:tcPr anchor="ctr">
+                    <a:lnL w="12700" cap="flat" cmpd="sng" algn="ctr">
+                      <a:solidFill>
+                        <a:schemeClr val="tx1"/>
+                      </a:solidFill>
+                      <a:prstDash val="solid"/>
+                      <a:round/>
+                      <a:headEnd type="none" w="med" len="med"/>
+                      <a:tailEnd type="none" w="med" len="med"/>
+                    </a:lnL>
+                    <a:lnR w="12700" cap="flat" cmpd="sng" algn="ctr">
+                      <a:solidFill>
+                        <a:schemeClr val="tx1"/>
+                      </a:solidFill>
+                      <a:prstDash val="solid"/>
+                      <a:round/>
+                      <a:headEnd type="none" w="med" len="med"/>
+                      <a:tailEnd type="none" w="med" len="med"/>
+                    </a:lnR>
+                    <a:lnT w="12700" cmpd="sng">
+                      <a:noFill/>
+                    </a:lnT>
+                    <a:lnB w="12700" cap="flat" cmpd="sng" algn="ctr">
+                      <a:solidFill>
+                        <a:schemeClr val="tx1"/>
+                      </a:solidFill>
+                      <a:prstDash val="solid"/>
+                      <a:round/>
+                      <a:headEnd type="none" w="med" len="med"/>
+                      <a:tailEnd type="none" w="med" len="med"/>
+                    </a:lnB>
+                    <a:lnTlToBr w="12700" cmpd="sng">
+                      <a:noFill/>
+                      <a:prstDash val="solid"/>
+                    </a:lnTlToBr>
+                    <a:lnBlToTr w="12700" cmpd="sng">
+                      <a:noFill/>
+                      <a:prstDash val="solid"/>
+                    </a:lnBlToTr>
+                  </a:tcPr>
+                </a:tc>
+                <a:tc>
+                  <a:txBody>
+                    <a:bodyPr/>
+                    <a:lstStyle/>
+                    <a:p>
+                      <a:pPr>
+                        <a:buNone/>
+                      </a:pPr>
+                      <a:r>
+                        <a:rPr lang="en-GB" sz="2600" dirty="0"/>
+                        <a:t>input</a:t>
+                      </a:r>
+                    </a:p>
+                  </a:txBody>
+                  <a:tcPr anchor="ctr">
+                    <a:lnL w="12700" cap="flat" cmpd="sng" algn="ctr">
+                      <a:solidFill>
+                        <a:schemeClr val="tx1"/>
+                      </a:solidFill>
+                      <a:prstDash val="solid"/>
+                      <a:round/>
+                      <a:headEnd type="none" w="med" len="med"/>
+                      <a:tailEnd type="none" w="med" len="med"/>
+                    </a:lnL>
+                    <a:lnR w="12700" cap="flat" cmpd="sng" algn="ctr">
+                      <a:solidFill>
+                        <a:schemeClr val="tx1"/>
+                      </a:solidFill>
+                      <a:prstDash val="solid"/>
+                      <a:round/>
+                      <a:headEnd type="none" w="med" len="med"/>
+                      <a:tailEnd type="none" w="med" len="med"/>
+                    </a:lnR>
+                    <a:lnT w="12700" cmpd="sng">
+                      <a:noFill/>
+                    </a:lnT>
+                    <a:lnB w="12700" cap="flat" cmpd="sng" algn="ctr">
+                      <a:solidFill>
+                        <a:schemeClr val="tx1"/>
+                      </a:solidFill>
+                      <a:prstDash val="solid"/>
+                      <a:round/>
+                      <a:headEnd type="none" w="med" len="med"/>
+                      <a:tailEnd type="none" w="med" len="med"/>
+                    </a:lnB>
+                    <a:lnTlToBr w="12700" cmpd="sng">
+                      <a:noFill/>
+                      <a:prstDash val="solid"/>
+                    </a:lnTlToBr>
+                    <a:lnBlToTr w="12700" cmpd="sng">
+                      <a:noFill/>
+                      <a:prstDash val="solid"/>
+                    </a:lnBlToTr>
+                  </a:tcPr>
+                </a:tc>
+                <a:tc>
+                  <a:txBody>
+                    <a:bodyPr/>
+                    <a:lstStyle/>
+                    <a:p>
+                      <a:pPr>
+                        <a:buNone/>
+                      </a:pPr>
+                      <a:r>
+                        <a:rPr lang="en-GB" sz="2600" dirty="0"/>
+                        <a:t>Next state in = 1</a:t>
+                      </a:r>
+                    </a:p>
+                  </a:txBody>
+                  <a:tcPr anchor="ctr">
+                    <a:lnL w="12700" cap="flat" cmpd="sng" algn="ctr">
+                      <a:solidFill>
+                        <a:schemeClr val="tx1"/>
+                      </a:solidFill>
+                      <a:prstDash val="solid"/>
+                      <a:round/>
+                      <a:headEnd type="none" w="med" len="med"/>
+                      <a:tailEnd type="none" w="med" len="med"/>
+                    </a:lnL>
+                    <a:lnR w="12700" cmpd="sng">
+                      <a:noFill/>
+                    </a:lnR>
+                    <a:lnT w="12700" cmpd="sng">
+                      <a:noFill/>
+                    </a:lnT>
+                    <a:lnB w="12700" cap="flat" cmpd="sng" algn="ctr">
+                      <a:solidFill>
+                        <a:schemeClr val="tx1"/>
+                      </a:solidFill>
+                      <a:prstDash val="solid"/>
+                      <a:round/>
+                      <a:headEnd type="none" w="med" len="med"/>
+                      <a:tailEnd type="none" w="med" len="med"/>
+                    </a:lnB>
+                    <a:lnTlToBr w="12700" cmpd="sng">
+                      <a:noFill/>
+                      <a:prstDash val="solid"/>
+                    </a:lnTlToBr>
+                    <a:lnBlToTr w="12700" cmpd="sng">
+                      <a:noFill/>
+                      <a:prstDash val="solid"/>
+                    </a:lnBlToTr>
+                  </a:tcPr>
+                </a:tc>
+                <a:extLst>
+                  <a:ext uri="{0D108BD9-81ED-4DB2-BD59-A6C34878D82A}">
+                    <a16:rowId xmlns:a16="http://schemas.microsoft.com/office/drawing/2014/main" val="2074150860"/>
+                  </a:ext>
+                </a:extLst>
+              </a:tr>
+              <a:tr h="0">
+                <a:tc>
+                  <a:txBody>
+                    <a:bodyPr/>
+                    <a:lstStyle/>
+                    <a:p>
+                      <a:pPr>
+                        <a:buNone/>
+                      </a:pPr>
+                      <a:r>
+                        <a:rPr lang="en-GB" sz="2600" dirty="0"/>
+                        <a:t>A</a:t>
+                      </a:r>
+                    </a:p>
+                  </a:txBody>
+                  <a:tcPr anchor="ctr">
+                    <a:lnL w="12700" cmpd="sng">
+                      <a:noFill/>
+                    </a:lnL>
+                    <a:lnR w="12700" cap="flat" cmpd="sng" algn="ctr">
+                      <a:solidFill>
+                        <a:schemeClr val="tx1"/>
+                      </a:solidFill>
+                      <a:prstDash val="solid"/>
+                      <a:round/>
+                      <a:headEnd type="none" w="med" len="med"/>
+                      <a:tailEnd type="none" w="med" len="med"/>
+                    </a:lnR>
+                    <a:lnT w="12700" cap="flat" cmpd="sng" algn="ctr">
+                      <a:solidFill>
+                        <a:schemeClr val="tx1"/>
+                      </a:solidFill>
+                      <a:prstDash val="solid"/>
+                      <a:round/>
+                      <a:headEnd type="none" w="med" len="med"/>
+                      <a:tailEnd type="none" w="med" len="med"/>
+                    </a:lnT>
+                    <a:lnB w="12700" cmpd="sng">
+                      <a:noFill/>
+                    </a:lnB>
+                    <a:lnTlToBr w="12700" cmpd="sng">
+                      <a:noFill/>
+                      <a:prstDash val="solid"/>
+                    </a:lnTlToBr>
+                    <a:lnBlToTr w="12700" cmpd="sng">
+                      <a:noFill/>
+                      <a:prstDash val="solid"/>
+                    </a:lnBlToTr>
+                  </a:tcPr>
+                </a:tc>
+                <a:tc>
+                  <a:txBody>
+                    <a:bodyPr/>
+                    <a:lstStyle/>
+                    <a:p>
+                      <a:pPr algn="r">
+                        <a:buNone/>
+                      </a:pPr>
+                      <a:r>
+                        <a:rPr lang="en-GB" sz="2600" dirty="0">
+                          <a:effectLst/>
+                        </a:rPr>
+                        <a:t>0</a:t>
+                      </a:r>
+                    </a:p>
+                  </a:txBody>
+                  <a:tcPr anchor="ctr">
+                    <a:lnL w="12700" cap="flat" cmpd="sng" algn="ctr">
+                      <a:solidFill>
+                        <a:schemeClr val="tx1"/>
+                      </a:solidFill>
+                      <a:prstDash val="solid"/>
+                      <a:round/>
+                      <a:headEnd type="none" w="med" len="med"/>
+                      <a:tailEnd type="none" w="med" len="med"/>
+                    </a:lnL>
+                    <a:lnR w="12700" cap="flat" cmpd="sng" algn="ctr">
+                      <a:solidFill>
+                        <a:schemeClr val="tx1"/>
+                      </a:solidFill>
+                      <a:prstDash val="solid"/>
+                      <a:round/>
+                      <a:headEnd type="none" w="med" len="med"/>
+                      <a:tailEnd type="none" w="med" len="med"/>
+                    </a:lnR>
+                    <a:lnT w="12700" cap="flat" cmpd="sng" algn="ctr">
+                      <a:solidFill>
+                        <a:schemeClr val="tx1"/>
+                      </a:solidFill>
+                      <a:prstDash val="solid"/>
+                      <a:round/>
+                      <a:headEnd type="none" w="med" len="med"/>
+                      <a:tailEnd type="none" w="med" len="med"/>
+                    </a:lnT>
+                    <a:lnB w="12700" cmpd="sng">
+                      <a:noFill/>
+                    </a:lnB>
+                    <a:lnTlToBr w="12700" cmpd="sng">
+                      <a:noFill/>
+                      <a:prstDash val="solid"/>
+                    </a:lnTlToBr>
+                    <a:lnBlToTr w="12700" cmpd="sng">
+                      <a:noFill/>
+                      <a:prstDash val="solid"/>
+                    </a:lnBlToTr>
+                  </a:tcPr>
+                </a:tc>
+                <a:tc>
+                  <a:txBody>
+                    <a:bodyPr/>
+                    <a:lstStyle/>
+                    <a:p>
+                      <a:pPr>
+                        <a:buNone/>
+                      </a:pPr>
+                      <a:r>
+                        <a:rPr lang="en-GB" sz="2600" dirty="0"/>
+                        <a:t>0</a:t>
+                      </a:r>
+                    </a:p>
+                  </a:txBody>
+                  <a:tcPr anchor="ctr">
+                    <a:lnL w="12700" cap="flat" cmpd="sng" algn="ctr">
+                      <a:solidFill>
+                        <a:schemeClr val="tx1"/>
+                      </a:solidFill>
+                      <a:prstDash val="solid"/>
+                      <a:round/>
+                      <a:headEnd type="none" w="med" len="med"/>
+                      <a:tailEnd type="none" w="med" len="med"/>
+                    </a:lnL>
+                    <a:lnR w="12700" cap="flat" cmpd="sng" algn="ctr">
+                      <a:solidFill>
+                        <a:schemeClr val="tx1"/>
+                      </a:solidFill>
+                      <a:prstDash val="solid"/>
+                      <a:round/>
+                      <a:headEnd type="none" w="med" len="med"/>
+                      <a:tailEnd type="none" w="med" len="med"/>
+                    </a:lnR>
+                    <a:lnT w="12700" cap="flat" cmpd="sng" algn="ctr">
+                      <a:solidFill>
+                        <a:schemeClr val="tx1"/>
+                      </a:solidFill>
+                      <a:prstDash val="solid"/>
+                      <a:round/>
+                      <a:headEnd type="none" w="med" len="med"/>
+                      <a:tailEnd type="none" w="med" len="med"/>
+                    </a:lnT>
+                    <a:lnB w="12700" cmpd="sng">
+                      <a:noFill/>
+                    </a:lnB>
+                    <a:lnTlToBr w="12700" cmpd="sng">
+                      <a:noFill/>
+                      <a:prstDash val="solid"/>
+                    </a:lnTlToBr>
+                    <a:lnBlToTr w="12700" cmpd="sng">
+                      <a:noFill/>
+                      <a:prstDash val="solid"/>
+                    </a:lnBlToTr>
+                  </a:tcPr>
+                </a:tc>
+                <a:tc>
+                  <a:txBody>
+                    <a:bodyPr/>
+                    <a:lstStyle/>
+                    <a:p>
+                      <a:pPr>
+                        <a:buNone/>
+                      </a:pPr>
+                      <a:r>
+                        <a:rPr lang="en-GB" sz="2600" dirty="0"/>
+                        <a:t>B</a:t>
+                      </a:r>
+                    </a:p>
+                  </a:txBody>
+                  <a:tcPr anchor="ctr">
+                    <a:lnL w="12700" cap="flat" cmpd="sng" algn="ctr">
+                      <a:solidFill>
+                        <a:schemeClr val="tx1"/>
+                      </a:solidFill>
+                      <a:prstDash val="solid"/>
+                      <a:round/>
+                      <a:headEnd type="none" w="med" len="med"/>
+                      <a:tailEnd type="none" w="med" len="med"/>
+                    </a:lnL>
+                    <a:lnR w="12700" cmpd="sng">
+                      <a:noFill/>
+                    </a:lnR>
+                    <a:lnT w="12700" cap="flat" cmpd="sng" algn="ctr">
+                      <a:solidFill>
+                        <a:schemeClr val="tx1"/>
+                      </a:solidFill>
+                      <a:prstDash val="solid"/>
+                      <a:round/>
+                      <a:headEnd type="none" w="med" len="med"/>
+                      <a:tailEnd type="none" w="med" len="med"/>
+                    </a:lnT>
+                    <a:lnB w="12700" cmpd="sng">
+                      <a:noFill/>
+                    </a:lnB>
+                    <a:lnTlToBr w="12700" cmpd="sng">
+                      <a:noFill/>
+                      <a:prstDash val="solid"/>
+                    </a:lnTlToBr>
+                    <a:lnBlToTr w="12700" cmpd="sng">
+                      <a:noFill/>
+                      <a:prstDash val="solid"/>
+                    </a:lnBlToTr>
+                  </a:tcPr>
+                </a:tc>
+                <a:extLst>
+                  <a:ext uri="{0D108BD9-81ED-4DB2-BD59-A6C34878D82A}">
+                    <a16:rowId xmlns:a16="http://schemas.microsoft.com/office/drawing/2014/main" val="2716315097"/>
+                  </a:ext>
+                </a:extLst>
+              </a:tr>
+              <a:tr h="0">
+                <a:tc>
+                  <a:txBody>
+                    <a:bodyPr/>
+                    <a:lstStyle/>
+                    <a:p>
+                      <a:pPr>
+                        <a:buNone/>
+                      </a:pPr>
+                      <a:endParaRPr lang="en-GB" sz="2600" dirty="0"/>
+                    </a:p>
+                  </a:txBody>
+                  <a:tcPr anchor="ctr">
+                    <a:lnL w="12700" cmpd="sng">
+                      <a:noFill/>
+                    </a:lnL>
+                    <a:lnR w="12700" cap="flat" cmpd="sng" algn="ctr">
+                      <a:solidFill>
+                        <a:schemeClr val="tx1"/>
+                      </a:solidFill>
+                      <a:prstDash val="solid"/>
+                      <a:round/>
+                      <a:headEnd type="none" w="med" len="med"/>
+                      <a:tailEnd type="none" w="med" len="med"/>
+                    </a:lnR>
+                    <a:lnT w="12700" cap="flat" cmpd="sng" algn="ctr">
+                      <a:noFill/>
+                      <a:prstDash val="solid"/>
+                      <a:round/>
+                      <a:headEnd type="none" w="med" len="med"/>
+                      <a:tailEnd type="none" w="med" len="med"/>
+                    </a:lnT>
+                    <a:lnB w="12700" cap="flat" cmpd="sng" algn="ctr">
+                      <a:solidFill>
+                        <a:schemeClr val="tx1"/>
+                      </a:solidFill>
+                      <a:prstDash val="solid"/>
+                      <a:round/>
+                      <a:headEnd type="none" w="med" len="med"/>
+                      <a:tailEnd type="none" w="med" len="med"/>
+                    </a:lnB>
+                    <a:lnTlToBr w="12700" cmpd="sng">
+                      <a:noFill/>
+                      <a:prstDash val="solid"/>
+                    </a:lnTlToBr>
+                    <a:lnBlToTr w="12700" cmpd="sng">
+                      <a:noFill/>
+                      <a:prstDash val="solid"/>
+                    </a:lnBlToTr>
+                  </a:tcPr>
+                </a:tc>
+                <a:tc>
+                  <a:txBody>
+                    <a:bodyPr/>
+                    <a:lstStyle/>
+                    <a:p>
+                      <a:pPr algn="r">
+                        <a:buNone/>
+                      </a:pPr>
+                      <a:endParaRPr lang="en-GB" sz="2600" dirty="0">
+                        <a:effectLst/>
+                      </a:endParaRPr>
+                    </a:p>
+                  </a:txBody>
+                  <a:tcPr anchor="ctr">
+                    <a:lnL w="12700" cap="flat" cmpd="sng" algn="ctr">
+                      <a:solidFill>
+                        <a:schemeClr val="tx1"/>
+                      </a:solidFill>
+                      <a:prstDash val="solid"/>
+                      <a:round/>
+                      <a:headEnd type="none" w="med" len="med"/>
+                      <a:tailEnd type="none" w="med" len="med"/>
+                    </a:lnL>
+                    <a:lnR w="12700" cap="flat" cmpd="sng" algn="ctr">
+                      <a:solidFill>
+                        <a:schemeClr val="tx1"/>
+                      </a:solidFill>
+                      <a:prstDash val="solid"/>
+                      <a:round/>
+                      <a:headEnd type="none" w="med" len="med"/>
+                      <a:tailEnd type="none" w="med" len="med"/>
+                    </a:lnR>
+                    <a:lnT w="12700" cap="flat" cmpd="sng" algn="ctr">
+                      <a:noFill/>
+                      <a:prstDash val="solid"/>
+                      <a:round/>
+                      <a:headEnd type="none" w="med" len="med"/>
+                      <a:tailEnd type="none" w="med" len="med"/>
+                    </a:lnT>
+                    <a:lnB w="12700" cap="flat" cmpd="sng" algn="ctr">
+                      <a:solidFill>
+                        <a:schemeClr val="tx1"/>
+                      </a:solidFill>
+                      <a:prstDash val="solid"/>
+                      <a:round/>
+                      <a:headEnd type="none" w="med" len="med"/>
+                      <a:tailEnd type="none" w="med" len="med"/>
+                    </a:lnB>
+                    <a:lnTlToBr w="12700" cmpd="sng">
+                      <a:noFill/>
+                      <a:prstDash val="solid"/>
+                    </a:lnTlToBr>
+                    <a:lnBlToTr w="12700" cmpd="sng">
+                      <a:noFill/>
+                      <a:prstDash val="solid"/>
+                    </a:lnBlToTr>
+                  </a:tcPr>
+                </a:tc>
+                <a:tc>
+                  <a:txBody>
+                    <a:bodyPr/>
+                    <a:lstStyle/>
+                    <a:p>
+                      <a:pPr>
+                        <a:buNone/>
+                      </a:pPr>
+                      <a:r>
+                        <a:rPr lang="en-GB" sz="2600" dirty="0"/>
+                        <a:t>1</a:t>
+                      </a:r>
+                    </a:p>
+                  </a:txBody>
+                  <a:tcPr anchor="ctr">
+                    <a:lnL w="12700" cap="flat" cmpd="sng" algn="ctr">
+                      <a:solidFill>
+                        <a:schemeClr val="tx1"/>
+                      </a:solidFill>
+                      <a:prstDash val="solid"/>
+                      <a:round/>
+                      <a:headEnd type="none" w="med" len="med"/>
+                      <a:tailEnd type="none" w="med" len="med"/>
+                    </a:lnL>
+                    <a:lnR w="12700" cap="flat" cmpd="sng" algn="ctr">
+                      <a:solidFill>
+                        <a:schemeClr val="tx1"/>
+                      </a:solidFill>
+                      <a:prstDash val="solid"/>
+                      <a:round/>
+                      <a:headEnd type="none" w="med" len="med"/>
+                      <a:tailEnd type="none" w="med" len="med"/>
+                    </a:lnR>
+                    <a:lnT w="12700" cap="flat" cmpd="sng" algn="ctr">
+                      <a:noFill/>
+                      <a:prstDash val="solid"/>
+                      <a:round/>
+                      <a:headEnd type="none" w="med" len="med"/>
+                      <a:tailEnd type="none" w="med" len="med"/>
+                    </a:lnT>
+                    <a:lnB w="12700" cap="flat" cmpd="sng" algn="ctr">
+                      <a:solidFill>
+                        <a:schemeClr val="tx1"/>
+                      </a:solidFill>
+                      <a:prstDash val="solid"/>
+                      <a:round/>
+                      <a:headEnd type="none" w="med" len="med"/>
+                      <a:tailEnd type="none" w="med" len="med"/>
+                    </a:lnB>
+                    <a:lnTlToBr w="12700" cmpd="sng">
+                      <a:noFill/>
+                      <a:prstDash val="solid"/>
+                    </a:lnTlToBr>
+                    <a:lnBlToTr w="12700" cmpd="sng">
+                      <a:noFill/>
+                      <a:prstDash val="solid"/>
+                    </a:lnBlToTr>
+                  </a:tcPr>
+                </a:tc>
+                <a:tc>
+                  <a:txBody>
+                    <a:bodyPr/>
+                    <a:lstStyle/>
+                    <a:p>
+                      <a:pPr>
+                        <a:buNone/>
+                      </a:pPr>
+                      <a:r>
+                        <a:rPr lang="en-GB" sz="2600" dirty="0"/>
+                        <a:t>C</a:t>
+                      </a:r>
+                    </a:p>
+                  </a:txBody>
+                  <a:tcPr anchor="ctr">
+                    <a:lnL w="12700" cap="flat" cmpd="sng" algn="ctr">
+                      <a:solidFill>
+                        <a:schemeClr val="tx1"/>
+                      </a:solidFill>
+                      <a:prstDash val="solid"/>
+                      <a:round/>
+                      <a:headEnd type="none" w="med" len="med"/>
+                      <a:tailEnd type="none" w="med" len="med"/>
+                    </a:lnL>
+                    <a:lnR w="12700" cmpd="sng">
+                      <a:noFill/>
+                    </a:lnR>
+                    <a:lnT w="12700" cap="flat" cmpd="sng" algn="ctr">
+                      <a:noFill/>
+                      <a:prstDash val="solid"/>
+                      <a:round/>
+                      <a:headEnd type="none" w="med" len="med"/>
+                      <a:tailEnd type="none" w="med" len="med"/>
+                    </a:lnT>
+                    <a:lnB w="12700" cap="flat" cmpd="sng" algn="ctr">
+                      <a:solidFill>
+                        <a:schemeClr val="tx1"/>
+                      </a:solidFill>
+                      <a:prstDash val="solid"/>
+                      <a:round/>
+                      <a:headEnd type="none" w="med" len="med"/>
+                      <a:tailEnd type="none" w="med" len="med"/>
+                    </a:lnB>
+                    <a:lnTlToBr w="12700" cmpd="sng">
+                      <a:noFill/>
+                      <a:prstDash val="solid"/>
+                    </a:lnTlToBr>
+                    <a:lnBlToTr w="12700" cmpd="sng">
+                      <a:noFill/>
+                      <a:prstDash val="solid"/>
+                    </a:lnBlToTr>
+                  </a:tcPr>
+                </a:tc>
+                <a:extLst>
+                  <a:ext uri="{0D108BD9-81ED-4DB2-BD59-A6C34878D82A}">
+                    <a16:rowId xmlns:a16="http://schemas.microsoft.com/office/drawing/2014/main" val="4043350102"/>
+                  </a:ext>
+                </a:extLst>
+              </a:tr>
+              <a:tr h="0">
+                <a:tc>
+                  <a:txBody>
+                    <a:bodyPr/>
+                    <a:lstStyle/>
+                    <a:p>
+                      <a:pPr>
+                        <a:buNone/>
+                      </a:pPr>
+                      <a:r>
+                        <a:rPr lang="en-GB" sz="2600" dirty="0"/>
+                        <a:t>B</a:t>
+                      </a:r>
+                    </a:p>
+                  </a:txBody>
+                  <a:tcPr anchor="ctr">
+                    <a:lnL w="12700" cmpd="sng">
+                      <a:noFill/>
+                    </a:lnL>
+                    <a:lnR w="12700" cap="flat" cmpd="sng" algn="ctr">
+                      <a:solidFill>
+                        <a:schemeClr val="tx1"/>
+                      </a:solidFill>
+                      <a:prstDash val="solid"/>
+                      <a:round/>
+                      <a:headEnd type="none" w="med" len="med"/>
+                      <a:tailEnd type="none" w="med" len="med"/>
+                    </a:lnR>
+                    <a:lnT w="12700" cap="flat" cmpd="sng" algn="ctr">
+                      <a:solidFill>
+                        <a:schemeClr val="tx1"/>
+                      </a:solidFill>
+                      <a:prstDash val="solid"/>
+                      <a:round/>
+                      <a:headEnd type="none" w="med" len="med"/>
+                      <a:tailEnd type="none" w="med" len="med"/>
+                    </a:lnT>
+                    <a:lnB w="12700" cmpd="sng">
+                      <a:noFill/>
+                    </a:lnB>
+                    <a:lnTlToBr w="12700" cmpd="sng">
+                      <a:noFill/>
+                      <a:prstDash val="solid"/>
+                    </a:lnTlToBr>
+                    <a:lnBlToTr w="12700" cmpd="sng">
+                      <a:noFill/>
+                      <a:prstDash val="solid"/>
+                    </a:lnBlToTr>
+                    <a:noFill/>
+                  </a:tcPr>
+                </a:tc>
+                <a:tc>
+                  <a:txBody>
+                    <a:bodyPr/>
+                    <a:lstStyle/>
+                    <a:p>
+                      <a:pPr algn="r">
+                        <a:buNone/>
+                      </a:pPr>
+                      <a:r>
+                        <a:rPr lang="en-GB" sz="2600" dirty="0">
+                          <a:effectLst/>
+                        </a:rPr>
+                        <a:t>0</a:t>
+                      </a:r>
+                    </a:p>
+                  </a:txBody>
+                  <a:tcPr anchor="ctr">
+                    <a:lnL w="12700" cap="flat" cmpd="sng" algn="ctr">
+                      <a:solidFill>
+                        <a:schemeClr val="tx1"/>
+                      </a:solidFill>
+                      <a:prstDash val="solid"/>
+                      <a:round/>
+                      <a:headEnd type="none" w="med" len="med"/>
+                      <a:tailEnd type="none" w="med" len="med"/>
+                    </a:lnL>
+                    <a:lnR w="12700" cap="flat" cmpd="sng" algn="ctr">
+                      <a:solidFill>
+                        <a:schemeClr val="tx1"/>
+                      </a:solidFill>
+                      <a:prstDash val="solid"/>
+                      <a:round/>
+                      <a:headEnd type="none" w="med" len="med"/>
+                      <a:tailEnd type="none" w="med" len="med"/>
+                    </a:lnR>
+                    <a:lnT w="12700" cap="flat" cmpd="sng" algn="ctr">
+                      <a:solidFill>
+                        <a:schemeClr val="tx1"/>
+                      </a:solidFill>
+                      <a:prstDash val="solid"/>
+                      <a:round/>
+                      <a:headEnd type="none" w="med" len="med"/>
+                      <a:tailEnd type="none" w="med" len="med"/>
+                    </a:lnT>
+                    <a:lnB w="12700" cmpd="sng">
+                      <a:noFill/>
+                    </a:lnB>
+                    <a:lnTlToBr w="12700" cmpd="sng">
+                      <a:noFill/>
+                      <a:prstDash val="solid"/>
+                    </a:lnTlToBr>
+                    <a:lnBlToTr w="12700" cmpd="sng">
+                      <a:noFill/>
+                      <a:prstDash val="solid"/>
+                    </a:lnBlToTr>
+                    <a:noFill/>
+                  </a:tcPr>
+                </a:tc>
+                <a:tc>
+                  <a:txBody>
+                    <a:bodyPr/>
+                    <a:lstStyle/>
+                    <a:p>
+                      <a:pPr>
+                        <a:buNone/>
+                      </a:pPr>
+                      <a:r>
+                        <a:rPr lang="en-GB" sz="2600" dirty="0"/>
+                        <a:t>0</a:t>
+                      </a:r>
+                    </a:p>
+                  </a:txBody>
+                  <a:tcPr anchor="ctr">
+                    <a:lnL w="12700" cap="flat" cmpd="sng" algn="ctr">
+                      <a:solidFill>
+                        <a:schemeClr val="tx1"/>
+                      </a:solidFill>
+                      <a:prstDash val="solid"/>
+                      <a:round/>
+                      <a:headEnd type="none" w="med" len="med"/>
+                      <a:tailEnd type="none" w="med" len="med"/>
+                    </a:lnL>
+                    <a:lnR w="12700" cap="flat" cmpd="sng" algn="ctr">
+                      <a:solidFill>
+                        <a:schemeClr val="tx1"/>
+                      </a:solidFill>
+                      <a:prstDash val="solid"/>
+                      <a:round/>
+                      <a:headEnd type="none" w="med" len="med"/>
+                      <a:tailEnd type="none" w="med" len="med"/>
+                    </a:lnR>
+                    <a:lnT w="12700" cap="flat" cmpd="sng" algn="ctr">
+                      <a:solidFill>
+                        <a:schemeClr val="tx1"/>
+                      </a:solidFill>
+                      <a:prstDash val="solid"/>
+                      <a:round/>
+                      <a:headEnd type="none" w="med" len="med"/>
+                      <a:tailEnd type="none" w="med" len="med"/>
+                    </a:lnT>
+                    <a:lnB w="12700" cmpd="sng">
+                      <a:noFill/>
+                    </a:lnB>
+                    <a:lnTlToBr w="12700" cmpd="sng">
+                      <a:noFill/>
+                      <a:prstDash val="solid"/>
+                    </a:lnTlToBr>
+                    <a:lnBlToTr w="12700" cmpd="sng">
+                      <a:noFill/>
+                      <a:prstDash val="solid"/>
+                    </a:lnBlToTr>
+                    <a:noFill/>
+                  </a:tcPr>
+                </a:tc>
+                <a:tc>
+                  <a:txBody>
+                    <a:bodyPr/>
+                    <a:lstStyle/>
+                    <a:p>
+                      <a:pPr>
+                        <a:buNone/>
+                      </a:pPr>
+                      <a:r>
+                        <a:rPr lang="en-GB" sz="2600" dirty="0"/>
+                        <a:t>E</a:t>
+                      </a:r>
+                    </a:p>
+                  </a:txBody>
+                  <a:tcPr anchor="ctr">
+                    <a:lnL w="12700" cap="flat" cmpd="sng" algn="ctr">
+                      <a:solidFill>
+                        <a:schemeClr val="tx1"/>
+                      </a:solidFill>
+                      <a:prstDash val="solid"/>
+                      <a:round/>
+                      <a:headEnd type="none" w="med" len="med"/>
+                      <a:tailEnd type="none" w="med" len="med"/>
+                    </a:lnL>
+                    <a:lnR w="12700" cmpd="sng">
+                      <a:noFill/>
+                    </a:lnR>
+                    <a:lnT w="12700" cap="flat" cmpd="sng" algn="ctr">
+                      <a:solidFill>
+                        <a:schemeClr val="tx1"/>
+                      </a:solidFill>
+                      <a:prstDash val="solid"/>
+                      <a:round/>
+                      <a:headEnd type="none" w="med" len="med"/>
+                      <a:tailEnd type="none" w="med" len="med"/>
+                    </a:lnT>
+                    <a:lnB w="12700" cmpd="sng">
+                      <a:noFill/>
+                    </a:lnB>
+                    <a:lnTlToBr w="12700" cmpd="sng">
+                      <a:noFill/>
+                      <a:prstDash val="solid"/>
+                    </a:lnTlToBr>
+                    <a:lnBlToTr w="12700" cmpd="sng">
+                      <a:noFill/>
+                      <a:prstDash val="solid"/>
+                    </a:lnBlToTr>
+                    <a:noFill/>
+                  </a:tcPr>
+                </a:tc>
+                <a:extLst>
+                  <a:ext uri="{0D108BD9-81ED-4DB2-BD59-A6C34878D82A}">
+                    <a16:rowId xmlns:a16="http://schemas.microsoft.com/office/drawing/2014/main" val="39279895"/>
+                  </a:ext>
+                </a:extLst>
+              </a:tr>
+              <a:tr h="0">
+                <a:tc>
+                  <a:txBody>
+                    <a:bodyPr/>
+                    <a:lstStyle/>
+                    <a:p>
+                      <a:pPr>
+                        <a:buNone/>
+                      </a:pPr>
+                      <a:endParaRPr lang="en-GB" sz="2600"/>
+                    </a:p>
+                  </a:txBody>
+                  <a:tcPr anchor="ctr">
+                    <a:lnL w="12700" cmpd="sng">
+                      <a:noFill/>
+                    </a:lnL>
+                    <a:lnR w="12700" cap="flat" cmpd="sng" algn="ctr">
+                      <a:solidFill>
+                        <a:schemeClr val="tx1"/>
+                      </a:solidFill>
+                      <a:prstDash val="solid"/>
+                      <a:round/>
+                      <a:headEnd type="none" w="med" len="med"/>
+                      <a:tailEnd type="none" w="med" len="med"/>
+                    </a:lnR>
+                    <a:lnT w="12700" cmpd="sng">
+                      <a:noFill/>
+                    </a:lnT>
+                    <a:lnB w="12700" cap="flat" cmpd="sng" algn="ctr">
+                      <a:solidFill>
+                        <a:schemeClr val="tx1"/>
+                      </a:solidFill>
+                      <a:prstDash val="solid"/>
+                      <a:round/>
+                      <a:headEnd type="none" w="med" len="med"/>
+                      <a:tailEnd type="none" w="med" len="med"/>
+                    </a:lnB>
+                    <a:lnTlToBr w="12700" cmpd="sng">
+                      <a:noFill/>
+                      <a:prstDash val="solid"/>
+                    </a:lnTlToBr>
+                    <a:lnBlToTr w="12700" cmpd="sng">
+                      <a:noFill/>
+                      <a:prstDash val="solid"/>
+                    </a:lnBlToTr>
+                    <a:noFill/>
+                  </a:tcPr>
+                </a:tc>
+                <a:tc>
+                  <a:txBody>
+                    <a:bodyPr/>
+                    <a:lstStyle/>
+                    <a:p>
+                      <a:pPr algn="r">
+                        <a:buNone/>
+                      </a:pPr>
+                      <a:endParaRPr lang="en-GB" sz="2600" dirty="0">
+                        <a:effectLst/>
+                      </a:endParaRPr>
+                    </a:p>
+                  </a:txBody>
+                  <a:tcPr anchor="ctr">
+                    <a:lnL w="12700" cap="flat" cmpd="sng" algn="ctr">
+                      <a:solidFill>
+                        <a:schemeClr val="tx1"/>
+                      </a:solidFill>
+                      <a:prstDash val="solid"/>
+                      <a:round/>
+                      <a:headEnd type="none" w="med" len="med"/>
+                      <a:tailEnd type="none" w="med" len="med"/>
+                    </a:lnL>
+                    <a:lnR w="12700" cap="flat" cmpd="sng" algn="ctr">
+                      <a:solidFill>
+                        <a:schemeClr val="tx1"/>
+                      </a:solidFill>
+                      <a:prstDash val="solid"/>
+                      <a:round/>
+                      <a:headEnd type="none" w="med" len="med"/>
+                      <a:tailEnd type="none" w="med" len="med"/>
+                    </a:lnR>
+                    <a:lnT w="12700" cmpd="sng">
+                      <a:noFill/>
+                    </a:lnT>
+                    <a:lnB w="12700" cap="flat" cmpd="sng" algn="ctr">
+                      <a:solidFill>
+                        <a:schemeClr val="tx1"/>
+                      </a:solidFill>
+                      <a:prstDash val="solid"/>
+                      <a:round/>
+                      <a:headEnd type="none" w="med" len="med"/>
+                      <a:tailEnd type="none" w="med" len="med"/>
+                    </a:lnB>
+                    <a:lnTlToBr w="12700" cmpd="sng">
+                      <a:noFill/>
+                      <a:prstDash val="solid"/>
+                    </a:lnTlToBr>
+                    <a:lnBlToTr w="12700" cmpd="sng">
+                      <a:noFill/>
+                      <a:prstDash val="solid"/>
+                    </a:lnBlToTr>
+                    <a:noFill/>
+                  </a:tcPr>
+                </a:tc>
+                <a:tc>
+                  <a:txBody>
+                    <a:bodyPr/>
+                    <a:lstStyle/>
+                    <a:p>
+                      <a:pPr>
+                        <a:buNone/>
+                      </a:pPr>
+                      <a:r>
+                        <a:rPr lang="en-GB" sz="2600" dirty="0"/>
+                        <a:t>1</a:t>
+                      </a:r>
+                    </a:p>
+                  </a:txBody>
+                  <a:tcPr anchor="ctr">
+                    <a:lnL w="12700" cap="flat" cmpd="sng" algn="ctr">
+                      <a:solidFill>
+                        <a:schemeClr val="tx1"/>
+                      </a:solidFill>
+                      <a:prstDash val="solid"/>
+                      <a:round/>
+                      <a:headEnd type="none" w="med" len="med"/>
+                      <a:tailEnd type="none" w="med" len="med"/>
+                    </a:lnL>
+                    <a:lnR w="12700" cap="flat" cmpd="sng" algn="ctr">
+                      <a:solidFill>
+                        <a:schemeClr val="tx1"/>
+                      </a:solidFill>
+                      <a:prstDash val="solid"/>
+                      <a:round/>
+                      <a:headEnd type="none" w="med" len="med"/>
+                      <a:tailEnd type="none" w="med" len="med"/>
+                    </a:lnR>
+                    <a:lnT w="12700" cmpd="sng">
+                      <a:noFill/>
+                    </a:lnT>
+                    <a:lnB w="12700" cap="flat" cmpd="sng" algn="ctr">
+                      <a:solidFill>
+                        <a:schemeClr val="tx1"/>
+                      </a:solidFill>
+                      <a:prstDash val="solid"/>
+                      <a:round/>
+                      <a:headEnd type="none" w="med" len="med"/>
+                      <a:tailEnd type="none" w="med" len="med"/>
+                    </a:lnB>
+                    <a:lnTlToBr w="12700" cmpd="sng">
+                      <a:noFill/>
+                      <a:prstDash val="solid"/>
+                    </a:lnTlToBr>
+                    <a:lnBlToTr w="12700" cmpd="sng">
+                      <a:noFill/>
+                      <a:prstDash val="solid"/>
+                    </a:lnBlToTr>
+                    <a:noFill/>
+                  </a:tcPr>
+                </a:tc>
+                <a:tc>
+                  <a:txBody>
+                    <a:bodyPr/>
+                    <a:lstStyle/>
+                    <a:p>
+                      <a:pPr>
+                        <a:buNone/>
+                      </a:pPr>
+                      <a:r>
+                        <a:rPr lang="en-GB" sz="2600" dirty="0"/>
+                        <a:t>A</a:t>
+                      </a:r>
+                    </a:p>
+                  </a:txBody>
+                  <a:tcPr anchor="ctr">
+                    <a:lnL w="12700" cap="flat" cmpd="sng" algn="ctr">
+                      <a:solidFill>
+                        <a:schemeClr val="tx1"/>
+                      </a:solidFill>
+                      <a:prstDash val="solid"/>
+                      <a:round/>
+                      <a:headEnd type="none" w="med" len="med"/>
+                      <a:tailEnd type="none" w="med" len="med"/>
+                    </a:lnL>
+                    <a:lnR w="12700" cmpd="sng">
+                      <a:noFill/>
+                    </a:lnR>
+                    <a:lnT w="12700" cmpd="sng">
+                      <a:noFill/>
+                    </a:lnT>
+                    <a:lnB w="12700" cap="flat" cmpd="sng" algn="ctr">
+                      <a:solidFill>
+                        <a:schemeClr val="tx1"/>
+                      </a:solidFill>
+                      <a:prstDash val="solid"/>
+                      <a:round/>
+                      <a:headEnd type="none" w="med" len="med"/>
+                      <a:tailEnd type="none" w="med" len="med"/>
+                    </a:lnB>
+                    <a:lnTlToBr w="12700" cmpd="sng">
+                      <a:noFill/>
+                      <a:prstDash val="solid"/>
+                    </a:lnTlToBr>
+                    <a:lnBlToTr w="12700" cmpd="sng">
+                      <a:noFill/>
+                      <a:prstDash val="solid"/>
+                    </a:lnBlToTr>
+                    <a:noFill/>
+                  </a:tcPr>
+                </a:tc>
+                <a:extLst>
+                  <a:ext uri="{0D108BD9-81ED-4DB2-BD59-A6C34878D82A}">
+                    <a16:rowId xmlns:a16="http://schemas.microsoft.com/office/drawing/2014/main" val="2179612770"/>
+                  </a:ext>
+                </a:extLst>
+              </a:tr>
+              <a:tr h="0">
+                <a:tc>
+                  <a:txBody>
+                    <a:bodyPr/>
+                    <a:lstStyle/>
+                    <a:p>
+                      <a:pPr>
+                        <a:buNone/>
+                      </a:pPr>
+                      <a:r>
+                        <a:rPr lang="en-GB" sz="2600" dirty="0"/>
+                        <a:t>C</a:t>
+                      </a:r>
+                    </a:p>
+                  </a:txBody>
+                  <a:tcPr anchor="ctr">
+                    <a:lnL w="12700" cmpd="sng">
+                      <a:noFill/>
+                    </a:lnL>
+                    <a:lnR w="12700" cap="flat" cmpd="sng" algn="ctr">
+                      <a:solidFill>
+                        <a:schemeClr val="tx1"/>
+                      </a:solidFill>
+                      <a:prstDash val="solid"/>
+                      <a:round/>
+                      <a:headEnd type="none" w="med" len="med"/>
+                      <a:tailEnd type="none" w="med" len="med"/>
+                    </a:lnR>
+                    <a:lnT w="12700" cap="flat" cmpd="sng" algn="ctr">
+                      <a:solidFill>
+                        <a:schemeClr val="tx1"/>
+                      </a:solidFill>
+                      <a:prstDash val="solid"/>
+                      <a:round/>
+                      <a:headEnd type="none" w="med" len="med"/>
+                      <a:tailEnd type="none" w="med" len="med"/>
+                    </a:lnT>
+                    <a:lnB w="12700" cmpd="sng">
+                      <a:noFill/>
+                    </a:lnB>
+                    <a:lnTlToBr w="12700" cmpd="sng">
+                      <a:noFill/>
+                      <a:prstDash val="solid"/>
+                    </a:lnTlToBr>
+                    <a:lnBlToTr w="12700" cmpd="sng">
+                      <a:noFill/>
+                      <a:prstDash val="solid"/>
+                    </a:lnBlToTr>
+                  </a:tcPr>
+                </a:tc>
+                <a:tc>
+                  <a:txBody>
+                    <a:bodyPr/>
+                    <a:lstStyle/>
+                    <a:p>
+                      <a:pPr algn="r">
+                        <a:buNone/>
+                      </a:pPr>
+                      <a:r>
+                        <a:rPr lang="en-GB" sz="2600" dirty="0">
+                          <a:effectLst/>
+                        </a:rPr>
+                        <a:t>0</a:t>
+                      </a:r>
+                    </a:p>
+                  </a:txBody>
+                  <a:tcPr anchor="ctr">
+                    <a:lnL w="12700" cap="flat" cmpd="sng" algn="ctr">
+                      <a:solidFill>
+                        <a:schemeClr val="tx1"/>
+                      </a:solidFill>
+                      <a:prstDash val="solid"/>
+                      <a:round/>
+                      <a:headEnd type="none" w="med" len="med"/>
+                      <a:tailEnd type="none" w="med" len="med"/>
+                    </a:lnL>
+                    <a:lnR w="12700" cap="flat" cmpd="sng" algn="ctr">
+                      <a:solidFill>
+                        <a:schemeClr val="tx1"/>
+                      </a:solidFill>
+                      <a:prstDash val="solid"/>
+                      <a:round/>
+                      <a:headEnd type="none" w="med" len="med"/>
+                      <a:tailEnd type="none" w="med" len="med"/>
+                    </a:lnR>
+                    <a:lnT w="12700" cap="flat" cmpd="sng" algn="ctr">
+                      <a:solidFill>
+                        <a:schemeClr val="tx1"/>
+                      </a:solidFill>
+                      <a:prstDash val="solid"/>
+                      <a:round/>
+                      <a:headEnd type="none" w="med" len="med"/>
+                      <a:tailEnd type="none" w="med" len="med"/>
+                    </a:lnT>
+                    <a:lnB w="12700" cmpd="sng">
+                      <a:noFill/>
+                    </a:lnB>
+                    <a:lnTlToBr w="12700" cmpd="sng">
+                      <a:noFill/>
+                      <a:prstDash val="solid"/>
+                    </a:lnTlToBr>
+                    <a:lnBlToTr w="12700" cmpd="sng">
+                      <a:noFill/>
+                      <a:prstDash val="solid"/>
+                    </a:lnBlToTr>
+                  </a:tcPr>
+                </a:tc>
+                <a:tc>
+                  <a:txBody>
+                    <a:bodyPr/>
+                    <a:lstStyle/>
+                    <a:p>
+                      <a:pPr>
+                        <a:buNone/>
+                      </a:pPr>
+                      <a:r>
+                        <a:rPr lang="en-GB" sz="2600" dirty="0"/>
+                        <a:t>0</a:t>
+                      </a:r>
+                    </a:p>
+                  </a:txBody>
+                  <a:tcPr anchor="ctr">
+                    <a:lnL w="12700" cap="flat" cmpd="sng" algn="ctr">
+                      <a:solidFill>
+                        <a:schemeClr val="tx1"/>
+                      </a:solidFill>
+                      <a:prstDash val="solid"/>
+                      <a:round/>
+                      <a:headEnd type="none" w="med" len="med"/>
+                      <a:tailEnd type="none" w="med" len="med"/>
+                    </a:lnL>
+                    <a:lnR w="12700" cap="flat" cmpd="sng" algn="ctr">
+                      <a:solidFill>
+                        <a:schemeClr val="tx1"/>
+                      </a:solidFill>
+                      <a:prstDash val="solid"/>
+                      <a:round/>
+                      <a:headEnd type="none" w="med" len="med"/>
+                      <a:tailEnd type="none" w="med" len="med"/>
+                    </a:lnR>
+                    <a:lnT w="12700" cap="flat" cmpd="sng" algn="ctr">
+                      <a:solidFill>
+                        <a:schemeClr val="tx1"/>
+                      </a:solidFill>
+                      <a:prstDash val="solid"/>
+                      <a:round/>
+                      <a:headEnd type="none" w="med" len="med"/>
+                      <a:tailEnd type="none" w="med" len="med"/>
+                    </a:lnT>
+                    <a:lnB w="12700" cmpd="sng">
+                      <a:noFill/>
+                    </a:lnB>
+                    <a:lnTlToBr w="12700" cmpd="sng">
+                      <a:noFill/>
+                      <a:prstDash val="solid"/>
+                    </a:lnTlToBr>
+                    <a:lnBlToTr w="12700" cmpd="sng">
+                      <a:noFill/>
+                      <a:prstDash val="solid"/>
+                    </a:lnBlToTr>
+                  </a:tcPr>
+                </a:tc>
+                <a:tc>
+                  <a:txBody>
+                    <a:bodyPr/>
+                    <a:lstStyle/>
+                    <a:p>
+                      <a:pPr>
+                        <a:buNone/>
+                      </a:pPr>
+                      <a:r>
+                        <a:rPr lang="en-GB" sz="2600" dirty="0"/>
+                        <a:t>D</a:t>
+                      </a:r>
+                    </a:p>
+                  </a:txBody>
+                  <a:tcPr anchor="ctr">
+                    <a:lnL w="12700" cap="flat" cmpd="sng" algn="ctr">
+                      <a:solidFill>
+                        <a:schemeClr val="tx1"/>
+                      </a:solidFill>
+                      <a:prstDash val="solid"/>
+                      <a:round/>
+                      <a:headEnd type="none" w="med" len="med"/>
+                      <a:tailEnd type="none" w="med" len="med"/>
+                    </a:lnL>
+                    <a:lnR w="12700" cmpd="sng">
+                      <a:noFill/>
+                    </a:lnR>
+                    <a:lnT w="12700" cap="flat" cmpd="sng" algn="ctr">
+                      <a:solidFill>
+                        <a:schemeClr val="tx1"/>
+                      </a:solidFill>
+                      <a:prstDash val="solid"/>
+                      <a:round/>
+                      <a:headEnd type="none" w="med" len="med"/>
+                      <a:tailEnd type="none" w="med" len="med"/>
+                    </a:lnT>
+                    <a:lnB w="12700" cmpd="sng">
+                      <a:noFill/>
+                    </a:lnB>
+                    <a:lnTlToBr w="12700" cmpd="sng">
+                      <a:noFill/>
+                      <a:prstDash val="solid"/>
+                    </a:lnTlToBr>
+                    <a:lnBlToTr w="12700" cmpd="sng">
+                      <a:noFill/>
+                      <a:prstDash val="solid"/>
+                    </a:lnBlToTr>
+                  </a:tcPr>
+                </a:tc>
+                <a:extLst>
+                  <a:ext uri="{0D108BD9-81ED-4DB2-BD59-A6C34878D82A}">
+                    <a16:rowId xmlns:a16="http://schemas.microsoft.com/office/drawing/2014/main" val="1018681201"/>
+                  </a:ext>
+                </a:extLst>
+              </a:tr>
+              <a:tr h="0">
+                <a:tc>
+                  <a:txBody>
+                    <a:bodyPr/>
+                    <a:lstStyle/>
+                    <a:p>
+                      <a:pPr>
+                        <a:buNone/>
+                      </a:pPr>
+                      <a:endParaRPr lang="en-GB" sz="2600" dirty="0"/>
+                    </a:p>
+                  </a:txBody>
+                  <a:tcPr anchor="ctr">
+                    <a:lnL w="12700" cmpd="sng">
+                      <a:noFill/>
+                    </a:lnL>
+                    <a:lnR w="12700" cap="flat" cmpd="sng" algn="ctr">
+                      <a:solidFill>
+                        <a:schemeClr val="tx1"/>
+                      </a:solidFill>
+                      <a:prstDash val="solid"/>
+                      <a:round/>
+                      <a:headEnd type="none" w="med" len="med"/>
+                      <a:tailEnd type="none" w="med" len="med"/>
+                    </a:lnR>
+                    <a:lnT w="12700" cmpd="sng">
+                      <a:noFill/>
+                    </a:lnT>
+                    <a:lnB w="12700" cap="flat" cmpd="sng" algn="ctr">
+                      <a:solidFill>
+                        <a:schemeClr val="tx1"/>
+                      </a:solidFill>
+                      <a:prstDash val="solid"/>
+                      <a:round/>
+                      <a:headEnd type="none" w="med" len="med"/>
+                      <a:tailEnd type="none" w="med" len="med"/>
+                    </a:lnB>
+                    <a:lnTlToBr w="12700" cmpd="sng">
+                      <a:noFill/>
+                      <a:prstDash val="solid"/>
+                    </a:lnTlToBr>
+                    <a:lnBlToTr w="12700" cmpd="sng">
+                      <a:noFill/>
+                      <a:prstDash val="solid"/>
+                    </a:lnBlToTr>
+                  </a:tcPr>
+                </a:tc>
+                <a:tc>
+                  <a:txBody>
+                    <a:bodyPr/>
+                    <a:lstStyle/>
+                    <a:p>
+                      <a:pPr algn="r">
+                        <a:buNone/>
+                      </a:pPr>
+                      <a:endParaRPr lang="en-GB" sz="2600" dirty="0">
+                        <a:effectLst/>
+                      </a:endParaRPr>
+                    </a:p>
+                  </a:txBody>
+                  <a:tcPr anchor="ctr">
+                    <a:lnL w="12700" cap="flat" cmpd="sng" algn="ctr">
+                      <a:solidFill>
+                        <a:schemeClr val="tx1"/>
+                      </a:solidFill>
+                      <a:prstDash val="solid"/>
+                      <a:round/>
+                      <a:headEnd type="none" w="med" len="med"/>
+                      <a:tailEnd type="none" w="med" len="med"/>
+                    </a:lnL>
+                    <a:lnR w="12700" cap="flat" cmpd="sng" algn="ctr">
+                      <a:solidFill>
+                        <a:schemeClr val="tx1"/>
+                      </a:solidFill>
+                      <a:prstDash val="solid"/>
+                      <a:round/>
+                      <a:headEnd type="none" w="med" len="med"/>
+                      <a:tailEnd type="none" w="med" len="med"/>
+                    </a:lnR>
+                    <a:lnT w="12700" cmpd="sng">
+                      <a:noFill/>
+                    </a:lnT>
+                    <a:lnB w="12700" cap="flat" cmpd="sng" algn="ctr">
+                      <a:solidFill>
+                        <a:schemeClr val="tx1"/>
+                      </a:solidFill>
+                      <a:prstDash val="solid"/>
+                      <a:round/>
+                      <a:headEnd type="none" w="med" len="med"/>
+                      <a:tailEnd type="none" w="med" len="med"/>
+                    </a:lnB>
+                    <a:lnTlToBr w="12700" cmpd="sng">
+                      <a:noFill/>
+                      <a:prstDash val="solid"/>
+                    </a:lnTlToBr>
+                    <a:lnBlToTr w="12700" cmpd="sng">
+                      <a:noFill/>
+                      <a:prstDash val="solid"/>
+                    </a:lnBlToTr>
+                  </a:tcPr>
+                </a:tc>
+                <a:tc>
+                  <a:txBody>
+                    <a:bodyPr/>
+                    <a:lstStyle/>
+                    <a:p>
+                      <a:pPr>
+                        <a:buNone/>
+                      </a:pPr>
+                      <a:r>
+                        <a:rPr lang="en-GB" sz="2600" dirty="0"/>
+                        <a:t>1</a:t>
+                      </a:r>
+                    </a:p>
+                  </a:txBody>
+                  <a:tcPr anchor="ctr">
+                    <a:lnL w="12700" cap="flat" cmpd="sng" algn="ctr">
+                      <a:solidFill>
+                        <a:schemeClr val="tx1"/>
+                      </a:solidFill>
+                      <a:prstDash val="solid"/>
+                      <a:round/>
+                      <a:headEnd type="none" w="med" len="med"/>
+                      <a:tailEnd type="none" w="med" len="med"/>
+                    </a:lnL>
+                    <a:lnR w="12700" cap="flat" cmpd="sng" algn="ctr">
+                      <a:solidFill>
+                        <a:schemeClr val="tx1"/>
+                      </a:solidFill>
+                      <a:prstDash val="solid"/>
+                      <a:round/>
+                      <a:headEnd type="none" w="med" len="med"/>
+                      <a:tailEnd type="none" w="med" len="med"/>
+                    </a:lnR>
+                    <a:lnT w="12700" cmpd="sng">
+                      <a:noFill/>
+                    </a:lnT>
+                    <a:lnB w="12700" cap="flat" cmpd="sng" algn="ctr">
+                      <a:solidFill>
+                        <a:schemeClr val="tx1"/>
+                      </a:solidFill>
+                      <a:prstDash val="solid"/>
+                      <a:round/>
+                      <a:headEnd type="none" w="med" len="med"/>
+                      <a:tailEnd type="none" w="med" len="med"/>
+                    </a:lnB>
+                    <a:lnTlToBr w="12700" cmpd="sng">
+                      <a:noFill/>
+                      <a:prstDash val="solid"/>
+                    </a:lnTlToBr>
+                    <a:lnBlToTr w="12700" cmpd="sng">
+                      <a:noFill/>
+                      <a:prstDash val="solid"/>
+                    </a:lnBlToTr>
+                  </a:tcPr>
+                </a:tc>
+                <a:tc>
+                  <a:txBody>
+                    <a:bodyPr/>
+                    <a:lstStyle/>
+                    <a:p>
+                      <a:pPr marL="0" marR="0" lvl="0" indent="0" algn="r" defTabSz="584200" rtl="0" eaLnBrk="1" fontAlgn="auto" latinLnBrk="0" hangingPunct="1">
+                        <a:lnSpc>
+                          <a:spcPct val="100000"/>
+                        </a:lnSpc>
+                        <a:spcBef>
+                          <a:spcPts val="0"/>
+                        </a:spcBef>
+                        <a:spcAft>
+                          <a:spcPts val="0"/>
+                        </a:spcAft>
+                        <a:buClrTx/>
+                        <a:buSzTx/>
+                        <a:buFontTx/>
+                        <a:buNone/>
+                        <a:tabLst/>
+                        <a:defRPr/>
+                      </a:pPr>
+                      <a:r>
+                        <a:rPr lang="en-GB" sz="2600" dirty="0"/>
+                        <a:t>C</a:t>
+                      </a:r>
+                    </a:p>
+                  </a:txBody>
+                  <a:tcPr anchor="ctr">
+                    <a:lnL w="12700" cap="flat" cmpd="sng" algn="ctr">
+                      <a:solidFill>
+                        <a:schemeClr val="tx1"/>
+                      </a:solidFill>
+                      <a:prstDash val="solid"/>
+                      <a:round/>
+                      <a:headEnd type="none" w="med" len="med"/>
+                      <a:tailEnd type="none" w="med" len="med"/>
+                    </a:lnL>
+                    <a:lnR w="12700" cmpd="sng">
+                      <a:noFill/>
+                    </a:lnR>
+                    <a:lnT w="12700" cmpd="sng">
+                      <a:noFill/>
+                    </a:lnT>
+                    <a:lnB w="12700" cap="flat" cmpd="sng" algn="ctr">
+                      <a:solidFill>
+                        <a:schemeClr val="tx1"/>
+                      </a:solidFill>
+                      <a:prstDash val="solid"/>
+                      <a:round/>
+                      <a:headEnd type="none" w="med" len="med"/>
+                      <a:tailEnd type="none" w="med" len="med"/>
+                    </a:lnB>
+                    <a:lnTlToBr w="12700" cmpd="sng">
+                      <a:noFill/>
+                      <a:prstDash val="solid"/>
+                    </a:lnTlToBr>
+                    <a:lnBlToTr w="12700" cmpd="sng">
+                      <a:noFill/>
+                      <a:prstDash val="solid"/>
+                    </a:lnBlToTr>
+                  </a:tcPr>
+                </a:tc>
+                <a:extLst>
+                  <a:ext uri="{0D108BD9-81ED-4DB2-BD59-A6C34878D82A}">
+                    <a16:rowId xmlns:a16="http://schemas.microsoft.com/office/drawing/2014/main" val="948567101"/>
+                  </a:ext>
+                </a:extLst>
+              </a:tr>
+              <a:tr h="0">
+                <a:tc>
+                  <a:txBody>
+                    <a:bodyPr/>
+                    <a:lstStyle/>
+                    <a:p>
+                      <a:pPr>
+                        <a:buNone/>
+                      </a:pPr>
+                      <a:r>
+                        <a:rPr lang="en-GB" sz="2600" dirty="0"/>
+                        <a:t>D</a:t>
+                      </a:r>
+                    </a:p>
+                  </a:txBody>
+                  <a:tcPr anchor="ctr">
+                    <a:lnL w="12700" cmpd="sng">
+                      <a:noFill/>
+                    </a:lnL>
+                    <a:lnR w="12700" cap="flat" cmpd="sng" algn="ctr">
+                      <a:solidFill>
+                        <a:schemeClr val="tx1"/>
+                      </a:solidFill>
+                      <a:prstDash val="solid"/>
+                      <a:round/>
+                      <a:headEnd type="none" w="med" len="med"/>
+                      <a:tailEnd type="none" w="med" len="med"/>
+                    </a:lnR>
+                    <a:lnT w="12700" cap="flat" cmpd="sng" algn="ctr">
+                      <a:solidFill>
+                        <a:schemeClr val="tx1"/>
+                      </a:solidFill>
+                      <a:prstDash val="solid"/>
+                      <a:round/>
+                      <a:headEnd type="none" w="med" len="med"/>
+                      <a:tailEnd type="none" w="med" len="med"/>
+                    </a:lnT>
+                    <a:lnB w="12700" cmpd="sng">
+                      <a:noFill/>
+                    </a:lnB>
+                    <a:lnTlToBr w="12700" cmpd="sng">
+                      <a:noFill/>
+                      <a:prstDash val="solid"/>
+                    </a:lnTlToBr>
+                    <a:lnBlToTr w="12700" cmpd="sng">
+                      <a:noFill/>
+                      <a:prstDash val="solid"/>
+                    </a:lnBlToTr>
+                    <a:noFill/>
+                  </a:tcPr>
+                </a:tc>
+                <a:tc>
+                  <a:txBody>
+                    <a:bodyPr/>
+                    <a:lstStyle/>
+                    <a:p>
+                      <a:pPr algn="r">
+                        <a:buNone/>
+                      </a:pPr>
+                      <a:r>
+                        <a:rPr lang="en-GB" sz="2600" dirty="0">
+                          <a:effectLst/>
+                        </a:rPr>
+                        <a:t>0</a:t>
+                      </a:r>
+                    </a:p>
+                  </a:txBody>
+                  <a:tcPr anchor="ctr">
+                    <a:lnL w="12700" cap="flat" cmpd="sng" algn="ctr">
+                      <a:solidFill>
+                        <a:schemeClr val="tx1"/>
+                      </a:solidFill>
+                      <a:prstDash val="solid"/>
+                      <a:round/>
+                      <a:headEnd type="none" w="med" len="med"/>
+                      <a:tailEnd type="none" w="med" len="med"/>
+                    </a:lnL>
+                    <a:lnR w="12700" cap="flat" cmpd="sng" algn="ctr">
+                      <a:solidFill>
+                        <a:schemeClr val="tx1"/>
+                      </a:solidFill>
+                      <a:prstDash val="solid"/>
+                      <a:round/>
+                      <a:headEnd type="none" w="med" len="med"/>
+                      <a:tailEnd type="none" w="med" len="med"/>
+                    </a:lnR>
+                    <a:lnT w="12700" cap="flat" cmpd="sng" algn="ctr">
+                      <a:solidFill>
+                        <a:schemeClr val="tx1"/>
+                      </a:solidFill>
+                      <a:prstDash val="solid"/>
+                      <a:round/>
+                      <a:headEnd type="none" w="med" len="med"/>
+                      <a:tailEnd type="none" w="med" len="med"/>
+                    </a:lnT>
+                    <a:lnB w="12700" cmpd="sng">
+                      <a:noFill/>
+                    </a:lnB>
+                    <a:lnTlToBr w="12700" cmpd="sng">
+                      <a:noFill/>
+                      <a:prstDash val="solid"/>
+                    </a:lnTlToBr>
+                    <a:lnBlToTr w="12700" cmpd="sng">
+                      <a:noFill/>
+                      <a:prstDash val="solid"/>
+                    </a:lnBlToTr>
+                    <a:noFill/>
+                  </a:tcPr>
+                </a:tc>
+                <a:tc>
+                  <a:txBody>
+                    <a:bodyPr/>
+                    <a:lstStyle/>
+                    <a:p>
+                      <a:pPr>
+                        <a:buNone/>
+                      </a:pPr>
+                      <a:r>
+                        <a:rPr lang="en-GB" sz="2600" dirty="0"/>
+                        <a:t>0</a:t>
+                      </a:r>
+                    </a:p>
+                  </a:txBody>
+                  <a:tcPr anchor="ctr">
+                    <a:lnL w="12700" cap="flat" cmpd="sng" algn="ctr">
+                      <a:solidFill>
+                        <a:schemeClr val="tx1"/>
+                      </a:solidFill>
+                      <a:prstDash val="solid"/>
+                      <a:round/>
+                      <a:headEnd type="none" w="med" len="med"/>
+                      <a:tailEnd type="none" w="med" len="med"/>
+                    </a:lnL>
+                    <a:lnR w="12700" cap="flat" cmpd="sng" algn="ctr">
+                      <a:solidFill>
+                        <a:schemeClr val="tx1"/>
+                      </a:solidFill>
+                      <a:prstDash val="solid"/>
+                      <a:round/>
+                      <a:headEnd type="none" w="med" len="med"/>
+                      <a:tailEnd type="none" w="med" len="med"/>
+                    </a:lnR>
+                    <a:lnT w="12700" cap="flat" cmpd="sng" algn="ctr">
+                      <a:solidFill>
+                        <a:schemeClr val="tx1"/>
+                      </a:solidFill>
+                      <a:prstDash val="solid"/>
+                      <a:round/>
+                      <a:headEnd type="none" w="med" len="med"/>
+                      <a:tailEnd type="none" w="med" len="med"/>
+                    </a:lnT>
+                    <a:lnB w="12700" cmpd="sng">
+                      <a:noFill/>
+                    </a:lnB>
+                    <a:lnTlToBr w="12700" cmpd="sng">
+                      <a:noFill/>
+                      <a:prstDash val="solid"/>
+                    </a:lnTlToBr>
+                    <a:lnBlToTr w="12700" cmpd="sng">
+                      <a:noFill/>
+                      <a:prstDash val="solid"/>
+                    </a:lnBlToTr>
+                    <a:noFill/>
+                  </a:tcPr>
+                </a:tc>
+                <a:tc>
+                  <a:txBody>
+                    <a:bodyPr/>
+                    <a:lstStyle/>
+                    <a:p>
+                      <a:pPr>
+                        <a:buNone/>
+                      </a:pPr>
+                      <a:r>
+                        <a:rPr lang="en-GB" sz="2600" dirty="0"/>
+                        <a:t>E</a:t>
+                      </a:r>
+                    </a:p>
+                  </a:txBody>
+                  <a:tcPr anchor="ctr">
+                    <a:lnL w="12700" cap="flat" cmpd="sng" algn="ctr">
+                      <a:solidFill>
+                        <a:schemeClr val="tx1"/>
+                      </a:solidFill>
+                      <a:prstDash val="solid"/>
+                      <a:round/>
+                      <a:headEnd type="none" w="med" len="med"/>
+                      <a:tailEnd type="none" w="med" len="med"/>
+                    </a:lnL>
+                    <a:lnR w="12700" cmpd="sng">
+                      <a:noFill/>
+                    </a:lnR>
+                    <a:lnT w="12700" cap="flat" cmpd="sng" algn="ctr">
+                      <a:solidFill>
+                        <a:schemeClr val="tx1"/>
+                      </a:solidFill>
+                      <a:prstDash val="solid"/>
+                      <a:round/>
+                      <a:headEnd type="none" w="med" len="med"/>
+                      <a:tailEnd type="none" w="med" len="med"/>
+                    </a:lnT>
+                    <a:lnB w="12700" cmpd="sng">
+                      <a:noFill/>
+                    </a:lnB>
+                    <a:lnTlToBr w="12700" cmpd="sng">
+                      <a:noFill/>
+                      <a:prstDash val="solid"/>
+                    </a:lnTlToBr>
+                    <a:lnBlToTr w="12700" cmpd="sng">
+                      <a:noFill/>
+                      <a:prstDash val="solid"/>
+                    </a:lnBlToTr>
+                    <a:noFill/>
+                  </a:tcPr>
+                </a:tc>
+                <a:extLst>
+                  <a:ext uri="{0D108BD9-81ED-4DB2-BD59-A6C34878D82A}">
+                    <a16:rowId xmlns:a16="http://schemas.microsoft.com/office/drawing/2014/main" val="1755242314"/>
+                  </a:ext>
+                </a:extLst>
+              </a:tr>
+              <a:tr h="0">
+                <a:tc>
+                  <a:txBody>
+                    <a:bodyPr/>
+                    <a:lstStyle/>
+                    <a:p>
+                      <a:pPr>
+                        <a:buNone/>
+                      </a:pPr>
+                      <a:endParaRPr lang="en-GB" sz="2600"/>
+                    </a:p>
+                  </a:txBody>
+                  <a:tcPr anchor="ctr">
+                    <a:lnL w="12700" cmpd="sng">
+                      <a:noFill/>
+                    </a:lnL>
+                    <a:lnR w="12700" cap="flat" cmpd="sng" algn="ctr">
+                      <a:solidFill>
+                        <a:schemeClr val="tx1"/>
+                      </a:solidFill>
+                      <a:prstDash val="solid"/>
+                      <a:round/>
+                      <a:headEnd type="none" w="med" len="med"/>
+                      <a:tailEnd type="none" w="med" len="med"/>
+                    </a:lnR>
+                    <a:lnT w="12700" cmpd="sng">
+                      <a:noFill/>
+                    </a:lnT>
+                    <a:lnB w="12700" cap="flat" cmpd="sng" algn="ctr">
+                      <a:solidFill>
+                        <a:schemeClr val="tx1"/>
+                      </a:solidFill>
+                      <a:prstDash val="solid"/>
+                      <a:round/>
+                      <a:headEnd type="none" w="med" len="med"/>
+                      <a:tailEnd type="none" w="med" len="med"/>
+                    </a:lnB>
+                    <a:lnTlToBr w="12700" cmpd="sng">
+                      <a:noFill/>
+                      <a:prstDash val="solid"/>
+                    </a:lnTlToBr>
+                    <a:lnBlToTr w="12700" cmpd="sng">
+                      <a:noFill/>
+                      <a:prstDash val="solid"/>
+                    </a:lnBlToTr>
+                    <a:noFill/>
+                  </a:tcPr>
+                </a:tc>
+                <a:tc>
+                  <a:txBody>
+                    <a:bodyPr/>
+                    <a:lstStyle/>
+                    <a:p>
+                      <a:pPr algn="r">
+                        <a:buNone/>
+                      </a:pPr>
+                      <a:endParaRPr lang="en-GB" sz="2600" dirty="0">
+                        <a:effectLst/>
+                      </a:endParaRPr>
+                    </a:p>
+                  </a:txBody>
+                  <a:tcPr anchor="ctr">
+                    <a:lnL w="12700" cap="flat" cmpd="sng" algn="ctr">
+                      <a:solidFill>
+                        <a:schemeClr val="tx1"/>
+                      </a:solidFill>
+                      <a:prstDash val="solid"/>
+                      <a:round/>
+                      <a:headEnd type="none" w="med" len="med"/>
+                      <a:tailEnd type="none" w="med" len="med"/>
+                    </a:lnL>
+                    <a:lnR w="12700" cap="flat" cmpd="sng" algn="ctr">
+                      <a:solidFill>
+                        <a:schemeClr val="tx1"/>
+                      </a:solidFill>
+                      <a:prstDash val="solid"/>
+                      <a:round/>
+                      <a:headEnd type="none" w="med" len="med"/>
+                      <a:tailEnd type="none" w="med" len="med"/>
+                    </a:lnR>
+                    <a:lnT w="12700" cmpd="sng">
+                      <a:noFill/>
+                    </a:lnT>
+                    <a:lnB w="12700" cap="flat" cmpd="sng" algn="ctr">
+                      <a:solidFill>
+                        <a:schemeClr val="tx1"/>
+                      </a:solidFill>
+                      <a:prstDash val="solid"/>
+                      <a:round/>
+                      <a:headEnd type="none" w="med" len="med"/>
+                      <a:tailEnd type="none" w="med" len="med"/>
+                    </a:lnB>
+                    <a:lnTlToBr w="12700" cmpd="sng">
+                      <a:noFill/>
+                      <a:prstDash val="solid"/>
+                    </a:lnTlToBr>
+                    <a:lnBlToTr w="12700" cmpd="sng">
+                      <a:noFill/>
+                      <a:prstDash val="solid"/>
+                    </a:lnBlToTr>
+                    <a:noFill/>
+                  </a:tcPr>
+                </a:tc>
+                <a:tc>
+                  <a:txBody>
+                    <a:bodyPr/>
+                    <a:lstStyle/>
+                    <a:p>
+                      <a:pPr>
+                        <a:buNone/>
+                      </a:pPr>
+                      <a:r>
+                        <a:rPr lang="en-GB" sz="2600" dirty="0"/>
+                        <a:t>1</a:t>
+                      </a:r>
+                    </a:p>
+                  </a:txBody>
+                  <a:tcPr anchor="ctr">
+                    <a:lnL w="12700" cap="flat" cmpd="sng" algn="ctr">
+                      <a:solidFill>
+                        <a:schemeClr val="tx1"/>
+                      </a:solidFill>
+                      <a:prstDash val="solid"/>
+                      <a:round/>
+                      <a:headEnd type="none" w="med" len="med"/>
+                      <a:tailEnd type="none" w="med" len="med"/>
+                    </a:lnL>
+                    <a:lnR w="12700" cap="flat" cmpd="sng" algn="ctr">
+                      <a:solidFill>
+                        <a:schemeClr val="tx1"/>
+                      </a:solidFill>
+                      <a:prstDash val="solid"/>
+                      <a:round/>
+                      <a:headEnd type="none" w="med" len="med"/>
+                      <a:tailEnd type="none" w="med" len="med"/>
+                    </a:lnR>
+                    <a:lnT w="12700" cmpd="sng">
+                      <a:noFill/>
+                    </a:lnT>
+                    <a:lnB w="12700" cap="flat" cmpd="sng" algn="ctr">
+                      <a:solidFill>
+                        <a:schemeClr val="tx1"/>
+                      </a:solidFill>
+                      <a:prstDash val="solid"/>
+                      <a:round/>
+                      <a:headEnd type="none" w="med" len="med"/>
+                      <a:tailEnd type="none" w="med" len="med"/>
+                    </a:lnB>
+                    <a:lnTlToBr w="12700" cmpd="sng">
+                      <a:noFill/>
+                      <a:prstDash val="solid"/>
+                    </a:lnTlToBr>
+                    <a:lnBlToTr w="12700" cmpd="sng">
+                      <a:noFill/>
+                      <a:prstDash val="solid"/>
+                    </a:lnBlToTr>
+                    <a:noFill/>
+                  </a:tcPr>
+                </a:tc>
+                <a:tc>
+                  <a:txBody>
+                    <a:bodyPr/>
+                    <a:lstStyle/>
+                    <a:p>
+                      <a:pPr>
+                        <a:buNone/>
+                      </a:pPr>
+                      <a:r>
+                        <a:rPr lang="en-GB" sz="2600" dirty="0"/>
+                        <a:t>A</a:t>
+                      </a:r>
+                    </a:p>
+                  </a:txBody>
+                  <a:tcPr anchor="ctr">
+                    <a:lnL w="12700" cap="flat" cmpd="sng" algn="ctr">
+                      <a:solidFill>
+                        <a:schemeClr val="tx1"/>
+                      </a:solidFill>
+                      <a:prstDash val="solid"/>
+                      <a:round/>
+                      <a:headEnd type="none" w="med" len="med"/>
+                      <a:tailEnd type="none" w="med" len="med"/>
+                    </a:lnL>
+                    <a:lnR w="12700" cmpd="sng">
+                      <a:noFill/>
+                    </a:lnR>
+                    <a:lnT w="12700" cmpd="sng">
+                      <a:noFill/>
+                    </a:lnT>
+                    <a:lnB w="12700" cap="flat" cmpd="sng" algn="ctr">
+                      <a:solidFill>
+                        <a:schemeClr val="tx1"/>
+                      </a:solidFill>
+                      <a:prstDash val="solid"/>
+                      <a:round/>
+                      <a:headEnd type="none" w="med" len="med"/>
+                      <a:tailEnd type="none" w="med" len="med"/>
+                    </a:lnB>
+                    <a:lnTlToBr w="12700" cmpd="sng">
+                      <a:noFill/>
+                      <a:prstDash val="solid"/>
+                    </a:lnTlToBr>
+                    <a:lnBlToTr w="12700" cmpd="sng">
+                      <a:noFill/>
+                      <a:prstDash val="solid"/>
+                    </a:lnBlToTr>
+                    <a:noFill/>
+                  </a:tcPr>
+                </a:tc>
+                <a:extLst>
+                  <a:ext uri="{0D108BD9-81ED-4DB2-BD59-A6C34878D82A}">
+                    <a16:rowId xmlns:a16="http://schemas.microsoft.com/office/drawing/2014/main" val="1425699198"/>
+                  </a:ext>
+                </a:extLst>
+              </a:tr>
+              <a:tr h="0">
+                <a:tc>
+                  <a:txBody>
+                    <a:bodyPr/>
+                    <a:lstStyle/>
+                    <a:p>
+                      <a:pPr>
+                        <a:buNone/>
+                      </a:pPr>
+                      <a:r>
+                        <a:rPr lang="en-GB" sz="2600"/>
+                        <a:t>E</a:t>
+                      </a:r>
+                    </a:p>
+                  </a:txBody>
+                  <a:tcPr anchor="ctr">
+                    <a:lnL w="12700" cmpd="sng">
+                      <a:noFill/>
+                    </a:lnL>
+                    <a:lnR w="12700" cap="flat" cmpd="sng" algn="ctr">
+                      <a:solidFill>
+                        <a:schemeClr val="tx1"/>
+                      </a:solidFill>
+                      <a:prstDash val="solid"/>
+                      <a:round/>
+                      <a:headEnd type="none" w="med" len="med"/>
+                      <a:tailEnd type="none" w="med" len="med"/>
+                    </a:lnR>
+                    <a:lnT w="12700" cap="flat" cmpd="sng" algn="ctr">
+                      <a:solidFill>
+                        <a:schemeClr val="tx1"/>
+                      </a:solidFill>
+                      <a:prstDash val="solid"/>
+                      <a:round/>
+                      <a:headEnd type="none" w="med" len="med"/>
+                      <a:tailEnd type="none" w="med" len="med"/>
+                    </a:lnT>
+                    <a:lnB w="12700" cmpd="sng">
+                      <a:noFill/>
+                    </a:lnB>
+                    <a:lnTlToBr w="12700" cmpd="sng">
+                      <a:noFill/>
+                      <a:prstDash val="solid"/>
+                    </a:lnTlToBr>
+                    <a:lnBlToTr w="12700" cmpd="sng">
+                      <a:noFill/>
+                      <a:prstDash val="solid"/>
+                    </a:lnBlToTr>
+                  </a:tcPr>
+                </a:tc>
+                <a:tc>
+                  <a:txBody>
+                    <a:bodyPr/>
+                    <a:lstStyle/>
+                    <a:p>
+                      <a:pPr algn="r">
+                        <a:buNone/>
+                      </a:pPr>
+                      <a:r>
+                        <a:rPr lang="en-GB" sz="2600">
+                          <a:effectLst/>
+                        </a:rPr>
+                        <a:t>1</a:t>
+                      </a:r>
+                    </a:p>
+                  </a:txBody>
+                  <a:tcPr anchor="ctr">
+                    <a:lnL w="12700" cap="flat" cmpd="sng" algn="ctr">
+                      <a:solidFill>
+                        <a:schemeClr val="tx1"/>
+                      </a:solidFill>
+                      <a:prstDash val="solid"/>
+                      <a:round/>
+                      <a:headEnd type="none" w="med" len="med"/>
+                      <a:tailEnd type="none" w="med" len="med"/>
+                    </a:lnL>
+                    <a:lnR w="12700" cap="flat" cmpd="sng" algn="ctr">
+                      <a:solidFill>
+                        <a:schemeClr val="tx1"/>
+                      </a:solidFill>
+                      <a:prstDash val="solid"/>
+                      <a:round/>
+                      <a:headEnd type="none" w="med" len="med"/>
+                      <a:tailEnd type="none" w="med" len="med"/>
+                    </a:lnR>
+                    <a:lnT w="12700" cap="flat" cmpd="sng" algn="ctr">
+                      <a:solidFill>
+                        <a:schemeClr val="tx1"/>
+                      </a:solidFill>
+                      <a:prstDash val="solid"/>
+                      <a:round/>
+                      <a:headEnd type="none" w="med" len="med"/>
+                      <a:tailEnd type="none" w="med" len="med"/>
+                    </a:lnT>
+                    <a:lnB w="12700" cmpd="sng">
+                      <a:noFill/>
+                    </a:lnB>
+                    <a:lnTlToBr w="12700" cmpd="sng">
+                      <a:noFill/>
+                      <a:prstDash val="solid"/>
+                    </a:lnTlToBr>
+                    <a:lnBlToTr w="12700" cmpd="sng">
+                      <a:noFill/>
+                      <a:prstDash val="solid"/>
+                    </a:lnBlToTr>
+                  </a:tcPr>
+                </a:tc>
+                <a:tc>
+                  <a:txBody>
+                    <a:bodyPr/>
+                    <a:lstStyle/>
+                    <a:p>
+                      <a:pPr>
+                        <a:buNone/>
+                      </a:pPr>
+                      <a:r>
+                        <a:rPr lang="en-GB" sz="2600" dirty="0"/>
+                        <a:t>0</a:t>
+                      </a:r>
+                    </a:p>
+                  </a:txBody>
+                  <a:tcPr anchor="ctr">
+                    <a:lnL w="12700" cap="flat" cmpd="sng" algn="ctr">
+                      <a:solidFill>
+                        <a:schemeClr val="tx1"/>
+                      </a:solidFill>
+                      <a:prstDash val="solid"/>
+                      <a:round/>
+                      <a:headEnd type="none" w="med" len="med"/>
+                      <a:tailEnd type="none" w="med" len="med"/>
+                    </a:lnL>
+                    <a:lnR w="12700" cap="flat" cmpd="sng" algn="ctr">
+                      <a:solidFill>
+                        <a:schemeClr val="tx1"/>
+                      </a:solidFill>
+                      <a:prstDash val="solid"/>
+                      <a:round/>
+                      <a:headEnd type="none" w="med" len="med"/>
+                      <a:tailEnd type="none" w="med" len="med"/>
+                    </a:lnR>
+                    <a:lnT w="12700" cap="flat" cmpd="sng" algn="ctr">
+                      <a:solidFill>
+                        <a:schemeClr val="tx1"/>
+                      </a:solidFill>
+                      <a:prstDash val="solid"/>
+                      <a:round/>
+                      <a:headEnd type="none" w="med" len="med"/>
+                      <a:tailEnd type="none" w="med" len="med"/>
+                    </a:lnT>
+                    <a:lnB w="12700" cmpd="sng">
+                      <a:noFill/>
+                    </a:lnB>
+                    <a:lnTlToBr w="12700" cmpd="sng">
+                      <a:noFill/>
+                      <a:prstDash val="solid"/>
+                    </a:lnTlToBr>
+                    <a:lnBlToTr w="12700" cmpd="sng">
+                      <a:noFill/>
+                      <a:prstDash val="solid"/>
+                    </a:lnBlToTr>
+                  </a:tcPr>
+                </a:tc>
+                <a:tc>
+                  <a:txBody>
+                    <a:bodyPr/>
+                    <a:lstStyle/>
+                    <a:p>
+                      <a:pPr>
+                        <a:buNone/>
+                      </a:pPr>
+                      <a:r>
+                        <a:rPr lang="en-GB" sz="2600" dirty="0"/>
+                        <a:t>E</a:t>
+                      </a:r>
+                    </a:p>
+                  </a:txBody>
+                  <a:tcPr anchor="ctr">
+                    <a:lnL w="12700" cap="flat" cmpd="sng" algn="ctr">
+                      <a:solidFill>
+                        <a:schemeClr val="tx1"/>
+                      </a:solidFill>
+                      <a:prstDash val="solid"/>
+                      <a:round/>
+                      <a:headEnd type="none" w="med" len="med"/>
+                      <a:tailEnd type="none" w="med" len="med"/>
+                    </a:lnL>
+                    <a:lnR w="12700" cmpd="sng">
+                      <a:noFill/>
+                    </a:lnR>
+                    <a:lnT w="12700" cap="flat" cmpd="sng" algn="ctr">
+                      <a:solidFill>
+                        <a:schemeClr val="tx1"/>
+                      </a:solidFill>
+                      <a:prstDash val="solid"/>
+                      <a:round/>
+                      <a:headEnd type="none" w="med" len="med"/>
+                      <a:tailEnd type="none" w="med" len="med"/>
+                    </a:lnT>
+                    <a:lnB w="12700" cmpd="sng">
+                      <a:noFill/>
+                    </a:lnB>
+                    <a:lnTlToBr w="12700" cmpd="sng">
+                      <a:noFill/>
+                      <a:prstDash val="solid"/>
+                    </a:lnTlToBr>
+                    <a:lnBlToTr w="12700" cmpd="sng">
+                      <a:noFill/>
+                      <a:prstDash val="solid"/>
+                    </a:lnBlToTr>
+                  </a:tcPr>
+                </a:tc>
+                <a:extLst>
+                  <a:ext uri="{0D108BD9-81ED-4DB2-BD59-A6C34878D82A}">
+                    <a16:rowId xmlns:a16="http://schemas.microsoft.com/office/drawing/2014/main" val="1031025890"/>
+                  </a:ext>
+                </a:extLst>
+              </a:tr>
+              <a:tr h="0">
+                <a:tc>
+                  <a:txBody>
+                    <a:bodyPr/>
+                    <a:lstStyle/>
+                    <a:p>
+                      <a:pPr>
+                        <a:buNone/>
+                      </a:pPr>
+                      <a:endParaRPr lang="en-GB" sz="2600"/>
+                    </a:p>
+                  </a:txBody>
+                  <a:tcPr anchor="ctr">
+                    <a:lnL w="12700" cmpd="sng">
+                      <a:noFill/>
+                    </a:lnL>
+                    <a:lnR w="12700" cap="flat" cmpd="sng" algn="ctr">
+                      <a:solidFill>
+                        <a:schemeClr val="tx1"/>
+                      </a:solidFill>
+                      <a:prstDash val="solid"/>
+                      <a:round/>
+                      <a:headEnd type="none" w="med" len="med"/>
+                      <a:tailEnd type="none" w="med" len="med"/>
+                    </a:lnR>
+                    <a:lnT w="12700" cmpd="sng">
+                      <a:noFill/>
+                    </a:lnT>
+                    <a:lnB w="12700" cmpd="sng">
+                      <a:noFill/>
+                    </a:lnB>
+                    <a:lnTlToBr w="12700" cmpd="sng">
+                      <a:noFill/>
+                      <a:prstDash val="solid"/>
+                    </a:lnTlToBr>
+                    <a:lnBlToTr w="12700" cmpd="sng">
+                      <a:noFill/>
+                      <a:prstDash val="solid"/>
+                    </a:lnBlToTr>
+                  </a:tcPr>
+                </a:tc>
+                <a:tc>
+                  <a:txBody>
+                    <a:bodyPr/>
+                    <a:lstStyle/>
+                    <a:p>
+                      <a:pPr algn="r">
+                        <a:buNone/>
+                      </a:pPr>
+                      <a:endParaRPr lang="en-GB" sz="2600">
+                        <a:effectLst/>
+                      </a:endParaRPr>
+                    </a:p>
+                  </a:txBody>
+                  <a:tcPr anchor="ctr">
+                    <a:lnL w="12700" cap="flat" cmpd="sng" algn="ctr">
+                      <a:solidFill>
+                        <a:schemeClr val="tx1"/>
+                      </a:solidFill>
+                      <a:prstDash val="solid"/>
+                      <a:round/>
+                      <a:headEnd type="none" w="med" len="med"/>
+                      <a:tailEnd type="none" w="med" len="med"/>
+                    </a:lnL>
+                    <a:lnR w="12700" cap="flat" cmpd="sng" algn="ctr">
+                      <a:solidFill>
+                        <a:schemeClr val="tx1"/>
+                      </a:solidFill>
+                      <a:prstDash val="solid"/>
+                      <a:round/>
+                      <a:headEnd type="none" w="med" len="med"/>
+                      <a:tailEnd type="none" w="med" len="med"/>
+                    </a:lnR>
+                    <a:lnT w="12700" cmpd="sng">
+                      <a:noFill/>
+                    </a:lnT>
+                    <a:lnB w="12700" cmpd="sng">
+                      <a:noFill/>
+                    </a:lnB>
+                    <a:lnTlToBr w="12700" cmpd="sng">
+                      <a:noFill/>
+                      <a:prstDash val="solid"/>
+                    </a:lnTlToBr>
+                    <a:lnBlToTr w="12700" cmpd="sng">
+                      <a:noFill/>
+                      <a:prstDash val="solid"/>
+                    </a:lnBlToTr>
+                  </a:tcPr>
+                </a:tc>
+                <a:tc>
+                  <a:txBody>
+                    <a:bodyPr/>
+                    <a:lstStyle/>
+                    <a:p>
+                      <a:pPr>
+                        <a:buNone/>
+                      </a:pPr>
+                      <a:r>
+                        <a:rPr lang="en-GB" sz="2600" dirty="0"/>
+                        <a:t>1</a:t>
+                      </a:r>
+                    </a:p>
+                  </a:txBody>
+                  <a:tcPr anchor="ctr">
+                    <a:lnL w="12700" cap="flat" cmpd="sng" algn="ctr">
+                      <a:solidFill>
+                        <a:schemeClr val="tx1"/>
+                      </a:solidFill>
+                      <a:prstDash val="solid"/>
+                      <a:round/>
+                      <a:headEnd type="none" w="med" len="med"/>
+                      <a:tailEnd type="none" w="med" len="med"/>
+                    </a:lnL>
+                    <a:lnR w="12700" cap="flat" cmpd="sng" algn="ctr">
+                      <a:solidFill>
+                        <a:schemeClr val="tx1"/>
+                      </a:solidFill>
+                      <a:prstDash val="solid"/>
+                      <a:round/>
+                      <a:headEnd type="none" w="med" len="med"/>
+                      <a:tailEnd type="none" w="med" len="med"/>
+                    </a:lnR>
+                    <a:lnT w="12700" cmpd="sng">
+                      <a:noFill/>
+                    </a:lnT>
+                    <a:lnB w="12700" cmpd="sng">
+                      <a:noFill/>
+                    </a:lnB>
+                    <a:lnTlToBr w="12700" cmpd="sng">
+                      <a:noFill/>
+                      <a:prstDash val="solid"/>
+                    </a:lnTlToBr>
+                    <a:lnBlToTr w="12700" cmpd="sng">
+                      <a:noFill/>
+                      <a:prstDash val="solid"/>
+                    </a:lnBlToTr>
+                  </a:tcPr>
+                </a:tc>
+                <a:tc>
+                  <a:txBody>
+                    <a:bodyPr/>
+                    <a:lstStyle/>
+                    <a:p>
+                      <a:pPr>
+                        <a:buNone/>
+                      </a:pPr>
+                      <a:r>
+                        <a:rPr lang="en-GB" sz="2600" dirty="0"/>
+                        <a:t>A</a:t>
+                      </a:r>
+                    </a:p>
+                  </a:txBody>
+                  <a:tcPr anchor="ctr">
+                    <a:lnL w="12700" cap="flat" cmpd="sng" algn="ctr">
+                      <a:solidFill>
+                        <a:schemeClr val="tx1"/>
+                      </a:solidFill>
+                      <a:prstDash val="solid"/>
+                      <a:round/>
+                      <a:headEnd type="none" w="med" len="med"/>
+                      <a:tailEnd type="none" w="med" len="med"/>
+                    </a:lnL>
+                    <a:lnR w="12700" cmpd="sng">
+                      <a:noFill/>
+                    </a:lnR>
+                    <a:lnT w="12700" cmpd="sng">
+                      <a:noFill/>
+                    </a:lnT>
+                    <a:lnB w="12700" cmpd="sng">
+                      <a:noFill/>
+                    </a:lnB>
+                    <a:lnTlToBr w="12700" cmpd="sng">
+                      <a:noFill/>
+                      <a:prstDash val="solid"/>
+                    </a:lnTlToBr>
+                    <a:lnBlToTr w="12700" cmpd="sng">
+                      <a:noFill/>
+                      <a:prstDash val="solid"/>
+                    </a:lnBlToTr>
+                  </a:tcPr>
+                </a:tc>
+                <a:extLst>
+                  <a:ext uri="{0D108BD9-81ED-4DB2-BD59-A6C34878D82A}">
+                    <a16:rowId xmlns:a16="http://schemas.microsoft.com/office/drawing/2014/main" val="2958631378"/>
+                  </a:ext>
+                </a:extLst>
+              </a:tr>
+            </a:tbl>
+          </a:graphicData>
+        </a:graphic>
+      </p:graphicFrame>
       <p:sp>
         <p:nvSpPr>
-          <p:cNvPr id="623" name="Slide Number"/>
-          <p:cNvSpPr txBox="1">
-            <a:spLocks noGrp="1"/>
-          </p:cNvSpPr>
-          <p:nvPr>
-            <p:ph type="sldNum" sz="quarter" idx="2"/>
-          </p:nvPr>
+          <p:cNvPr id="5" name="TextBox 4">
+            <a:extLst>
+              <a:ext uri="{FF2B5EF4-FFF2-40B4-BE49-F238E27FC236}">
+                <a16:creationId xmlns:a16="http://schemas.microsoft.com/office/drawing/2014/main" id="{8B88425B-2083-70F5-4DA2-49ABAFE79C2D}"/>
+              </a:ext>
+            </a:extLst>
+          </p:cNvPr>
+          <p:cNvSpPr txBox="1"/>
+          <p:nvPr/>
         </p:nvSpPr>
         <p:spPr>
-          <a:prstGeom prst="rect">
-            <a:avLst/>
-          </a:prstGeom>
-          <a:extLst>
-            <a:ext uri="{C572A759-6A51-4108-AA02-DFA0A04FC94B}">
-              <ma14:wrappingTextBoxFlag xmlns="" xmlns:m="http://schemas.openxmlformats.org/officeDocument/2006/math" xmlns:a14="http://schemas.microsoft.com/office/drawing/2010/main" xmlns:ma14="http://schemas.microsoft.com/office/mac/drawingml/2011/main" val="1"/>
-            </a:ext>
-          </a:extLst>
-        </p:spPr>
-        <p:txBody>
-          <a:bodyPr/>
-          <a:lstStyle/>
-          <a:p>
-            <a:fld id="{86CB4B4D-7CA3-9044-876B-883B54F8677D}" type="slidenum">
-              <a:rPr/>
-              <a:t>23</a:t>
-            </a:fld>
-            <a:endParaRPr/>
-          </a:p>
-        </p:txBody>
-      </p:sp>
-      <p:pic>
-        <p:nvPicPr>
-          <p:cNvPr id="624" name="Image" descr="Image"/>
-          <p:cNvPicPr>
-            <a:picLocks noChangeAspect="1"/>
-          </p:cNvPicPr>
-          <p:nvPr/>
-        </p:nvPicPr>
-        <p:blipFill>
-          <a:blip r:embed="rId2"/>
-          <a:stretch>
-            <a:fillRect/>
-          </a:stretch>
-        </p:blipFill>
-        <p:spPr>
           <a:xfrm>
-            <a:off x="148487" y="3600450"/>
-            <a:ext cx="12561198" cy="2582850"/>
+            <a:off x="636608" y="8114125"/>
+            <a:ext cx="11265221" cy="1087477"/>
           </a:xfrm>
           <a:prstGeom prst="rect">
             <a:avLst/>
           </a:prstGeom>
-          <a:ln w="12700">
+          <a:noFill/>
+          <a:ln w="12700" cap="flat">
+            <a:noFill/>
             <a:miter lim="400000"/>
           </a:ln>
+          <a:effectLst/>
+          <a:sp3d/>
         </p:spPr>
-      </p:pic>
+        <p:style>
+          <a:lnRef idx="0">
+            <a:scrgbClr r="0" g="0" b="0"/>
+          </a:lnRef>
+          <a:fillRef idx="0">
+            <a:scrgbClr r="0" g="0" b="0"/>
+          </a:fillRef>
+          <a:effectRef idx="0">
+            <a:scrgbClr r="0" g="0" b="0"/>
+          </a:effectRef>
+          <a:fontRef idx="none"/>
+        </p:style>
+        <p:txBody>
+          <a:bodyPr rot="0" spcFirstLastPara="1" vertOverflow="overflow" horzOverflow="overflow" vert="horz" wrap="square" lIns="50800" tIns="50800" rIns="50800" bIns="50800" numCol="1" spcCol="38100" rtlCol="0" anchor="ctr">
+            <a:spAutoFit/>
+          </a:bodyPr>
+          <a:lstStyle/>
+          <a:p>
+            <a:pPr marL="514350" marR="0" indent="-514350" algn="l" defTabSz="584200" rtl="0" fontAlgn="auto" latinLnBrk="0" hangingPunct="0">
+              <a:lnSpc>
+                <a:spcPct val="100000"/>
+              </a:lnSpc>
+              <a:spcBef>
+                <a:spcPts val="0"/>
+              </a:spcBef>
+              <a:spcAft>
+                <a:spcPts val="0"/>
+              </a:spcAft>
+              <a:buClrTx/>
+              <a:buSzTx/>
+              <a:buFontTx/>
+              <a:buAutoNum type="arabicPeriod"/>
+              <a:tabLst/>
+            </a:pPr>
+            <a:r>
+              <a:rPr kumimoji="0" lang="en-GB" sz="3200" b="0" i="0" u="none" strike="noStrike" cap="none" spc="0" normalizeH="0" baseline="0" dirty="0">
+                <a:ln>
+                  <a:noFill/>
+                </a:ln>
+                <a:solidFill>
+                  <a:srgbClr val="000000"/>
+                </a:solidFill>
+                <a:effectLst/>
+                <a:uFillTx/>
+                <a:latin typeface="+mn-lt"/>
+                <a:ea typeface="+mn-ea"/>
+                <a:cs typeface="+mn-cs"/>
+                <a:sym typeface="Helvetica"/>
+              </a:rPr>
+              <a:t>Draw the corresponding FSM?</a:t>
+            </a:r>
+            <a:endParaRPr lang="en-GB" dirty="0"/>
+          </a:p>
+          <a:p>
+            <a:pPr marL="514350" marR="0" indent="-514350" algn="l" defTabSz="584200" rtl="0" fontAlgn="auto" latinLnBrk="0" hangingPunct="0">
+              <a:lnSpc>
+                <a:spcPct val="100000"/>
+              </a:lnSpc>
+              <a:spcBef>
+                <a:spcPts val="0"/>
+              </a:spcBef>
+              <a:spcAft>
+                <a:spcPts val="0"/>
+              </a:spcAft>
+              <a:buClrTx/>
+              <a:buSzTx/>
+              <a:buFontTx/>
+              <a:buAutoNum type="arabicPeriod"/>
+              <a:tabLst/>
+            </a:pPr>
+            <a:r>
+              <a:rPr kumimoji="0" lang="en-GB" sz="3200" b="0" i="0" u="none" strike="noStrike" cap="none" spc="0" normalizeH="0" baseline="0" dirty="0">
+                <a:ln>
+                  <a:noFill/>
+                </a:ln>
+                <a:solidFill>
+                  <a:srgbClr val="000000"/>
+                </a:solidFill>
+                <a:effectLst/>
+                <a:uFillTx/>
+                <a:latin typeface="+mn-lt"/>
+                <a:ea typeface="+mn-ea"/>
+                <a:cs typeface="+mn-cs"/>
+                <a:sym typeface="Helvetica"/>
+              </a:rPr>
+              <a:t>Can you simplify it and merge some states together?</a:t>
+            </a:r>
+          </a:p>
+        </p:txBody>
+      </p:sp>
     </p:spTree>
+    <p:extLst>
+      <p:ext uri="{BB962C8B-B14F-4D97-AF65-F5344CB8AC3E}">
+        <p14:creationId xmlns:p14="http://schemas.microsoft.com/office/powerpoint/2010/main" val="792682310"/>
+      </p:ext>
+    </p:extLst>
   </p:cSld>
   <p:clrMapOvr>
     <a:masterClrMapping/>
   </p:clrMapOvr>
   <p:transition spd="med"/>
-  <p:timing>
-    <p:tnLst>
-      <p:par>
-        <p:cTn id="1" dur="indefinite" restart="never" fill="hold" nodeType="tmRoot">
-          <p:childTnLst>
-            <p:seq concurrent="1" prevAc="none" nextAc="seek">
-              <p:cTn id="2" dur="indefinite" fill="hold" nodeType="mainSeq">
-                <p:childTnLst>
-                  <p:par>
-                    <p:cTn id="3" fill="hold">
-                      <p:stCondLst>
-                        <p:cond delay="indefinite"/>
-                      </p:stCondLst>
-                      <p:childTnLst>
-                        <p:par>
-                          <p:cTn id="4" fill="hold">
-                            <p:stCondLst>
-                              <p:cond delay="0"/>
-                            </p:stCondLst>
-                            <p:childTnLst>
-                              <p:par>
-                                <p:cTn id="5" presetID="1" presetClass="entr" presetSubtype="0" fill="hold" grpId="1" nodeType="clickEffect">
-                                  <p:stCondLst>
-                                    <p:cond delay="0"/>
-                                  </p:stCondLst>
-                                  <p:iterate>
-                                    <p:tmAbs val="0"/>
-                                  </p:iterate>
-                                  <p:childTnLst>
-                                    <p:set>
-                                      <p:cBhvr>
-                                        <p:cTn id="6" fill="hold"/>
-                                        <p:tgtEl>
-                                          <p:spTgt spid="624"/>
-                                        </p:tgtEl>
-                                        <p:attrNameLst>
-                                          <p:attrName>style.visibility</p:attrName>
-                                        </p:attrNameLst>
-                                      </p:cBhvr>
-                                      <p:to>
-                                        <p:strVal val="visible"/>
-                                      </p:to>
-                                    </p:set>
-                                  </p:childTnLst>
-                                </p:cTn>
-                              </p:par>
-                            </p:childTnLst>
-                          </p:cTn>
-                        </p:par>
-                      </p:childTnLst>
-                    </p:cTn>
-                  </p:par>
-                </p:childTnLst>
-              </p:cTn>
-              <p:prevCondLst>
-                <p:cond evt="onPrev" delay="0">
-                  <p:tgtEl>
-                    <p:sldTgt/>
-                  </p:tgtEl>
-                </p:cond>
-              </p:prevCondLst>
-              <p:nextCondLst>
-                <p:cond evt="onNext" delay="0">
-                  <p:tgtEl>
-                    <p:sldTgt/>
-                  </p:tgtEl>
-                </p:cond>
-              </p:nextCondLst>
-            </p:seq>
-          </p:childTnLst>
-        </p:cTn>
-      </p:par>
-    </p:tnLst>
-    <p:bldLst>
-      <p:bldP spid="624" grpId="1" animBg="1" advAuto="0"/>
-    </p:bldLst>
-  </p:timing>
 </p:sld>
 </file>
 
@@ -20876,7 +23909,7 @@
           </a:prstGeom>
           <a:extLst>
             <a:ext uri="{C572A759-6A51-4108-AA02-DFA0A04FC94B}">
-              <ma14:wrappingTextBoxFlag xmlns="" xmlns:m="http://schemas.openxmlformats.org/officeDocument/2006/math" xmlns:a14="http://schemas.microsoft.com/office/drawing/2010/main" xmlns:ma14="http://schemas.microsoft.com/office/mac/drawingml/2011/main" val="1"/>
+              <ma14:wrappingTextBoxFlag xmlns:ma14="http://schemas.microsoft.com/office/mac/drawingml/2011/main" xmlns:a14="http://schemas.microsoft.com/office/drawing/2010/main" xmlns:m="http://schemas.openxmlformats.org/officeDocument/2006/math" xmlns="" val="1"/>
             </a:ext>
           </a:extLst>
         </p:spPr>
@@ -20960,8 +23993,8 @@
       <p:par>
         <p:cTn id="1" dur="indefinite" restart="never" fill="hold" nodeType="tmRoot">
           <p:childTnLst>
-            <p:seq concurrent="1" prevAc="none" nextAc="seek">
-              <p:cTn id="2" dur="indefinite" fill="hold" nodeType="mainSeq">
+            <p:seq concurrent="1" nextAc="seek">
+              <p:cTn id="2" dur="indefinite" nodeType="mainSeq">
                 <p:childTnLst>
                   <p:par>
                     <p:cTn id="3" fill="hold">
@@ -20976,63 +24009,20 @@
                             </p:stCondLst>
                             <p:childTnLst>
                               <p:par>
-                                <p:cTn id="5" presetID="1" presetClass="entr" presetSubtype="0" fill="hold" grpId="1" nodeType="clickEffect">
+                                <p:cTn id="5" presetID="1" presetClass="entr" presetSubtype="0" fill="hold" nodeType="clickEffect">
                                   <p:stCondLst>
                                     <p:cond delay="0"/>
                                   </p:stCondLst>
-                                  <p:iterate>
-                                    <p:tmAbs val="0"/>
-                                  </p:iterate>
                                   <p:childTnLst>
                                     <p:set>
                                       <p:cBhvr>
-                                        <p:cTn id="6" fill="hold"/>
+                                        <p:cTn id="6" dur="1" fill="hold">
+                                          <p:stCondLst>
+                                            <p:cond delay="0"/>
+                                          </p:stCondLst>
+                                        </p:cTn>
                                         <p:tgtEl>
-                                          <p:spTgt spid="627"/>
-                                        </p:tgtEl>
-                                        <p:attrNameLst>
-                                          <p:attrName>style.visibility</p:attrName>
-                                        </p:attrNameLst>
-                                      </p:cBhvr>
-                                      <p:to>
-                                        <p:strVal val="visible"/>
-                                      </p:to>
-                                    </p:set>
-                                  </p:childTnLst>
-                                </p:cTn>
-                              </p:par>
-                            </p:childTnLst>
-                          </p:cTn>
-                        </p:par>
-                      </p:childTnLst>
-                    </p:cTn>
-                  </p:par>
-                  <p:par>
-                    <p:cTn id="7" fill="hold">
-                      <p:stCondLst>
-                        <p:cond delay="indefinite"/>
-                      </p:stCondLst>
-                      <p:childTnLst>
-                        <p:par>
-                          <p:cTn id="8" fill="hold">
-                            <p:stCondLst>
-                              <p:cond delay="0"/>
-                            </p:stCondLst>
-                            <p:childTnLst>
-                              <p:par>
-                                <p:cTn id="9" presetID="1" presetClass="entr" presetSubtype="0" fill="hold" grpId="2" nodeType="clickEffect">
-                                  <p:stCondLst>
-                                    <p:cond delay="0"/>
-                                  </p:stCondLst>
-                                  <p:iterate>
-                                    <p:tmAbs val="0"/>
-                                  </p:iterate>
-                                  <p:childTnLst>
-                                    <p:set>
-                                      <p:cBhvr>
-                                        <p:cTn id="10" fill="hold"/>
-                                        <p:tgtEl>
-                                          <p:spTgt spid="629"/>
+                                          <p:spTgt spid="2"/>
                                         </p:tgtEl>
                                         <p:attrNameLst>
                                           <p:attrName>style.visibility</p:attrName>
@@ -21072,10 +24062,6 @@
         </p:cTn>
       </p:par>
     </p:tnLst>
-    <p:bldLst>
-      <p:bldP spid="627" grpId="1" animBg="1" advAuto="0"/>
-      <p:bldP spid="629" grpId="2" animBg="1" advAuto="0"/>
-    </p:bldLst>
   </p:timing>
 </p:sld>
 </file>
@@ -21145,7 +24131,7 @@
           </a:prstGeom>
           <a:extLst>
             <a:ext uri="{C572A759-6A51-4108-AA02-DFA0A04FC94B}">
-              <ma14:wrappingTextBoxFlag xmlns="" xmlns:m="http://schemas.openxmlformats.org/officeDocument/2006/math" xmlns:a14="http://schemas.microsoft.com/office/drawing/2010/main" xmlns:ma14="http://schemas.microsoft.com/office/mac/drawingml/2011/main" val="1"/>
+              <ma14:wrappingTextBoxFlag xmlns:ma14="http://schemas.microsoft.com/office/mac/drawingml/2011/main" xmlns:a14="http://schemas.microsoft.com/office/drawing/2010/main" xmlns:m="http://schemas.openxmlformats.org/officeDocument/2006/math" xmlns="" val="1"/>
             </a:ext>
           </a:extLst>
         </p:spPr>
@@ -21183,7 +24169,7 @@
           </a:ln>
           <a:extLst>
             <a:ext uri="{C572A759-6A51-4108-AA02-DFA0A04FC94B}">
-              <ma14:wrappingTextBoxFlag xmlns="" xmlns:m="http://schemas.openxmlformats.org/officeDocument/2006/math" xmlns:a14="http://schemas.microsoft.com/office/drawing/2010/main" xmlns:ma14="http://schemas.microsoft.com/office/mac/drawingml/2011/main" val="1"/>
+              <ma14:wrappingTextBoxFlag xmlns:ma14="http://schemas.microsoft.com/office/mac/drawingml/2011/main" xmlns:a14="http://schemas.microsoft.com/office/drawing/2010/main" xmlns:m="http://schemas.openxmlformats.org/officeDocument/2006/math" xmlns="" val="1"/>
             </a:ext>
           </a:extLst>
         </p:spPr>
@@ -22737,7 +25723,7 @@
           <a:effectLst/>
           <a:extLst>
             <a:ext uri="{C572A759-6A51-4108-AA02-DFA0A04FC94B}">
-              <ma14:wrappingTextBoxFlag xmlns="" xmlns:m="http://schemas.openxmlformats.org/officeDocument/2006/math" xmlns:a14="http://schemas.microsoft.com/office/drawing/2010/main" xmlns:ma14="http://schemas.microsoft.com/office/mac/drawingml/2011/main" val="1"/>
+              <ma14:wrappingTextBoxFlag xmlns:ma14="http://schemas.microsoft.com/office/mac/drawingml/2011/main" xmlns:a14="http://schemas.microsoft.com/office/drawing/2010/main" xmlns:m="http://schemas.openxmlformats.org/officeDocument/2006/math" xmlns="" val="1"/>
             </a:ext>
           </a:extLst>
         </p:spPr>
@@ -22782,7 +25768,7 @@
           <a:effectLst/>
           <a:extLst>
             <a:ext uri="{C572A759-6A51-4108-AA02-DFA0A04FC94B}">
-              <ma14:wrappingTextBoxFlag xmlns="" xmlns:m="http://schemas.openxmlformats.org/officeDocument/2006/math" xmlns:a14="http://schemas.microsoft.com/office/drawing/2010/main" xmlns:ma14="http://schemas.microsoft.com/office/mac/drawingml/2011/main" val="1"/>
+              <ma14:wrappingTextBoxFlag xmlns:ma14="http://schemas.microsoft.com/office/mac/drawingml/2011/main" xmlns:a14="http://schemas.microsoft.com/office/drawing/2010/main" xmlns:m="http://schemas.openxmlformats.org/officeDocument/2006/math" xmlns="" val="1"/>
             </a:ext>
           </a:extLst>
         </p:spPr>
@@ -22827,7 +25813,7 @@
           <a:effectLst/>
           <a:extLst>
             <a:ext uri="{C572A759-6A51-4108-AA02-DFA0A04FC94B}">
-              <ma14:wrappingTextBoxFlag xmlns="" xmlns:m="http://schemas.openxmlformats.org/officeDocument/2006/math" xmlns:a14="http://schemas.microsoft.com/office/drawing/2010/main" xmlns:ma14="http://schemas.microsoft.com/office/mac/drawingml/2011/main" val="1"/>
+              <ma14:wrappingTextBoxFlag xmlns:ma14="http://schemas.microsoft.com/office/mac/drawingml/2011/main" xmlns:a14="http://schemas.microsoft.com/office/drawing/2010/main" xmlns:m="http://schemas.openxmlformats.org/officeDocument/2006/math" xmlns="" val="1"/>
             </a:ext>
           </a:extLst>
         </p:spPr>
@@ -22970,7 +25956,7 @@
           </a:prstGeom>
           <a:extLst>
             <a:ext uri="{C572A759-6A51-4108-AA02-DFA0A04FC94B}">
-              <ma14:wrappingTextBoxFlag xmlns="" xmlns:m="http://schemas.openxmlformats.org/officeDocument/2006/math" xmlns:a14="http://schemas.microsoft.com/office/drawing/2010/main" xmlns:ma14="http://schemas.microsoft.com/office/mac/drawingml/2011/main" val="1"/>
+              <ma14:wrappingTextBoxFlag xmlns:ma14="http://schemas.microsoft.com/office/mac/drawingml/2011/main" xmlns:a14="http://schemas.microsoft.com/office/drawing/2010/main" xmlns:m="http://schemas.openxmlformats.org/officeDocument/2006/math" xmlns="" val="1"/>
             </a:ext>
           </a:extLst>
         </p:spPr>
@@ -23261,8 +26247,8 @@
       <p:par>
         <p:cTn id="1" dur="indefinite" restart="never" fill="hold" nodeType="tmRoot">
           <p:childTnLst>
-            <p:seq concurrent="1" prevAc="none" nextAc="seek">
-              <p:cTn id="2" dur="indefinite" fill="hold" nodeType="mainSeq">
+            <p:seq concurrent="1" nextAc="seek">
+              <p:cTn id="2" dur="indefinite" nodeType="mainSeq">
                 <p:childTnLst>
                   <p:par>
                     <p:cTn id="3" fill="hold">
@@ -23277,63 +26263,20 @@
                             </p:stCondLst>
                             <p:childTnLst>
                               <p:par>
-                                <p:cTn id="5" presetID="1" presetClass="entr" presetSubtype="0" fill="hold" grpId="1" nodeType="clickEffect">
+                                <p:cTn id="5" presetID="1" presetClass="entr" presetSubtype="0" fill="hold" nodeType="clickEffect">
                                   <p:stCondLst>
                                     <p:cond delay="0"/>
                                   </p:stCondLst>
-                                  <p:iterate>
-                                    <p:tmAbs val="0"/>
-                                  </p:iterate>
                                   <p:childTnLst>
                                     <p:set>
                                       <p:cBhvr>
-                                        <p:cTn id="6" fill="hold"/>
+                                        <p:cTn id="6" dur="1" fill="hold">
+                                          <p:stCondLst>
+                                            <p:cond delay="0"/>
+                                          </p:stCondLst>
+                                        </p:cTn>
                                         <p:tgtEl>
-                                          <p:spTgt spid="662"/>
-                                        </p:tgtEl>
-                                        <p:attrNameLst>
-                                          <p:attrName>style.visibility</p:attrName>
-                                        </p:attrNameLst>
-                                      </p:cBhvr>
-                                      <p:to>
-                                        <p:strVal val="visible"/>
-                                      </p:to>
-                                    </p:set>
-                                  </p:childTnLst>
-                                </p:cTn>
-                              </p:par>
-                            </p:childTnLst>
-                          </p:cTn>
-                        </p:par>
-                      </p:childTnLst>
-                    </p:cTn>
-                  </p:par>
-                  <p:par>
-                    <p:cTn id="7" fill="hold">
-                      <p:stCondLst>
-                        <p:cond delay="indefinite"/>
-                      </p:stCondLst>
-                      <p:childTnLst>
-                        <p:par>
-                          <p:cTn id="8" fill="hold">
-                            <p:stCondLst>
-                              <p:cond delay="0"/>
-                            </p:stCondLst>
-                            <p:childTnLst>
-                              <p:par>
-                                <p:cTn id="9" presetID="1" presetClass="entr" presetSubtype="0" fill="hold" grpId="2" nodeType="clickEffect">
-                                  <p:stCondLst>
-                                    <p:cond delay="0"/>
-                                  </p:stCondLst>
-                                  <p:iterate>
-                                    <p:tmAbs val="0"/>
-                                  </p:iterate>
-                                  <p:childTnLst>
-                                    <p:set>
-                                      <p:cBhvr>
-                                        <p:cTn id="10" fill="hold"/>
-                                        <p:tgtEl>
-                                          <p:spTgt spid="668"/>
+                                          <p:spTgt spid="4"/>
                                         </p:tgtEl>
                                         <p:attrNameLst>
                                           <p:attrName>style.visibility</p:attrName>
@@ -23373,10 +26316,6 @@
         </p:cTn>
       </p:par>
     </p:tnLst>
-    <p:bldLst>
-      <p:bldP spid="662" grpId="1" animBg="1" advAuto="0"/>
-      <p:bldP spid="668" grpId="2" animBg="1" advAuto="0"/>
-    </p:bldLst>
   </p:timing>
 </p:sld>
 </file>
@@ -23414,7 +26353,7 @@
           </a:prstGeom>
           <a:extLst>
             <a:ext uri="{C572A759-6A51-4108-AA02-DFA0A04FC94B}">
-              <ma14:wrappingTextBoxFlag xmlns="" xmlns:m="http://schemas.openxmlformats.org/officeDocument/2006/math" xmlns:a14="http://schemas.microsoft.com/office/drawing/2010/main" xmlns:ma14="http://schemas.microsoft.com/office/mac/drawingml/2011/main" val="1"/>
+              <ma14:wrappingTextBoxFlag xmlns:ma14="http://schemas.microsoft.com/office/mac/drawingml/2011/main" xmlns:a14="http://schemas.microsoft.com/office/drawing/2010/main" xmlns:m="http://schemas.openxmlformats.org/officeDocument/2006/math" xmlns="" val="1"/>
             </a:ext>
           </a:extLst>
         </p:spPr>
@@ -23452,7 +26391,7 @@
           </a:ln>
           <a:extLst>
             <a:ext uri="{C572A759-6A51-4108-AA02-DFA0A04FC94B}">
-              <ma14:wrappingTextBoxFlag xmlns="" xmlns:m="http://schemas.openxmlformats.org/officeDocument/2006/math" xmlns:a14="http://schemas.microsoft.com/office/drawing/2010/main" xmlns:ma14="http://schemas.microsoft.com/office/mac/drawingml/2011/main" val="1"/>
+              <ma14:wrappingTextBoxFlag xmlns:ma14="http://schemas.microsoft.com/office/mac/drawingml/2011/main" xmlns:a14="http://schemas.microsoft.com/office/drawing/2010/main" xmlns:m="http://schemas.openxmlformats.org/officeDocument/2006/math" xmlns="" val="1"/>
             </a:ext>
           </a:extLst>
         </p:spPr>
@@ -25745,7 +28684,7 @@
           </a:prstGeom>
           <a:extLst>
             <a:ext uri="{C572A759-6A51-4108-AA02-DFA0A04FC94B}">
-              <ma14:wrappingTextBoxFlag xmlns="" xmlns:m="http://schemas.openxmlformats.org/officeDocument/2006/math" xmlns:a14="http://schemas.microsoft.com/office/drawing/2010/main" xmlns:ma14="http://schemas.microsoft.com/office/mac/drawingml/2011/main" val="1"/>
+              <ma14:wrappingTextBoxFlag xmlns:ma14="http://schemas.microsoft.com/office/mac/drawingml/2011/main" xmlns:a14="http://schemas.microsoft.com/office/drawing/2010/main" xmlns:m="http://schemas.openxmlformats.org/officeDocument/2006/math" xmlns="" val="1"/>
             </a:ext>
           </a:extLst>
         </p:spPr>
@@ -25866,7 +28805,7 @@
           </a:prstGeom>
           <a:extLst>
             <a:ext uri="{C572A759-6A51-4108-AA02-DFA0A04FC94B}">
-              <ma14:wrappingTextBoxFlag xmlns="" xmlns:m="http://schemas.openxmlformats.org/officeDocument/2006/math" xmlns:a14="http://schemas.microsoft.com/office/drawing/2010/main" xmlns:ma14="http://schemas.microsoft.com/office/mac/drawingml/2011/main" val="1"/>
+              <ma14:wrappingTextBoxFlag xmlns:ma14="http://schemas.microsoft.com/office/mac/drawingml/2011/main" xmlns:a14="http://schemas.microsoft.com/office/drawing/2010/main" xmlns:m="http://schemas.openxmlformats.org/officeDocument/2006/math" xmlns="" val="1"/>
             </a:ext>
           </a:extLst>
         </p:spPr>
@@ -25990,7 +28929,7 @@
           </a:prstGeom>
           <a:extLst>
             <a:ext uri="{C572A759-6A51-4108-AA02-DFA0A04FC94B}">
-              <ma14:wrappingTextBoxFlag xmlns="" xmlns:m="http://schemas.openxmlformats.org/officeDocument/2006/math" xmlns:a14="http://schemas.microsoft.com/office/drawing/2010/main" xmlns:ma14="http://schemas.microsoft.com/office/mac/drawingml/2011/main" val="1"/>
+              <ma14:wrappingTextBoxFlag xmlns:ma14="http://schemas.microsoft.com/office/mac/drawingml/2011/main" xmlns:a14="http://schemas.microsoft.com/office/drawing/2010/main" xmlns:m="http://schemas.openxmlformats.org/officeDocument/2006/math" xmlns="" val="1"/>
             </a:ext>
           </a:extLst>
         </p:spPr>
@@ -25999,6 +28938,7 @@
           <a:lstStyle/>
           <a:p>
             <a:fld id="{86CB4B4D-7CA3-9044-876B-883B54F8677D}" type="slidenum">
+              <a:rPr/>
               <a:t>3</a:t>
             </a:fld>
             <a:endParaRPr/>
@@ -26080,16 +29020,27 @@
           <a:lstStyle/>
           <a:p>
             <a:r>
+              <a:rPr dirty="0"/>
               <a:t>Provides analogue inputs and outputs.</a:t>
             </a:r>
           </a:p>
           <a:p>
             <a:r>
-              <a:t>Contains an ADC, a DAC, a low-pass filter, and an op-amp.</a:t>
+              <a:rPr dirty="0"/>
+              <a:t>Contains an ADC, a DAC, a low-pass filter, and an op-amp</a:t>
+            </a:r>
+            <a:r>
+              <a:rPr lang="en-GB" dirty="0"/>
+              <a:t> (amplify/buffer a signal)</a:t>
+            </a:r>
+            <a:r>
+              <a:rPr dirty="0"/>
+              <a:t>.</a:t>
             </a:r>
           </a:p>
           <a:p>
             <a:r>
+              <a:rPr dirty="0"/>
               <a:t>Will be used for parts 3 and 4 of the experiment.</a:t>
             </a:r>
           </a:p>
@@ -26111,7 +29062,7 @@
           </a:prstGeom>
           <a:extLst>
             <a:ext uri="{C572A759-6A51-4108-AA02-DFA0A04FC94B}">
-              <ma14:wrappingTextBoxFlag xmlns="" xmlns:m="http://schemas.openxmlformats.org/officeDocument/2006/math" xmlns:a14="http://schemas.microsoft.com/office/drawing/2010/main" xmlns:ma14="http://schemas.microsoft.com/office/mac/drawingml/2011/main" val="1"/>
+              <ma14:wrappingTextBoxFlag xmlns:ma14="http://schemas.microsoft.com/office/mac/drawingml/2011/main" xmlns:a14="http://schemas.microsoft.com/office/drawing/2010/main" xmlns:m="http://schemas.openxmlformats.org/officeDocument/2006/math" xmlns="" val="1"/>
             </a:ext>
           </a:extLst>
         </p:spPr>
@@ -26426,7 +29377,7 @@
           </a:prstGeom>
           <a:extLst>
             <a:ext uri="{C572A759-6A51-4108-AA02-DFA0A04FC94B}">
-              <ma14:wrappingTextBoxFlag xmlns="" xmlns:m="http://schemas.openxmlformats.org/officeDocument/2006/math" xmlns:a14="http://schemas.microsoft.com/office/drawing/2010/main" xmlns:ma14="http://schemas.microsoft.com/office/mac/drawingml/2011/main" val="1"/>
+              <ma14:wrappingTextBoxFlag xmlns:ma14="http://schemas.microsoft.com/office/mac/drawingml/2011/main" xmlns:a14="http://schemas.microsoft.com/office/drawing/2010/main" xmlns:m="http://schemas.openxmlformats.org/officeDocument/2006/math" xmlns="" val="1"/>
             </a:ext>
           </a:extLst>
         </p:spPr>
@@ -26519,7 +29470,28 @@
           </a:lstStyle>
           <a:p>
             <a:r>
-              <a:t>Series-parallel interface for DAC</a:t>
+              <a:rPr dirty="0"/>
+              <a:t>Series</a:t>
+            </a:r>
+            <a:r>
+              <a:rPr lang="en-GB" dirty="0"/>
+              <a:t> Peripheral</a:t>
+            </a:r>
+            <a:r>
+              <a:rPr dirty="0"/>
+              <a:t> </a:t>
+            </a:r>
+            <a:r>
+              <a:rPr lang="en-GB" dirty="0"/>
+              <a:t>I</a:t>
+            </a:r>
+            <a:r>
+              <a:rPr dirty="0" err="1"/>
+              <a:t>nterface</a:t>
+            </a:r>
+            <a:r>
+              <a:rPr dirty="0"/>
+              <a:t> for DAC</a:t>
             </a:r>
           </a:p>
         </p:txBody>
@@ -26554,13 +29526,15 @@
               <a:defRPr sz="3040"/>
             </a:pPr>
             <a:r>
+              <a:rPr dirty="0"/>
               <a:t>To send a value to the DAC, 16 bits are transmitted </a:t>
             </a:r>
             <a:r>
-              <a:rPr b="1"/>
+              <a:rPr b="1" dirty="0"/>
               <a:t>serially</a:t>
             </a:r>
             <a:r>
+              <a:rPr dirty="0"/>
               <a:t>. </a:t>
             </a:r>
           </a:p>
@@ -26572,11 +29546,20 @@
               <a:defRPr sz="3040"/>
             </a:pPr>
             <a:r>
-              <a:rPr b="1"/>
+              <a:rPr b="1" dirty="0"/>
               <a:t>Chip select</a:t>
             </a:r>
             <a:r>
-              <a:t> (SC) going low means the start of transmission.</a:t>
+              <a:rPr dirty="0"/>
+              <a:t> (C</a:t>
+            </a:r>
+            <a:r>
+              <a:rPr lang="en-GB" dirty="0"/>
+              <a:t>S</a:t>
+            </a:r>
+            <a:r>
+              <a:rPr dirty="0"/>
+              <a:t>) going low means the start of transmission.</a:t>
             </a:r>
           </a:p>
           <a:p>
@@ -26587,13 +29570,15 @@
               <a:defRPr sz="3040"/>
             </a:pPr>
             <a:r>
+              <a:rPr dirty="0"/>
               <a:t>Then </a:t>
             </a:r>
             <a:r>
-              <a:rPr b="1"/>
+              <a:rPr b="1" dirty="0"/>
               <a:t>serial data in</a:t>
             </a:r>
             <a:r>
+              <a:rPr dirty="0"/>
               <a:t> (SDI) takes the following sequence of values.</a:t>
             </a:r>
           </a:p>
@@ -26615,7 +29600,7 @@
           </a:prstGeom>
           <a:extLst>
             <a:ext uri="{C572A759-6A51-4108-AA02-DFA0A04FC94B}">
-              <ma14:wrappingTextBoxFlag xmlns="" xmlns:m="http://schemas.openxmlformats.org/officeDocument/2006/math" xmlns:a14="http://schemas.microsoft.com/office/drawing/2010/main" xmlns:ma14="http://schemas.microsoft.com/office/mac/drawingml/2011/main" val="1"/>
+              <ma14:wrappingTextBoxFlag xmlns:ma14="http://schemas.microsoft.com/office/mac/drawingml/2011/main" xmlns:a14="http://schemas.microsoft.com/office/drawing/2010/main" xmlns:m="http://schemas.openxmlformats.org/officeDocument/2006/math" xmlns="" val="1"/>
             </a:ext>
           </a:extLst>
         </p:spPr>
@@ -27353,7 +30338,7 @@
           </a:prstGeom>
           <a:extLst>
             <a:ext uri="{C572A759-6A51-4108-AA02-DFA0A04FC94B}">
-              <ma14:wrappingTextBoxFlag xmlns="" xmlns:m="http://schemas.openxmlformats.org/officeDocument/2006/math" xmlns:a14="http://schemas.microsoft.com/office/drawing/2010/main" xmlns:ma14="http://schemas.microsoft.com/office/mac/drawingml/2011/main" val="1"/>
+              <ma14:wrappingTextBoxFlag xmlns:ma14="http://schemas.microsoft.com/office/mac/drawingml/2011/main" xmlns:a14="http://schemas.microsoft.com/office/drawing/2010/main" xmlns:m="http://schemas.openxmlformats.org/officeDocument/2006/math" xmlns="" val="1"/>
             </a:ext>
           </a:extLst>
         </p:spPr>
@@ -27608,7 +30593,7 @@
           </a:prstGeom>
           <a:extLst>
             <a:ext uri="{C572A759-6A51-4108-AA02-DFA0A04FC94B}">
-              <ma14:wrappingTextBoxFlag xmlns="" xmlns:m="http://schemas.openxmlformats.org/officeDocument/2006/math" xmlns:a14="http://schemas.microsoft.com/office/drawing/2010/main" xmlns:ma14="http://schemas.microsoft.com/office/mac/drawingml/2011/main" val="1"/>
+              <ma14:wrappingTextBoxFlag xmlns:ma14="http://schemas.microsoft.com/office/mac/drawingml/2011/main" xmlns:a14="http://schemas.microsoft.com/office/drawing/2010/main" xmlns:m="http://schemas.openxmlformats.org/officeDocument/2006/math" xmlns="" val="1"/>
             </a:ext>
           </a:extLst>
         </p:spPr>
@@ -29421,7 +32406,7 @@
             <a:effectLst/>
             <a:extLst>
               <a:ext uri="{C572A759-6A51-4108-AA02-DFA0A04FC94B}">
-                <ma14:wrappingTextBoxFlag xmlns="" xmlns:m="http://schemas.openxmlformats.org/officeDocument/2006/math" xmlns:a14="http://schemas.microsoft.com/office/drawing/2010/main" xmlns:ma14="http://schemas.microsoft.com/office/mac/drawingml/2011/main" val="1"/>
+                <ma14:wrappingTextBoxFlag xmlns:ma14="http://schemas.microsoft.com/office/mac/drawingml/2011/main" xmlns:a14="http://schemas.microsoft.com/office/drawing/2010/main" xmlns:m="http://schemas.openxmlformats.org/officeDocument/2006/math" xmlns="" val="1"/>
               </a:ext>
             </a:extLst>
           </p:spPr>
@@ -29463,7 +32448,7 @@
             <a:effectLst/>
             <a:extLst>
               <a:ext uri="{C572A759-6A51-4108-AA02-DFA0A04FC94B}">
-                <ma14:wrappingTextBoxFlag xmlns="" xmlns:m="http://schemas.openxmlformats.org/officeDocument/2006/math" xmlns:a14="http://schemas.microsoft.com/office/drawing/2010/main" xmlns:ma14="http://schemas.microsoft.com/office/mac/drawingml/2011/main" val="1"/>
+                <ma14:wrappingTextBoxFlag xmlns:ma14="http://schemas.microsoft.com/office/mac/drawingml/2011/main" xmlns:a14="http://schemas.microsoft.com/office/drawing/2010/main" xmlns:m="http://schemas.openxmlformats.org/officeDocument/2006/math" xmlns="" val="1"/>
               </a:ext>
             </a:extLst>
           </p:spPr>
@@ -29505,7 +32490,7 @@
             <a:effectLst/>
             <a:extLst>
               <a:ext uri="{C572A759-6A51-4108-AA02-DFA0A04FC94B}">
-                <ma14:wrappingTextBoxFlag xmlns="" xmlns:m="http://schemas.openxmlformats.org/officeDocument/2006/math" xmlns:a14="http://schemas.microsoft.com/office/drawing/2010/main" xmlns:ma14="http://schemas.microsoft.com/office/mac/drawingml/2011/main" val="1"/>
+                <ma14:wrappingTextBoxFlag xmlns:ma14="http://schemas.microsoft.com/office/mac/drawingml/2011/main" xmlns:a14="http://schemas.microsoft.com/office/drawing/2010/main" xmlns:m="http://schemas.openxmlformats.org/officeDocument/2006/math" xmlns="" val="1"/>
               </a:ext>
             </a:extLst>
           </p:spPr>
@@ -29547,7 +32532,7 @@
             <a:effectLst/>
             <a:extLst>
               <a:ext uri="{C572A759-6A51-4108-AA02-DFA0A04FC94B}">
-                <ma14:wrappingTextBoxFlag xmlns="" xmlns:m="http://schemas.openxmlformats.org/officeDocument/2006/math" xmlns:a14="http://schemas.microsoft.com/office/drawing/2010/main" xmlns:ma14="http://schemas.microsoft.com/office/mac/drawingml/2011/main" val="1"/>
+                <ma14:wrappingTextBoxFlag xmlns:ma14="http://schemas.microsoft.com/office/mac/drawingml/2011/main" xmlns:a14="http://schemas.microsoft.com/office/drawing/2010/main" xmlns:m="http://schemas.openxmlformats.org/officeDocument/2006/math" xmlns="" val="1"/>
               </a:ext>
             </a:extLst>
           </p:spPr>
@@ -29589,7 +32574,7 @@
             <a:effectLst/>
             <a:extLst>
               <a:ext uri="{C572A759-6A51-4108-AA02-DFA0A04FC94B}">
-                <ma14:wrappingTextBoxFlag xmlns="" xmlns:m="http://schemas.openxmlformats.org/officeDocument/2006/math" xmlns:a14="http://schemas.microsoft.com/office/drawing/2010/main" xmlns:ma14="http://schemas.microsoft.com/office/mac/drawingml/2011/main" val="1"/>
+                <ma14:wrappingTextBoxFlag xmlns:ma14="http://schemas.microsoft.com/office/mac/drawingml/2011/main" xmlns:a14="http://schemas.microsoft.com/office/drawing/2010/main" xmlns:m="http://schemas.openxmlformats.org/officeDocument/2006/math" xmlns="" val="1"/>
               </a:ext>
             </a:extLst>
           </p:spPr>
@@ -29631,7 +32616,7 @@
             <a:effectLst/>
             <a:extLst>
               <a:ext uri="{C572A759-6A51-4108-AA02-DFA0A04FC94B}">
-                <ma14:wrappingTextBoxFlag xmlns="" xmlns:m="http://schemas.openxmlformats.org/officeDocument/2006/math" xmlns:a14="http://schemas.microsoft.com/office/drawing/2010/main" xmlns:ma14="http://schemas.microsoft.com/office/mac/drawingml/2011/main" val="1"/>
+                <ma14:wrappingTextBoxFlag xmlns:ma14="http://schemas.microsoft.com/office/mac/drawingml/2011/main" xmlns:a14="http://schemas.microsoft.com/office/drawing/2010/main" xmlns:m="http://schemas.openxmlformats.org/officeDocument/2006/math" xmlns="" val="1"/>
               </a:ext>
             </a:extLst>
           </p:spPr>
@@ -29673,7 +32658,7 @@
             <a:effectLst/>
             <a:extLst>
               <a:ext uri="{C572A759-6A51-4108-AA02-DFA0A04FC94B}">
-                <ma14:wrappingTextBoxFlag xmlns="" xmlns:m="http://schemas.openxmlformats.org/officeDocument/2006/math" xmlns:a14="http://schemas.microsoft.com/office/drawing/2010/main" xmlns:ma14="http://schemas.microsoft.com/office/mac/drawingml/2011/main" val="1"/>
+                <ma14:wrappingTextBoxFlag xmlns:ma14="http://schemas.microsoft.com/office/mac/drawingml/2011/main" xmlns:a14="http://schemas.microsoft.com/office/drawing/2010/main" xmlns:m="http://schemas.openxmlformats.org/officeDocument/2006/math" xmlns="" val="1"/>
               </a:ext>
             </a:extLst>
           </p:spPr>
@@ -29715,7 +32700,7 @@
             <a:effectLst/>
             <a:extLst>
               <a:ext uri="{C572A759-6A51-4108-AA02-DFA0A04FC94B}">
-                <ma14:wrappingTextBoxFlag xmlns="" xmlns:m="http://schemas.openxmlformats.org/officeDocument/2006/math" xmlns:a14="http://schemas.microsoft.com/office/drawing/2010/main" xmlns:ma14="http://schemas.microsoft.com/office/mac/drawingml/2011/main" val="1"/>
+                <ma14:wrappingTextBoxFlag xmlns:ma14="http://schemas.microsoft.com/office/mac/drawingml/2011/main" xmlns:a14="http://schemas.microsoft.com/office/drawing/2010/main" xmlns:m="http://schemas.openxmlformats.org/officeDocument/2006/math" xmlns="" val="1"/>
               </a:ext>
             </a:extLst>
           </p:spPr>
@@ -29757,7 +32742,7 @@
             <a:effectLst/>
             <a:extLst>
               <a:ext uri="{C572A759-6A51-4108-AA02-DFA0A04FC94B}">
-                <ma14:wrappingTextBoxFlag xmlns="" xmlns:m="http://schemas.openxmlformats.org/officeDocument/2006/math" xmlns:a14="http://schemas.microsoft.com/office/drawing/2010/main" xmlns:ma14="http://schemas.microsoft.com/office/mac/drawingml/2011/main" val="1"/>
+                <ma14:wrappingTextBoxFlag xmlns:ma14="http://schemas.microsoft.com/office/mac/drawingml/2011/main" xmlns:a14="http://schemas.microsoft.com/office/drawing/2010/main" xmlns:m="http://schemas.openxmlformats.org/officeDocument/2006/math" xmlns="" val="1"/>
               </a:ext>
             </a:extLst>
           </p:spPr>
@@ -29833,7 +32818,7 @@
             <a:effectLst/>
             <a:extLst>
               <a:ext uri="{C572A759-6A51-4108-AA02-DFA0A04FC94B}">
-                <ma14:wrappingTextBoxFlag xmlns="" xmlns:m="http://schemas.openxmlformats.org/officeDocument/2006/math" xmlns:a14="http://schemas.microsoft.com/office/drawing/2010/main" xmlns:ma14="http://schemas.microsoft.com/office/mac/drawingml/2011/main" val="1"/>
+                <ma14:wrappingTextBoxFlag xmlns:ma14="http://schemas.microsoft.com/office/mac/drawingml/2011/main" xmlns:a14="http://schemas.microsoft.com/office/drawing/2010/main" xmlns:m="http://schemas.openxmlformats.org/officeDocument/2006/math" xmlns="" val="1"/>
               </a:ext>
             </a:extLst>
           </p:spPr>
@@ -29909,7 +32894,7 @@
             <a:effectLst/>
             <a:extLst>
               <a:ext uri="{C572A759-6A51-4108-AA02-DFA0A04FC94B}">
-                <ma14:wrappingTextBoxFlag xmlns="" xmlns:m="http://schemas.openxmlformats.org/officeDocument/2006/math" xmlns:a14="http://schemas.microsoft.com/office/drawing/2010/main" xmlns:ma14="http://schemas.microsoft.com/office/mac/drawingml/2011/main" val="1"/>
+                <ma14:wrappingTextBoxFlag xmlns:ma14="http://schemas.microsoft.com/office/mac/drawingml/2011/main" xmlns:a14="http://schemas.microsoft.com/office/drawing/2010/main" xmlns:m="http://schemas.openxmlformats.org/officeDocument/2006/math" xmlns="" val="1"/>
               </a:ext>
             </a:extLst>
           </p:spPr>
@@ -29946,7 +32931,7 @@
                 </a:defRPr>
               </a:pPr>
               <a:r>
-                <a:rPr>
+                <a:rPr dirty="0">
                   <a:solidFill>
                     <a:schemeClr val="accent6">
                       <a:satOff val="-15808"/>
@@ -29985,7 +32970,7 @@
             <a:effectLst/>
             <a:extLst>
               <a:ext uri="{C572A759-6A51-4108-AA02-DFA0A04FC94B}">
-                <ma14:wrappingTextBoxFlag xmlns="" xmlns:m="http://schemas.openxmlformats.org/officeDocument/2006/math" xmlns:a14="http://schemas.microsoft.com/office/drawing/2010/main" xmlns:ma14="http://schemas.microsoft.com/office/mac/drawingml/2011/main" val="1"/>
+                <ma14:wrappingTextBoxFlag xmlns:ma14="http://schemas.microsoft.com/office/mac/drawingml/2011/main" xmlns:a14="http://schemas.microsoft.com/office/drawing/2010/main" xmlns:m="http://schemas.openxmlformats.org/officeDocument/2006/math" xmlns="" val="1"/>
               </a:ext>
             </a:extLst>
           </p:spPr>
@@ -30061,7 +33046,7 @@
             <a:effectLst/>
             <a:extLst>
               <a:ext uri="{C572A759-6A51-4108-AA02-DFA0A04FC94B}">
-                <ma14:wrappingTextBoxFlag xmlns="" xmlns:m="http://schemas.openxmlformats.org/officeDocument/2006/math" xmlns:a14="http://schemas.microsoft.com/office/drawing/2010/main" xmlns:ma14="http://schemas.microsoft.com/office/mac/drawingml/2011/main" val="1"/>
+                <ma14:wrappingTextBoxFlag xmlns:ma14="http://schemas.microsoft.com/office/mac/drawingml/2011/main" xmlns:a14="http://schemas.microsoft.com/office/drawing/2010/main" xmlns:m="http://schemas.openxmlformats.org/officeDocument/2006/math" xmlns="" val="1"/>
               </a:ext>
             </a:extLst>
           </p:spPr>
@@ -30137,7 +33122,7 @@
             <a:effectLst/>
             <a:extLst>
               <a:ext uri="{C572A759-6A51-4108-AA02-DFA0A04FC94B}">
-                <ma14:wrappingTextBoxFlag xmlns="" xmlns:m="http://schemas.openxmlformats.org/officeDocument/2006/math" xmlns:a14="http://schemas.microsoft.com/office/drawing/2010/main" xmlns:ma14="http://schemas.microsoft.com/office/mac/drawingml/2011/main" val="1"/>
+                <ma14:wrappingTextBoxFlag xmlns:ma14="http://schemas.microsoft.com/office/mac/drawingml/2011/main" xmlns:a14="http://schemas.microsoft.com/office/drawing/2010/main" xmlns:m="http://schemas.openxmlformats.org/officeDocument/2006/math" xmlns="" val="1"/>
               </a:ext>
             </a:extLst>
           </p:spPr>
@@ -30213,7 +33198,7 @@
             <a:effectLst/>
             <a:extLst>
               <a:ext uri="{C572A759-6A51-4108-AA02-DFA0A04FC94B}">
-                <ma14:wrappingTextBoxFlag xmlns="" xmlns:m="http://schemas.openxmlformats.org/officeDocument/2006/math" xmlns:a14="http://schemas.microsoft.com/office/drawing/2010/main" xmlns:ma14="http://schemas.microsoft.com/office/mac/drawingml/2011/main" val="1"/>
+                <ma14:wrappingTextBoxFlag xmlns:ma14="http://schemas.microsoft.com/office/mac/drawingml/2011/main" xmlns:a14="http://schemas.microsoft.com/office/drawing/2010/main" xmlns:m="http://schemas.openxmlformats.org/officeDocument/2006/math" xmlns="" val="1"/>
               </a:ext>
             </a:extLst>
           </p:spPr>
@@ -30289,7 +33274,7 @@
             <a:effectLst/>
             <a:extLst>
               <a:ext uri="{C572A759-6A51-4108-AA02-DFA0A04FC94B}">
-                <ma14:wrappingTextBoxFlag xmlns="" xmlns:m="http://schemas.openxmlformats.org/officeDocument/2006/math" xmlns:a14="http://schemas.microsoft.com/office/drawing/2010/main" xmlns:ma14="http://schemas.microsoft.com/office/mac/drawingml/2011/main" val="1"/>
+                <ma14:wrappingTextBoxFlag xmlns:ma14="http://schemas.microsoft.com/office/mac/drawingml/2011/main" xmlns:a14="http://schemas.microsoft.com/office/drawing/2010/main" xmlns:m="http://schemas.openxmlformats.org/officeDocument/2006/math" xmlns="" val="1"/>
               </a:ext>
             </a:extLst>
           </p:spPr>
@@ -30365,7 +33350,7 @@
             <a:effectLst/>
             <a:extLst>
               <a:ext uri="{C572A759-6A51-4108-AA02-DFA0A04FC94B}">
-                <ma14:wrappingTextBoxFlag xmlns="" xmlns:m="http://schemas.openxmlformats.org/officeDocument/2006/math" xmlns:a14="http://schemas.microsoft.com/office/drawing/2010/main" xmlns:ma14="http://schemas.microsoft.com/office/mac/drawingml/2011/main" val="1"/>
+                <ma14:wrappingTextBoxFlag xmlns:ma14="http://schemas.microsoft.com/office/mac/drawingml/2011/main" xmlns:a14="http://schemas.microsoft.com/office/drawing/2010/main" xmlns:m="http://schemas.openxmlformats.org/officeDocument/2006/math" xmlns="" val="1"/>
               </a:ext>
             </a:extLst>
           </p:spPr>
@@ -30410,7 +33395,7 @@
             <a:effectLst/>
             <a:extLst>
               <a:ext uri="{C572A759-6A51-4108-AA02-DFA0A04FC94B}">
-                <ma14:wrappingTextBoxFlag xmlns="" xmlns:m="http://schemas.openxmlformats.org/officeDocument/2006/math" xmlns:a14="http://schemas.microsoft.com/office/drawing/2010/main" xmlns:ma14="http://schemas.microsoft.com/office/mac/drawingml/2011/main" val="1"/>
+                <ma14:wrappingTextBoxFlag xmlns:ma14="http://schemas.microsoft.com/office/mac/drawingml/2011/main" xmlns:a14="http://schemas.microsoft.com/office/drawing/2010/main" xmlns:m="http://schemas.openxmlformats.org/officeDocument/2006/math" xmlns="" val="1"/>
               </a:ext>
             </a:extLst>
           </p:spPr>
@@ -30455,7 +33440,7 @@
             <a:effectLst/>
             <a:extLst>
               <a:ext uri="{C572A759-6A51-4108-AA02-DFA0A04FC94B}">
-                <ma14:wrappingTextBoxFlag xmlns="" xmlns:m="http://schemas.openxmlformats.org/officeDocument/2006/math" xmlns:a14="http://schemas.microsoft.com/office/drawing/2010/main" xmlns:ma14="http://schemas.microsoft.com/office/mac/drawingml/2011/main" val="1"/>
+                <ma14:wrappingTextBoxFlag xmlns:ma14="http://schemas.microsoft.com/office/mac/drawingml/2011/main" xmlns:a14="http://schemas.microsoft.com/office/drawing/2010/main" xmlns:m="http://schemas.openxmlformats.org/officeDocument/2006/math" xmlns="" val="1"/>
               </a:ext>
             </a:extLst>
           </p:spPr>
@@ -30469,6 +33454,7 @@
                 <a:defRPr sz="2400"/>
               </a:pPr>
               <a:r>
+                <a:rPr dirty="0"/>
                 <a:t>output</a:t>
               </a:r>
             </a:p>
@@ -30477,115 +33463,319 @@
                 <a:defRPr sz="2400"/>
               </a:pPr>
               <a:r>
+                <a:rPr dirty="0"/>
                 <a:t>buffer</a:t>
               </a:r>
             </a:p>
           </p:txBody>
         </p:sp>
       </p:grpSp>
-      <p:sp>
-        <p:nvSpPr>
-          <p:cNvPr id="153" name="Here is a 3-bit DAC. It uses 23 = 8 resistors.…"/>
-          <p:cNvSpPr txBox="1"/>
-          <p:nvPr/>
-        </p:nvSpPr>
-        <p:spPr>
-          <a:xfrm>
-            <a:off x="5648690" y="3645388"/>
-            <a:ext cx="6939838" cy="4998651"/>
-          </a:xfrm>
-          <a:prstGeom prst="rect">
-            <a:avLst/>
-          </a:prstGeom>
-          <a:ln w="12700">
-            <a:miter lim="400000"/>
-          </a:ln>
-          <a:extLst>
-            <a:ext uri="{C572A759-6A51-4108-AA02-DFA0A04FC94B}">
-              <ma14:wrappingTextBoxFlag xmlns="" xmlns:m="http://schemas.openxmlformats.org/officeDocument/2006/math" xmlns:a14="http://schemas.microsoft.com/office/drawing/2010/main" xmlns:ma14="http://schemas.microsoft.com/office/mac/drawingml/2011/main" val="1"/>
-            </a:ext>
-          </a:extLst>
-        </p:spPr>
-        <p:txBody>
-          <a:bodyPr lIns="50800" tIns="50800" rIns="50800" bIns="50800">
-            <a:normAutofit/>
-          </a:bodyPr>
-          <a:lstStyle/>
-          <a:p>
-            <a:pPr marL="444500" indent="-444500" algn="l">
-              <a:spcBef>
-                <a:spcPts val="4200"/>
-              </a:spcBef>
-              <a:buSzPct val="145000"/>
-              <a:buChar char="•"/>
-            </a:pPr>
-            <a:r>
-              <a:rPr dirty="0"/>
-              <a:t>Here is a 3-bit DAC. It uses 2</a:t>
-            </a:r>
-            <a:r>
-              <a:rPr baseline="31999" dirty="0"/>
-              <a:t>3</a:t>
-            </a:r>
-            <a:r>
-              <a:rPr dirty="0"/>
-              <a:t> = 8 resistors.</a:t>
-            </a:r>
-          </a:p>
-          <a:p>
-            <a:pPr marL="444500" indent="-444500" algn="l">
-              <a:spcBef>
-                <a:spcPts val="4200"/>
-              </a:spcBef>
-              <a:buSzPct val="145000"/>
-              <a:buChar char="•"/>
-            </a:pPr>
-            <a:r>
-              <a:rPr dirty="0"/>
-              <a:t>When the digital input is 5, we close (only) switch </a:t>
-            </a:r>
-            <a:r>
-              <a:rPr dirty="0">
-                <a:solidFill>
-                  <a:schemeClr val="accent6">
-                    <a:satOff val="-15808"/>
-                    <a:lumOff val="-17557"/>
-                  </a:schemeClr>
-                </a:solidFill>
-                <a:latin typeface="Courier"/>
-                <a:ea typeface="Courier"/>
-                <a:cs typeface="Courier"/>
-                <a:sym typeface="Courier"/>
-              </a:rPr>
-              <a:t>sw5</a:t>
-            </a:r>
-            <a:r>
-              <a:rPr dirty="0"/>
-              <a:t>, which means V</a:t>
-            </a:r>
-            <a:r>
-              <a:rPr baseline="-5999" dirty="0"/>
-              <a:t>DAC</a:t>
-            </a:r>
-            <a:r>
-              <a:rPr dirty="0"/>
-              <a:t> is ⅝</a:t>
-            </a:r>
-            <a:r>
-              <a:rPr dirty="0" err="1"/>
-              <a:t>V</a:t>
-            </a:r>
-            <a:r>
-              <a:rPr baseline="-5999" dirty="0" err="1"/>
-              <a:t>ref</a:t>
-            </a:r>
-            <a:r>
-              <a:rPr dirty="0"/>
-              <a:t>.</a:t>
-            </a:r>
-          </a:p>
-        </p:txBody>
-      </p:sp>
+      <mc:AlternateContent xmlns:mc="http://schemas.openxmlformats.org/markup-compatibility/2006">
+        <mc:Choice xmlns:a14="http://schemas.microsoft.com/office/drawing/2010/main" Requires="a14">
+          <p:sp>
+            <p:nvSpPr>
+              <p:cNvPr id="153" name="Here is a 3-bit DAC. It uses 23 = 8 resistors.…"/>
+              <p:cNvSpPr txBox="1"/>
+              <p:nvPr/>
+            </p:nvSpPr>
+            <p:spPr>
+              <a:xfrm>
+                <a:off x="5648690" y="3645388"/>
+                <a:ext cx="6939838" cy="4998651"/>
+              </a:xfrm>
+              <a:prstGeom prst="rect">
+                <a:avLst/>
+              </a:prstGeom>
+              <a:ln w="12700">
+                <a:miter lim="400000"/>
+              </a:ln>
+              <a:extLst>
+                <a:ext uri="{C572A759-6A51-4108-AA02-DFA0A04FC94B}">
+                  <ma14:wrappingTextBoxFlag xmlns:ma14="http://schemas.microsoft.com/office/mac/drawingml/2011/main" xmlns:m="http://schemas.openxmlformats.org/officeDocument/2006/math" xmlns="" val="1"/>
+                </a:ext>
+              </a:extLst>
+            </p:spPr>
+            <p:txBody>
+              <a:bodyPr lIns="50800" tIns="50800" rIns="50800" bIns="50800">
+                <a:normAutofit/>
+              </a:bodyPr>
+              <a:lstStyle/>
+              <a:p>
+                <a:pPr marL="444500" indent="-444500" algn="l">
+                  <a:spcBef>
+                    <a:spcPts val="4200"/>
+                  </a:spcBef>
+                  <a:buSzPct val="145000"/>
+                  <a:buChar char="•"/>
+                </a:pPr>
+                <a:r>
+                  <a:rPr lang="en-GB" dirty="0"/>
+                  <a:t>A 3-bit DAC uses 2</a:t>
+                </a:r>
+                <a:r>
+                  <a:rPr lang="en-GB" baseline="31999" dirty="0"/>
+                  <a:t>3</a:t>
+                </a:r>
+                <a:r>
+                  <a:rPr lang="en-GB" dirty="0"/>
+                  <a:t> = 8 resistors.</a:t>
+                </a:r>
+              </a:p>
+              <a:p>
+                <a:pPr marL="444500" indent="-444500" algn="l">
+                  <a:spcBef>
+                    <a:spcPts val="4200"/>
+                  </a:spcBef>
+                  <a:buSzPct val="145000"/>
+                  <a:buChar char="•"/>
+                </a:pPr>
+                <a:r>
+                  <a:rPr lang="en-GB" dirty="0"/>
+                  <a:t>When the digital input is 5, we close (only) switch </a:t>
+                </a:r>
+                <a:r>
+                  <a:rPr lang="en-GB" dirty="0">
+                    <a:solidFill>
+                      <a:schemeClr val="accent6">
+                        <a:satOff val="-15808"/>
+                        <a:lumOff val="-17557"/>
+                      </a:schemeClr>
+                    </a:solidFill>
+                    <a:latin typeface="Courier"/>
+                    <a:ea typeface="Courier"/>
+                    <a:cs typeface="Courier"/>
+                    <a:sym typeface="Courier"/>
+                  </a:rPr>
+                  <a:t>sw5</a:t>
+                </a:r>
+                <a:r>
+                  <a:rPr lang="en-GB" dirty="0"/>
+                  <a:t>, which means V</a:t>
+                </a:r>
+                <a:r>
+                  <a:rPr lang="en-GB" baseline="-5999" dirty="0"/>
+                  <a:t>DAC</a:t>
+                </a:r>
+                <a:r>
+                  <a:rPr lang="en-GB" dirty="0"/>
+                  <a:t> is ⅝</a:t>
+                </a:r>
+                <a:r>
+                  <a:rPr lang="en-GB" dirty="0" err="1"/>
+                  <a:t>V</a:t>
+                </a:r>
+                <a:r>
+                  <a:rPr lang="en-GB" baseline="-5999" dirty="0" err="1"/>
+                  <a:t>ref</a:t>
+                </a:r>
+                <a:r>
+                  <a:rPr lang="en-GB" dirty="0"/>
+                  <a:t>.</a:t>
+                </a:r>
+              </a:p>
+              <a:p>
+                <a:pPr marL="444500" indent="-444500" algn="l">
+                  <a:spcBef>
+                    <a:spcPts val="4200"/>
+                  </a:spcBef>
+                  <a:buSzPct val="145000"/>
+                  <a:buChar char="•"/>
+                </a:pPr>
+                <a:r>
+                  <a:rPr lang="en-GB" dirty="0"/>
+                  <a:t>Resistors in series: </a:t>
+                </a:r>
+              </a:p>
+              <a:p>
+                <a:pPr algn="l">
+                  <a:spcBef>
+                    <a:spcPts val="4200"/>
+                  </a:spcBef>
+                  <a:buSzPct val="145000"/>
+                </a:pPr>
+                <a14:m>
+                  <m:oMathPara xmlns:m="http://schemas.openxmlformats.org/officeDocument/2006/math">
+                    <m:oMath>
+                      <m:sSub>
+                        <m:sSubPr>
+                          <m:ctrlPr>
+                            <a:rPr lang="en-GB" b="0" i="1" smtClean="0">
+                              <a:latin typeface="Cambria Math" panose="02040503050406030204" pitchFamily="18" charset="0"/>
+                            </a:rPr>
+                          </m:ctrlPr>
+                        </m:sSubPr>
+                        <m:e>
+                          <m:r>
+                            <a:rPr lang="en-GB" b="0" i="1" smtClean="0">
+                              <a:latin typeface="Cambria Math" panose="02040503050406030204" pitchFamily="18" charset="0"/>
+                            </a:rPr>
+                            <m:t>𝑉</m:t>
+                          </m:r>
+                        </m:e>
+                        <m:sub>
+                          <m:r>
+                            <a:rPr lang="en-GB" b="0" i="1" smtClean="0">
+                              <a:latin typeface="Cambria Math" panose="02040503050406030204" pitchFamily="18" charset="0"/>
+                            </a:rPr>
+                            <m:t>𝑜𝑢𝑡</m:t>
+                          </m:r>
+                        </m:sub>
+                      </m:sSub>
+                      <m:r>
+                        <a:rPr lang="en-GB" b="0" i="1" smtClean="0">
+                          <a:latin typeface="Cambria Math" panose="02040503050406030204" pitchFamily="18" charset="0"/>
+                        </a:rPr>
+                        <m:t>=</m:t>
+                      </m:r>
+                      <m:sSub>
+                        <m:sSubPr>
+                          <m:ctrlPr>
+                            <a:rPr lang="en-GB" b="0" i="1" smtClean="0">
+                              <a:latin typeface="Cambria Math" panose="02040503050406030204" pitchFamily="18" charset="0"/>
+                            </a:rPr>
+                          </m:ctrlPr>
+                        </m:sSubPr>
+                        <m:e>
+                          <m:r>
+                            <a:rPr lang="en-GB" b="0" i="1" smtClean="0">
+                              <a:latin typeface="Cambria Math" panose="02040503050406030204" pitchFamily="18" charset="0"/>
+                            </a:rPr>
+                            <m:t>𝑉</m:t>
+                          </m:r>
+                        </m:e>
+                        <m:sub>
+                          <m:r>
+                            <a:rPr lang="en-GB" b="0" i="1" smtClean="0">
+                              <a:latin typeface="Cambria Math" panose="02040503050406030204" pitchFamily="18" charset="0"/>
+                            </a:rPr>
+                            <m:t>𝑟𝑒𝑓</m:t>
+                          </m:r>
+                        </m:sub>
+                      </m:sSub>
+                      <m:r>
+                        <a:rPr lang="en-GB" b="0" i="1" smtClean="0">
+                          <a:latin typeface="Cambria Math" panose="02040503050406030204" pitchFamily="18" charset="0"/>
+                        </a:rPr>
+                        <m:t>×</m:t>
+                      </m:r>
+                      <m:f>
+                        <m:fPr>
+                          <m:ctrlPr>
+                            <a:rPr lang="en-GB" b="0" i="1" smtClean="0">
+                              <a:latin typeface="Cambria Math" panose="02040503050406030204" pitchFamily="18" charset="0"/>
+                            </a:rPr>
+                          </m:ctrlPr>
+                        </m:fPr>
+                        <m:num>
+                          <m:sSub>
+                            <m:sSubPr>
+                              <m:ctrlPr>
+                                <a:rPr lang="en-GB" b="0" i="1" smtClean="0">
+                                  <a:latin typeface="Cambria Math" panose="02040503050406030204" pitchFamily="18" charset="0"/>
+                                </a:rPr>
+                              </m:ctrlPr>
+                            </m:sSubPr>
+                            <m:e>
+                              <m:r>
+                                <a:rPr lang="en-GB" b="0" i="1" smtClean="0">
+                                  <a:latin typeface="Cambria Math" panose="02040503050406030204" pitchFamily="18" charset="0"/>
+                                </a:rPr>
+                                <m:t>𝑅</m:t>
+                              </m:r>
+                            </m:e>
+                            <m:sub>
+                              <m:r>
+                                <a:rPr lang="en-GB" b="0" i="1" smtClean="0">
+                                  <a:latin typeface="Cambria Math" panose="02040503050406030204" pitchFamily="18" charset="0"/>
+                                </a:rPr>
+                                <m:t>𝑏𝑒𝑙𝑜𝑤</m:t>
+                              </m:r>
+                            </m:sub>
+                          </m:sSub>
+                        </m:num>
+                        <m:den>
+                          <m:sSub>
+                            <m:sSubPr>
+                              <m:ctrlPr>
+                                <a:rPr lang="en-GB" b="0" i="1" smtClean="0">
+                                  <a:latin typeface="Cambria Math" panose="02040503050406030204" pitchFamily="18" charset="0"/>
+                                </a:rPr>
+                              </m:ctrlPr>
+                            </m:sSubPr>
+                            <m:e>
+                              <m:r>
+                                <a:rPr lang="en-GB" b="0" i="1" smtClean="0">
+                                  <a:latin typeface="Cambria Math" panose="02040503050406030204" pitchFamily="18" charset="0"/>
+                                </a:rPr>
+                                <m:t>𝑅</m:t>
+                              </m:r>
+                            </m:e>
+                            <m:sub>
+                              <m:r>
+                                <a:rPr lang="en-GB" b="0" i="1" smtClean="0">
+                                  <a:latin typeface="Cambria Math" panose="02040503050406030204" pitchFamily="18" charset="0"/>
+                                </a:rPr>
+                                <m:t>𝑡𝑜𝑡𝑎𝑙</m:t>
+                              </m:r>
+                            </m:sub>
+                          </m:sSub>
+                        </m:den>
+                      </m:f>
+                    </m:oMath>
+                  </m:oMathPara>
+                </a14:m>
+                <a:endParaRPr lang="en-GB" dirty="0"/>
+              </a:p>
+            </p:txBody>
+          </p:sp>
+        </mc:Choice>
+        <mc:Fallback>
+          <p:sp>
+            <p:nvSpPr>
+              <p:cNvPr id="153" name="Here is a 3-bit DAC. It uses 23 = 8 resistors.…"/>
+              <p:cNvSpPr txBox="1">
+                <a:spLocks noRot="1" noChangeAspect="1" noMove="1" noResize="1" noEditPoints="1" noAdjustHandles="1" noChangeArrowheads="1" noChangeShapeType="1" noTextEdit="1"/>
+              </p:cNvSpPr>
+              <p:nvPr/>
+            </p:nvSpPr>
+            <p:spPr>
+              <a:xfrm>
+                <a:off x="5648690" y="3645388"/>
+                <a:ext cx="6939838" cy="4998651"/>
+              </a:xfrm>
+              <a:prstGeom prst="rect">
+                <a:avLst/>
+              </a:prstGeom>
+              <a:blipFill>
+                <a:blip r:embed="rId2"/>
+                <a:stretch>
+                  <a:fillRect l="-3467" t="-3553"/>
+                </a:stretch>
+              </a:blipFill>
+              <a:ln w="12700">
+                <a:miter lim="400000"/>
+              </a:ln>
+              <a:extLst>
+                <a:ext uri="{C572A759-6A51-4108-AA02-DFA0A04FC94B}">
+                  <ma14:wrappingTextBoxFlag xmlns:ma14="http://schemas.microsoft.com/office/mac/drawingml/2011/main" xmlns:a14="http://schemas.microsoft.com/office/drawing/2010/main" xmlns:m="http://schemas.openxmlformats.org/officeDocument/2006/math" xmlns="" val="1"/>
+                </a:ext>
+              </a:extLst>
+            </p:spPr>
+            <p:txBody>
+              <a:bodyPr/>
+              <a:lstStyle/>
+              <a:p>
+                <a:r>
+                  <a:rPr lang="en-GB">
+                    <a:noFill/>
+                  </a:rPr>
+                  <a:t> </a:t>
+                </a:r>
+              </a:p>
+            </p:txBody>
+          </p:sp>
+        </mc:Fallback>
+      </mc:AlternateContent>
     </p:spTree>
   </p:cSld>
   <p:clrMapOvr>
@@ -30749,26 +33939,38 @@
                                   </p:childTnLst>
                                 </p:cTn>
                               </p:par>
-                            </p:childTnLst>
-                          </p:cTn>
-                        </p:par>
-                      </p:childTnLst>
-                    </p:cTn>
-                  </p:par>
-                  <p:par>
-                    <p:cTn id="16" fill="hold">
-                      <p:stCondLst>
-                        <p:cond delay="indefinite"/>
-                      </p:stCondLst>
-                      <p:childTnLst>
-                        <p:par>
-                          <p:cTn id="17" fill="hold">
-                            <p:stCondLst>
-                              <p:cond delay="0"/>
-                            </p:stCondLst>
-                            <p:childTnLst>
                               <p:par>
-                                <p:cTn id="18" presetID="1" presetClass="entr" presetSubtype="0" fill="hold" grpId="3" nodeType="clickEffect">
+                                <p:cTn id="16" presetID="1" presetClass="entr" presetSubtype="0" fill="hold" grpId="3" nodeType="withEffect">
+                                  <p:stCondLst>
+                                    <p:cond delay="0"/>
+                                  </p:stCondLst>
+                                  <p:iterate>
+                                    <p:tmAbs val="0"/>
+                                  </p:iterate>
+                                  <p:childTnLst>
+                                    <p:set>
+                                      <p:cBhvr>
+                                        <p:cTn id="17" fill="hold"/>
+                                        <p:tgtEl>
+                                          <p:spTgt spid="153">
+                                            <p:txEl>
+                                              <p:pRg st="1" end="1"/>
+                                            </p:txEl>
+                                          </p:spTgt>
+                                        </p:tgtEl>
+                                        <p:attrNameLst>
+                                          <p:attrName>style.visibility</p:attrName>
+                                        </p:attrNameLst>
+                                      </p:cBhvr>
+                                      <p:to>
+                                        <p:strVal val="visible"/>
+                                      </p:to>
+                                    </p:set>
+                                  </p:childTnLst>
+                                </p:cTn>
+                              </p:par>
+                              <p:par>
+                                <p:cTn id="18" presetID="1" presetClass="entr" presetSubtype="0" fill="hold" grpId="3" nodeType="withEffect">
                                   <p:stCondLst>
                                     <p:cond delay="0"/>
                                   </p:stCondLst>
@@ -30782,7 +33984,37 @@
                                         <p:tgtEl>
                                           <p:spTgt spid="153">
                                             <p:txEl>
-                                              <p:pRg st="1" end="1"/>
+                                              <p:pRg st="2" end="2"/>
+                                            </p:txEl>
+                                          </p:spTgt>
+                                        </p:tgtEl>
+                                        <p:attrNameLst>
+                                          <p:attrName>style.visibility</p:attrName>
+                                        </p:attrNameLst>
+                                      </p:cBhvr>
+                                      <p:to>
+                                        <p:strVal val="visible"/>
+                                      </p:to>
+                                    </p:set>
+                                  </p:childTnLst>
+                                </p:cTn>
+                              </p:par>
+                              <p:par>
+                                <p:cTn id="20" presetID="1" presetClass="entr" presetSubtype="0" fill="hold" grpId="3" nodeType="withEffect">
+                                  <p:stCondLst>
+                                    <p:cond delay="0"/>
+                                  </p:stCondLst>
+                                  <p:iterate>
+                                    <p:tmAbs val="0"/>
+                                  </p:iterate>
+                                  <p:childTnLst>
+                                    <p:set>
+                                      <p:cBhvr>
+                                        <p:cTn id="21" fill="hold"/>
+                                        <p:tgtEl>
+                                          <p:spTgt spid="153">
+                                            <p:txEl>
+                                              <p:pRg st="3" end="3"/>
                                             </p:txEl>
                                           </p:spTgt>
                                         </p:tgtEl>
@@ -30895,7 +34127,7 @@
           </a:prstGeom>
           <a:extLst>
             <a:ext uri="{C572A759-6A51-4108-AA02-DFA0A04FC94B}">
-              <ma14:wrappingTextBoxFlag xmlns="" xmlns:m="http://schemas.openxmlformats.org/officeDocument/2006/math" xmlns:a14="http://schemas.microsoft.com/office/drawing/2010/main" xmlns:ma14="http://schemas.microsoft.com/office/mac/drawingml/2011/main" val="1"/>
+              <ma14:wrappingTextBoxFlag xmlns:ma14="http://schemas.microsoft.com/office/mac/drawingml/2011/main" xmlns:a14="http://schemas.microsoft.com/office/drawing/2010/main" xmlns:m="http://schemas.openxmlformats.org/officeDocument/2006/math" xmlns="" val="1"/>
             </a:ext>
           </a:extLst>
         </p:spPr>
@@ -32620,7 +35852,7 @@
           </a:ln>
           <a:extLst>
             <a:ext uri="{C572A759-6A51-4108-AA02-DFA0A04FC94B}">
-              <ma14:wrappingTextBoxFlag xmlns="" xmlns:m="http://schemas.openxmlformats.org/officeDocument/2006/math" xmlns:a14="http://schemas.microsoft.com/office/drawing/2010/main" xmlns:ma14="http://schemas.microsoft.com/office/mac/drawingml/2011/main" val="1"/>
+              <ma14:wrappingTextBoxFlag xmlns:ma14="http://schemas.microsoft.com/office/mac/drawingml/2011/main" xmlns:a14="http://schemas.microsoft.com/office/drawing/2010/main" xmlns:m="http://schemas.openxmlformats.org/officeDocument/2006/math" xmlns="" val="1"/>
             </a:ext>
           </a:extLst>
         </p:spPr>
@@ -32659,7 +35891,7 @@
           </a:ln>
           <a:extLst>
             <a:ext uri="{C572A759-6A51-4108-AA02-DFA0A04FC94B}">
-              <ma14:wrappingTextBoxFlag xmlns="" xmlns:m="http://schemas.openxmlformats.org/officeDocument/2006/math" xmlns:a14="http://schemas.microsoft.com/office/drawing/2010/main" xmlns:ma14="http://schemas.microsoft.com/office/mac/drawingml/2011/main" val="1"/>
+              <ma14:wrappingTextBoxFlag xmlns:ma14="http://schemas.microsoft.com/office/mac/drawingml/2011/main" xmlns:a14="http://schemas.microsoft.com/office/drawing/2010/main" xmlns:m="http://schemas.openxmlformats.org/officeDocument/2006/math" xmlns="" val="1"/>
             </a:ext>
           </a:extLst>
         </p:spPr>
@@ -32698,7 +35930,7 @@
           </a:ln>
           <a:extLst>
             <a:ext uri="{C572A759-6A51-4108-AA02-DFA0A04FC94B}">
-              <ma14:wrappingTextBoxFlag xmlns="" xmlns:m="http://schemas.openxmlformats.org/officeDocument/2006/math" xmlns:a14="http://schemas.microsoft.com/office/drawing/2010/main" xmlns:ma14="http://schemas.microsoft.com/office/mac/drawingml/2011/main" val="1"/>
+              <ma14:wrappingTextBoxFlag xmlns:ma14="http://schemas.microsoft.com/office/mac/drawingml/2011/main" xmlns:a14="http://schemas.microsoft.com/office/drawing/2010/main" xmlns:m="http://schemas.openxmlformats.org/officeDocument/2006/math" xmlns="" val="1"/>
             </a:ext>
           </a:extLst>
         </p:spPr>
@@ -32737,7 +35969,7 @@
           </a:ln>
           <a:extLst>
             <a:ext uri="{C572A759-6A51-4108-AA02-DFA0A04FC94B}">
-              <ma14:wrappingTextBoxFlag xmlns="" xmlns:m="http://schemas.openxmlformats.org/officeDocument/2006/math" xmlns:a14="http://schemas.microsoft.com/office/drawing/2010/main" xmlns:ma14="http://schemas.microsoft.com/office/mac/drawingml/2011/main" val="1"/>
+              <ma14:wrappingTextBoxFlag xmlns:ma14="http://schemas.microsoft.com/office/mac/drawingml/2011/main" xmlns:a14="http://schemas.microsoft.com/office/drawing/2010/main" xmlns:m="http://schemas.openxmlformats.org/officeDocument/2006/math" xmlns="" val="1"/>
             </a:ext>
           </a:extLst>
         </p:spPr>
@@ -32776,7 +36008,7 @@
           </a:ln>
           <a:extLst>
             <a:ext uri="{C572A759-6A51-4108-AA02-DFA0A04FC94B}">
-              <ma14:wrappingTextBoxFlag xmlns="" xmlns:m="http://schemas.openxmlformats.org/officeDocument/2006/math" xmlns:a14="http://schemas.microsoft.com/office/drawing/2010/main" xmlns:ma14="http://schemas.microsoft.com/office/mac/drawingml/2011/main" val="1"/>
+              <ma14:wrappingTextBoxFlag xmlns:ma14="http://schemas.microsoft.com/office/mac/drawingml/2011/main" xmlns:a14="http://schemas.microsoft.com/office/drawing/2010/main" xmlns:m="http://schemas.openxmlformats.org/officeDocument/2006/math" xmlns="" val="1"/>
             </a:ext>
           </a:extLst>
         </p:spPr>
@@ -32815,7 +36047,7 @@
           </a:ln>
           <a:extLst>
             <a:ext uri="{C572A759-6A51-4108-AA02-DFA0A04FC94B}">
-              <ma14:wrappingTextBoxFlag xmlns="" xmlns:m="http://schemas.openxmlformats.org/officeDocument/2006/math" xmlns:a14="http://schemas.microsoft.com/office/drawing/2010/main" xmlns:ma14="http://schemas.microsoft.com/office/mac/drawingml/2011/main" val="1"/>
+              <ma14:wrappingTextBoxFlag xmlns:ma14="http://schemas.microsoft.com/office/mac/drawingml/2011/main" xmlns:a14="http://schemas.microsoft.com/office/drawing/2010/main" xmlns:m="http://schemas.openxmlformats.org/officeDocument/2006/math" xmlns="" val="1"/>
             </a:ext>
           </a:extLst>
         </p:spPr>
@@ -32854,7 +36086,7 @@
           </a:ln>
           <a:extLst>
             <a:ext uri="{C572A759-6A51-4108-AA02-DFA0A04FC94B}">
-              <ma14:wrappingTextBoxFlag xmlns="" xmlns:m="http://schemas.openxmlformats.org/officeDocument/2006/math" xmlns:a14="http://schemas.microsoft.com/office/drawing/2010/main" xmlns:ma14="http://schemas.microsoft.com/office/mac/drawingml/2011/main" val="1"/>
+              <ma14:wrappingTextBoxFlag xmlns:ma14="http://schemas.microsoft.com/office/mac/drawingml/2011/main" xmlns:a14="http://schemas.microsoft.com/office/drawing/2010/main" xmlns:m="http://schemas.openxmlformats.org/officeDocument/2006/math" xmlns="" val="1"/>
             </a:ext>
           </a:extLst>
         </p:spPr>
@@ -32893,7 +36125,7 @@
           </a:ln>
           <a:extLst>
             <a:ext uri="{C572A759-6A51-4108-AA02-DFA0A04FC94B}">
-              <ma14:wrappingTextBoxFlag xmlns="" xmlns:m="http://schemas.openxmlformats.org/officeDocument/2006/math" xmlns:a14="http://schemas.microsoft.com/office/drawing/2010/main" xmlns:ma14="http://schemas.microsoft.com/office/mac/drawingml/2011/main" val="1"/>
+              <ma14:wrappingTextBoxFlag xmlns:ma14="http://schemas.microsoft.com/office/mac/drawingml/2011/main" xmlns:a14="http://schemas.microsoft.com/office/drawing/2010/main" xmlns:m="http://schemas.openxmlformats.org/officeDocument/2006/math" xmlns="" val="1"/>
             </a:ext>
           </a:extLst>
         </p:spPr>
@@ -32932,7 +36164,7 @@
           </a:ln>
           <a:extLst>
             <a:ext uri="{C572A759-6A51-4108-AA02-DFA0A04FC94B}">
-              <ma14:wrappingTextBoxFlag xmlns="" xmlns:m="http://schemas.openxmlformats.org/officeDocument/2006/math" xmlns:a14="http://schemas.microsoft.com/office/drawing/2010/main" xmlns:ma14="http://schemas.microsoft.com/office/mac/drawingml/2011/main" val="1"/>
+              <ma14:wrappingTextBoxFlag xmlns:ma14="http://schemas.microsoft.com/office/mac/drawingml/2011/main" xmlns:a14="http://schemas.microsoft.com/office/drawing/2010/main" xmlns:m="http://schemas.openxmlformats.org/officeDocument/2006/math" xmlns="" val="1"/>
             </a:ext>
           </a:extLst>
         </p:spPr>
@@ -33005,7 +36237,7 @@
           </a:ln>
           <a:extLst>
             <a:ext uri="{C572A759-6A51-4108-AA02-DFA0A04FC94B}">
-              <ma14:wrappingTextBoxFlag xmlns="" xmlns:m="http://schemas.openxmlformats.org/officeDocument/2006/math" xmlns:a14="http://schemas.microsoft.com/office/drawing/2010/main" xmlns:ma14="http://schemas.microsoft.com/office/mac/drawingml/2011/main" val="1"/>
+              <ma14:wrappingTextBoxFlag xmlns:ma14="http://schemas.microsoft.com/office/mac/drawingml/2011/main" xmlns:a14="http://schemas.microsoft.com/office/drawing/2010/main" xmlns:m="http://schemas.openxmlformats.org/officeDocument/2006/math" xmlns="" val="1"/>
             </a:ext>
           </a:extLst>
         </p:spPr>
@@ -33078,7 +36310,7 @@
           </a:ln>
           <a:extLst>
             <a:ext uri="{C572A759-6A51-4108-AA02-DFA0A04FC94B}">
-              <ma14:wrappingTextBoxFlag xmlns="" xmlns:m="http://schemas.openxmlformats.org/officeDocument/2006/math" xmlns:a14="http://schemas.microsoft.com/office/drawing/2010/main" xmlns:ma14="http://schemas.microsoft.com/office/mac/drawingml/2011/main" val="1"/>
+              <ma14:wrappingTextBoxFlag xmlns:ma14="http://schemas.microsoft.com/office/mac/drawingml/2011/main" xmlns:a14="http://schemas.microsoft.com/office/drawing/2010/main" xmlns:m="http://schemas.openxmlformats.org/officeDocument/2006/math" xmlns="" val="1"/>
             </a:ext>
           </a:extLst>
         </p:spPr>
@@ -33151,7 +36383,7 @@
           </a:ln>
           <a:extLst>
             <a:ext uri="{C572A759-6A51-4108-AA02-DFA0A04FC94B}">
-              <ma14:wrappingTextBoxFlag xmlns="" xmlns:m="http://schemas.openxmlformats.org/officeDocument/2006/math" xmlns:a14="http://schemas.microsoft.com/office/drawing/2010/main" xmlns:ma14="http://schemas.microsoft.com/office/mac/drawingml/2011/main" val="1"/>
+              <ma14:wrappingTextBoxFlag xmlns:ma14="http://schemas.microsoft.com/office/mac/drawingml/2011/main" xmlns:a14="http://schemas.microsoft.com/office/drawing/2010/main" xmlns:m="http://schemas.openxmlformats.org/officeDocument/2006/math" xmlns="" val="1"/>
             </a:ext>
           </a:extLst>
         </p:spPr>
@@ -33224,7 +36456,7 @@
           </a:ln>
           <a:extLst>
             <a:ext uri="{C572A759-6A51-4108-AA02-DFA0A04FC94B}">
-              <ma14:wrappingTextBoxFlag xmlns="" xmlns:m="http://schemas.openxmlformats.org/officeDocument/2006/math" xmlns:a14="http://schemas.microsoft.com/office/drawing/2010/main" xmlns:ma14="http://schemas.microsoft.com/office/mac/drawingml/2011/main" val="1"/>
+              <ma14:wrappingTextBoxFlag xmlns:ma14="http://schemas.microsoft.com/office/mac/drawingml/2011/main" xmlns:a14="http://schemas.microsoft.com/office/drawing/2010/main" xmlns:m="http://schemas.openxmlformats.org/officeDocument/2006/math" xmlns="" val="1"/>
             </a:ext>
           </a:extLst>
         </p:spPr>
@@ -33297,7 +36529,7 @@
           </a:ln>
           <a:extLst>
             <a:ext uri="{C572A759-6A51-4108-AA02-DFA0A04FC94B}">
-              <ma14:wrappingTextBoxFlag xmlns="" xmlns:m="http://schemas.openxmlformats.org/officeDocument/2006/math" xmlns:a14="http://schemas.microsoft.com/office/drawing/2010/main" xmlns:ma14="http://schemas.microsoft.com/office/mac/drawingml/2011/main" val="1"/>
+              <ma14:wrappingTextBoxFlag xmlns:ma14="http://schemas.microsoft.com/office/mac/drawingml/2011/main" xmlns:a14="http://schemas.microsoft.com/office/drawing/2010/main" xmlns:m="http://schemas.openxmlformats.org/officeDocument/2006/math" xmlns="" val="1"/>
             </a:ext>
           </a:extLst>
         </p:spPr>
@@ -33370,7 +36602,7 @@
           </a:ln>
           <a:extLst>
             <a:ext uri="{C572A759-6A51-4108-AA02-DFA0A04FC94B}">
-              <ma14:wrappingTextBoxFlag xmlns="" xmlns:m="http://schemas.openxmlformats.org/officeDocument/2006/math" xmlns:a14="http://schemas.microsoft.com/office/drawing/2010/main" xmlns:ma14="http://schemas.microsoft.com/office/mac/drawingml/2011/main" val="1"/>
+              <ma14:wrappingTextBoxFlag xmlns:ma14="http://schemas.microsoft.com/office/mac/drawingml/2011/main" xmlns:a14="http://schemas.microsoft.com/office/drawing/2010/main" xmlns:m="http://schemas.openxmlformats.org/officeDocument/2006/math" xmlns="" val="1"/>
             </a:ext>
           </a:extLst>
         </p:spPr>
@@ -33443,7 +36675,7 @@
           </a:ln>
           <a:extLst>
             <a:ext uri="{C572A759-6A51-4108-AA02-DFA0A04FC94B}">
-              <ma14:wrappingTextBoxFlag xmlns="" xmlns:m="http://schemas.openxmlformats.org/officeDocument/2006/math" xmlns:a14="http://schemas.microsoft.com/office/drawing/2010/main" xmlns:ma14="http://schemas.microsoft.com/office/mac/drawingml/2011/main" val="1"/>
+              <ma14:wrappingTextBoxFlag xmlns:ma14="http://schemas.microsoft.com/office/mac/drawingml/2011/main" xmlns:a14="http://schemas.microsoft.com/office/drawing/2010/main" xmlns:m="http://schemas.openxmlformats.org/officeDocument/2006/math" xmlns="" val="1"/>
             </a:ext>
           </a:extLst>
         </p:spPr>
@@ -33516,7 +36748,7 @@
           </a:ln>
           <a:extLst>
             <a:ext uri="{C572A759-6A51-4108-AA02-DFA0A04FC94B}">
-              <ma14:wrappingTextBoxFlag xmlns="" xmlns:m="http://schemas.openxmlformats.org/officeDocument/2006/math" xmlns:a14="http://schemas.microsoft.com/office/drawing/2010/main" xmlns:ma14="http://schemas.microsoft.com/office/mac/drawingml/2011/main" val="1"/>
+              <ma14:wrappingTextBoxFlag xmlns:ma14="http://schemas.microsoft.com/office/mac/drawingml/2011/main" xmlns:a14="http://schemas.microsoft.com/office/drawing/2010/main" xmlns:m="http://schemas.openxmlformats.org/officeDocument/2006/math" xmlns="" val="1"/>
             </a:ext>
           </a:extLst>
         </p:spPr>
@@ -33558,7 +36790,7 @@
           </a:ln>
           <a:extLst>
             <a:ext uri="{C572A759-6A51-4108-AA02-DFA0A04FC94B}">
-              <ma14:wrappingTextBoxFlag xmlns="" xmlns:m="http://schemas.openxmlformats.org/officeDocument/2006/math" xmlns:a14="http://schemas.microsoft.com/office/drawing/2010/main" xmlns:ma14="http://schemas.microsoft.com/office/mac/drawingml/2011/main" val="1"/>
+              <ma14:wrappingTextBoxFlag xmlns:ma14="http://schemas.microsoft.com/office/mac/drawingml/2011/main" xmlns:a14="http://schemas.microsoft.com/office/drawing/2010/main" xmlns:m="http://schemas.openxmlformats.org/officeDocument/2006/math" xmlns="" val="1"/>
             </a:ext>
           </a:extLst>
         </p:spPr>
@@ -33600,7 +36832,7 @@
           </a:ln>
           <a:extLst>
             <a:ext uri="{C572A759-6A51-4108-AA02-DFA0A04FC94B}">
-              <ma14:wrappingTextBoxFlag xmlns="" xmlns:m="http://schemas.openxmlformats.org/officeDocument/2006/math" xmlns:a14="http://schemas.microsoft.com/office/drawing/2010/main" xmlns:ma14="http://schemas.microsoft.com/office/mac/drawingml/2011/main" val="1"/>
+              <ma14:wrappingTextBoxFlag xmlns:ma14="http://schemas.microsoft.com/office/mac/drawingml/2011/main" xmlns:a14="http://schemas.microsoft.com/office/drawing/2010/main" xmlns:m="http://schemas.openxmlformats.org/officeDocument/2006/math" xmlns="" val="1"/>
             </a:ext>
           </a:extLst>
         </p:spPr>
@@ -33785,7 +37017,7 @@
           </a:ln>
           <a:extLst>
             <a:ext uri="{C572A759-6A51-4108-AA02-DFA0A04FC94B}">
-              <ma14:wrappingTextBoxFlag xmlns="" xmlns:m="http://schemas.openxmlformats.org/officeDocument/2006/math" xmlns:a14="http://schemas.microsoft.com/office/drawing/2010/main" xmlns:ma14="http://schemas.microsoft.com/office/mac/drawingml/2011/main" val="1"/>
+              <ma14:wrappingTextBoxFlag xmlns:ma14="http://schemas.microsoft.com/office/mac/drawingml/2011/main" xmlns:a14="http://schemas.microsoft.com/office/drawing/2010/main" xmlns:m="http://schemas.openxmlformats.org/officeDocument/2006/math" xmlns="" val="1"/>
             </a:ext>
           </a:extLst>
         </p:spPr>
@@ -33865,7 +37097,7 @@
           </a:ln>
           <a:extLst>
             <a:ext uri="{C572A759-6A51-4108-AA02-DFA0A04FC94B}">
-              <ma14:wrappingTextBoxFlag xmlns="" xmlns:m="http://schemas.openxmlformats.org/officeDocument/2006/math" xmlns:a14="http://schemas.microsoft.com/office/drawing/2010/main" xmlns:ma14="http://schemas.microsoft.com/office/mac/drawingml/2011/main" val="1"/>
+              <ma14:wrappingTextBoxFlag xmlns:ma14="http://schemas.microsoft.com/office/mac/drawingml/2011/main" xmlns:a14="http://schemas.microsoft.com/office/drawing/2010/main" xmlns:m="http://schemas.openxmlformats.org/officeDocument/2006/math" xmlns="" val="1"/>
             </a:ext>
           </a:extLst>
         </p:spPr>
@@ -33945,7 +37177,7 @@
           </a:ln>
           <a:extLst>
             <a:ext uri="{C572A759-6A51-4108-AA02-DFA0A04FC94B}">
-              <ma14:wrappingTextBoxFlag xmlns="" xmlns:m="http://schemas.openxmlformats.org/officeDocument/2006/math" xmlns:a14="http://schemas.microsoft.com/office/drawing/2010/main" xmlns:ma14="http://schemas.microsoft.com/office/mac/drawingml/2011/main" val="1"/>
+              <ma14:wrappingTextBoxFlag xmlns:ma14="http://schemas.microsoft.com/office/mac/drawingml/2011/main" xmlns:a14="http://schemas.microsoft.com/office/drawing/2010/main" xmlns:m="http://schemas.openxmlformats.org/officeDocument/2006/math" xmlns="" val="1"/>
             </a:ext>
           </a:extLst>
         </p:spPr>
@@ -34025,7 +37257,7 @@
           </a:ln>
           <a:extLst>
             <a:ext uri="{C572A759-6A51-4108-AA02-DFA0A04FC94B}">
-              <ma14:wrappingTextBoxFlag xmlns="" xmlns:m="http://schemas.openxmlformats.org/officeDocument/2006/math" xmlns:a14="http://schemas.microsoft.com/office/drawing/2010/main" xmlns:ma14="http://schemas.microsoft.com/office/mac/drawingml/2011/main" val="1"/>
+              <ma14:wrappingTextBoxFlag xmlns:ma14="http://schemas.microsoft.com/office/mac/drawingml/2011/main" xmlns:a14="http://schemas.microsoft.com/office/drawing/2010/main" xmlns:m="http://schemas.openxmlformats.org/officeDocument/2006/math" xmlns="" val="1"/>
             </a:ext>
           </a:extLst>
         </p:spPr>
@@ -34105,7 +37337,7 @@
           </a:ln>
           <a:extLst>
             <a:ext uri="{C572A759-6A51-4108-AA02-DFA0A04FC94B}">
-              <ma14:wrappingTextBoxFlag xmlns="" xmlns:m="http://schemas.openxmlformats.org/officeDocument/2006/math" xmlns:a14="http://schemas.microsoft.com/office/drawing/2010/main" xmlns:ma14="http://schemas.microsoft.com/office/mac/drawingml/2011/main" val="1"/>
+              <ma14:wrappingTextBoxFlag xmlns:ma14="http://schemas.microsoft.com/office/mac/drawingml/2011/main" xmlns:a14="http://schemas.microsoft.com/office/drawing/2010/main" xmlns:m="http://schemas.openxmlformats.org/officeDocument/2006/math" xmlns="" val="1"/>
             </a:ext>
           </a:extLst>
         </p:spPr>
@@ -34185,7 +37417,7 @@
           </a:ln>
           <a:extLst>
             <a:ext uri="{C572A759-6A51-4108-AA02-DFA0A04FC94B}">
-              <ma14:wrappingTextBoxFlag xmlns="" xmlns:m="http://schemas.openxmlformats.org/officeDocument/2006/math" xmlns:a14="http://schemas.microsoft.com/office/drawing/2010/main" xmlns:ma14="http://schemas.microsoft.com/office/mac/drawingml/2011/main" val="1"/>
+              <ma14:wrappingTextBoxFlag xmlns:ma14="http://schemas.microsoft.com/office/mac/drawingml/2011/main" xmlns:a14="http://schemas.microsoft.com/office/drawing/2010/main" xmlns:m="http://schemas.openxmlformats.org/officeDocument/2006/math" xmlns="" val="1"/>
             </a:ext>
           </a:extLst>
         </p:spPr>
@@ -34265,7 +37497,7 @@
           </a:ln>
           <a:extLst>
             <a:ext uri="{C572A759-6A51-4108-AA02-DFA0A04FC94B}">
-              <ma14:wrappingTextBoxFlag xmlns="" xmlns:m="http://schemas.openxmlformats.org/officeDocument/2006/math" xmlns:a14="http://schemas.microsoft.com/office/drawing/2010/main" xmlns:ma14="http://schemas.microsoft.com/office/mac/drawingml/2011/main" val="1"/>
+              <ma14:wrappingTextBoxFlag xmlns:ma14="http://schemas.microsoft.com/office/mac/drawingml/2011/main" xmlns:a14="http://schemas.microsoft.com/office/drawing/2010/main" xmlns:m="http://schemas.openxmlformats.org/officeDocument/2006/math" xmlns="" val="1"/>
             </a:ext>
           </a:extLst>
         </p:spPr>
@@ -35980,7 +39212,7 @@
           </a:ln>
           <a:extLst>
             <a:ext uri="{C572A759-6A51-4108-AA02-DFA0A04FC94B}">
-              <ma14:wrappingTextBoxFlag xmlns="" xmlns:m="http://schemas.openxmlformats.org/officeDocument/2006/math" xmlns:a14="http://schemas.microsoft.com/office/drawing/2010/main" xmlns:ma14="http://schemas.microsoft.com/office/mac/drawingml/2011/main" val="1"/>
+              <ma14:wrappingTextBoxFlag xmlns:ma14="http://schemas.microsoft.com/office/mac/drawingml/2011/main" xmlns:a14="http://schemas.microsoft.com/office/drawing/2010/main" xmlns:m="http://schemas.openxmlformats.org/officeDocument/2006/math" xmlns="" val="1"/>
             </a:ext>
           </a:extLst>
         </p:spPr>
@@ -36019,7 +39251,7 @@
           </a:ln>
           <a:extLst>
             <a:ext uri="{C572A759-6A51-4108-AA02-DFA0A04FC94B}">
-              <ma14:wrappingTextBoxFlag xmlns="" xmlns:m="http://schemas.openxmlformats.org/officeDocument/2006/math" xmlns:a14="http://schemas.microsoft.com/office/drawing/2010/main" xmlns:ma14="http://schemas.microsoft.com/office/mac/drawingml/2011/main" val="1"/>
+              <ma14:wrappingTextBoxFlag xmlns:ma14="http://schemas.microsoft.com/office/mac/drawingml/2011/main" xmlns:a14="http://schemas.microsoft.com/office/drawing/2010/main" xmlns:m="http://schemas.openxmlformats.org/officeDocument/2006/math" xmlns="" val="1"/>
             </a:ext>
           </a:extLst>
         </p:spPr>
@@ -36058,7 +39290,7 @@
           </a:ln>
           <a:extLst>
             <a:ext uri="{C572A759-6A51-4108-AA02-DFA0A04FC94B}">
-              <ma14:wrappingTextBoxFlag xmlns="" xmlns:m="http://schemas.openxmlformats.org/officeDocument/2006/math" xmlns:a14="http://schemas.microsoft.com/office/drawing/2010/main" xmlns:ma14="http://schemas.microsoft.com/office/mac/drawingml/2011/main" val="1"/>
+              <ma14:wrappingTextBoxFlag xmlns:ma14="http://schemas.microsoft.com/office/mac/drawingml/2011/main" xmlns:a14="http://schemas.microsoft.com/office/drawing/2010/main" xmlns:m="http://schemas.openxmlformats.org/officeDocument/2006/math" xmlns="" val="1"/>
             </a:ext>
           </a:extLst>
         </p:spPr>
@@ -36097,7 +39329,7 @@
           </a:ln>
           <a:extLst>
             <a:ext uri="{C572A759-6A51-4108-AA02-DFA0A04FC94B}">
-              <ma14:wrappingTextBoxFlag xmlns="" xmlns:m="http://schemas.openxmlformats.org/officeDocument/2006/math" xmlns:a14="http://schemas.microsoft.com/office/drawing/2010/main" xmlns:ma14="http://schemas.microsoft.com/office/mac/drawingml/2011/main" val="1"/>
+              <ma14:wrappingTextBoxFlag xmlns:ma14="http://schemas.microsoft.com/office/mac/drawingml/2011/main" xmlns:a14="http://schemas.microsoft.com/office/drawing/2010/main" xmlns:m="http://schemas.openxmlformats.org/officeDocument/2006/math" xmlns="" val="1"/>
             </a:ext>
           </a:extLst>
         </p:spPr>
@@ -36136,7 +39368,7 @@
           </a:ln>
           <a:extLst>
             <a:ext uri="{C572A759-6A51-4108-AA02-DFA0A04FC94B}">
-              <ma14:wrappingTextBoxFlag xmlns="" xmlns:m="http://schemas.openxmlformats.org/officeDocument/2006/math" xmlns:a14="http://schemas.microsoft.com/office/drawing/2010/main" xmlns:ma14="http://schemas.microsoft.com/office/mac/drawingml/2011/main" val="1"/>
+              <ma14:wrappingTextBoxFlag xmlns:ma14="http://schemas.microsoft.com/office/mac/drawingml/2011/main" xmlns:a14="http://schemas.microsoft.com/office/drawing/2010/main" xmlns:m="http://schemas.openxmlformats.org/officeDocument/2006/math" xmlns="" val="1"/>
             </a:ext>
           </a:extLst>
         </p:spPr>
@@ -36175,7 +39407,7 @@
           </a:ln>
           <a:extLst>
             <a:ext uri="{C572A759-6A51-4108-AA02-DFA0A04FC94B}">
-              <ma14:wrappingTextBoxFlag xmlns="" xmlns:m="http://schemas.openxmlformats.org/officeDocument/2006/math" xmlns:a14="http://schemas.microsoft.com/office/drawing/2010/main" xmlns:ma14="http://schemas.microsoft.com/office/mac/drawingml/2011/main" val="1"/>
+              <ma14:wrappingTextBoxFlag xmlns:ma14="http://schemas.microsoft.com/office/mac/drawingml/2011/main" xmlns:a14="http://schemas.microsoft.com/office/drawing/2010/main" xmlns:m="http://schemas.openxmlformats.org/officeDocument/2006/math" xmlns="" val="1"/>
             </a:ext>
           </a:extLst>
         </p:spPr>
@@ -36214,7 +39446,7 @@
           </a:ln>
           <a:extLst>
             <a:ext uri="{C572A759-6A51-4108-AA02-DFA0A04FC94B}">
-              <ma14:wrappingTextBoxFlag xmlns="" xmlns:m="http://schemas.openxmlformats.org/officeDocument/2006/math" xmlns:a14="http://schemas.microsoft.com/office/drawing/2010/main" xmlns:ma14="http://schemas.microsoft.com/office/mac/drawingml/2011/main" val="1"/>
+              <ma14:wrappingTextBoxFlag xmlns:ma14="http://schemas.microsoft.com/office/mac/drawingml/2011/main" xmlns:a14="http://schemas.microsoft.com/office/drawing/2010/main" xmlns:m="http://schemas.openxmlformats.org/officeDocument/2006/math" xmlns="" val="1"/>
             </a:ext>
           </a:extLst>
         </p:spPr>
@@ -36253,7 +39485,7 @@
           </a:ln>
           <a:extLst>
             <a:ext uri="{C572A759-6A51-4108-AA02-DFA0A04FC94B}">
-              <ma14:wrappingTextBoxFlag xmlns="" xmlns:m="http://schemas.openxmlformats.org/officeDocument/2006/math" xmlns:a14="http://schemas.microsoft.com/office/drawing/2010/main" xmlns:ma14="http://schemas.microsoft.com/office/mac/drawingml/2011/main" val="1"/>
+              <ma14:wrappingTextBoxFlag xmlns:ma14="http://schemas.microsoft.com/office/mac/drawingml/2011/main" xmlns:a14="http://schemas.microsoft.com/office/drawing/2010/main" xmlns:m="http://schemas.openxmlformats.org/officeDocument/2006/math" xmlns="" val="1"/>
             </a:ext>
           </a:extLst>
         </p:spPr>
@@ -36292,7 +39524,7 @@
           </a:ln>
           <a:extLst>
             <a:ext uri="{C572A759-6A51-4108-AA02-DFA0A04FC94B}">
-              <ma14:wrappingTextBoxFlag xmlns="" xmlns:m="http://schemas.openxmlformats.org/officeDocument/2006/math" xmlns:a14="http://schemas.microsoft.com/office/drawing/2010/main" xmlns:ma14="http://schemas.microsoft.com/office/mac/drawingml/2011/main" val="1"/>
+              <ma14:wrappingTextBoxFlag xmlns:ma14="http://schemas.microsoft.com/office/mac/drawingml/2011/main" xmlns:a14="http://schemas.microsoft.com/office/drawing/2010/main" xmlns:m="http://schemas.openxmlformats.org/officeDocument/2006/math" xmlns="" val="1"/>
             </a:ext>
           </a:extLst>
         </p:spPr>
@@ -36331,7 +39563,7 @@
           </a:ln>
           <a:extLst>
             <a:ext uri="{C572A759-6A51-4108-AA02-DFA0A04FC94B}">
-              <ma14:wrappingTextBoxFlag xmlns="" xmlns:m="http://schemas.openxmlformats.org/officeDocument/2006/math" xmlns:a14="http://schemas.microsoft.com/office/drawing/2010/main" xmlns:ma14="http://schemas.microsoft.com/office/mac/drawingml/2011/main" val="1"/>
+              <ma14:wrappingTextBoxFlag xmlns:ma14="http://schemas.microsoft.com/office/mac/drawingml/2011/main" xmlns:a14="http://schemas.microsoft.com/office/drawing/2010/main" xmlns:m="http://schemas.openxmlformats.org/officeDocument/2006/math" xmlns="" val="1"/>
             </a:ext>
           </a:extLst>
         </p:spPr>
@@ -36370,7 +39602,7 @@
           </a:ln>
           <a:extLst>
             <a:ext uri="{C572A759-6A51-4108-AA02-DFA0A04FC94B}">
-              <ma14:wrappingTextBoxFlag xmlns="" xmlns:m="http://schemas.openxmlformats.org/officeDocument/2006/math" xmlns:a14="http://schemas.microsoft.com/office/drawing/2010/main" xmlns:ma14="http://schemas.microsoft.com/office/mac/drawingml/2011/main" val="1"/>
+              <ma14:wrappingTextBoxFlag xmlns:ma14="http://schemas.microsoft.com/office/mac/drawingml/2011/main" xmlns:a14="http://schemas.microsoft.com/office/drawing/2010/main" xmlns:m="http://schemas.openxmlformats.org/officeDocument/2006/math" xmlns="" val="1"/>
             </a:ext>
           </a:extLst>
         </p:spPr>
@@ -36409,7 +39641,7 @@
           </a:ln>
           <a:extLst>
             <a:ext uri="{C572A759-6A51-4108-AA02-DFA0A04FC94B}">
-              <ma14:wrappingTextBoxFlag xmlns="" xmlns:m="http://schemas.openxmlformats.org/officeDocument/2006/math" xmlns:a14="http://schemas.microsoft.com/office/drawing/2010/main" xmlns:ma14="http://schemas.microsoft.com/office/mac/drawingml/2011/main" val="1"/>
+              <ma14:wrappingTextBoxFlag xmlns:ma14="http://schemas.microsoft.com/office/mac/drawingml/2011/main" xmlns:a14="http://schemas.microsoft.com/office/drawing/2010/main" xmlns:m="http://schemas.openxmlformats.org/officeDocument/2006/math" xmlns="" val="1"/>
             </a:ext>
           </a:extLst>
         </p:spPr>
@@ -36448,7 +39680,7 @@
           </a:ln>
           <a:extLst>
             <a:ext uri="{C572A759-6A51-4108-AA02-DFA0A04FC94B}">
-              <ma14:wrappingTextBoxFlag xmlns="" xmlns:m="http://schemas.openxmlformats.org/officeDocument/2006/math" xmlns:a14="http://schemas.microsoft.com/office/drawing/2010/main" xmlns:ma14="http://schemas.microsoft.com/office/mac/drawingml/2011/main" val="1"/>
+              <ma14:wrappingTextBoxFlag xmlns:ma14="http://schemas.microsoft.com/office/mac/drawingml/2011/main" xmlns:a14="http://schemas.microsoft.com/office/drawing/2010/main" xmlns:m="http://schemas.openxmlformats.org/officeDocument/2006/math" xmlns="" val="1"/>
             </a:ext>
           </a:extLst>
         </p:spPr>
@@ -36487,7 +39719,7 @@
           </a:ln>
           <a:extLst>
             <a:ext uri="{C572A759-6A51-4108-AA02-DFA0A04FC94B}">
-              <ma14:wrappingTextBoxFlag xmlns="" xmlns:m="http://schemas.openxmlformats.org/officeDocument/2006/math" xmlns:a14="http://schemas.microsoft.com/office/drawing/2010/main" xmlns:ma14="http://schemas.microsoft.com/office/mac/drawingml/2011/main" val="1"/>
+              <ma14:wrappingTextBoxFlag xmlns:ma14="http://schemas.microsoft.com/office/mac/drawingml/2011/main" xmlns:a14="http://schemas.microsoft.com/office/drawing/2010/main" xmlns:m="http://schemas.openxmlformats.org/officeDocument/2006/math" xmlns="" val="1"/>
             </a:ext>
           </a:extLst>
         </p:spPr>
@@ -36526,7 +39758,7 @@
           </a:ln>
           <a:extLst>
             <a:ext uri="{C572A759-6A51-4108-AA02-DFA0A04FC94B}">
-              <ma14:wrappingTextBoxFlag xmlns="" xmlns:m="http://schemas.openxmlformats.org/officeDocument/2006/math" xmlns:a14="http://schemas.microsoft.com/office/drawing/2010/main" xmlns:ma14="http://schemas.microsoft.com/office/mac/drawingml/2011/main" val="1"/>
+              <ma14:wrappingTextBoxFlag xmlns:ma14="http://schemas.microsoft.com/office/mac/drawingml/2011/main" xmlns:a14="http://schemas.microsoft.com/office/drawing/2010/main" xmlns:m="http://schemas.openxmlformats.org/officeDocument/2006/math" xmlns="" val="1"/>
             </a:ext>
           </a:extLst>
         </p:spPr>
@@ -36565,7 +39797,7 @@
           </a:ln>
           <a:extLst>
             <a:ext uri="{C572A759-6A51-4108-AA02-DFA0A04FC94B}">
-              <ma14:wrappingTextBoxFlag xmlns="" xmlns:m="http://schemas.openxmlformats.org/officeDocument/2006/math" xmlns:a14="http://schemas.microsoft.com/office/drawing/2010/main" xmlns:ma14="http://schemas.microsoft.com/office/mac/drawingml/2011/main" val="1"/>
+              <ma14:wrappingTextBoxFlag xmlns:ma14="http://schemas.microsoft.com/office/mac/drawingml/2011/main" xmlns:a14="http://schemas.microsoft.com/office/drawing/2010/main" xmlns:m="http://schemas.openxmlformats.org/officeDocument/2006/math" xmlns="" val="1"/>
             </a:ext>
           </a:extLst>
         </p:spPr>
@@ -36604,7 +39836,7 @@
           </a:ln>
           <a:extLst>
             <a:ext uri="{C572A759-6A51-4108-AA02-DFA0A04FC94B}">
-              <ma14:wrappingTextBoxFlag xmlns="" xmlns:m="http://schemas.openxmlformats.org/officeDocument/2006/math" xmlns:a14="http://schemas.microsoft.com/office/drawing/2010/main" xmlns:ma14="http://schemas.microsoft.com/office/mac/drawingml/2011/main" val="1"/>
+              <ma14:wrappingTextBoxFlag xmlns:ma14="http://schemas.microsoft.com/office/mac/drawingml/2011/main" xmlns:a14="http://schemas.microsoft.com/office/drawing/2010/main" xmlns:m="http://schemas.openxmlformats.org/officeDocument/2006/math" xmlns="" val="1"/>
             </a:ext>
           </a:extLst>
         </p:spPr>
@@ -36643,7 +39875,7 @@
           </a:ln>
           <a:extLst>
             <a:ext uri="{C572A759-6A51-4108-AA02-DFA0A04FC94B}">
-              <ma14:wrappingTextBoxFlag xmlns="" xmlns:m="http://schemas.openxmlformats.org/officeDocument/2006/math" xmlns:a14="http://schemas.microsoft.com/office/drawing/2010/main" xmlns:ma14="http://schemas.microsoft.com/office/mac/drawingml/2011/main" val="1"/>
+              <ma14:wrappingTextBoxFlag xmlns:ma14="http://schemas.microsoft.com/office/mac/drawingml/2011/main" xmlns:a14="http://schemas.microsoft.com/office/drawing/2010/main" xmlns:m="http://schemas.openxmlformats.org/officeDocument/2006/math" xmlns="" val="1"/>
             </a:ext>
           </a:extLst>
         </p:spPr>
@@ -36745,7 +39977,7 @@
           </a:prstGeom>
           <a:extLst>
             <a:ext uri="{C572A759-6A51-4108-AA02-DFA0A04FC94B}">
-              <ma14:wrappingTextBoxFlag xmlns="" xmlns:m="http://schemas.openxmlformats.org/officeDocument/2006/math" xmlns:a14="http://schemas.microsoft.com/office/drawing/2010/main" xmlns:ma14="http://schemas.microsoft.com/office/mac/drawingml/2011/main" val="1"/>
+              <ma14:wrappingTextBoxFlag xmlns:ma14="http://schemas.microsoft.com/office/mac/drawingml/2011/main" xmlns:a14="http://schemas.microsoft.com/office/drawing/2010/main" xmlns:m="http://schemas.openxmlformats.org/officeDocument/2006/math" xmlns="" val="1"/>
             </a:ext>
           </a:extLst>
         </p:spPr>
@@ -36769,10 +40001,10 @@
         </p:nvGrpSpPr>
         <p:grpSpPr>
           <a:xfrm>
-            <a:off x="1845030" y="5689600"/>
-            <a:ext cx="9023867" cy="1270001"/>
-            <a:chOff x="-71747" y="0"/>
-            <a:chExt cx="9023866" cy="1270000"/>
+            <a:off x="824958" y="5689600"/>
+            <a:ext cx="10043939" cy="1270001"/>
+            <a:chOff x="-1091819" y="0"/>
+            <a:chExt cx="10043938" cy="1270000"/>
           </a:xfrm>
         </p:grpSpPr>
         <p:sp>
@@ -37234,8 +40466,8 @@
           </p:nvSpPr>
           <p:spPr>
             <a:xfrm>
-              <a:off x="-71748" y="139699"/>
-              <a:ext cx="2508846" cy="584201"/>
+              <a:off x="-1091819" y="22552"/>
+              <a:ext cx="3494546" cy="595035"/>
             </a:xfrm>
             <a:prstGeom prst="rect">
               <a:avLst/>
@@ -37248,7 +40480,7 @@
             <a:effectLst/>
             <a:extLst>
               <a:ext uri="{C572A759-6A51-4108-AA02-DFA0A04FC94B}">
-                <ma14:wrappingTextBoxFlag xmlns="" xmlns:m="http://schemas.openxmlformats.org/officeDocument/2006/math" xmlns:a14="http://schemas.microsoft.com/office/drawing/2010/main" xmlns:ma14="http://schemas.microsoft.com/office/mac/drawingml/2011/main" val="1"/>
+                <ma14:wrappingTextBoxFlag xmlns:ma14="http://schemas.microsoft.com/office/mac/drawingml/2011/main" xmlns:a14="http://schemas.microsoft.com/office/drawing/2010/main" xmlns:m="http://schemas.openxmlformats.org/officeDocument/2006/math" xmlns="" val="1"/>
               </a:ext>
             </a:extLst>
           </p:spPr>
@@ -37271,8 +40503,10 @@
             </a:lstStyle>
             <a:p>
               <a:r>
-                <a:t>triangle wave</a:t>
+                <a:rPr lang="en-GB" dirty="0"/>
+                <a:t>counter (sawtooth)</a:t>
               </a:r>
+              <a:endParaRPr dirty="0"/>
             </a:p>
           </p:txBody>
         </p:sp>
@@ -37405,7 +40639,7 @@
             <a:effectLst/>
             <a:extLst>
               <a:ext uri="{C572A759-6A51-4108-AA02-DFA0A04FC94B}">
-                <ma14:wrappingTextBoxFlag xmlns="" xmlns:m="http://schemas.openxmlformats.org/officeDocument/2006/math" xmlns:a14="http://schemas.microsoft.com/office/drawing/2010/main" xmlns:ma14="http://schemas.microsoft.com/office/mac/drawingml/2011/main" val="1"/>
+                <ma14:wrappingTextBoxFlag xmlns:ma14="http://schemas.microsoft.com/office/mac/drawingml/2011/main" xmlns:a14="http://schemas.microsoft.com/office/drawing/2010/main" xmlns:m="http://schemas.openxmlformats.org/officeDocument/2006/math" xmlns="" val="1"/>
               </a:ext>
             </a:extLst>
           </p:spPr>
@@ -38432,7 +41666,7 @@
             <a:effectLst/>
             <a:extLst>
               <a:ext uri="{C572A759-6A51-4108-AA02-DFA0A04FC94B}">
-                <ma14:wrappingTextBoxFlag xmlns="" xmlns:m="http://schemas.openxmlformats.org/officeDocument/2006/math" xmlns:a14="http://schemas.microsoft.com/office/drawing/2010/main" xmlns:ma14="http://schemas.microsoft.com/office/mac/drawingml/2011/main" val="1"/>
+                <ma14:wrappingTextBoxFlag xmlns:ma14="http://schemas.microsoft.com/office/mac/drawingml/2011/main" xmlns:a14="http://schemas.microsoft.com/office/drawing/2010/main" xmlns:m="http://schemas.openxmlformats.org/officeDocument/2006/math" xmlns="" val="1"/>
               </a:ext>
             </a:extLst>
           </p:spPr>
@@ -38485,7 +41719,7 @@
             <a:effectLst/>
             <a:extLst>
               <a:ext uri="{C572A759-6A51-4108-AA02-DFA0A04FC94B}">
-                <ma14:wrappingTextBoxFlag xmlns="" xmlns:m="http://schemas.openxmlformats.org/officeDocument/2006/math" xmlns:a14="http://schemas.microsoft.com/office/drawing/2010/main" xmlns:ma14="http://schemas.microsoft.com/office/mac/drawingml/2011/main" val="1"/>
+                <ma14:wrappingTextBoxFlag xmlns:ma14="http://schemas.microsoft.com/office/mac/drawingml/2011/main" xmlns:a14="http://schemas.microsoft.com/office/drawing/2010/main" xmlns:m="http://schemas.openxmlformats.org/officeDocument/2006/math" xmlns="" val="1"/>
               </a:ext>
             </a:extLst>
           </p:spPr>
@@ -38951,7 +42185,7 @@
           </a:prstGeom>
           <a:extLst>
             <a:ext uri="{C572A759-6A51-4108-AA02-DFA0A04FC94B}">
-              <ma14:wrappingTextBoxFlag xmlns="" xmlns:m="http://schemas.openxmlformats.org/officeDocument/2006/math" xmlns:a14="http://schemas.microsoft.com/office/drawing/2010/main" xmlns:ma14="http://schemas.microsoft.com/office/mac/drawingml/2011/main" val="1"/>
+              <ma14:wrappingTextBoxFlag xmlns:ma14="http://schemas.microsoft.com/office/mac/drawingml/2011/main" xmlns:a14="http://schemas.microsoft.com/office/drawing/2010/main" xmlns:m="http://schemas.openxmlformats.org/officeDocument/2006/math" xmlns="" val="1"/>
             </a:ext>
           </a:extLst>
         </p:spPr>
@@ -39110,7 +42344,7 @@
           </a:ln>
           <a:extLst>
             <a:ext uri="{C572A759-6A51-4108-AA02-DFA0A04FC94B}">
-              <ma14:wrappingTextBoxFlag xmlns="" xmlns:m="http://schemas.openxmlformats.org/officeDocument/2006/math" xmlns:a14="http://schemas.microsoft.com/office/drawing/2010/main" xmlns:ma14="http://schemas.microsoft.com/office/mac/drawingml/2011/main" val="1"/>
+              <ma14:wrappingTextBoxFlag xmlns:ma14="http://schemas.microsoft.com/office/mac/drawingml/2011/main" xmlns:a14="http://schemas.microsoft.com/office/drawing/2010/main" xmlns:m="http://schemas.openxmlformats.org/officeDocument/2006/math" xmlns="" val="1"/>
             </a:ext>
           </a:extLst>
         </p:spPr>
@@ -39364,6 +42598,36 @@
           </a:p>
         </p:txBody>
       </p:sp>
+      <p:pic>
+        <p:nvPicPr>
+          <p:cNvPr id="2" name="Picture 1" descr="Passive Low Pass Filter Circuit - A Passive RC Filter Tutorial">
+            <a:extLst>
+              <a:ext uri="{FF2B5EF4-FFF2-40B4-BE49-F238E27FC236}">
+                <a16:creationId xmlns:a16="http://schemas.microsoft.com/office/drawing/2014/main" id="{75F31069-3930-786B-2D36-08DDED12A170}"/>
+              </a:ext>
+            </a:extLst>
+          </p:cNvPr>
+          <p:cNvPicPr>
+            <a:picLocks noChangeAspect="1"/>
+          </p:cNvPicPr>
+          <p:nvPr/>
+        </p:nvPicPr>
+        <p:blipFill>
+          <a:blip r:embed="rId3"/>
+          <a:stretch>
+            <a:fillRect/>
+          </a:stretch>
+        </p:blipFill>
+        <p:spPr>
+          <a:xfrm>
+            <a:off x="9929955" y="4808814"/>
+            <a:ext cx="2700910" cy="1748839"/>
+          </a:xfrm>
+          <a:prstGeom prst="rect">
+            <a:avLst/>
+          </a:prstGeom>
+        </p:spPr>
+      </p:pic>
     </p:spTree>
   </p:cSld>
   <p:clrMapOvr>
@@ -39410,7 +42674,7 @@
           </a:prstGeom>
           <a:extLst>
             <a:ext uri="{C572A759-6A51-4108-AA02-DFA0A04FC94B}">
-              <ma14:wrappingTextBoxFlag xmlns="" xmlns:m="http://schemas.openxmlformats.org/officeDocument/2006/math" xmlns:a14="http://schemas.microsoft.com/office/drawing/2010/main" xmlns:ma14="http://schemas.microsoft.com/office/mac/drawingml/2011/main" val="1"/>
+              <ma14:wrappingTextBoxFlag xmlns:ma14="http://schemas.microsoft.com/office/mac/drawingml/2011/main" xmlns:a14="http://schemas.microsoft.com/office/drawing/2010/main" xmlns:m="http://schemas.openxmlformats.org/officeDocument/2006/math" xmlns="" val="1"/>
             </a:ext>
           </a:extLst>
         </p:spPr>
@@ -39609,7 +42873,7 @@
           </a:ln>
           <a:extLst>
             <a:ext uri="{C572A759-6A51-4108-AA02-DFA0A04FC94B}">
-              <ma14:wrappingTextBoxFlag xmlns="" xmlns:m="http://schemas.openxmlformats.org/officeDocument/2006/math" xmlns:a14="http://schemas.microsoft.com/office/drawing/2010/main" xmlns:ma14="http://schemas.microsoft.com/office/mac/drawingml/2011/main" val="1"/>
+              <ma14:wrappingTextBoxFlag xmlns:ma14="http://schemas.microsoft.com/office/mac/drawingml/2011/main" xmlns:a14="http://schemas.microsoft.com/office/drawing/2010/main" xmlns:m="http://schemas.openxmlformats.org/officeDocument/2006/math" xmlns="" val="1"/>
             </a:ext>
           </a:extLst>
         </p:spPr>
@@ -39964,7 +43228,7 @@
           </a:ln>
           <a:extLst>
             <a:ext uri="{C572A759-6A51-4108-AA02-DFA0A04FC94B}">
-              <ma14:wrappingTextBoxFlag xmlns="" xmlns:m="http://schemas.openxmlformats.org/officeDocument/2006/math" xmlns:a14="http://schemas.microsoft.com/office/drawing/2010/main" xmlns:ma14="http://schemas.microsoft.com/office/mac/drawingml/2011/main" val="1"/>
+              <ma14:wrappingTextBoxFlag xmlns:ma14="http://schemas.microsoft.com/office/mac/drawingml/2011/main" xmlns:a14="http://schemas.microsoft.com/office/drawing/2010/main" xmlns:m="http://schemas.openxmlformats.org/officeDocument/2006/math" xmlns="" val="1"/>
             </a:ext>
           </a:extLst>
         </p:spPr>
@@ -40925,7 +44189,7 @@
           </a:prstGeom>
           <a:extLst>
             <a:ext uri="{C572A759-6A51-4108-AA02-DFA0A04FC94B}">
-              <ma14:wrappingTextBoxFlag xmlns="" xmlns:m="http://schemas.openxmlformats.org/officeDocument/2006/math" xmlns:a14="http://schemas.microsoft.com/office/drawing/2010/main" xmlns:ma14="http://schemas.microsoft.com/office/mac/drawingml/2011/main" val="1"/>
+              <ma14:wrappingTextBoxFlag xmlns:ma14="http://schemas.microsoft.com/office/mac/drawingml/2011/main" xmlns:a14="http://schemas.microsoft.com/office/drawing/2010/main" xmlns:m="http://schemas.openxmlformats.org/officeDocument/2006/math" xmlns="" val="1"/>
             </a:ext>
           </a:extLst>
         </p:spPr>
